--- a/2026.03.30/klyukin_lomonosov_presentation.pptx
+++ b/2026.03.30/klyukin_lomonosov_presentation.pptx
@@ -6,40 +6,42 @@
   </p:sldMasterIdLst>
   <p:sldIdLst>
     <p:sldId id="256" r:id="rId2"/>
-    <p:sldId id="269" r:id="rId3"/>
-    <p:sldId id="280" r:id="rId4"/>
-    <p:sldId id="257" r:id="rId5"/>
-    <p:sldId id="258" r:id="rId6"/>
-    <p:sldId id="259" r:id="rId7"/>
-    <p:sldId id="270" r:id="rId8"/>
-    <p:sldId id="260" r:id="rId9"/>
-    <p:sldId id="261" r:id="rId10"/>
-    <p:sldId id="262" r:id="rId11"/>
-    <p:sldId id="271" r:id="rId12"/>
-    <p:sldId id="264" r:id="rId13"/>
-    <p:sldId id="263" r:id="rId14"/>
-    <p:sldId id="277" r:id="rId15"/>
-    <p:sldId id="279" r:id="rId16"/>
-    <p:sldId id="274" r:id="rId17"/>
-    <p:sldId id="275" r:id="rId18"/>
-    <p:sldId id="276" r:id="rId19"/>
-    <p:sldId id="272" r:id="rId20"/>
-    <p:sldId id="266" r:id="rId21"/>
-    <p:sldId id="265" r:id="rId22"/>
-    <p:sldId id="273" r:id="rId23"/>
-    <p:sldId id="267" r:id="rId24"/>
-    <p:sldId id="268" r:id="rId25"/>
-    <p:sldId id="281" r:id="rId26"/>
-    <p:sldId id="285" r:id="rId27"/>
-    <p:sldId id="286" r:id="rId28"/>
-    <p:sldId id="287" r:id="rId29"/>
-    <p:sldId id="289" r:id="rId30"/>
-    <p:sldId id="288" r:id="rId31"/>
-    <p:sldId id="290" r:id="rId32"/>
-    <p:sldId id="291" r:id="rId33"/>
-    <p:sldId id="282" r:id="rId34"/>
-    <p:sldId id="283" r:id="rId35"/>
-    <p:sldId id="284" r:id="rId36"/>
+    <p:sldId id="296" r:id="rId3"/>
+    <p:sldId id="297" r:id="rId4"/>
+    <p:sldId id="298" r:id="rId5"/>
+    <p:sldId id="280" r:id="rId6"/>
+    <p:sldId id="257" r:id="rId7"/>
+    <p:sldId id="258" r:id="rId8"/>
+    <p:sldId id="259" r:id="rId9"/>
+    <p:sldId id="270" r:id="rId10"/>
+    <p:sldId id="260" r:id="rId11"/>
+    <p:sldId id="261" r:id="rId12"/>
+    <p:sldId id="262" r:id="rId13"/>
+    <p:sldId id="271" r:id="rId14"/>
+    <p:sldId id="264" r:id="rId15"/>
+    <p:sldId id="263" r:id="rId16"/>
+    <p:sldId id="277" r:id="rId17"/>
+    <p:sldId id="279" r:id="rId18"/>
+    <p:sldId id="274" r:id="rId19"/>
+    <p:sldId id="275" r:id="rId20"/>
+    <p:sldId id="276" r:id="rId21"/>
+    <p:sldId id="272" r:id="rId22"/>
+    <p:sldId id="266" r:id="rId23"/>
+    <p:sldId id="265" r:id="rId24"/>
+    <p:sldId id="273" r:id="rId25"/>
+    <p:sldId id="267" r:id="rId26"/>
+    <p:sldId id="268" r:id="rId27"/>
+    <p:sldId id="281" r:id="rId28"/>
+    <p:sldId id="285" r:id="rId29"/>
+    <p:sldId id="294" r:id="rId30"/>
+    <p:sldId id="287" r:id="rId31"/>
+    <p:sldId id="289" r:id="rId32"/>
+    <p:sldId id="295" r:id="rId33"/>
+    <p:sldId id="290" r:id="rId34"/>
+    <p:sldId id="291" r:id="rId35"/>
+    <p:sldId id="282" r:id="rId36"/>
+    <p:sldId id="283" r:id="rId37"/>
+    <p:sldId id="284" r:id="rId38"/>
   </p:sldIdLst>
   <p:sldSz cx="10160000" cy="5715000"/>
   <p:notesSz cx="6797675" cy="9926638"/>
@@ -3331,6 +3333,208 @@
           <a:p>
             <a:r>
               <a:rPr lang="ru-RU" dirty="0"/>
+              <a:t>Динамика показателей</a:t>
+            </a:r>
+            <a:endParaRPr lang="en-US" dirty="0"/>
+          </a:p>
+        </p:txBody>
+      </p:sp>
+      <p:pic>
+        <p:nvPicPr>
+          <p:cNvPr id="4098" name="Picture 2" descr="C:\Users\bklyu\Documents\Python Scripts\_GitHub_repos\conferences\lomonosov readings 2026\explore_data\relationship_diff_both.png"/>
+          <p:cNvPicPr>
+            <a:picLocks noChangeAspect="1" noChangeArrowheads="1"/>
+          </p:cNvPicPr>
+          <p:nvPr/>
+        </p:nvPicPr>
+        <p:blipFill>
+          <a:blip r:embed="rId2">
+            <a:extLst>
+              <a:ext uri="{28A0092B-C50C-407E-A947-70E740481C1C}">
+                <a14:useLocalDpi xmlns:a14="http://schemas.microsoft.com/office/drawing/2010/main" val="0"/>
+              </a:ext>
+            </a:extLst>
+          </a:blip>
+          <a:srcRect/>
+          <a:stretch>
+            <a:fillRect/>
+          </a:stretch>
+        </p:blipFill>
+        <p:spPr bwMode="auto">
+          <a:xfrm>
+            <a:off x="690880" y="1517998"/>
+            <a:ext cx="8778240" cy="2679015"/>
+          </a:xfrm>
+          <a:prstGeom prst="rect">
+            <a:avLst/>
+          </a:prstGeom>
+          <a:noFill/>
+          <a:extLst>
+            <a:ext uri="{909E8E84-426E-40DD-AFC4-6F175D3DCCD1}">
+              <a14:hiddenFill xmlns:a14="http://schemas.microsoft.com/office/drawing/2010/main">
+                <a:solidFill>
+                  <a:srgbClr val="FFFFFF"/>
+                </a:solidFill>
+              </a14:hiddenFill>
+            </a:ext>
+          </a:extLst>
+        </p:spPr>
+      </p:pic>
+    </p:spTree>
+    <p:extLst>
+      <p:ext uri="{BB962C8B-B14F-4D97-AF65-F5344CB8AC3E}">
+        <p14:creationId xmlns:p14="http://schemas.microsoft.com/office/powerpoint/2010/main" val="1280440382"/>
+      </p:ext>
+    </p:extLst>
+  </p:cSld>
+  <p:clrMapOvr>
+    <a:masterClrMapping/>
+  </p:clrMapOvr>
+  <p:timing>
+    <p:tnLst>
+      <p:par>
+        <p:cTn id="1" dur="indefinite" restart="never" nodeType="tmRoot"/>
+      </p:par>
+    </p:tnLst>
+  </p:timing>
+</p:sld>
+</file>
+
+<file path=ppt/slides/slide11.xml><?xml version="1.0" encoding="utf-8"?>
+<p:sld xmlns:a="http://schemas.openxmlformats.org/drawingml/2006/main" xmlns:r="http://schemas.openxmlformats.org/officeDocument/2006/relationships" xmlns:p="http://schemas.openxmlformats.org/presentationml/2006/main">
+  <p:cSld>
+    <p:spTree>
+      <p:nvGrpSpPr>
+        <p:cNvPr id="1" name=""/>
+        <p:cNvGrpSpPr/>
+        <p:nvPr/>
+      </p:nvGrpSpPr>
+      <p:grpSpPr>
+        <a:xfrm>
+          <a:off x="0" y="0"/>
+          <a:ext cx="0" cy="0"/>
+          <a:chOff x="0" y="0"/>
+          <a:chExt cx="0" cy="0"/>
+        </a:xfrm>
+      </p:grpSpPr>
+      <p:sp>
+        <p:nvSpPr>
+          <p:cNvPr id="2" name="Title 1"/>
+          <p:cNvSpPr>
+            <a:spLocks noGrp="1"/>
+          </p:cNvSpPr>
+          <p:nvPr>
+            <p:ph type="title"/>
+          </p:nvPr>
+        </p:nvSpPr>
+        <p:spPr/>
+        <p:txBody>
+          <a:bodyPr/>
+          <a:lstStyle/>
+          <a:p>
+            <a:r>
+              <a:rPr lang="ru-RU" dirty="0"/>
+              <a:t>Динамика показателей (Китай)</a:t>
+            </a:r>
+            <a:endParaRPr lang="en-US" dirty="0"/>
+          </a:p>
+        </p:txBody>
+      </p:sp>
+      <p:pic>
+        <p:nvPicPr>
+          <p:cNvPr id="5122" name="Picture 2" descr="C:\Users\bklyu\Documents\Python Scripts\_GitHub_repos\conferences\lomonosov readings 2026\explore_data\relationship_diff_china.png"/>
+          <p:cNvPicPr>
+            <a:picLocks noChangeAspect="1" noChangeArrowheads="1"/>
+          </p:cNvPicPr>
+          <p:nvPr/>
+        </p:nvPicPr>
+        <p:blipFill>
+          <a:blip r:embed="rId2">
+            <a:extLst>
+              <a:ext uri="{28A0092B-C50C-407E-A947-70E740481C1C}">
+                <a14:useLocalDpi xmlns:a14="http://schemas.microsoft.com/office/drawing/2010/main" val="0"/>
+              </a:ext>
+            </a:extLst>
+          </a:blip>
+          <a:srcRect/>
+          <a:stretch>
+            <a:fillRect/>
+          </a:stretch>
+        </p:blipFill>
+        <p:spPr bwMode="auto">
+          <a:xfrm>
+            <a:off x="690880" y="1377751"/>
+            <a:ext cx="8778240" cy="2959511"/>
+          </a:xfrm>
+          <a:prstGeom prst="rect">
+            <a:avLst/>
+          </a:prstGeom>
+          <a:noFill/>
+          <a:extLst>
+            <a:ext uri="{909E8E84-426E-40DD-AFC4-6F175D3DCCD1}">
+              <a14:hiddenFill xmlns:a14="http://schemas.microsoft.com/office/drawing/2010/main">
+                <a:solidFill>
+                  <a:srgbClr val="FFFFFF"/>
+                </a:solidFill>
+              </a14:hiddenFill>
+            </a:ext>
+          </a:extLst>
+        </p:spPr>
+      </p:pic>
+    </p:spTree>
+    <p:extLst>
+      <p:ext uri="{BB962C8B-B14F-4D97-AF65-F5344CB8AC3E}">
+        <p14:creationId xmlns:p14="http://schemas.microsoft.com/office/powerpoint/2010/main" val="3706015842"/>
+      </p:ext>
+    </p:extLst>
+  </p:cSld>
+  <p:clrMapOvr>
+    <a:masterClrMapping/>
+  </p:clrMapOvr>
+  <p:timing>
+    <p:tnLst>
+      <p:par>
+        <p:cTn id="1" dur="indefinite" restart="never" nodeType="tmRoot"/>
+      </p:par>
+    </p:tnLst>
+  </p:timing>
+</p:sld>
+</file>
+
+<file path=ppt/slides/slide12.xml><?xml version="1.0" encoding="utf-8"?>
+<p:sld xmlns:a="http://schemas.openxmlformats.org/drawingml/2006/main" xmlns:r="http://schemas.openxmlformats.org/officeDocument/2006/relationships" xmlns:p="http://schemas.openxmlformats.org/presentationml/2006/main">
+  <p:cSld>
+    <p:spTree>
+      <p:nvGrpSpPr>
+        <p:cNvPr id="1" name=""/>
+        <p:cNvGrpSpPr/>
+        <p:nvPr/>
+      </p:nvGrpSpPr>
+      <p:grpSpPr>
+        <a:xfrm>
+          <a:off x="0" y="0"/>
+          <a:ext cx="0" cy="0"/>
+          <a:chOff x="0" y="0"/>
+          <a:chExt cx="0" cy="0"/>
+        </a:xfrm>
+      </p:grpSpPr>
+      <p:sp>
+        <p:nvSpPr>
+          <p:cNvPr id="2" name="Title 1"/>
+          <p:cNvSpPr>
+            <a:spLocks noGrp="1"/>
+          </p:cNvSpPr>
+          <p:nvPr>
+            <p:ph type="title"/>
+          </p:nvPr>
+        </p:nvSpPr>
+        <p:spPr/>
+        <p:txBody>
+          <a:bodyPr/>
+          <a:lstStyle/>
+          <a:p>
+            <a:r>
+              <a:rPr lang="ru-RU" dirty="0"/>
               <a:t>Динамика показателей (Индия)</a:t>
             </a:r>
             <a:endParaRPr lang="en-US" dirty="0"/>
@@ -3398,7 +3602,7 @@
 </p:sld>
 </file>
 
-<file path=ppt/slides/slide11.xml><?xml version="1.0" encoding="utf-8"?>
+<file path=ppt/slides/slide13.xml><?xml version="1.0" encoding="utf-8"?>
 <p:sld xmlns:a="http://schemas.openxmlformats.org/drawingml/2006/main" xmlns:r="http://schemas.openxmlformats.org/officeDocument/2006/relationships" xmlns:p="http://schemas.openxmlformats.org/presentationml/2006/main">
   <p:cSld>
     <p:spTree>
@@ -3536,7 +3740,7 @@
 </p:sld>
 </file>
 
-<file path=ppt/slides/slide12.xml><?xml version="1.0" encoding="utf-8"?>
+<file path=ppt/slides/slide14.xml><?xml version="1.0" encoding="utf-8"?>
 <p:sld xmlns:a="http://schemas.openxmlformats.org/drawingml/2006/main" xmlns:r="http://schemas.openxmlformats.org/officeDocument/2006/relationships" xmlns:p="http://schemas.openxmlformats.org/presentationml/2006/main">
   <p:cSld>
     <p:spTree>
@@ -3684,7 +3888,7 @@
 </p:sld>
 </file>
 
-<file path=ppt/slides/slide13.xml><?xml version="1.0" encoding="utf-8"?>
+<file path=ppt/slides/slide15.xml><?xml version="1.0" encoding="utf-8"?>
 <p:sld xmlns:a="http://schemas.openxmlformats.org/drawingml/2006/main" xmlns:r="http://schemas.openxmlformats.org/officeDocument/2006/relationships" xmlns:p="http://schemas.openxmlformats.org/presentationml/2006/main">
   <p:cSld>
     <p:spTree>
@@ -3836,7 +4040,7 @@
 </p:sld>
 </file>
 
-<file path=ppt/slides/slide14.xml><?xml version="1.0" encoding="utf-8"?>
+<file path=ppt/slides/slide16.xml><?xml version="1.0" encoding="utf-8"?>
 <p:sld xmlns:a="http://schemas.openxmlformats.org/drawingml/2006/main" xmlns:r="http://schemas.openxmlformats.org/officeDocument/2006/relationships" xmlns:p="http://schemas.openxmlformats.org/presentationml/2006/main">
   <p:cSld>
     <p:spTree>
@@ -3992,7 +4196,7 @@
 </p:sld>
 </file>
 
-<file path=ppt/slides/slide15.xml><?xml version="1.0" encoding="utf-8"?>
+<file path=ppt/slides/slide17.xml><?xml version="1.0" encoding="utf-8"?>
 <p:sld xmlns:a="http://schemas.openxmlformats.org/drawingml/2006/main" xmlns:r="http://schemas.openxmlformats.org/officeDocument/2006/relationships" xmlns:p="http://schemas.openxmlformats.org/presentationml/2006/main">
   <p:cSld>
     <p:spTree>
@@ -4148,7 +4352,7 @@
 </p:sld>
 </file>
 
-<file path=ppt/slides/slide16.xml><?xml version="1.0" encoding="utf-8"?>
+<file path=ppt/slides/slide18.xml><?xml version="1.0" encoding="utf-8"?>
 <p:sld xmlns:a="http://schemas.openxmlformats.org/drawingml/2006/main" xmlns:r="http://schemas.openxmlformats.org/officeDocument/2006/relationships" xmlns:p="http://schemas.openxmlformats.org/presentationml/2006/main">
   <p:cSld>
     <p:spTree>
@@ -4264,7 +4468,7 @@
 </p:sld>
 </file>
 
-<file path=ppt/slides/slide17.xml><?xml version="1.0" encoding="utf-8"?>
+<file path=ppt/slides/slide19.xml><?xml version="1.0" encoding="utf-8"?>
 <p:sld xmlns:a="http://schemas.openxmlformats.org/drawingml/2006/main" xmlns:r="http://schemas.openxmlformats.org/officeDocument/2006/relationships" xmlns:p="http://schemas.openxmlformats.org/presentationml/2006/main">
   <p:cSld>
     <p:spTree>
@@ -4373,7 +4577,106 @@
 </p:sld>
 </file>
 
-<file path=ppt/slides/slide18.xml><?xml version="1.0" encoding="utf-8"?>
+<file path=ppt/slides/slide2.xml><?xml version="1.0" encoding="utf-8"?>
+<p:sld xmlns:a="http://schemas.openxmlformats.org/drawingml/2006/main" xmlns:r="http://schemas.openxmlformats.org/officeDocument/2006/relationships" xmlns:p="http://schemas.openxmlformats.org/presentationml/2006/main">
+  <p:cSld>
+    <p:spTree>
+      <p:nvGrpSpPr>
+        <p:cNvPr id="1" name=""/>
+        <p:cNvGrpSpPr/>
+        <p:nvPr/>
+      </p:nvGrpSpPr>
+      <p:grpSpPr>
+        <a:xfrm>
+          <a:off x="0" y="0"/>
+          <a:ext cx="0" cy="0"/>
+          <a:chOff x="0" y="0"/>
+          <a:chExt cx="0" cy="0"/>
+        </a:xfrm>
+      </p:grpSpPr>
+      <p:sp>
+        <p:nvSpPr>
+          <p:cNvPr id="2" name="Title 1"/>
+          <p:cNvSpPr>
+            <a:spLocks noGrp="1"/>
+          </p:cNvSpPr>
+          <p:nvPr>
+            <p:ph type="title"/>
+          </p:nvPr>
+        </p:nvSpPr>
+        <p:spPr/>
+        <p:txBody>
+          <a:bodyPr/>
+          <a:lstStyle/>
+          <a:p>
+            <a:r>
+              <a:rPr lang="ru-RU" dirty="0" smtClean="0"/>
+              <a:t>Обоснование </a:t>
+            </a:r>
+            <a:r>
+              <a:rPr lang="ru-RU" dirty="0"/>
+              <a:t>исследования</a:t>
+            </a:r>
+            <a:endParaRPr lang="en-US" dirty="0"/>
+          </a:p>
+        </p:txBody>
+      </p:sp>
+      <p:sp>
+        <p:nvSpPr>
+          <p:cNvPr id="3" name="Text Placeholder 2"/>
+          <p:cNvSpPr>
+            <a:spLocks noGrp="1"/>
+          </p:cNvSpPr>
+          <p:nvPr>
+            <p:ph type="body" idx="1"/>
+          </p:nvPr>
+        </p:nvSpPr>
+        <p:spPr>
+          <a:xfrm>
+            <a:off x="2108200" y="2089828"/>
+            <a:ext cx="6324600" cy="1258093"/>
+          </a:xfrm>
+        </p:spPr>
+        <p:txBody>
+          <a:bodyPr>
+            <a:noAutofit/>
+          </a:bodyPr>
+          <a:lstStyle/>
+          <a:p>
+            <a:pPr algn="just"/>
+            <a:r>
+              <a:rPr lang="ru-RU" dirty="0"/>
+              <a:t>Взаимосвязь между развитием финансового сектора и экономическим ростом остается предметом активных теоретических и эмпирических дискуссий. Несмотря на общее признание важности устойчивой финансовой системы, конкретное влияние фондовых рынков на экономику трактуется неоднозначно</a:t>
+            </a:r>
+            <a:r>
+              <a:rPr lang="ru-RU" dirty="0" smtClean="0"/>
+              <a:t>.</a:t>
+            </a:r>
+            <a:endParaRPr lang="en-US" dirty="0"/>
+          </a:p>
+        </p:txBody>
+      </p:sp>
+    </p:spTree>
+    <p:extLst>
+      <p:ext uri="{BB962C8B-B14F-4D97-AF65-F5344CB8AC3E}">
+        <p14:creationId xmlns:p14="http://schemas.microsoft.com/office/powerpoint/2010/main" val="3279012890"/>
+      </p:ext>
+    </p:extLst>
+  </p:cSld>
+  <p:clrMapOvr>
+    <a:masterClrMapping/>
+  </p:clrMapOvr>
+  <p:timing>
+    <p:tnLst>
+      <p:par>
+        <p:cTn id="1" dur="indefinite" restart="never" nodeType="tmRoot"/>
+      </p:par>
+    </p:tnLst>
+  </p:timing>
+</p:sld>
+</file>
+
+<file path=ppt/slides/slide20.xml><?xml version="1.0" encoding="utf-8"?>
 <p:sld xmlns:a="http://schemas.openxmlformats.org/drawingml/2006/main" xmlns:r="http://schemas.openxmlformats.org/officeDocument/2006/relationships" xmlns:p="http://schemas.openxmlformats.org/presentationml/2006/main">
   <p:cSld>
     <p:spTree>
@@ -4484,7 +4787,7 @@
 </p:sld>
 </file>
 
-<file path=ppt/slides/slide19.xml><?xml version="1.0" encoding="utf-8"?>
+<file path=ppt/slides/slide21.xml><?xml version="1.0" encoding="utf-8"?>
 <p:sld xmlns:a="http://schemas.openxmlformats.org/drawingml/2006/main" xmlns:r="http://schemas.openxmlformats.org/officeDocument/2006/relationships" xmlns:p="http://schemas.openxmlformats.org/presentationml/2006/main">
   <p:cSld>
     <p:spTree>
@@ -4634,110 +4937,7 @@
 </p:sld>
 </file>
 
-<file path=ppt/slides/slide2.xml><?xml version="1.0" encoding="utf-8"?>
-<p:sld xmlns:a="http://schemas.openxmlformats.org/drawingml/2006/main" xmlns:r="http://schemas.openxmlformats.org/officeDocument/2006/relationships" xmlns:p="http://schemas.openxmlformats.org/presentationml/2006/main">
-  <p:cSld>
-    <p:spTree>
-      <p:nvGrpSpPr>
-        <p:cNvPr id="1" name=""/>
-        <p:cNvGrpSpPr/>
-        <p:nvPr/>
-      </p:nvGrpSpPr>
-      <p:grpSpPr>
-        <a:xfrm>
-          <a:off x="0" y="0"/>
-          <a:ext cx="0" cy="0"/>
-          <a:chOff x="0" y="0"/>
-          <a:chExt cx="0" cy="0"/>
-        </a:xfrm>
-      </p:grpSpPr>
-      <p:sp>
-        <p:nvSpPr>
-          <p:cNvPr id="2" name="Title 1"/>
-          <p:cNvSpPr>
-            <a:spLocks noGrp="1"/>
-          </p:cNvSpPr>
-          <p:nvPr>
-            <p:ph type="title"/>
-          </p:nvPr>
-        </p:nvSpPr>
-        <p:spPr/>
-        <p:txBody>
-          <a:bodyPr/>
-          <a:lstStyle/>
-          <a:p>
-            <a:r>
-              <a:rPr lang="ru-RU" dirty="0" smtClean="0"/>
-              <a:t>Обоснование </a:t>
-            </a:r>
-            <a:r>
-              <a:rPr lang="ru-RU" dirty="0"/>
-              <a:t>исследования</a:t>
-            </a:r>
-            <a:endParaRPr lang="en-US" dirty="0"/>
-          </a:p>
-        </p:txBody>
-      </p:sp>
-      <p:sp>
-        <p:nvSpPr>
-          <p:cNvPr id="3" name="Text Placeholder 2"/>
-          <p:cNvSpPr>
-            <a:spLocks noGrp="1"/>
-          </p:cNvSpPr>
-          <p:nvPr>
-            <p:ph type="body" idx="1"/>
-          </p:nvPr>
-        </p:nvSpPr>
-        <p:spPr>
-          <a:xfrm>
-            <a:off x="2108200" y="2089828"/>
-            <a:ext cx="6324600" cy="1258093"/>
-          </a:xfrm>
-        </p:spPr>
-        <p:txBody>
-          <a:bodyPr>
-            <a:noAutofit/>
-          </a:bodyPr>
-          <a:lstStyle/>
-          <a:p>
-            <a:pPr algn="just"/>
-            <a:r>
-              <a:rPr lang="ru-RU" dirty="0"/>
-              <a:t>Взаимосвязь между развитием финансового сектора и экономическим ростом остается предметом активных теоретических и эмпирических дискуссий. Несмотря на общее признание важности устойчивой финансовой системы, </a:t>
-            </a:r>
-            <a:r>
-              <a:rPr lang="ru-RU" b="1" dirty="0"/>
-              <a:t>конкретное влияние фондовых рынков на экономику трактуется неоднозначно</a:t>
-            </a:r>
-            <a:r>
-              <a:rPr lang="ru-RU" b="1" dirty="0" smtClean="0"/>
-              <a:t>.</a:t>
-            </a:r>
-            <a:endParaRPr lang="en-US" b="1" dirty="0"/>
-          </a:p>
-        </p:txBody>
-      </p:sp>
-    </p:spTree>
-    <p:extLst>
-      <p:ext uri="{BB962C8B-B14F-4D97-AF65-F5344CB8AC3E}">
-        <p14:creationId xmlns:p14="http://schemas.microsoft.com/office/powerpoint/2010/main" val="4056755690"/>
-      </p:ext>
-    </p:extLst>
-  </p:cSld>
-  <p:clrMapOvr>
-    <a:masterClrMapping/>
-  </p:clrMapOvr>
-  <p:timing>
-    <p:tnLst>
-      <p:par>
-        <p:cTn id="1" dur="indefinite" restart="never" nodeType="tmRoot"/>
-      </p:par>
-    </p:tnLst>
-  </p:timing>
-</p:sld>
-</file>
-
-<file path=ppt/slides/slide20.xml><?xml version="1.0" encoding="utf-8"?>
+<file path=ppt/slides/slide22.xml><?xml version="1.0" encoding="utf-8"?>
 <p:sld xmlns:a="http://schemas.openxmlformats.org/drawingml/2006/main" xmlns:r="http://schemas.openxmlformats.org/officeDocument/2006/relationships" xmlns:p="http://schemas.openxmlformats.org/presentationml/2006/main">
   <p:cSld>
     <p:spTree>
@@ -4848,7 +5048,7 @@
 </p:sld>
 </file>
 
-<file path=ppt/slides/slide21.xml><?xml version="1.0" encoding="utf-8"?>
+<file path=ppt/slides/slide23.xml><?xml version="1.0" encoding="utf-8"?>
 <p:sld xmlns:a="http://schemas.openxmlformats.org/drawingml/2006/main" xmlns:r="http://schemas.openxmlformats.org/officeDocument/2006/relationships" xmlns:p="http://schemas.openxmlformats.org/presentationml/2006/main">
   <p:cSld>
     <p:spTree>
@@ -4955,7 +5155,7 @@
 </p:sld>
 </file>
 
-<file path=ppt/slides/slide22.xml><?xml version="1.0" encoding="utf-8"?>
+<file path=ppt/slides/slide24.xml><?xml version="1.0" encoding="utf-8"?>
 <p:sld xmlns:a="http://schemas.openxmlformats.org/drawingml/2006/main" xmlns:r="http://schemas.openxmlformats.org/officeDocument/2006/relationships" xmlns:p="http://schemas.openxmlformats.org/presentationml/2006/main">
   <p:cSld>
     <p:spTree>
@@ -5111,7 +5311,7 @@
 </p:sld>
 </file>
 
-<file path=ppt/slides/slide23.xml><?xml version="1.0" encoding="utf-8"?>
+<file path=ppt/slides/slide25.xml><?xml version="1.0" encoding="utf-8"?>
 <p:sld xmlns:a="http://schemas.openxmlformats.org/drawingml/2006/main" xmlns:r="http://schemas.openxmlformats.org/officeDocument/2006/relationships" xmlns:p="http://schemas.openxmlformats.org/presentationml/2006/main">
   <p:cSld>
     <p:spTree>
@@ -5214,7 +5414,7 @@
 </p:sld>
 </file>
 
-<file path=ppt/slides/slide24.xml><?xml version="1.0" encoding="utf-8"?>
+<file path=ppt/slides/slide26.xml><?xml version="1.0" encoding="utf-8"?>
 <p:sld xmlns:a="http://schemas.openxmlformats.org/drawingml/2006/main" xmlns:r="http://schemas.openxmlformats.org/officeDocument/2006/relationships" xmlns:p="http://schemas.openxmlformats.org/presentationml/2006/main">
   <p:cSld>
     <p:spTree>
@@ -5321,328 +5521,6 @@
 </p:sld>
 </file>
 
-<file path=ppt/slides/slide25.xml><?xml version="1.0" encoding="utf-8"?>
-<p:sld xmlns:a="http://schemas.openxmlformats.org/drawingml/2006/main" xmlns:r="http://schemas.openxmlformats.org/officeDocument/2006/relationships" xmlns:p="http://schemas.openxmlformats.org/presentationml/2006/main">
-  <p:cSld>
-    <p:spTree>
-      <p:nvGrpSpPr>
-        <p:cNvPr id="1" name=""/>
-        <p:cNvGrpSpPr/>
-        <p:nvPr/>
-      </p:nvGrpSpPr>
-      <p:grpSpPr>
-        <a:xfrm>
-          <a:off x="0" y="0"/>
-          <a:ext cx="0" cy="0"/>
-          <a:chOff x="0" y="0"/>
-          <a:chExt cx="0" cy="0"/>
-        </a:xfrm>
-      </p:grpSpPr>
-      <p:sp>
-        <p:nvSpPr>
-          <p:cNvPr id="2" name="Title 1"/>
-          <p:cNvSpPr>
-            <a:spLocks noGrp="1"/>
-          </p:cNvSpPr>
-          <p:nvPr>
-            <p:ph type="title"/>
-          </p:nvPr>
-        </p:nvSpPr>
-        <p:spPr/>
-        <p:txBody>
-          <a:bodyPr/>
-          <a:lstStyle/>
-          <a:p>
-            <a:r>
-              <a:rPr lang="ru-RU" sz="4400" dirty="0"/>
-              <a:t>Выводы (1)</a:t>
-            </a:r>
-            <a:endParaRPr lang="en-US" sz="4400" dirty="0"/>
-          </a:p>
-        </p:txBody>
-      </p:sp>
-      <p:sp>
-        <p:nvSpPr>
-          <p:cNvPr id="3" name="Text Placeholder 2"/>
-          <p:cNvSpPr>
-            <a:spLocks noGrp="1"/>
-          </p:cNvSpPr>
-          <p:nvPr>
-            <p:ph type="body" idx="1"/>
-          </p:nvPr>
-        </p:nvSpPr>
-        <p:spPr>
-          <a:xfrm>
-            <a:off x="1778000" y="2089829"/>
-            <a:ext cx="7721600" cy="1258093"/>
-          </a:xfrm>
-        </p:spPr>
-        <p:txBody>
-          <a:bodyPr>
-            <a:noAutofit/>
-          </a:bodyPr>
-          <a:lstStyle/>
-          <a:p>
-            <a:pPr marL="416042" indent="-342891" algn="just">
-              <a:buFont typeface="Arial" panose="020B0604020202020204" pitchFamily="34" charset="0"/>
-              <a:buChar char="•"/>
-            </a:pPr>
-            <a:r>
-              <a:rPr lang="ru-RU" dirty="0" smtClean="0"/>
-              <a:t>Долгосрочный тренд </a:t>
-            </a:r>
-            <a:r>
-              <a:rPr lang="ru-RU" dirty="0"/>
-              <a:t>совместного </a:t>
-            </a:r>
-            <a:r>
-              <a:rPr lang="ru-RU" dirty="0" smtClean="0"/>
-              <a:t>роста (</a:t>
-            </a:r>
-            <a:r>
-              <a:rPr lang="ru-RU" dirty="0" err="1" smtClean="0"/>
-              <a:t>коинтеграция</a:t>
-            </a:r>
-            <a:r>
-              <a:rPr lang="ru-RU" dirty="0" smtClean="0"/>
-              <a:t>):</a:t>
-            </a:r>
-          </a:p>
-          <a:p>
-            <a:pPr marL="870945" lvl="1" indent="-285744" algn="just">
-              <a:buFont typeface="Arial" panose="020B0604020202020204" pitchFamily="34" charset="0"/>
-              <a:buChar char="•"/>
-            </a:pPr>
-            <a:r>
-              <a:rPr lang="ru-RU" dirty="0" smtClean="0"/>
-              <a:t>В </a:t>
-            </a:r>
-            <a:r>
-              <a:rPr lang="ru-RU" b="1" dirty="0" smtClean="0"/>
-              <a:t>Индии</a:t>
-            </a:r>
-            <a:r>
-              <a:rPr lang="ru-RU" dirty="0" smtClean="0"/>
-              <a:t>: экономика растет совместно с рыночной капитализацией.</a:t>
-            </a:r>
-          </a:p>
-          <a:p>
-            <a:pPr marL="870945" lvl="1" indent="-285744" algn="just">
-              <a:buFont typeface="Arial" panose="020B0604020202020204" pitchFamily="34" charset="0"/>
-              <a:buChar char="•"/>
-            </a:pPr>
-            <a:r>
-              <a:rPr lang="ru-RU" dirty="0" smtClean="0"/>
-              <a:t>В</a:t>
-            </a:r>
-            <a:r>
-              <a:rPr lang="ru-RU" dirty="0"/>
-              <a:t> </a:t>
-            </a:r>
-            <a:r>
-              <a:rPr lang="ru-RU" b="1" dirty="0"/>
-              <a:t>Китае</a:t>
-            </a:r>
-            <a:r>
-              <a:rPr lang="ru-RU" dirty="0"/>
-              <a:t>: экономика растет совместно с задолженностью.</a:t>
-            </a:r>
-          </a:p>
-          <a:p>
-            <a:pPr marL="416042" indent="-342891" algn="just">
-              <a:buFont typeface="Arial" panose="020B0604020202020204" pitchFamily="34" charset="0"/>
-              <a:buChar char="•"/>
-            </a:pPr>
-            <a:r>
-              <a:rPr lang="ru-RU" dirty="0"/>
-              <a:t>Отсутствие долгосрочных связей не исключает значимых краткосрочных взаимодействий между переменными</a:t>
-            </a:r>
-            <a:r>
-              <a:rPr lang="ru-RU" dirty="0" smtClean="0"/>
-              <a:t>.</a:t>
-            </a:r>
-            <a:endParaRPr lang="en-US" dirty="0"/>
-          </a:p>
-        </p:txBody>
-      </p:sp>
-    </p:spTree>
-    <p:extLst>
-      <p:ext uri="{BB962C8B-B14F-4D97-AF65-F5344CB8AC3E}">
-        <p14:creationId xmlns:p14="http://schemas.microsoft.com/office/powerpoint/2010/main" val="3682347184"/>
-      </p:ext>
-    </p:extLst>
-  </p:cSld>
-  <p:clrMapOvr>
-    <a:masterClrMapping/>
-  </p:clrMapOvr>
-  <p:timing>
-    <p:tnLst>
-      <p:par>
-        <p:cTn id="1" dur="indefinite" restart="never" nodeType="tmRoot"/>
-      </p:par>
-    </p:tnLst>
-  </p:timing>
-</p:sld>
-</file>
-
-<file path=ppt/slides/slide26.xml><?xml version="1.0" encoding="utf-8"?>
-<p:sld xmlns:a="http://schemas.openxmlformats.org/drawingml/2006/main" xmlns:r="http://schemas.openxmlformats.org/officeDocument/2006/relationships" xmlns:p="http://schemas.openxmlformats.org/presentationml/2006/main">
-  <p:cSld>
-    <p:spTree>
-      <p:nvGrpSpPr>
-        <p:cNvPr id="1" name=""/>
-        <p:cNvGrpSpPr/>
-        <p:nvPr/>
-      </p:nvGrpSpPr>
-      <p:grpSpPr>
-        <a:xfrm>
-          <a:off x="0" y="0"/>
-          <a:ext cx="0" cy="0"/>
-          <a:chOff x="0" y="0"/>
-          <a:chExt cx="0" cy="0"/>
-        </a:xfrm>
-      </p:grpSpPr>
-      <p:sp>
-        <p:nvSpPr>
-          <p:cNvPr id="2" name="Title 1"/>
-          <p:cNvSpPr>
-            <a:spLocks noGrp="1"/>
-          </p:cNvSpPr>
-          <p:nvPr>
-            <p:ph type="title"/>
-          </p:nvPr>
-        </p:nvSpPr>
-        <p:spPr/>
-        <p:txBody>
-          <a:bodyPr/>
-          <a:lstStyle/>
-          <a:p>
-            <a:r>
-              <a:rPr lang="ru-RU" sz="4400" dirty="0"/>
-              <a:t>Выводы (2)</a:t>
-            </a:r>
-            <a:endParaRPr lang="en-US" sz="4400" dirty="0"/>
-          </a:p>
-        </p:txBody>
-      </p:sp>
-      <p:sp>
-        <p:nvSpPr>
-          <p:cNvPr id="3" name="Text Placeholder 2"/>
-          <p:cNvSpPr>
-            <a:spLocks noGrp="1"/>
-          </p:cNvSpPr>
-          <p:nvPr>
-            <p:ph type="body" idx="1"/>
-          </p:nvPr>
-        </p:nvSpPr>
-        <p:spPr>
-          <a:xfrm>
-            <a:off x="1778000" y="2089829"/>
-            <a:ext cx="7264400" cy="1258093"/>
-          </a:xfrm>
-        </p:spPr>
-        <p:txBody>
-          <a:bodyPr>
-            <a:noAutofit/>
-          </a:bodyPr>
-          <a:lstStyle/>
-          <a:p>
-            <a:pPr marL="416042" indent="-342891" algn="just">
-              <a:buFont typeface="Arial" panose="020B0604020202020204" pitchFamily="34" charset="0"/>
-              <a:buChar char="•"/>
-            </a:pPr>
-            <a:r>
-              <a:rPr lang="ru-RU" dirty="0"/>
-              <a:t>Направление влияния на ВВП </a:t>
-            </a:r>
-            <a:r>
-              <a:rPr lang="ru-RU" dirty="0" smtClean="0"/>
-              <a:t>(кумулятивный отклик):</a:t>
-            </a:r>
-          </a:p>
-          <a:p>
-            <a:pPr marL="1211550" lvl="1" indent="-342891" algn="just">
-              <a:buFont typeface="Arial" panose="020B0604020202020204" pitchFamily="34" charset="0"/>
-              <a:buChar char="•"/>
-            </a:pPr>
-            <a:r>
-              <a:rPr lang="ru-RU" b="1" dirty="0" smtClean="0"/>
-              <a:t>В </a:t>
-            </a:r>
-            <a:r>
-              <a:rPr lang="ru-RU" b="1" dirty="0"/>
-              <a:t>Индии</a:t>
-            </a:r>
-            <a:r>
-              <a:rPr lang="ru-RU" dirty="0"/>
-              <a:t> положительное влияние на ВВП оказывают: рыночная капитализация, задолженность и экспорт </a:t>
-            </a:r>
-            <a:r>
-              <a:rPr lang="ru-RU" dirty="0" smtClean="0"/>
-              <a:t>товаров </a:t>
-            </a:r>
-            <a:r>
-              <a:rPr lang="ru-RU" dirty="0"/>
-              <a:t>и </a:t>
-            </a:r>
-            <a:r>
-              <a:rPr lang="ru-RU" dirty="0" smtClean="0"/>
-              <a:t>услуг.</a:t>
-            </a:r>
-          </a:p>
-          <a:p>
-            <a:pPr marL="1211550" lvl="1" indent="-342891" algn="just">
-              <a:buFont typeface="Arial" panose="020B0604020202020204" pitchFamily="34" charset="0"/>
-              <a:buChar char="•"/>
-            </a:pPr>
-            <a:r>
-              <a:rPr lang="ru-RU" b="1" dirty="0" smtClean="0"/>
-              <a:t>В </a:t>
-            </a:r>
-            <a:r>
-              <a:rPr lang="ru-RU" b="1" dirty="0"/>
-              <a:t>Китае</a:t>
-            </a:r>
-            <a:r>
-              <a:rPr lang="ru-RU" dirty="0"/>
-              <a:t> структура влияния аналогична, за исключением ключевого отличия: рыночная капитализация оказывает </a:t>
-            </a:r>
-            <a:r>
-              <a:rPr lang="ru-RU" b="1" dirty="0"/>
-              <a:t>отрицательное</a:t>
-            </a:r>
-            <a:r>
-              <a:rPr lang="ru-RU" dirty="0"/>
-              <a:t> влияние на ВВП</a:t>
-            </a:r>
-            <a:r>
-              <a:rPr lang="ru-RU" dirty="0" smtClean="0"/>
-              <a:t>.</a:t>
-            </a:r>
-            <a:endParaRPr lang="en-US" dirty="0"/>
-          </a:p>
-        </p:txBody>
-      </p:sp>
-    </p:spTree>
-    <p:extLst>
-      <p:ext uri="{BB962C8B-B14F-4D97-AF65-F5344CB8AC3E}">
-        <p14:creationId xmlns:p14="http://schemas.microsoft.com/office/powerpoint/2010/main" val="1651311990"/>
-      </p:ext>
-    </p:extLst>
-  </p:cSld>
-  <p:clrMapOvr>
-    <a:masterClrMapping/>
-  </p:clrMapOvr>
-  <p:timing>
-    <p:tnLst>
-      <p:par>
-        <p:cTn id="1" dur="indefinite" restart="never" nodeType="tmRoot"/>
-      </p:par>
-    </p:tnLst>
-  </p:timing>
-</p:sld>
-</file>
-
 <file path=ppt/slides/slide27.xml><?xml version="1.0" encoding="utf-8"?>
 <p:sld xmlns:a="http://schemas.openxmlformats.org/drawingml/2006/main" xmlns:r="http://schemas.openxmlformats.org/officeDocument/2006/relationships" xmlns:p="http://schemas.openxmlformats.org/presentationml/2006/main">
   <p:cSld>
@@ -5677,7 +5555,7 @@
           <a:p>
             <a:r>
               <a:rPr lang="ru-RU" sz="4400" dirty="0"/>
-              <a:t>Выводы (3)</a:t>
+              <a:t>Выводы (1)</a:t>
             </a:r>
             <a:endParaRPr lang="en-US" sz="4400" dirty="0"/>
           </a:p>
@@ -5693,7 +5571,12 @@
             <p:ph type="body" idx="1"/>
           </p:nvPr>
         </p:nvSpPr>
-        <p:spPr/>
+        <p:spPr>
+          <a:xfrm>
+            <a:off x="1778000" y="2089829"/>
+            <a:ext cx="7721600" cy="1258093"/>
+          </a:xfrm>
+        </p:spPr>
         <p:txBody>
           <a:bodyPr>
             <a:noAutofit/>
@@ -5706,114 +5589,78 @@
             </a:pPr>
             <a:r>
               <a:rPr lang="ru-RU" dirty="0" smtClean="0"/>
-              <a:t>Переменные (не ВВП) объясняют не большой </a:t>
+              <a:t>Долгосрочный тренд </a:t>
             </a:r>
             <a:r>
               <a:rPr lang="ru-RU" dirty="0"/>
-              <a:t>объем вариации ВВП в </a:t>
-            </a:r>
-            <a:r>
-              <a:rPr lang="ru-RU" b="1" dirty="0"/>
-              <a:t>Индии (≈30%)</a:t>
-            </a:r>
-            <a:r>
-              <a:rPr lang="ru-RU" dirty="0"/>
-              <a:t> , чем в </a:t>
-            </a:r>
-            <a:r>
-              <a:rPr lang="ru-RU" b="1" dirty="0"/>
-              <a:t>Китае (≈10</a:t>
-            </a:r>
-            <a:r>
-              <a:rPr lang="ru-RU" b="1" dirty="0" smtClean="0"/>
-              <a:t>%)</a:t>
+              <a:t>совместного </a:t>
             </a:r>
             <a:r>
               <a:rPr lang="ru-RU" dirty="0" smtClean="0"/>
-              <a:t>:</a:t>
+              <a:t>роста (</a:t>
+            </a:r>
+            <a:r>
+              <a:rPr lang="ru-RU" dirty="0" err="1" smtClean="0"/>
+              <a:t>коинтеграция</a:t>
+            </a:r>
+            <a:r>
+              <a:rPr lang="ru-RU" dirty="0" smtClean="0"/>
+              <a:t>):</a:t>
             </a:r>
           </a:p>
           <a:p>
-            <a:pPr marL="1211550" lvl="1" indent="-342891" algn="just">
+            <a:pPr marL="870945" lvl="1" indent="-285744" algn="just">
               <a:buFont typeface="Arial" panose="020B0604020202020204" pitchFamily="34" charset="0"/>
               <a:buChar char="•"/>
             </a:pPr>
             <a:r>
+              <a:rPr lang="ru-RU" dirty="0" smtClean="0"/>
+              <a:t>В </a:t>
+            </a:r>
+            <a:r>
               <a:rPr lang="ru-RU" b="1" dirty="0" smtClean="0"/>
-              <a:t>Индия</a:t>
-            </a:r>
-            <a:r>
-              <a:rPr lang="ru-RU" b="1" dirty="0"/>
-              <a:t>:</a:t>
-            </a:r>
-            <a:r>
-              <a:rPr lang="ru-RU" dirty="0"/>
-              <a:t> основную объяснительную силу несет </a:t>
-            </a:r>
-            <a:r>
-              <a:rPr lang="ru-RU" b="1" dirty="0"/>
-              <a:t>капитализация (≈15%)</a:t>
-            </a:r>
-            <a:r>
-              <a:rPr lang="ru-RU" dirty="0"/>
-              <a:t> , далее следуют задолженность и экспорт (по 7.5% каждый</a:t>
+              <a:t>Индии</a:t>
             </a:r>
             <a:r>
               <a:rPr lang="ru-RU" dirty="0" smtClean="0"/>
-              <a:t>).</a:t>
+              <a:t>: экономика растет совместно с рыночной капитализацией.</a:t>
             </a:r>
           </a:p>
           <a:p>
-            <a:pPr marL="1211550" lvl="1" indent="-342891" algn="just">
+            <a:pPr marL="870945" lvl="1" indent="-285744" algn="just">
               <a:buFont typeface="Arial" panose="020B0604020202020204" pitchFamily="34" charset="0"/>
               <a:buChar char="•"/>
             </a:pPr>
             <a:r>
-              <a:rPr lang="ru-RU" b="1" dirty="0" smtClean="0"/>
-              <a:t>Китай</a:t>
+              <a:rPr lang="ru-RU" dirty="0" smtClean="0"/>
+              <a:t>В</a:t>
+            </a:r>
+            <a:r>
+              <a:rPr lang="ru-RU" dirty="0"/>
+              <a:t> </a:t>
             </a:r>
             <a:r>
               <a:rPr lang="ru-RU" b="1" dirty="0"/>
-              <a:t>:</a:t>
+              <a:t>Китае</a:t>
             </a:r>
             <a:r>
               <a:rPr lang="ru-RU" dirty="0"/>
-              <a:t> ключевым фактором является </a:t>
-            </a:r>
-            <a:r>
-              <a:rPr lang="ru-RU" b="1" dirty="0"/>
-              <a:t>задолженность (≈5%)</a:t>
-            </a:r>
+              <a:t>: экономика растет совместно с задолженностью.</a:t>
+            </a:r>
+          </a:p>
+          <a:p>
+            <a:pPr marL="416042" indent="-342891" algn="just">
+              <a:buFont typeface="Arial" panose="020B0604020202020204" pitchFamily="34" charset="0"/>
+              <a:buChar char="•"/>
+            </a:pPr>
             <a:r>
               <a:rPr lang="ru-RU" dirty="0"/>
-              <a:t> , </a:t>
+              <a:t>Отсутствие долгосрочных связей не исключает значимых краткосрочных взаимодействий между переменными</a:t>
             </a:r>
             <a:r>
               <a:rPr lang="ru-RU" dirty="0" smtClean="0"/>
-              <a:t/>
-            </a:r>
-            <a:br>
-              <a:rPr lang="ru-RU" dirty="0" smtClean="0"/>
-            </a:br>
-            <a:r>
-              <a:rPr lang="ru-RU" dirty="0" smtClean="0"/>
-              <a:t>за </a:t>
-            </a:r>
-            <a:r>
-              <a:rPr lang="ru-RU" dirty="0"/>
-              <a:t>ней следуют экспорт (≈3%) и капитализация (≈2</a:t>
-            </a:r>
-            <a:r>
-              <a:rPr lang="ru-RU" dirty="0" smtClean="0"/>
-              <a:t>%).</a:t>
-            </a:r>
-            <a:r>
-              <a:rPr lang="ru-RU" dirty="0"/>
-              <a:t/>
-            </a:r>
-            <a:br>
-              <a:rPr lang="ru-RU" dirty="0"/>
-            </a:br>
+              <a:t>.</a:t>
+            </a:r>
             <a:endParaRPr lang="en-US" dirty="0"/>
           </a:p>
         </p:txBody>
@@ -5821,7 +5668,7 @@
     </p:spTree>
     <p:extLst>
       <p:ext uri="{BB962C8B-B14F-4D97-AF65-F5344CB8AC3E}">
-        <p14:creationId xmlns:p14="http://schemas.microsoft.com/office/powerpoint/2010/main" val="1019839675"/>
+        <p14:creationId xmlns:p14="http://schemas.microsoft.com/office/powerpoint/2010/main" val="3682347184"/>
       </p:ext>
     </p:extLst>
   </p:cSld>
@@ -5871,8 +5718,8 @@
           <a:lstStyle/>
           <a:p>
             <a:r>
-              <a:rPr lang="ru-RU" sz="4400" dirty="0" smtClean="0"/>
-              <a:t>Заключение по Индии</a:t>
+              <a:rPr lang="ru-RU" sz="4400" dirty="0"/>
+              <a:t>Выводы (2)</a:t>
             </a:r>
             <a:endParaRPr lang="en-US" sz="4400" dirty="0"/>
           </a:p>
@@ -5888,49 +5735,90 @@
             <p:ph type="body" idx="1"/>
           </p:nvPr>
         </p:nvSpPr>
-        <p:spPr/>
+        <p:spPr>
+          <a:xfrm>
+            <a:off x="1778000" y="2089829"/>
+            <a:ext cx="7264400" cy="1258093"/>
+          </a:xfrm>
+        </p:spPr>
         <p:txBody>
           <a:bodyPr>
             <a:noAutofit/>
           </a:bodyPr>
           <a:lstStyle/>
           <a:p>
-            <a:pPr algn="just"/>
+            <a:pPr marL="416042" indent="-342891" algn="just">
+              <a:buFont typeface="Arial" panose="020B0604020202020204" pitchFamily="34" charset="0"/>
+              <a:buChar char="•"/>
+            </a:pPr>
             <a:r>
               <a:rPr lang="ru-RU" dirty="0"/>
-              <a:t>Для экономики Республики Индия </a:t>
+              <a:t>Направление влияния на ВВП </a:t>
             </a:r>
             <a:r>
               <a:rPr lang="ru-RU" dirty="0" smtClean="0"/>
-              <a:t>особую </a:t>
-            </a:r>
-            <a:r>
-              <a:rPr lang="ru-RU" dirty="0"/>
-              <a:t>роль играют фондовые рынки. Это объясняется относительно более легким доступом к биржевому финансированию по сравнению с банковским кредитованием. В пользу этого тезиса свидетельствует значительное количество публичных компаний, чьи акции находятся в </a:t>
-            </a:r>
-            <a:r>
-              <a:rPr lang="ru-RU" dirty="0" smtClean="0"/>
-              <a:t>котировальных списках, но чьи акции не торгуются. </a:t>
-            </a:r>
-            <a:r>
-              <a:rPr lang="ru-RU" dirty="0"/>
-              <a:t>Роль банковского сектора, напротив, оказывается менее выраженной ввиду сохраняющихся сложностей с выдачей кредитов малому и среднему бизнесу (МСП), включая жесткие требования к </a:t>
-            </a:r>
-            <a:r>
-              <a:rPr lang="ru-RU" dirty="0" smtClean="0"/>
-              <a:t>обеспечению.</a:t>
-            </a:r>
-            <a:endParaRPr lang="ru-RU" dirty="0"/>
+              <a:t>(кумулятивный отклик):</a:t>
+            </a:r>
           </a:p>
           <a:p>
-            <a:pPr algn="just"/>
+            <a:pPr marL="1211550" lvl="1" indent="-342891" algn="just">
+              <a:buFont typeface="Arial" panose="020B0604020202020204" pitchFamily="34" charset="0"/>
+              <a:buChar char="•"/>
+            </a:pPr>
+            <a:r>
+              <a:rPr lang="ru-RU" b="1" dirty="0" smtClean="0"/>
+              <a:t>В </a:t>
+            </a:r>
+            <a:r>
+              <a:rPr lang="ru-RU" b="1" dirty="0"/>
+              <a:t>Индии</a:t>
+            </a:r>
             <a:r>
               <a:rPr lang="ru-RU" dirty="0"/>
-              <a:t/>
-            </a:r>
-            <a:br>
+              <a:t> положительное влияние на ВВП оказывают: рыночная капитализация, задолженность и экспорт </a:t>
+            </a:r>
+            <a:r>
+              <a:rPr lang="ru-RU" dirty="0" smtClean="0"/>
+              <a:t>товаров </a:t>
+            </a:r>
+            <a:r>
               <a:rPr lang="ru-RU" dirty="0"/>
-            </a:br>
+              <a:t>и </a:t>
+            </a:r>
+            <a:r>
+              <a:rPr lang="ru-RU" dirty="0" smtClean="0"/>
+              <a:t>услуг.</a:t>
+            </a:r>
+          </a:p>
+          <a:p>
+            <a:pPr marL="1211550" lvl="1" indent="-342891" algn="just">
+              <a:buFont typeface="Arial" panose="020B0604020202020204" pitchFamily="34" charset="0"/>
+              <a:buChar char="•"/>
+            </a:pPr>
+            <a:r>
+              <a:rPr lang="ru-RU" b="1" dirty="0" smtClean="0"/>
+              <a:t>В </a:t>
+            </a:r>
+            <a:r>
+              <a:rPr lang="ru-RU" b="1" dirty="0"/>
+              <a:t>Китае</a:t>
+            </a:r>
+            <a:r>
+              <a:rPr lang="ru-RU" dirty="0"/>
+              <a:t> структура влияния аналогична, за исключением ключевого отличия: рыночная капитализация оказывает </a:t>
+            </a:r>
+            <a:r>
+              <a:rPr lang="ru-RU" b="1" dirty="0"/>
+              <a:t>отрицательное</a:t>
+            </a:r>
+            <a:r>
+              <a:rPr lang="ru-RU" dirty="0"/>
+              <a:t> влияние на ВВП</a:t>
+            </a:r>
+            <a:r>
+              <a:rPr lang="ru-RU" dirty="0" smtClean="0"/>
+              <a:t>.</a:t>
+            </a:r>
             <a:endParaRPr lang="en-US" dirty="0"/>
           </a:p>
         </p:txBody>
@@ -5938,7 +5826,7 @@
     </p:spTree>
     <p:extLst>
       <p:ext uri="{BB962C8B-B14F-4D97-AF65-F5344CB8AC3E}">
-        <p14:creationId xmlns:p14="http://schemas.microsoft.com/office/powerpoint/2010/main" val="3806076759"/>
+        <p14:creationId xmlns:p14="http://schemas.microsoft.com/office/powerpoint/2010/main" val="1651311990"/>
       </p:ext>
     </p:extLst>
   </p:cSld>
@@ -5989,11 +5877,7 @@
           <a:p>
             <a:r>
               <a:rPr lang="ru-RU" sz="4400" dirty="0"/>
-              <a:t>Рекомендации </a:t>
-            </a:r>
-            <a:r>
-              <a:rPr lang="ru-RU" sz="4400" dirty="0" smtClean="0"/>
-              <a:t>для Индии</a:t>
+              <a:t>Выводы (3)</a:t>
             </a:r>
             <a:endParaRPr lang="en-US" sz="4400" dirty="0"/>
           </a:p>
@@ -6016,41 +5900,232 @@
           </a:bodyPr>
           <a:lstStyle/>
           <a:p>
-            <a:pPr marL="416050" indent="-342900" algn="just">
+            <a:pPr marL="416042" indent="-342891" algn="just">
               <a:buFont typeface="Arial" panose="020B0604020202020204" pitchFamily="34" charset="0"/>
               <a:buChar char="•"/>
             </a:pPr>
             <a:r>
               <a:rPr lang="ru-RU" dirty="0" smtClean="0"/>
-              <a:t>Развивать </a:t>
+              <a:t>Переменные </a:t>
+            </a:r>
+            <a:r>
+              <a:rPr lang="ru-RU" dirty="0" smtClean="0"/>
+              <a:t>(без учета вклада </a:t>
+            </a:r>
+            <a:r>
+              <a:rPr lang="ru-RU" dirty="0" smtClean="0"/>
+              <a:t>ВВП) объясняют </a:t>
+            </a:r>
+            <a:r>
+              <a:rPr lang="ru-RU" dirty="0" smtClean="0"/>
+              <a:t>больший </a:t>
             </a:r>
             <a:r>
               <a:rPr lang="ru-RU" dirty="0"/>
-              <a:t>специализированные механизмы финансирования МСП, включая </a:t>
-            </a:r>
-            <a:r>
-              <a:rPr lang="ru-RU" dirty="0" err="1"/>
-              <a:t>секьюритизацию</a:t>
+              <a:t>объем вариации ВВП в </a:t>
+            </a:r>
+            <a:r>
+              <a:rPr lang="ru-RU" b="1" dirty="0"/>
+              <a:t>Индии </a:t>
+            </a:r>
+            <a:r>
+              <a:rPr lang="ru-RU" b="1" dirty="0" smtClean="0"/>
+              <a:t>(</a:t>
+            </a:r>
+            <a:r>
+              <a:rPr lang="en-US" b="1" dirty="0" smtClean="0"/>
+              <a:t>~</a:t>
+            </a:r>
+            <a:r>
+              <a:rPr lang="ru-RU" b="1" dirty="0" smtClean="0"/>
+              <a:t>30</a:t>
+            </a:r>
+            <a:r>
+              <a:rPr lang="ru-RU" b="1" dirty="0"/>
+              <a:t>%)</a:t>
             </a:r>
             <a:r>
               <a:rPr lang="ru-RU" dirty="0"/>
-              <a:t> портфелей кредитов и развитие альтернативных биржевых площадок (платформ для МСП). </a:t>
-            </a:r>
-            <a:endParaRPr lang="ru-RU" dirty="0" smtClean="0"/>
+              <a:t> , чем в </a:t>
+            </a:r>
+            <a:r>
+              <a:rPr lang="ru-RU" b="1" dirty="0"/>
+              <a:t>Китае </a:t>
+            </a:r>
+            <a:r>
+              <a:rPr lang="ru-RU" b="1" dirty="0" smtClean="0"/>
+              <a:t>(</a:t>
+            </a:r>
+            <a:r>
+              <a:rPr lang="en-US" b="1" dirty="0" smtClean="0"/>
+              <a:t>~</a:t>
+            </a:r>
+            <a:r>
+              <a:rPr lang="ru-RU" b="1" dirty="0" smtClean="0"/>
+              <a:t>10</a:t>
+            </a:r>
+            <a:r>
+              <a:rPr lang="ru-RU" b="1" dirty="0" smtClean="0"/>
+              <a:t>%)</a:t>
+            </a:r>
+            <a:r>
+              <a:rPr lang="ru-RU" dirty="0" smtClean="0"/>
+              <a:t>:</a:t>
+            </a:r>
           </a:p>
           <a:p>
-            <a:pPr marL="416050" indent="-342900" algn="just">
+            <a:pPr marL="1211550" lvl="1" indent="-342891" algn="just">
               <a:buFont typeface="Arial" panose="020B0604020202020204" pitchFamily="34" charset="0"/>
               <a:buChar char="•"/>
             </a:pPr>
             <a:r>
+              <a:rPr lang="ru-RU" b="1" dirty="0" smtClean="0"/>
+              <a:t>Индия</a:t>
+            </a:r>
+            <a:r>
+              <a:rPr lang="ru-RU" b="1" dirty="0"/>
+              <a:t>:</a:t>
+            </a:r>
+            <a:r>
+              <a:rPr lang="ru-RU" dirty="0"/>
+              <a:t> основную объяснительную силу несет </a:t>
+            </a:r>
+            <a:r>
+              <a:rPr lang="ru-RU" b="1" dirty="0"/>
+              <a:t>капитализация </a:t>
+            </a:r>
+            <a:r>
+              <a:rPr lang="ru-RU" b="1" dirty="0" smtClean="0"/>
+              <a:t>(</a:t>
+            </a:r>
+            <a:r>
+              <a:rPr lang="en-US" b="1" dirty="0" smtClean="0"/>
+              <a:t>~</a:t>
+            </a:r>
+            <a:r>
+              <a:rPr lang="ru-RU" b="1" dirty="0" smtClean="0"/>
+              <a:t>15</a:t>
+            </a:r>
+            <a:r>
+              <a:rPr lang="ru-RU" b="1" dirty="0"/>
+              <a:t>%)</a:t>
+            </a:r>
+            <a:r>
+              <a:rPr lang="ru-RU" dirty="0"/>
+              <a:t> , далее следуют задолженность и экспорт (по </a:t>
+            </a:r>
+            <a:r>
+              <a:rPr lang="en-US" dirty="0" smtClean="0"/>
+              <a:t>~</a:t>
+            </a:r>
+            <a:r>
               <a:rPr lang="ru-RU" dirty="0" smtClean="0"/>
-              <a:t>Усилить </a:t>
+              <a:t>7.5</a:t>
             </a:r>
             <a:r>
               <a:rPr lang="ru-RU" dirty="0"/>
-              <a:t>пост-листинговый контроль за компаниями, вышедшими на биржу, с целью повышения прозрачности корпоративного управления и защиты прав миноритарных акционеров.</a:t>
-            </a:r>
+              <a:t>% каждый</a:t>
+            </a:r>
+            <a:r>
+              <a:rPr lang="ru-RU" dirty="0" smtClean="0"/>
+              <a:t>).</a:t>
+            </a:r>
+          </a:p>
+          <a:p>
+            <a:pPr marL="1211550" lvl="1" indent="-342891" algn="just">
+              <a:buFont typeface="Arial" panose="020B0604020202020204" pitchFamily="34" charset="0"/>
+              <a:buChar char="•"/>
+            </a:pPr>
+            <a:r>
+              <a:rPr lang="ru-RU" b="1" dirty="0" smtClean="0"/>
+              <a:t>Китай</a:t>
+            </a:r>
+            <a:r>
+              <a:rPr lang="ru-RU" b="1" dirty="0"/>
+              <a:t>:</a:t>
+            </a:r>
+            <a:r>
+              <a:rPr lang="ru-RU" dirty="0"/>
+              <a:t> ключевым фактором является </a:t>
+            </a:r>
+            <a:r>
+              <a:rPr lang="ru-RU" b="1" dirty="0"/>
+              <a:t>задолженность </a:t>
+            </a:r>
+            <a:r>
+              <a:rPr lang="ru-RU" b="1" dirty="0" smtClean="0"/>
+              <a:t>(</a:t>
+            </a:r>
+            <a:r>
+              <a:rPr lang="en-US" b="1" dirty="0" smtClean="0"/>
+              <a:t>~</a:t>
+            </a:r>
+            <a:r>
+              <a:rPr lang="ru-RU" b="1" dirty="0" smtClean="0"/>
+              <a:t>5</a:t>
+            </a:r>
+            <a:r>
+              <a:rPr lang="ru-RU" b="1" dirty="0"/>
+              <a:t>%)</a:t>
+            </a:r>
+            <a:r>
+              <a:rPr lang="ru-RU" dirty="0"/>
+              <a:t> , </a:t>
+            </a:r>
+            <a:r>
+              <a:rPr lang="ru-RU" dirty="0" smtClean="0"/>
+              <a:t/>
+            </a:r>
+            <a:br>
+              <a:rPr lang="ru-RU" dirty="0" smtClean="0"/>
+            </a:br>
+            <a:r>
+              <a:rPr lang="ru-RU" dirty="0" smtClean="0"/>
+              <a:t>за </a:t>
+            </a:r>
+            <a:r>
+              <a:rPr lang="ru-RU" dirty="0"/>
+              <a:t>ней следуют экспорт </a:t>
+            </a:r>
+            <a:r>
+              <a:rPr lang="ru-RU" dirty="0" smtClean="0"/>
+              <a:t>(</a:t>
+            </a:r>
+            <a:r>
+              <a:rPr lang="en-US" dirty="0" smtClean="0"/>
+              <a:t>~</a:t>
+            </a:r>
+            <a:r>
+              <a:rPr lang="ru-RU" dirty="0" smtClean="0"/>
+              <a:t>3</a:t>
+            </a:r>
+            <a:r>
+              <a:rPr lang="ru-RU" dirty="0"/>
+              <a:t>%) и капитализация </a:t>
+            </a:r>
+            <a:r>
+              <a:rPr lang="ru-RU" dirty="0" smtClean="0"/>
+              <a:t>(</a:t>
+            </a:r>
+            <a:r>
+              <a:rPr lang="en-US" dirty="0" smtClean="0"/>
+              <a:t>~</a:t>
+            </a:r>
+            <a:r>
+              <a:rPr lang="ru-RU" dirty="0" smtClean="0"/>
+              <a:t>2</a:t>
+            </a:r>
+            <a:r>
+              <a:rPr lang="ru-RU" dirty="0" smtClean="0"/>
+              <a:t>%).</a:t>
+            </a:r>
+            <a:r>
+              <a:rPr lang="ru-RU" dirty="0"/>
+              <a:t/>
+            </a:r>
+            <a:br>
+              <a:rPr lang="ru-RU" dirty="0"/>
+            </a:br>
             <a:endParaRPr lang="en-US" dirty="0"/>
           </a:p>
         </p:txBody>
@@ -6058,7 +6133,7 @@
     </p:spTree>
     <p:extLst>
       <p:ext uri="{BB962C8B-B14F-4D97-AF65-F5344CB8AC3E}">
-        <p14:creationId xmlns:p14="http://schemas.microsoft.com/office/powerpoint/2010/main" val="2164138985"/>
+        <p14:creationId xmlns:p14="http://schemas.microsoft.com/office/powerpoint/2010/main" val="935023520"/>
       </p:ext>
     </p:extLst>
   </p:cSld>
@@ -6108,8 +6183,8 @@
           <a:lstStyle/>
           <a:p>
             <a:r>
-              <a:rPr lang="ru-RU" dirty="0" smtClean="0"/>
-              <a:t>Исходные данные</a:t>
+              <a:rPr lang="ru-RU" dirty="0"/>
+              <a:t>Проблемы с литературой</a:t>
             </a:r>
             <a:endParaRPr lang="en-US" dirty="0"/>
           </a:p>
@@ -6133,65 +6208,31 @@
         </p:spPr>
         <p:txBody>
           <a:bodyPr>
-            <a:normAutofit lnSpcReduction="10000"/>
+            <a:noAutofit/>
           </a:bodyPr>
           <a:lstStyle/>
           <a:p>
             <a:pPr algn="just"/>
             <a:r>
               <a:rPr lang="ru-RU" dirty="0"/>
-              <a:t>Исходные данные позволяют </a:t>
-            </a:r>
-            <a:r>
-              <a:rPr lang="ru-RU" dirty="0" smtClean="0"/>
-              <a:t>сравнить </a:t>
+              <a:t>Многие существующие исследования прибегающие к методологии векторной авторегрессии сфокусированы исключительно на переменных фондового рынка игнорируя другие факторы также играющие важную роль в экономике каждой страны. Это является ошибкой спецификации модели, что нарушает условие </a:t>
+            </a:r>
+            <a:r>
+              <a:rPr lang="ru-RU" dirty="0" err="1"/>
+              <a:t>экзогенности</a:t>
             </a:r>
             <a:r>
               <a:rPr lang="ru-RU" dirty="0"/>
-              <a:t>размеры ВВП, экспорта, долга и фондового рынка каждой страны </a:t>
-            </a:r>
-            <a:r>
-              <a:rPr lang="ru-RU" dirty="0" smtClean="0"/>
-              <a:t/>
-            </a:r>
-            <a:br>
-              <a:rPr lang="ru-RU" dirty="0" smtClean="0"/>
-            </a:br>
-            <a:r>
-              <a:rPr lang="ru-RU" dirty="0" smtClean="0"/>
-              <a:t>и </a:t>
-            </a:r>
-            <a:r>
-              <a:rPr lang="ru-RU" dirty="0"/>
-              <a:t>выдвинуть ряд гипотез относительно </a:t>
-            </a:r>
-            <a:r>
-              <a:rPr lang="ru-RU" dirty="0" smtClean="0"/>
-              <a:t>вклада </a:t>
-            </a:r>
-            <a:br>
-              <a:rPr lang="ru-RU" dirty="0" smtClean="0"/>
-            </a:br>
-            <a:r>
-              <a:rPr lang="ru-RU" dirty="0" smtClean="0"/>
-              <a:t>в </a:t>
-            </a:r>
-            <a:r>
-              <a:rPr lang="ru-RU" dirty="0"/>
-              <a:t>экономический рост </a:t>
-            </a:r>
-            <a:r>
-              <a:rPr lang="ru-RU" dirty="0" smtClean="0"/>
-              <a:t>каждой из них.</a:t>
-            </a:r>
-            <a:endParaRPr lang="en-US" dirty="0"/>
+              <a:t>, приводя к смещенным и несостоятельным оценкам коэффициентов.</a:t>
+            </a:r>
+            <a:endParaRPr lang="en-US" b="1" dirty="0"/>
           </a:p>
         </p:txBody>
       </p:sp>
     </p:spTree>
     <p:extLst>
       <p:ext uri="{BB962C8B-B14F-4D97-AF65-F5344CB8AC3E}">
-        <p14:creationId xmlns:p14="http://schemas.microsoft.com/office/powerpoint/2010/main" val="3380102462"/>
+        <p14:creationId xmlns:p14="http://schemas.microsoft.com/office/powerpoint/2010/main" val="3161655172"/>
       </p:ext>
     </p:extLst>
   </p:cSld>
@@ -6242,7 +6283,7 @@
           <a:p>
             <a:r>
               <a:rPr lang="ru-RU" sz="4400" dirty="0" smtClean="0"/>
-              <a:t>Заключение по Китаю</a:t>
+              <a:t>Заключение по Индии</a:t>
             </a:r>
             <a:endParaRPr lang="en-US" sz="4400" dirty="0"/>
           </a:p>
@@ -6268,61 +6309,39 @@
             <a:pPr algn="just"/>
             <a:r>
               <a:rPr lang="ru-RU" dirty="0"/>
-              <a:t>В Китайской Народной Республике структура финансовой системы характеризуется доминированием банковского сектора </a:t>
+              <a:t>Для экономики Республики Индия </a:t>
             </a:r>
             <a:r>
               <a:rPr lang="ru-RU" dirty="0" smtClean="0"/>
+              <a:t>особую </a:t>
+            </a:r>
+            <a:r>
+              <a:rPr lang="ru-RU" dirty="0"/>
+              <a:t>роль играют фондовые рынки. Это объясняется относительно более легким доступом к биржевому финансированию по сравнению с банковским кредитованием. В пользу этого тезиса свидетельствует значительное количество публичных компаний, чьи акции находятся в </a:t>
+            </a:r>
+            <a:r>
+              <a:rPr lang="ru-RU" dirty="0" smtClean="0"/>
+              <a:t>котировальных списках, но чьи акции не торгуются. </a:t>
+            </a:r>
+            <a:r>
+              <a:rPr lang="ru-RU" dirty="0"/>
+              <a:t>Роль банковского сектора, напротив, оказывается менее выраженной ввиду сохраняющихся сложностей с выдачей кредитов малому и среднему бизнесу (МСП), включая жесткие требования к </a:t>
+            </a:r>
+            <a:r>
+              <a:rPr lang="ru-RU" dirty="0" smtClean="0"/>
+              <a:t>обеспечению.</a:t>
+            </a:r>
+            <a:endParaRPr lang="ru-RU" dirty="0"/>
+          </a:p>
+          <a:p>
+            <a:pPr algn="just"/>
+            <a:r>
+              <a:rPr lang="ru-RU" dirty="0"/>
               <a:t/>
             </a:r>
             <a:br>
-              <a:rPr lang="ru-RU" dirty="0" smtClean="0"/>
+              <a:rPr lang="ru-RU" dirty="0"/>
             </a:br>
-            <a:r>
-              <a:rPr lang="ru-RU" dirty="0" smtClean="0"/>
-              <a:t>над </a:t>
-            </a:r>
-            <a:r>
-              <a:rPr lang="ru-RU" dirty="0"/>
-              <a:t>рыночными механизмами финансирования. Это объясняется приоритетным доступом к кредитным ресурсам государственных </a:t>
-            </a:r>
-            <a:r>
-              <a:rPr lang="ru-RU" dirty="0" smtClean="0"/>
-              <a:t/>
-            </a:r>
-            <a:br>
-              <a:rPr lang="ru-RU" dirty="0" smtClean="0"/>
-            </a:br>
-            <a:r>
-              <a:rPr lang="ru-RU" dirty="0" smtClean="0"/>
-              <a:t>и </a:t>
-            </a:r>
-            <a:r>
-              <a:rPr lang="ru-RU" dirty="0" err="1"/>
-              <a:t>окологосударственных</a:t>
-            </a:r>
-            <a:r>
-              <a:rPr lang="ru-RU" dirty="0"/>
-              <a:t> компаний, которые, однако, создают относительно небольшую долю ВВП по сравнению с частным сектором. Фондовый рынок остается недоиспользованным источником экономического роста ввиду активного административного регулирования и периодических интервенций </a:t>
-            </a:r>
-            <a:r>
-              <a:rPr lang="ru-RU" dirty="0" smtClean="0"/>
-              <a:t/>
-            </a:r>
-            <a:br>
-              <a:rPr lang="ru-RU" dirty="0" smtClean="0"/>
-            </a:br>
-            <a:r>
-              <a:rPr lang="ru-RU" dirty="0" smtClean="0"/>
-              <a:t>со </a:t>
-            </a:r>
-            <a:r>
-              <a:rPr lang="ru-RU" dirty="0"/>
-              <a:t>стороны государства, направленных на поддержание стабильности</a:t>
-            </a:r>
-            <a:r>
-              <a:rPr lang="ru-RU" dirty="0" smtClean="0"/>
-              <a:t>.</a:t>
-            </a:r>
             <a:endParaRPr lang="en-US" dirty="0"/>
           </a:p>
         </p:txBody>
@@ -6330,7 +6349,7 @@
     </p:spTree>
     <p:extLst>
       <p:ext uri="{BB962C8B-B14F-4D97-AF65-F5344CB8AC3E}">
-        <p14:creationId xmlns:p14="http://schemas.microsoft.com/office/powerpoint/2010/main" val="1408297121"/>
+        <p14:creationId xmlns:p14="http://schemas.microsoft.com/office/powerpoint/2010/main" val="3806076759"/>
       </p:ext>
     </p:extLst>
   </p:cSld>
@@ -6381,11 +6400,11 @@
           <a:p>
             <a:r>
               <a:rPr lang="ru-RU" sz="4400" dirty="0"/>
-              <a:t>Рекомендации для </a:t>
+              <a:t>Рекомендации </a:t>
             </a:r>
             <a:r>
               <a:rPr lang="ru-RU" sz="4400" dirty="0" smtClean="0"/>
-              <a:t>Китая</a:t>
+              <a:t>для Индии</a:t>
             </a:r>
             <a:endParaRPr lang="en-US" sz="4400" dirty="0"/>
           </a:p>
@@ -6413,6 +6432,274 @@
               <a:buChar char="•"/>
             </a:pPr>
             <a:r>
+              <a:rPr lang="ru-RU" dirty="0" smtClean="0"/>
+              <a:t>Развивать </a:t>
+            </a:r>
+            <a:r>
+              <a:rPr lang="ru-RU" dirty="0"/>
+              <a:t>специализированные механизмы финансирования МСП, включая </a:t>
+            </a:r>
+            <a:r>
+              <a:rPr lang="ru-RU" dirty="0" err="1"/>
+              <a:t>секьюритизацию</a:t>
+            </a:r>
+            <a:r>
+              <a:rPr lang="ru-RU" dirty="0"/>
+              <a:t> портфелей кредитов и развитие альтернативных биржевых площадок (платформ для МСП). </a:t>
+            </a:r>
+            <a:endParaRPr lang="ru-RU" dirty="0" smtClean="0"/>
+          </a:p>
+          <a:p>
+            <a:pPr marL="416050" indent="-342900" algn="just">
+              <a:buFont typeface="Arial" panose="020B0604020202020204" pitchFamily="34" charset="0"/>
+              <a:buChar char="•"/>
+            </a:pPr>
+            <a:r>
+              <a:rPr lang="ru-RU" dirty="0" smtClean="0"/>
+              <a:t>Усилить </a:t>
+            </a:r>
+            <a:r>
+              <a:rPr lang="ru-RU" dirty="0"/>
+              <a:t>пост-листинговый контроль за компаниями, вышедшими на биржу, с целью повышения прозрачности корпоративного управления и защиты прав миноритарных акционеров.</a:t>
+            </a:r>
+            <a:endParaRPr lang="en-US" dirty="0"/>
+          </a:p>
+        </p:txBody>
+      </p:sp>
+    </p:spTree>
+    <p:extLst>
+      <p:ext uri="{BB962C8B-B14F-4D97-AF65-F5344CB8AC3E}">
+        <p14:creationId xmlns:p14="http://schemas.microsoft.com/office/powerpoint/2010/main" val="2164138985"/>
+      </p:ext>
+    </p:extLst>
+  </p:cSld>
+  <p:clrMapOvr>
+    <a:masterClrMapping/>
+  </p:clrMapOvr>
+  <p:timing>
+    <p:tnLst>
+      <p:par>
+        <p:cTn id="1" dur="indefinite" restart="never" nodeType="tmRoot"/>
+      </p:par>
+    </p:tnLst>
+  </p:timing>
+</p:sld>
+</file>
+
+<file path=ppt/slides/slide32.xml><?xml version="1.0" encoding="utf-8"?>
+<p:sld xmlns:a="http://schemas.openxmlformats.org/drawingml/2006/main" xmlns:r="http://schemas.openxmlformats.org/officeDocument/2006/relationships" xmlns:p="http://schemas.openxmlformats.org/presentationml/2006/main">
+  <p:cSld>
+    <p:spTree>
+      <p:nvGrpSpPr>
+        <p:cNvPr id="1" name=""/>
+        <p:cNvGrpSpPr/>
+        <p:nvPr/>
+      </p:nvGrpSpPr>
+      <p:grpSpPr>
+        <a:xfrm>
+          <a:off x="0" y="0"/>
+          <a:ext cx="0" cy="0"/>
+          <a:chOff x="0" y="0"/>
+          <a:chExt cx="0" cy="0"/>
+        </a:xfrm>
+      </p:grpSpPr>
+      <p:sp>
+        <p:nvSpPr>
+          <p:cNvPr id="2" name="Title 1"/>
+          <p:cNvSpPr>
+            <a:spLocks noGrp="1"/>
+          </p:cNvSpPr>
+          <p:nvPr>
+            <p:ph type="title"/>
+          </p:nvPr>
+        </p:nvSpPr>
+        <p:spPr/>
+        <p:txBody>
+          <a:bodyPr/>
+          <a:lstStyle/>
+          <a:p>
+            <a:r>
+              <a:rPr lang="ru-RU" sz="4400" dirty="0" smtClean="0"/>
+              <a:t>Заключение по Китаю</a:t>
+            </a:r>
+            <a:endParaRPr lang="en-US" sz="4400" dirty="0"/>
+          </a:p>
+        </p:txBody>
+      </p:sp>
+      <p:sp>
+        <p:nvSpPr>
+          <p:cNvPr id="3" name="Text Placeholder 2"/>
+          <p:cNvSpPr>
+            <a:spLocks noGrp="1"/>
+          </p:cNvSpPr>
+          <p:nvPr>
+            <p:ph type="body" idx="1"/>
+          </p:nvPr>
+        </p:nvSpPr>
+        <p:spPr/>
+        <p:txBody>
+          <a:bodyPr>
+            <a:noAutofit/>
+          </a:bodyPr>
+          <a:lstStyle/>
+          <a:p>
+            <a:pPr algn="just"/>
+            <a:r>
+              <a:rPr lang="ru-RU" dirty="0"/>
+              <a:t>В Китайской Народной Республике структура финансовой системы характеризуется доминированием банковского сектора </a:t>
+            </a:r>
+            <a:r>
+              <a:rPr lang="ru-RU" dirty="0" smtClean="0"/>
+              <a:t/>
+            </a:r>
+            <a:br>
+              <a:rPr lang="ru-RU" dirty="0" smtClean="0"/>
+            </a:br>
+            <a:r>
+              <a:rPr lang="ru-RU" dirty="0" smtClean="0"/>
+              <a:t>над </a:t>
+            </a:r>
+            <a:r>
+              <a:rPr lang="ru-RU" dirty="0"/>
+              <a:t>рыночными механизмами финансирования. Это объясняется приоритетным доступом к кредитным ресурсам государственных </a:t>
+            </a:r>
+            <a:r>
+              <a:rPr lang="ru-RU" dirty="0" smtClean="0"/>
+              <a:t/>
+            </a:r>
+            <a:br>
+              <a:rPr lang="ru-RU" dirty="0" smtClean="0"/>
+            </a:br>
+            <a:r>
+              <a:rPr lang="ru-RU" dirty="0" smtClean="0"/>
+              <a:t>и </a:t>
+            </a:r>
+            <a:r>
+              <a:rPr lang="ru-RU" dirty="0" smtClean="0"/>
+              <a:t>около</a:t>
+            </a:r>
+            <a:r>
+              <a:rPr lang="en-US" dirty="0" smtClean="0"/>
+              <a:t> </a:t>
+            </a:r>
+            <a:r>
+              <a:rPr lang="ru-RU" dirty="0" smtClean="0"/>
+              <a:t>государственных </a:t>
+            </a:r>
+            <a:r>
+              <a:rPr lang="ru-RU" dirty="0"/>
+              <a:t>компаний, которые, однако, создают относительно небольшую долю ВВП по сравнению с частным сектором. Фондовый рынок остается недоиспользованным источником экономического роста ввиду активного административного регулирования и </a:t>
+            </a:r>
+            <a:r>
+              <a:rPr lang="ru-RU" dirty="0" smtClean="0"/>
+              <a:t>интервенций</a:t>
+            </a:r>
+            <a:r>
+              <a:rPr lang="en-US" dirty="0" smtClean="0"/>
+              <a:t> </a:t>
+            </a:r>
+            <a:r>
+              <a:rPr lang="ru-RU" dirty="0" smtClean="0"/>
+              <a:t>со </a:t>
+            </a:r>
+            <a:r>
+              <a:rPr lang="ru-RU" dirty="0"/>
+              <a:t>стороны государства, направленных на поддержание стабильности</a:t>
+            </a:r>
+            <a:r>
+              <a:rPr lang="ru-RU" dirty="0" smtClean="0"/>
+              <a:t>.</a:t>
+            </a:r>
+            <a:endParaRPr lang="en-US" dirty="0"/>
+          </a:p>
+        </p:txBody>
+      </p:sp>
+    </p:spTree>
+    <p:extLst>
+      <p:ext uri="{BB962C8B-B14F-4D97-AF65-F5344CB8AC3E}">
+        <p14:creationId xmlns:p14="http://schemas.microsoft.com/office/powerpoint/2010/main" val="1359136810"/>
+      </p:ext>
+    </p:extLst>
+  </p:cSld>
+  <p:clrMapOvr>
+    <a:masterClrMapping/>
+  </p:clrMapOvr>
+  <p:timing>
+    <p:tnLst>
+      <p:par>
+        <p:cTn id="1" dur="indefinite" restart="never" nodeType="tmRoot"/>
+      </p:par>
+    </p:tnLst>
+  </p:timing>
+</p:sld>
+</file>
+
+<file path=ppt/slides/slide33.xml><?xml version="1.0" encoding="utf-8"?>
+<p:sld xmlns:a="http://schemas.openxmlformats.org/drawingml/2006/main" xmlns:r="http://schemas.openxmlformats.org/officeDocument/2006/relationships" xmlns:p="http://schemas.openxmlformats.org/presentationml/2006/main">
+  <p:cSld>
+    <p:spTree>
+      <p:nvGrpSpPr>
+        <p:cNvPr id="1" name=""/>
+        <p:cNvGrpSpPr/>
+        <p:nvPr/>
+      </p:nvGrpSpPr>
+      <p:grpSpPr>
+        <a:xfrm>
+          <a:off x="0" y="0"/>
+          <a:ext cx="0" cy="0"/>
+          <a:chOff x="0" y="0"/>
+          <a:chExt cx="0" cy="0"/>
+        </a:xfrm>
+      </p:grpSpPr>
+      <p:sp>
+        <p:nvSpPr>
+          <p:cNvPr id="2" name="Title 1"/>
+          <p:cNvSpPr>
+            <a:spLocks noGrp="1"/>
+          </p:cNvSpPr>
+          <p:nvPr>
+            <p:ph type="title"/>
+          </p:nvPr>
+        </p:nvSpPr>
+        <p:spPr/>
+        <p:txBody>
+          <a:bodyPr/>
+          <a:lstStyle/>
+          <a:p>
+            <a:r>
+              <a:rPr lang="ru-RU" sz="4400" dirty="0"/>
+              <a:t>Рекомендации для </a:t>
+            </a:r>
+            <a:r>
+              <a:rPr lang="ru-RU" sz="4400" dirty="0" smtClean="0"/>
+              <a:t>Китая</a:t>
+            </a:r>
+            <a:endParaRPr lang="en-US" sz="4400" dirty="0"/>
+          </a:p>
+        </p:txBody>
+      </p:sp>
+      <p:sp>
+        <p:nvSpPr>
+          <p:cNvPr id="3" name="Text Placeholder 2"/>
+          <p:cNvSpPr>
+            <a:spLocks noGrp="1"/>
+          </p:cNvSpPr>
+          <p:nvPr>
+            <p:ph type="body" idx="1"/>
+          </p:nvPr>
+        </p:nvSpPr>
+        <p:spPr/>
+        <p:txBody>
+          <a:bodyPr>
+            <a:noAutofit/>
+          </a:bodyPr>
+          <a:lstStyle/>
+          <a:p>
+            <a:pPr marL="416050" indent="-342900" algn="just">
+              <a:buFont typeface="Arial" panose="020B0604020202020204" pitchFamily="34" charset="0"/>
+              <a:buChar char="•"/>
+            </a:pPr>
+            <a:r>
               <a:rPr lang="ru-RU" dirty="0"/>
               <a:t>Расширить практику кредитования негосударственного сектора, включая малые и средние предприятия, с целью повышения эффективности распределения капитала. </a:t>
             </a:r>
@@ -6493,7 +6780,7 @@
 </p:sld>
 </file>
 
-<file path=ppt/slides/slide32.xml><?xml version="1.0" encoding="utf-8"?>
+<file path=ppt/slides/slide34.xml><?xml version="1.0" encoding="utf-8"?>
 <p:sld xmlns:a="http://schemas.openxmlformats.org/drawingml/2006/main" xmlns:r="http://schemas.openxmlformats.org/officeDocument/2006/relationships" xmlns:p="http://schemas.openxmlformats.org/presentationml/2006/main">
   <p:cSld>
     <p:spTree>
@@ -6756,7 +7043,7 @@
 </p:sld>
 </file>
 
-<file path=ppt/slides/slide33.xml><?xml version="1.0" encoding="utf-8"?>
+<file path=ppt/slides/slide35.xml><?xml version="1.0" encoding="utf-8"?>
 <p:sld xmlns:a="http://schemas.openxmlformats.org/drawingml/2006/main" xmlns:r="http://schemas.openxmlformats.org/officeDocument/2006/relationships" xmlns:p="http://schemas.openxmlformats.org/presentationml/2006/main">
   <p:cSld>
     <p:spTree>
@@ -12677,7 +12964,7 @@
 </p:sld>
 </file>
 
-<file path=ppt/slides/slide34.xml><?xml version="1.0" encoding="utf-8"?>
+<file path=ppt/slides/slide36.xml><?xml version="1.0" encoding="utf-8"?>
 <p:sld xmlns:a="http://schemas.openxmlformats.org/drawingml/2006/main" xmlns:r="http://schemas.openxmlformats.org/officeDocument/2006/relationships" xmlns:p="http://schemas.openxmlformats.org/presentationml/2006/main">
   <p:cSld>
     <p:spTree>
@@ -14893,7 +15180,7 @@
 </p:sld>
 </file>
 
-<file path=ppt/slides/slide35.xml><?xml version="1.0" encoding="utf-8"?>
+<file path=ppt/slides/slide37.xml><?xml version="1.0" encoding="utf-8"?>
 <p:sld xmlns:a="http://schemas.openxmlformats.org/drawingml/2006/main" xmlns:r="http://schemas.openxmlformats.org/officeDocument/2006/relationships" xmlns:p="http://schemas.openxmlformats.org/presentationml/2006/main">
   <p:cSld>
     <p:spTree>
@@ -19558,6 +19845,266 @@
           <a:lstStyle/>
           <a:p>
             <a:r>
+              <a:rPr lang="ru-RU" dirty="0"/>
+              <a:t>Учет недостатков </a:t>
+            </a:r>
+            <a:br>
+              <a:rPr lang="ru-RU" dirty="0"/>
+            </a:br>
+            <a:r>
+              <a:rPr lang="ru-RU" dirty="0"/>
+              <a:t>и новизна</a:t>
+            </a:r>
+            <a:endParaRPr lang="en-US" dirty="0"/>
+          </a:p>
+        </p:txBody>
+      </p:sp>
+      <p:sp>
+        <p:nvSpPr>
+          <p:cNvPr id="3" name="Text Placeholder 2"/>
+          <p:cNvSpPr>
+            <a:spLocks noGrp="1"/>
+          </p:cNvSpPr>
+          <p:nvPr>
+            <p:ph type="body" idx="1"/>
+          </p:nvPr>
+        </p:nvSpPr>
+        <p:spPr>
+          <a:xfrm>
+            <a:off x="2108200" y="2089828"/>
+            <a:ext cx="6324600" cy="1258093"/>
+          </a:xfrm>
+        </p:spPr>
+        <p:txBody>
+          <a:bodyPr>
+            <a:noAutofit/>
+          </a:bodyPr>
+          <a:lstStyle/>
+          <a:p>
+            <a:pPr algn="just"/>
+            <a:r>
+              <a:rPr lang="ru-RU" dirty="0"/>
+              <a:t>В данном исследовании автор, помимо переменной фондового рынка, включил в </a:t>
+            </a:r>
+            <a:r>
+              <a:rPr lang="ru-RU" dirty="0" smtClean="0"/>
+              <a:t>модель </a:t>
+            </a:r>
+            <a:r>
+              <a:rPr lang="ru-RU" dirty="0"/>
+              <a:t>показатели долга и экспорта.</a:t>
+            </a:r>
+          </a:p>
+          <a:p>
+            <a:pPr algn="just"/>
+            <a:r>
+              <a:rPr lang="ru-RU" dirty="0"/>
+              <a:t>Кроме того, чтобы избежать ненужных предположений </a:t>
+            </a:r>
+            <a:br>
+              <a:rPr lang="ru-RU" dirty="0"/>
+            </a:br>
+            <a:r>
+              <a:rPr lang="ru-RU" dirty="0"/>
+              <a:t>об однородности, автор рассчитывал модели индивидуально для каждой страны.</a:t>
+            </a:r>
+          </a:p>
+          <a:p>
+            <a:pPr algn="just"/>
+            <a:r>
+              <a:rPr lang="ru-RU" dirty="0"/>
+              <a:t>Наконец, автор использовал более свежие и полные данные, чем многие предыдущие авторы.</a:t>
+            </a:r>
+            <a:endParaRPr lang="en-US" dirty="0"/>
+          </a:p>
+        </p:txBody>
+      </p:sp>
+    </p:spTree>
+    <p:extLst>
+      <p:ext uri="{BB962C8B-B14F-4D97-AF65-F5344CB8AC3E}">
+        <p14:creationId xmlns:p14="http://schemas.microsoft.com/office/powerpoint/2010/main" val="3991246279"/>
+      </p:ext>
+    </p:extLst>
+  </p:cSld>
+  <p:clrMapOvr>
+    <a:masterClrMapping/>
+  </p:clrMapOvr>
+  <p:timing>
+    <p:tnLst>
+      <p:par>
+        <p:cTn id="1" dur="indefinite" restart="never" nodeType="tmRoot"/>
+      </p:par>
+    </p:tnLst>
+  </p:timing>
+</p:sld>
+</file>
+
+<file path=ppt/slides/slide5.xml><?xml version="1.0" encoding="utf-8"?>
+<p:sld xmlns:a="http://schemas.openxmlformats.org/drawingml/2006/main" xmlns:r="http://schemas.openxmlformats.org/officeDocument/2006/relationships" xmlns:p="http://schemas.openxmlformats.org/presentationml/2006/main">
+  <p:cSld>
+    <p:spTree>
+      <p:nvGrpSpPr>
+        <p:cNvPr id="1" name=""/>
+        <p:cNvGrpSpPr/>
+        <p:nvPr/>
+      </p:nvGrpSpPr>
+      <p:grpSpPr>
+        <a:xfrm>
+          <a:off x="0" y="0"/>
+          <a:ext cx="0" cy="0"/>
+          <a:chOff x="0" y="0"/>
+          <a:chExt cx="0" cy="0"/>
+        </a:xfrm>
+      </p:grpSpPr>
+      <p:sp>
+        <p:nvSpPr>
+          <p:cNvPr id="2" name="Title 1"/>
+          <p:cNvSpPr>
+            <a:spLocks noGrp="1"/>
+          </p:cNvSpPr>
+          <p:nvPr>
+            <p:ph type="title"/>
+          </p:nvPr>
+        </p:nvSpPr>
+        <p:spPr/>
+        <p:txBody>
+          <a:bodyPr/>
+          <a:lstStyle/>
+          <a:p>
+            <a:r>
+              <a:rPr lang="ru-RU" dirty="0" smtClean="0"/>
+              <a:t>Исходные данные</a:t>
+            </a:r>
+            <a:endParaRPr lang="en-US" dirty="0"/>
+          </a:p>
+        </p:txBody>
+      </p:sp>
+      <p:sp>
+        <p:nvSpPr>
+          <p:cNvPr id="3" name="Text Placeholder 2"/>
+          <p:cNvSpPr>
+            <a:spLocks noGrp="1"/>
+          </p:cNvSpPr>
+          <p:nvPr>
+            <p:ph type="body" idx="1"/>
+          </p:nvPr>
+        </p:nvSpPr>
+        <p:spPr>
+          <a:xfrm>
+            <a:off x="2108200" y="2089828"/>
+            <a:ext cx="6324600" cy="1258093"/>
+          </a:xfrm>
+        </p:spPr>
+        <p:txBody>
+          <a:bodyPr>
+            <a:normAutofit lnSpcReduction="10000"/>
+          </a:bodyPr>
+          <a:lstStyle/>
+          <a:p>
+            <a:pPr algn="just"/>
+            <a:r>
+              <a:rPr lang="ru-RU" dirty="0"/>
+              <a:t>Исходные данные позволяют </a:t>
+            </a:r>
+            <a:r>
+              <a:rPr lang="ru-RU" dirty="0" smtClean="0"/>
+              <a:t>сравнить </a:t>
+            </a:r>
+            <a:r>
+              <a:rPr lang="ru-RU" dirty="0"/>
+              <a:t>размеры ВВП, экспорта, долга и фондового рынка каждой страны </a:t>
+            </a:r>
+            <a:r>
+              <a:rPr lang="ru-RU" dirty="0" smtClean="0"/>
+              <a:t/>
+            </a:r>
+            <a:br>
+              <a:rPr lang="ru-RU" dirty="0" smtClean="0"/>
+            </a:br>
+            <a:r>
+              <a:rPr lang="ru-RU" dirty="0" smtClean="0"/>
+              <a:t>и </a:t>
+            </a:r>
+            <a:r>
+              <a:rPr lang="ru-RU" dirty="0"/>
+              <a:t>выдвинуть ряд гипотез относительно </a:t>
+            </a:r>
+            <a:r>
+              <a:rPr lang="ru-RU" dirty="0" smtClean="0"/>
+              <a:t>вклада </a:t>
+            </a:r>
+            <a:br>
+              <a:rPr lang="ru-RU" dirty="0" smtClean="0"/>
+            </a:br>
+            <a:r>
+              <a:rPr lang="ru-RU" dirty="0" smtClean="0"/>
+              <a:t>в </a:t>
+            </a:r>
+            <a:r>
+              <a:rPr lang="ru-RU" dirty="0"/>
+              <a:t>экономический рост </a:t>
+            </a:r>
+            <a:r>
+              <a:rPr lang="ru-RU" dirty="0" smtClean="0"/>
+              <a:t>каждой из них.</a:t>
+            </a:r>
+            <a:endParaRPr lang="en-US" dirty="0"/>
+          </a:p>
+        </p:txBody>
+      </p:sp>
+    </p:spTree>
+    <p:extLst>
+      <p:ext uri="{BB962C8B-B14F-4D97-AF65-F5344CB8AC3E}">
+        <p14:creationId xmlns:p14="http://schemas.microsoft.com/office/powerpoint/2010/main" val="3380102462"/>
+      </p:ext>
+    </p:extLst>
+  </p:cSld>
+  <p:clrMapOvr>
+    <a:masterClrMapping/>
+  </p:clrMapOvr>
+  <p:timing>
+    <p:tnLst>
+      <p:par>
+        <p:cTn id="1" dur="indefinite" restart="never" nodeType="tmRoot"/>
+      </p:par>
+    </p:tnLst>
+  </p:timing>
+</p:sld>
+</file>
+
+<file path=ppt/slides/slide6.xml><?xml version="1.0" encoding="utf-8"?>
+<p:sld xmlns:a="http://schemas.openxmlformats.org/drawingml/2006/main" xmlns:r="http://schemas.openxmlformats.org/officeDocument/2006/relationships" xmlns:p="http://schemas.openxmlformats.org/presentationml/2006/main">
+  <p:cSld>
+    <p:spTree>
+      <p:nvGrpSpPr>
+        <p:cNvPr id="1" name=""/>
+        <p:cNvGrpSpPr/>
+        <p:nvPr/>
+      </p:nvGrpSpPr>
+      <p:grpSpPr>
+        <a:xfrm>
+          <a:off x="0" y="0"/>
+          <a:ext cx="0" cy="0"/>
+          <a:chOff x="0" y="0"/>
+          <a:chExt cx="0" cy="0"/>
+        </a:xfrm>
+      </p:grpSpPr>
+      <p:sp>
+        <p:nvSpPr>
+          <p:cNvPr id="2" name="Title 1"/>
+          <p:cNvSpPr>
+            <a:spLocks noGrp="1"/>
+          </p:cNvSpPr>
+          <p:nvPr>
+            <p:ph type="title"/>
+          </p:nvPr>
+        </p:nvSpPr>
+        <p:spPr/>
+        <p:txBody>
+          <a:bodyPr/>
+          <a:lstStyle/>
+          <a:p>
+            <a:r>
               <a:rPr lang="ru-RU" dirty="0" smtClean="0"/>
               <a:t>Динамика показателей</a:t>
             </a:r>
@@ -19626,7 +20173,7 @@
 </p:sld>
 </file>
 
-<file path=ppt/slides/slide5.xml><?xml version="1.0" encoding="utf-8"?>
+<file path=ppt/slides/slide7.xml><?xml version="1.0" encoding="utf-8"?>
 <p:sld xmlns:a="http://schemas.openxmlformats.org/drawingml/2006/main" xmlns:r="http://schemas.openxmlformats.org/officeDocument/2006/relationships" xmlns:p="http://schemas.openxmlformats.org/presentationml/2006/main">
   <p:cSld>
     <p:spTree>
@@ -19731,7 +20278,7 @@
 </p:sld>
 </file>
 
-<file path=ppt/slides/slide6.xml><?xml version="1.0" encoding="utf-8"?>
+<file path=ppt/slides/slide8.xml><?xml version="1.0" encoding="utf-8"?>
 <p:sld xmlns:a="http://schemas.openxmlformats.org/drawingml/2006/main" xmlns:r="http://schemas.openxmlformats.org/officeDocument/2006/relationships" xmlns:p="http://schemas.openxmlformats.org/presentationml/2006/main">
   <p:cSld>
     <p:spTree>
@@ -19836,232 +20383,6 @@
 </p:sld>
 </file>
 
-<file path=ppt/slides/slide7.xml><?xml version="1.0" encoding="utf-8"?>
-<p:sld xmlns:a="http://schemas.openxmlformats.org/drawingml/2006/main" xmlns:r="http://schemas.openxmlformats.org/officeDocument/2006/relationships" xmlns:p="http://schemas.openxmlformats.org/presentationml/2006/main">
-  <p:cSld>
-    <p:spTree>
-      <p:nvGrpSpPr>
-        <p:cNvPr id="1" name=""/>
-        <p:cNvGrpSpPr/>
-        <p:nvPr/>
-      </p:nvGrpSpPr>
-      <p:grpSpPr>
-        <a:xfrm>
-          <a:off x="0" y="0"/>
-          <a:ext cx="0" cy="0"/>
-          <a:chOff x="0" y="0"/>
-          <a:chExt cx="0" cy="0"/>
-        </a:xfrm>
-      </p:grpSpPr>
-      <p:sp>
-        <p:nvSpPr>
-          <p:cNvPr id="2" name="Title 1"/>
-          <p:cNvSpPr>
-            <a:spLocks noGrp="1"/>
-          </p:cNvSpPr>
-          <p:nvPr>
-            <p:ph type="title"/>
-          </p:nvPr>
-        </p:nvSpPr>
-        <p:spPr/>
-        <p:txBody>
-          <a:bodyPr/>
-          <a:lstStyle/>
-          <a:p>
-            <a:r>
-              <a:rPr lang="ru-RU" dirty="0" smtClean="0"/>
-              <a:t>Абсолютные приросты</a:t>
-            </a:r>
-            <a:endParaRPr lang="en-US" dirty="0"/>
-          </a:p>
-        </p:txBody>
-      </p:sp>
-      <p:sp>
-        <p:nvSpPr>
-          <p:cNvPr id="3" name="Text Placeholder 2"/>
-          <p:cNvSpPr>
-            <a:spLocks noGrp="1"/>
-          </p:cNvSpPr>
-          <p:nvPr>
-            <p:ph type="body" idx="1"/>
-          </p:nvPr>
-        </p:nvSpPr>
-        <p:spPr/>
-        <p:txBody>
-          <a:bodyPr>
-            <a:noAutofit/>
-          </a:bodyPr>
-          <a:lstStyle/>
-          <a:p>
-            <a:pPr algn="just"/>
-            <a:r>
-              <a:rPr lang="ru-RU" dirty="0"/>
-              <a:t>Абсолютные темпы роста, также известные как первые разности, позволяют </a:t>
-            </a:r>
-            <a:r>
-              <a:rPr lang="ru-RU" dirty="0" smtClean="0"/>
-              <a:t>сделать </a:t>
-            </a:r>
-            <a:r>
-              <a:rPr lang="ru-RU" dirty="0"/>
-              <a:t>данные </a:t>
-            </a:r>
-            <a:r>
-              <a:rPr lang="ru-RU" dirty="0" smtClean="0"/>
-              <a:t>стационарными, что </a:t>
-            </a:r>
-            <a:r>
-              <a:rPr lang="ru-RU" dirty="0"/>
-              <a:t>является одним </a:t>
-            </a:r>
-            <a:r>
-              <a:rPr lang="ru-RU" dirty="0" smtClean="0"/>
-              <a:t/>
-            </a:r>
-            <a:br>
-              <a:rPr lang="ru-RU" dirty="0" smtClean="0"/>
-            </a:br>
-            <a:r>
-              <a:rPr lang="ru-RU" dirty="0" smtClean="0"/>
-              <a:t>из </a:t>
-            </a:r>
-            <a:r>
-              <a:rPr lang="ru-RU" dirty="0"/>
-              <a:t>ключевых предположений большинства эконометрических методов, включая векторную авторегрессию. Первые разности также позволяют </a:t>
-            </a:r>
-            <a:r>
-              <a:rPr lang="ru-RU" dirty="0" smtClean="0"/>
-              <a:t>исследовать </a:t>
-            </a:r>
-            <a:r>
-              <a:rPr lang="ru-RU" dirty="0"/>
-              <a:t>причинно-следственную связь роста, исключая общие тренды.</a:t>
-            </a:r>
-            <a:endParaRPr lang="en-US" dirty="0"/>
-          </a:p>
-        </p:txBody>
-      </p:sp>
-    </p:spTree>
-    <p:extLst>
-      <p:ext uri="{BB962C8B-B14F-4D97-AF65-F5344CB8AC3E}">
-        <p14:creationId xmlns:p14="http://schemas.microsoft.com/office/powerpoint/2010/main" val="3624016492"/>
-      </p:ext>
-    </p:extLst>
-  </p:cSld>
-  <p:clrMapOvr>
-    <a:masterClrMapping/>
-  </p:clrMapOvr>
-  <p:timing>
-    <p:tnLst>
-      <p:par>
-        <p:cTn id="1" dur="indefinite" restart="never" nodeType="tmRoot"/>
-      </p:par>
-    </p:tnLst>
-  </p:timing>
-</p:sld>
-</file>
-
-<file path=ppt/slides/slide8.xml><?xml version="1.0" encoding="utf-8"?>
-<p:sld xmlns:a="http://schemas.openxmlformats.org/drawingml/2006/main" xmlns:r="http://schemas.openxmlformats.org/officeDocument/2006/relationships" xmlns:p="http://schemas.openxmlformats.org/presentationml/2006/main">
-  <p:cSld>
-    <p:spTree>
-      <p:nvGrpSpPr>
-        <p:cNvPr id="1" name=""/>
-        <p:cNvGrpSpPr/>
-        <p:nvPr/>
-      </p:nvGrpSpPr>
-      <p:grpSpPr>
-        <a:xfrm>
-          <a:off x="0" y="0"/>
-          <a:ext cx="0" cy="0"/>
-          <a:chOff x="0" y="0"/>
-          <a:chExt cx="0" cy="0"/>
-        </a:xfrm>
-      </p:grpSpPr>
-      <p:sp>
-        <p:nvSpPr>
-          <p:cNvPr id="2" name="Title 1"/>
-          <p:cNvSpPr>
-            <a:spLocks noGrp="1"/>
-          </p:cNvSpPr>
-          <p:nvPr>
-            <p:ph type="title"/>
-          </p:nvPr>
-        </p:nvSpPr>
-        <p:spPr/>
-        <p:txBody>
-          <a:bodyPr/>
-          <a:lstStyle/>
-          <a:p>
-            <a:r>
-              <a:rPr lang="ru-RU" dirty="0"/>
-              <a:t>Динамика показателей</a:t>
-            </a:r>
-            <a:endParaRPr lang="en-US" dirty="0"/>
-          </a:p>
-        </p:txBody>
-      </p:sp>
-      <p:pic>
-        <p:nvPicPr>
-          <p:cNvPr id="4098" name="Picture 2" descr="C:\Users\bklyu\Documents\Python Scripts\_GitHub_repos\conferences\lomonosov readings 2026\explore_data\relationship_diff_both.png"/>
-          <p:cNvPicPr>
-            <a:picLocks noChangeAspect="1" noChangeArrowheads="1"/>
-          </p:cNvPicPr>
-          <p:nvPr/>
-        </p:nvPicPr>
-        <p:blipFill>
-          <a:blip r:embed="rId2">
-            <a:extLst>
-              <a:ext uri="{28A0092B-C50C-407E-A947-70E740481C1C}">
-                <a14:useLocalDpi xmlns:a14="http://schemas.microsoft.com/office/drawing/2010/main" val="0"/>
-              </a:ext>
-            </a:extLst>
-          </a:blip>
-          <a:srcRect/>
-          <a:stretch>
-            <a:fillRect/>
-          </a:stretch>
-        </p:blipFill>
-        <p:spPr bwMode="auto">
-          <a:xfrm>
-            <a:off x="690880" y="1517998"/>
-            <a:ext cx="8778240" cy="2679015"/>
-          </a:xfrm>
-          <a:prstGeom prst="rect">
-            <a:avLst/>
-          </a:prstGeom>
-          <a:noFill/>
-          <a:extLst>
-            <a:ext uri="{909E8E84-426E-40DD-AFC4-6F175D3DCCD1}">
-              <a14:hiddenFill xmlns:a14="http://schemas.microsoft.com/office/drawing/2010/main">
-                <a:solidFill>
-                  <a:srgbClr val="FFFFFF"/>
-                </a:solidFill>
-              </a14:hiddenFill>
-            </a:ext>
-          </a:extLst>
-        </p:spPr>
-      </p:pic>
-    </p:spTree>
-    <p:extLst>
-      <p:ext uri="{BB962C8B-B14F-4D97-AF65-F5344CB8AC3E}">
-        <p14:creationId xmlns:p14="http://schemas.microsoft.com/office/powerpoint/2010/main" val="1280440382"/>
-      </p:ext>
-    </p:extLst>
-  </p:cSld>
-  <p:clrMapOvr>
-    <a:masterClrMapping/>
-  </p:clrMapOvr>
-  <p:timing>
-    <p:tnLst>
-      <p:par>
-        <p:cTn id="1" dur="indefinite" restart="never" nodeType="tmRoot"/>
-      </p:par>
-    </p:tnLst>
-  </p:timing>
-</p:sld>
-</file>
-
 <file path=ppt/slides/slide9.xml><?xml version="1.0" encoding="utf-8"?>
 <p:sld xmlns:a="http://schemas.openxmlformats.org/drawingml/2006/main" xmlns:r="http://schemas.openxmlformats.org/officeDocument/2006/relationships" xmlns:p="http://schemas.openxmlformats.org/presentationml/2006/main">
   <p:cSld>
@@ -20095,58 +20416,82 @@
           <a:lstStyle/>
           <a:p>
             <a:r>
-              <a:rPr lang="ru-RU" dirty="0"/>
-              <a:t>Динамика показателей (Китай)</a:t>
+              <a:rPr lang="ru-RU" dirty="0" smtClean="0"/>
+              <a:t>Абсолютные приросты</a:t>
             </a:r>
             <a:endParaRPr lang="en-US" dirty="0"/>
           </a:p>
         </p:txBody>
       </p:sp>
-      <p:pic>
-        <p:nvPicPr>
-          <p:cNvPr id="5122" name="Picture 2" descr="C:\Users\bklyu\Documents\Python Scripts\_GitHub_repos\conferences\lomonosov readings 2026\explore_data\relationship_diff_china.png"/>
-          <p:cNvPicPr>
-            <a:picLocks noChangeAspect="1" noChangeArrowheads="1"/>
-          </p:cNvPicPr>
-          <p:nvPr/>
-        </p:nvPicPr>
-        <p:blipFill>
-          <a:blip r:embed="rId2">
-            <a:extLst>
-              <a:ext uri="{28A0092B-C50C-407E-A947-70E740481C1C}">
-                <a14:useLocalDpi xmlns:a14="http://schemas.microsoft.com/office/drawing/2010/main" val="0"/>
-              </a:ext>
-            </a:extLst>
-          </a:blip>
-          <a:srcRect/>
-          <a:stretch>
-            <a:fillRect/>
-          </a:stretch>
-        </p:blipFill>
-        <p:spPr bwMode="auto">
-          <a:xfrm>
-            <a:off x="690880" y="1377751"/>
-            <a:ext cx="8778240" cy="2959511"/>
-          </a:xfrm>
-          <a:prstGeom prst="rect">
-            <a:avLst/>
-          </a:prstGeom>
-          <a:noFill/>
-          <a:extLst>
-            <a:ext uri="{909E8E84-426E-40DD-AFC4-6F175D3DCCD1}">
-              <a14:hiddenFill xmlns:a14="http://schemas.microsoft.com/office/drawing/2010/main">
-                <a:solidFill>
-                  <a:srgbClr val="FFFFFF"/>
-                </a:solidFill>
-              </a14:hiddenFill>
-            </a:ext>
-          </a:extLst>
-        </p:spPr>
-      </p:pic>
+      <p:sp>
+        <p:nvSpPr>
+          <p:cNvPr id="3" name="Text Placeholder 2"/>
+          <p:cNvSpPr>
+            <a:spLocks noGrp="1"/>
+          </p:cNvSpPr>
+          <p:nvPr>
+            <p:ph type="body" idx="1"/>
+          </p:nvPr>
+        </p:nvSpPr>
+        <p:spPr/>
+        <p:txBody>
+          <a:bodyPr>
+            <a:noAutofit/>
+          </a:bodyPr>
+          <a:lstStyle/>
+          <a:p>
+            <a:pPr algn="just"/>
+            <a:r>
+              <a:rPr lang="ru-RU" dirty="0"/>
+              <a:t>Абсолютные темпы роста, также известные как первые разности, позволяют </a:t>
+            </a:r>
+            <a:r>
+              <a:rPr lang="ru-RU" dirty="0" smtClean="0"/>
+              <a:t>сделать </a:t>
+            </a:r>
+            <a:r>
+              <a:rPr lang="ru-RU" dirty="0"/>
+              <a:t>данные </a:t>
+            </a:r>
+            <a:r>
+              <a:rPr lang="ru-RU" dirty="0" smtClean="0"/>
+              <a:t>стационарными, что </a:t>
+            </a:r>
+            <a:r>
+              <a:rPr lang="ru-RU" dirty="0"/>
+              <a:t>является одним </a:t>
+            </a:r>
+            <a:r>
+              <a:rPr lang="ru-RU" dirty="0" smtClean="0"/>
+              <a:t/>
+            </a:r>
+            <a:br>
+              <a:rPr lang="ru-RU" dirty="0" smtClean="0"/>
+            </a:br>
+            <a:r>
+              <a:rPr lang="ru-RU" dirty="0" smtClean="0"/>
+              <a:t>из </a:t>
+            </a:r>
+            <a:r>
+              <a:rPr lang="ru-RU" dirty="0"/>
+              <a:t>ключевых предположений большинства эконометрических методов, включая векторную авторегрессию. Первые разности также позволяют </a:t>
+            </a:r>
+            <a:r>
+              <a:rPr lang="ru-RU" dirty="0" smtClean="0"/>
+              <a:t>исследовать </a:t>
+            </a:r>
+            <a:r>
+              <a:rPr lang="ru-RU" dirty="0"/>
+              <a:t>причинно-следственную связь роста, исключая общие тренды.</a:t>
+            </a:r>
+            <a:endParaRPr lang="en-US" dirty="0"/>
+          </a:p>
+        </p:txBody>
+      </p:sp>
     </p:spTree>
     <p:extLst>
       <p:ext uri="{BB962C8B-B14F-4D97-AF65-F5344CB8AC3E}">
-        <p14:creationId xmlns:p14="http://schemas.microsoft.com/office/powerpoint/2010/main" val="3706015842"/>
+        <p14:creationId xmlns:p14="http://schemas.microsoft.com/office/powerpoint/2010/main" val="3624016492"/>
       </p:ext>
     </p:extLst>
   </p:cSld>

--- a/2026.03.30/klyukin_lomonosov_presentation.pptx
+++ b/2026.03.30/klyukin_lomonosov_presentation.pptx
@@ -9,36 +9,36 @@
     <p:sldId id="296" r:id="rId3"/>
     <p:sldId id="297" r:id="rId4"/>
     <p:sldId id="298" r:id="rId5"/>
-    <p:sldId id="280" r:id="rId6"/>
-    <p:sldId id="257" r:id="rId7"/>
-    <p:sldId id="258" r:id="rId8"/>
-    <p:sldId id="259" r:id="rId9"/>
-    <p:sldId id="270" r:id="rId10"/>
-    <p:sldId id="260" r:id="rId11"/>
-    <p:sldId id="261" r:id="rId12"/>
-    <p:sldId id="262" r:id="rId13"/>
-    <p:sldId id="271" r:id="rId14"/>
-    <p:sldId id="264" r:id="rId15"/>
-    <p:sldId id="263" r:id="rId16"/>
-    <p:sldId id="277" r:id="rId17"/>
-    <p:sldId id="279" r:id="rId18"/>
-    <p:sldId id="274" r:id="rId19"/>
-    <p:sldId id="275" r:id="rId20"/>
-    <p:sldId id="276" r:id="rId21"/>
-    <p:sldId id="272" r:id="rId22"/>
-    <p:sldId id="266" r:id="rId23"/>
-    <p:sldId id="265" r:id="rId24"/>
-    <p:sldId id="273" r:id="rId25"/>
-    <p:sldId id="267" r:id="rId26"/>
-    <p:sldId id="268" r:id="rId27"/>
-    <p:sldId id="281" r:id="rId28"/>
-    <p:sldId id="285" r:id="rId29"/>
-    <p:sldId id="294" r:id="rId30"/>
-    <p:sldId id="287" r:id="rId31"/>
-    <p:sldId id="289" r:id="rId32"/>
-    <p:sldId id="295" r:id="rId33"/>
-    <p:sldId id="290" r:id="rId34"/>
-    <p:sldId id="291" r:id="rId35"/>
+    <p:sldId id="281" r:id="rId6"/>
+    <p:sldId id="285" r:id="rId7"/>
+    <p:sldId id="294" r:id="rId8"/>
+    <p:sldId id="287" r:id="rId9"/>
+    <p:sldId id="289" r:id="rId10"/>
+    <p:sldId id="295" r:id="rId11"/>
+    <p:sldId id="290" r:id="rId12"/>
+    <p:sldId id="291" r:id="rId13"/>
+    <p:sldId id="280" r:id="rId14"/>
+    <p:sldId id="257" r:id="rId15"/>
+    <p:sldId id="258" r:id="rId16"/>
+    <p:sldId id="259" r:id="rId17"/>
+    <p:sldId id="270" r:id="rId18"/>
+    <p:sldId id="260" r:id="rId19"/>
+    <p:sldId id="261" r:id="rId20"/>
+    <p:sldId id="262" r:id="rId21"/>
+    <p:sldId id="271" r:id="rId22"/>
+    <p:sldId id="264" r:id="rId23"/>
+    <p:sldId id="263" r:id="rId24"/>
+    <p:sldId id="277" r:id="rId25"/>
+    <p:sldId id="279" r:id="rId26"/>
+    <p:sldId id="274" r:id="rId27"/>
+    <p:sldId id="275" r:id="rId28"/>
+    <p:sldId id="276" r:id="rId29"/>
+    <p:sldId id="272" r:id="rId30"/>
+    <p:sldId id="266" r:id="rId31"/>
+    <p:sldId id="265" r:id="rId32"/>
+    <p:sldId id="273" r:id="rId33"/>
+    <p:sldId id="267" r:id="rId34"/>
+    <p:sldId id="268" r:id="rId35"/>
     <p:sldId id="282" r:id="rId36"/>
     <p:sldId id="283" r:id="rId37"/>
     <p:sldId id="284" r:id="rId38"/>
@@ -3332,58 +3332,101 @@
           <a:lstStyle/>
           <a:p>
             <a:r>
+              <a:rPr lang="ru-RU" sz="4400" dirty="0" smtClean="0"/>
+              <a:t>Заключение по Китаю</a:t>
+            </a:r>
+            <a:endParaRPr lang="en-US" sz="4400" dirty="0"/>
+          </a:p>
+        </p:txBody>
+      </p:sp>
+      <p:sp>
+        <p:nvSpPr>
+          <p:cNvPr id="3" name="Text Placeholder 2"/>
+          <p:cNvSpPr>
+            <a:spLocks noGrp="1"/>
+          </p:cNvSpPr>
+          <p:nvPr>
+            <p:ph type="body" idx="1"/>
+          </p:nvPr>
+        </p:nvSpPr>
+        <p:spPr/>
+        <p:txBody>
+          <a:bodyPr>
+            <a:noAutofit/>
+          </a:bodyPr>
+          <a:lstStyle/>
+          <a:p>
+            <a:pPr algn="just"/>
+            <a:r>
               <a:rPr lang="ru-RU" dirty="0"/>
-              <a:t>Динамика показателей</a:t>
+              <a:t>В Китайской Народной Республике структура финансовой системы характеризуется доминированием банковского сектора </a:t>
+            </a:r>
+            <a:r>
+              <a:rPr lang="ru-RU" dirty="0" smtClean="0"/>
+              <a:t/>
+            </a:r>
+            <a:br>
+              <a:rPr lang="ru-RU" dirty="0" smtClean="0"/>
+            </a:br>
+            <a:r>
+              <a:rPr lang="ru-RU" dirty="0" smtClean="0"/>
+              <a:t>над </a:t>
+            </a:r>
+            <a:r>
+              <a:rPr lang="ru-RU" dirty="0"/>
+              <a:t>рыночными механизмами финансирования. Это объясняется приоритетным доступом к кредитным ресурсам государственных </a:t>
+            </a:r>
+            <a:r>
+              <a:rPr lang="ru-RU" dirty="0" smtClean="0"/>
+              <a:t/>
+            </a:r>
+            <a:br>
+              <a:rPr lang="ru-RU" dirty="0" smtClean="0"/>
+            </a:br>
+            <a:r>
+              <a:rPr lang="ru-RU" dirty="0" smtClean="0"/>
+              <a:t>и около</a:t>
+            </a:r>
+            <a:r>
+              <a:rPr lang="en-US" dirty="0" smtClean="0"/>
+              <a:t> </a:t>
+            </a:r>
+            <a:r>
+              <a:rPr lang="ru-RU" dirty="0" smtClean="0"/>
+              <a:t>государственных </a:t>
+            </a:r>
+            <a:r>
+              <a:rPr lang="ru-RU" dirty="0"/>
+              <a:t>компаний, которые, однако, создают относительно небольшую долю ВВП по сравнению с частным сектором. Фондовый рынок остается недоиспользованным источником экономического роста ввиду активного административного регулирования и </a:t>
+            </a:r>
+            <a:r>
+              <a:rPr lang="ru-RU" dirty="0" smtClean="0"/>
+              <a:t>интервенций</a:t>
+            </a:r>
+            <a:r>
+              <a:rPr lang="en-US" dirty="0" smtClean="0"/>
+              <a:t> </a:t>
+            </a:r>
+            <a:r>
+              <a:rPr lang="ru-RU" dirty="0" smtClean="0"/>
+              <a:t>со </a:t>
+            </a:r>
+            <a:r>
+              <a:rPr lang="ru-RU" dirty="0"/>
+              <a:t>стороны государства, направленных на поддержание стабильности</a:t>
+            </a:r>
+            <a:r>
+              <a:rPr lang="ru-RU" dirty="0" smtClean="0"/>
+              <a:t>.</a:t>
             </a:r>
             <a:endParaRPr lang="en-US" dirty="0"/>
           </a:p>
         </p:txBody>
       </p:sp>
-      <p:pic>
-        <p:nvPicPr>
-          <p:cNvPr id="4098" name="Picture 2" descr="C:\Users\bklyu\Documents\Python Scripts\_GitHub_repos\conferences\lomonosov readings 2026\explore_data\relationship_diff_both.png"/>
-          <p:cNvPicPr>
-            <a:picLocks noChangeAspect="1" noChangeArrowheads="1"/>
-          </p:cNvPicPr>
-          <p:nvPr/>
-        </p:nvPicPr>
-        <p:blipFill>
-          <a:blip r:embed="rId2">
-            <a:extLst>
-              <a:ext uri="{28A0092B-C50C-407E-A947-70E740481C1C}">
-                <a14:useLocalDpi xmlns:a14="http://schemas.microsoft.com/office/drawing/2010/main" val="0"/>
-              </a:ext>
-            </a:extLst>
-          </a:blip>
-          <a:srcRect/>
-          <a:stretch>
-            <a:fillRect/>
-          </a:stretch>
-        </p:blipFill>
-        <p:spPr bwMode="auto">
-          <a:xfrm>
-            <a:off x="690880" y="1517998"/>
-            <a:ext cx="8778240" cy="2679015"/>
-          </a:xfrm>
-          <a:prstGeom prst="rect">
-            <a:avLst/>
-          </a:prstGeom>
-          <a:noFill/>
-          <a:extLst>
-            <a:ext uri="{909E8E84-426E-40DD-AFC4-6F175D3DCCD1}">
-              <a14:hiddenFill xmlns:a14="http://schemas.microsoft.com/office/drawing/2010/main">
-                <a:solidFill>
-                  <a:srgbClr val="FFFFFF"/>
-                </a:solidFill>
-              </a14:hiddenFill>
-            </a:ext>
-          </a:extLst>
-        </p:spPr>
-      </p:pic>
     </p:spTree>
     <p:extLst>
       <p:ext uri="{BB962C8B-B14F-4D97-AF65-F5344CB8AC3E}">
-        <p14:creationId xmlns:p14="http://schemas.microsoft.com/office/powerpoint/2010/main" val="1280440382"/>
+        <p14:creationId xmlns:p14="http://schemas.microsoft.com/office/powerpoint/2010/main" val="1359136810"/>
       </p:ext>
     </p:extLst>
   </p:cSld>
@@ -3433,2978 +3476,12 @@
           <a:lstStyle/>
           <a:p>
             <a:r>
-              <a:rPr lang="ru-RU" dirty="0"/>
-              <a:t>Динамика показателей (Китай)</a:t>
-            </a:r>
-            <a:endParaRPr lang="en-US" dirty="0"/>
-          </a:p>
-        </p:txBody>
-      </p:sp>
-      <p:pic>
-        <p:nvPicPr>
-          <p:cNvPr id="5122" name="Picture 2" descr="C:\Users\bklyu\Documents\Python Scripts\_GitHub_repos\conferences\lomonosov readings 2026\explore_data\relationship_diff_china.png"/>
-          <p:cNvPicPr>
-            <a:picLocks noChangeAspect="1" noChangeArrowheads="1"/>
-          </p:cNvPicPr>
-          <p:nvPr/>
-        </p:nvPicPr>
-        <p:blipFill>
-          <a:blip r:embed="rId2">
-            <a:extLst>
-              <a:ext uri="{28A0092B-C50C-407E-A947-70E740481C1C}">
-                <a14:useLocalDpi xmlns:a14="http://schemas.microsoft.com/office/drawing/2010/main" val="0"/>
-              </a:ext>
-            </a:extLst>
-          </a:blip>
-          <a:srcRect/>
-          <a:stretch>
-            <a:fillRect/>
-          </a:stretch>
-        </p:blipFill>
-        <p:spPr bwMode="auto">
-          <a:xfrm>
-            <a:off x="690880" y="1377751"/>
-            <a:ext cx="8778240" cy="2959511"/>
-          </a:xfrm>
-          <a:prstGeom prst="rect">
-            <a:avLst/>
-          </a:prstGeom>
-          <a:noFill/>
-          <a:extLst>
-            <a:ext uri="{909E8E84-426E-40DD-AFC4-6F175D3DCCD1}">
-              <a14:hiddenFill xmlns:a14="http://schemas.microsoft.com/office/drawing/2010/main">
-                <a:solidFill>
-                  <a:srgbClr val="FFFFFF"/>
-                </a:solidFill>
-              </a14:hiddenFill>
-            </a:ext>
-          </a:extLst>
-        </p:spPr>
-      </p:pic>
-    </p:spTree>
-    <p:extLst>
-      <p:ext uri="{BB962C8B-B14F-4D97-AF65-F5344CB8AC3E}">
-        <p14:creationId xmlns:p14="http://schemas.microsoft.com/office/powerpoint/2010/main" val="3706015842"/>
-      </p:ext>
-    </p:extLst>
-  </p:cSld>
-  <p:clrMapOvr>
-    <a:masterClrMapping/>
-  </p:clrMapOvr>
-  <p:timing>
-    <p:tnLst>
-      <p:par>
-        <p:cTn id="1" dur="indefinite" restart="never" nodeType="tmRoot"/>
-      </p:par>
-    </p:tnLst>
-  </p:timing>
-</p:sld>
-</file>
-
-<file path=ppt/slides/slide12.xml><?xml version="1.0" encoding="utf-8"?>
-<p:sld xmlns:a="http://schemas.openxmlformats.org/drawingml/2006/main" xmlns:r="http://schemas.openxmlformats.org/officeDocument/2006/relationships" xmlns:p="http://schemas.openxmlformats.org/presentationml/2006/main">
-  <p:cSld>
-    <p:spTree>
-      <p:nvGrpSpPr>
-        <p:cNvPr id="1" name=""/>
-        <p:cNvGrpSpPr/>
-        <p:nvPr/>
-      </p:nvGrpSpPr>
-      <p:grpSpPr>
-        <a:xfrm>
-          <a:off x="0" y="0"/>
-          <a:ext cx="0" cy="0"/>
-          <a:chOff x="0" y="0"/>
-          <a:chExt cx="0" cy="0"/>
-        </a:xfrm>
-      </p:grpSpPr>
-      <p:sp>
-        <p:nvSpPr>
-          <p:cNvPr id="2" name="Title 1"/>
-          <p:cNvSpPr>
-            <a:spLocks noGrp="1"/>
-          </p:cNvSpPr>
-          <p:nvPr>
-            <p:ph type="title"/>
-          </p:nvPr>
-        </p:nvSpPr>
-        <p:spPr/>
-        <p:txBody>
-          <a:bodyPr/>
-          <a:lstStyle/>
-          <a:p>
-            <a:r>
-              <a:rPr lang="ru-RU" dirty="0"/>
-              <a:t>Динамика показателей (Индия)</a:t>
-            </a:r>
-            <a:endParaRPr lang="en-US" dirty="0"/>
-          </a:p>
-        </p:txBody>
-      </p:sp>
-      <p:pic>
-        <p:nvPicPr>
-          <p:cNvPr id="6146" name="Picture 2" descr="C:\Users\bklyu\Documents\Python Scripts\_GitHub_repos\conferences\lomonosov readings 2026\explore_data\relationship_diff_india.png"/>
-          <p:cNvPicPr>
-            <a:picLocks noChangeAspect="1" noChangeArrowheads="1"/>
-          </p:cNvPicPr>
-          <p:nvPr/>
-        </p:nvPicPr>
-        <p:blipFill>
-          <a:blip r:embed="rId2">
-            <a:extLst>
-              <a:ext uri="{28A0092B-C50C-407E-A947-70E740481C1C}">
-                <a14:useLocalDpi xmlns:a14="http://schemas.microsoft.com/office/drawing/2010/main" val="0"/>
-              </a:ext>
-            </a:extLst>
-          </a:blip>
-          <a:srcRect/>
-          <a:stretch>
-            <a:fillRect/>
-          </a:stretch>
-        </p:blipFill>
-        <p:spPr bwMode="auto">
-          <a:xfrm>
-            <a:off x="690880" y="1382716"/>
-            <a:ext cx="8778240" cy="2949568"/>
-          </a:xfrm>
-          <a:prstGeom prst="rect">
-            <a:avLst/>
-          </a:prstGeom>
-          <a:noFill/>
-          <a:extLst>
-            <a:ext uri="{909E8E84-426E-40DD-AFC4-6F175D3DCCD1}">
-              <a14:hiddenFill xmlns:a14="http://schemas.microsoft.com/office/drawing/2010/main">
-                <a:solidFill>
-                  <a:srgbClr val="FFFFFF"/>
-                </a:solidFill>
-              </a14:hiddenFill>
-            </a:ext>
-          </a:extLst>
-        </p:spPr>
-      </p:pic>
-    </p:spTree>
-    <p:extLst>
-      <p:ext uri="{BB962C8B-B14F-4D97-AF65-F5344CB8AC3E}">
-        <p14:creationId xmlns:p14="http://schemas.microsoft.com/office/powerpoint/2010/main" val="1403363354"/>
-      </p:ext>
-    </p:extLst>
-  </p:cSld>
-  <p:clrMapOvr>
-    <a:masterClrMapping/>
-  </p:clrMapOvr>
-  <p:timing>
-    <p:tnLst>
-      <p:par>
-        <p:cTn id="1" dur="indefinite" restart="never" nodeType="tmRoot"/>
-      </p:par>
-    </p:tnLst>
-  </p:timing>
-</p:sld>
-</file>
-
-<file path=ppt/slides/slide13.xml><?xml version="1.0" encoding="utf-8"?>
-<p:sld xmlns:a="http://schemas.openxmlformats.org/drawingml/2006/main" xmlns:r="http://schemas.openxmlformats.org/officeDocument/2006/relationships" xmlns:p="http://schemas.openxmlformats.org/presentationml/2006/main">
-  <p:cSld>
-    <p:spTree>
-      <p:nvGrpSpPr>
-        <p:cNvPr id="1" name=""/>
-        <p:cNvGrpSpPr/>
-        <p:nvPr/>
-      </p:nvGrpSpPr>
-      <p:grpSpPr>
-        <a:xfrm>
-          <a:off x="0" y="0"/>
-          <a:ext cx="0" cy="0"/>
-          <a:chOff x="0" y="0"/>
-          <a:chExt cx="0" cy="0"/>
-        </a:xfrm>
-      </p:grpSpPr>
-      <p:sp>
-        <p:nvSpPr>
-          <p:cNvPr id="2" name="Title 1"/>
-          <p:cNvSpPr>
-            <a:spLocks noGrp="1"/>
-          </p:cNvSpPr>
-          <p:nvPr>
-            <p:ph type="title"/>
-          </p:nvPr>
-        </p:nvSpPr>
-        <p:spPr/>
-        <p:txBody>
-          <a:bodyPr/>
-          <a:lstStyle/>
-          <a:p>
-            <a:r>
               <a:rPr lang="ru-RU" sz="4400" dirty="0"/>
-              <a:t>Векторная авторегрессия</a:t>
-            </a:r>
-          </a:p>
-        </p:txBody>
-      </p:sp>
-      <p:sp>
-        <p:nvSpPr>
-          <p:cNvPr id="3" name="Text Placeholder 2"/>
-          <p:cNvSpPr>
-            <a:spLocks noGrp="1"/>
-          </p:cNvSpPr>
-          <p:nvPr>
-            <p:ph type="body" idx="1"/>
-          </p:nvPr>
-        </p:nvSpPr>
-        <p:spPr/>
-        <p:txBody>
-          <a:bodyPr>
-            <a:noAutofit/>
-          </a:bodyPr>
-          <a:lstStyle/>
-          <a:p>
-            <a:pPr algn="just"/>
-            <a:r>
-              <a:rPr lang="ru-RU" dirty="0"/>
-              <a:t>Векторная авторегрессия (VAR — Vector AutoRegression) — это эконометрическая модель, используемая для анализа </a:t>
-            </a:r>
-            <a:r>
-              <a:rPr lang="en-US" dirty="0" smtClean="0"/>
-              <a:t/>
-            </a:r>
-            <a:br>
-              <a:rPr lang="en-US" dirty="0" smtClean="0"/>
-            </a:br>
-            <a:r>
-              <a:rPr lang="ru-RU" dirty="0" smtClean="0"/>
-              <a:t>и </a:t>
-            </a:r>
-            <a:r>
-              <a:rPr lang="ru-RU" dirty="0"/>
-              <a:t>прогнозирования нескольких взаимосвязанных временных рядов. </a:t>
-            </a:r>
-            <a:r>
-              <a:rPr lang="ru-RU" dirty="0" smtClean="0"/>
-              <a:t/>
-            </a:r>
-            <a:br>
-              <a:rPr lang="ru-RU" dirty="0" smtClean="0"/>
-            </a:br>
-            <a:r>
-              <a:rPr lang="ru-RU" dirty="0" smtClean="0"/>
-              <a:t>В </a:t>
-            </a:r>
-            <a:r>
-              <a:rPr lang="ru-RU" dirty="0"/>
-              <a:t>ней текущее значение каждой переменной </a:t>
-            </a:r>
-            <a:r>
-              <a:rPr lang="ru-RU" dirty="0" smtClean="0"/>
-              <a:t>зависит от </a:t>
-            </a:r>
-            <a:r>
-              <a:rPr lang="ru-RU" dirty="0"/>
-              <a:t>её собственных прошлых значений и от прошлых значений всех остальных переменных в системе. Она </a:t>
-            </a:r>
-            <a:r>
-              <a:rPr lang="ru-RU" dirty="0" smtClean="0"/>
-              <a:t>применяется </a:t>
-            </a:r>
-            <a:br>
-              <a:rPr lang="ru-RU" dirty="0" smtClean="0"/>
-            </a:br>
-            <a:r>
-              <a:rPr lang="ru-RU" dirty="0" smtClean="0"/>
-              <a:t>для </a:t>
-            </a:r>
-            <a:r>
-              <a:rPr lang="ru-RU" dirty="0"/>
-              <a:t>моделирования динамики и взаимовлияния стационарных экономических показателей.</a:t>
-            </a:r>
-            <a:endParaRPr lang="en-US" dirty="0"/>
-          </a:p>
-        </p:txBody>
-      </p:sp>
-    </p:spTree>
-    <p:extLst>
-      <p:ext uri="{BB962C8B-B14F-4D97-AF65-F5344CB8AC3E}">
-        <p14:creationId xmlns:p14="http://schemas.microsoft.com/office/powerpoint/2010/main" val="2147299148"/>
-      </p:ext>
-    </p:extLst>
-  </p:cSld>
-  <p:clrMapOvr>
-    <a:masterClrMapping/>
-  </p:clrMapOvr>
-  <p:timing>
-    <p:tnLst>
-      <p:par>
-        <p:cTn id="1" dur="indefinite" restart="never" nodeType="tmRoot"/>
-      </p:par>
-    </p:tnLst>
-  </p:timing>
-</p:sld>
-</file>
-
-<file path=ppt/slides/slide14.xml><?xml version="1.0" encoding="utf-8"?>
-<p:sld xmlns:a="http://schemas.openxmlformats.org/drawingml/2006/main" xmlns:r="http://schemas.openxmlformats.org/officeDocument/2006/relationships" xmlns:p="http://schemas.openxmlformats.org/presentationml/2006/main">
-  <p:cSld>
-    <p:spTree>
-      <p:nvGrpSpPr>
-        <p:cNvPr id="1" name=""/>
-        <p:cNvGrpSpPr/>
-        <p:nvPr/>
-      </p:nvGrpSpPr>
-      <p:grpSpPr>
-        <a:xfrm>
-          <a:off x="0" y="0"/>
-          <a:ext cx="0" cy="0"/>
-          <a:chOff x="0" y="0"/>
-          <a:chExt cx="0" cy="0"/>
-        </a:xfrm>
-      </p:grpSpPr>
-      <p:sp>
-        <p:nvSpPr>
-          <p:cNvPr id="2" name="Title 1"/>
-          <p:cNvSpPr>
-            <a:spLocks noGrp="1"/>
-          </p:cNvSpPr>
-          <p:nvPr>
-            <p:ph type="title"/>
-          </p:nvPr>
-        </p:nvSpPr>
-        <p:spPr/>
-        <p:txBody>
-          <a:bodyPr>
-            <a:normAutofit/>
-          </a:bodyPr>
-          <a:lstStyle/>
-          <a:p>
-            <a:r>
-              <a:rPr lang="en-US" dirty="0" smtClean="0"/>
-              <a:t>VAR</a:t>
-            </a:r>
-            <a:r>
-              <a:rPr lang="ru-RU" dirty="0"/>
-              <a:t> </a:t>
-            </a:r>
-            <a:r>
-              <a:rPr lang="ru-RU" dirty="0" smtClean="0"/>
-              <a:t>Индии</a:t>
-            </a:r>
-            <a:r>
-              <a:rPr lang="en-US" dirty="0" smtClean="0"/>
-              <a:t>: </a:t>
-            </a:r>
-            <a:r>
-              <a:rPr lang="ru-RU" dirty="0" smtClean="0"/>
-              <a:t>спецификация</a:t>
-            </a:r>
-            <a:endParaRPr lang="en-US" dirty="0"/>
-          </a:p>
-        </p:txBody>
-      </p:sp>
-      <p:pic>
-        <p:nvPicPr>
-          <p:cNvPr id="8200" name="Picture 8" descr="C:\Users\bklyu\Documents\Python Scripts\_GitHub_repos\conferences\lomonosov readings 2026\explore_data\_gdp_obs_model_india.png"/>
-          <p:cNvPicPr>
-            <a:picLocks noChangeAspect="1" noChangeArrowheads="1"/>
-          </p:cNvPicPr>
-          <p:nvPr/>
-        </p:nvPicPr>
-        <p:blipFill>
-          <a:blip r:embed="rId2">
-            <a:extLst>
-              <a:ext uri="{28A0092B-C50C-407E-A947-70E740481C1C}">
-                <a14:useLocalDpi xmlns:a14="http://schemas.microsoft.com/office/drawing/2010/main" val="0"/>
-              </a:ext>
-            </a:extLst>
-          </a:blip>
-          <a:srcRect/>
-          <a:stretch>
-            <a:fillRect/>
-          </a:stretch>
-        </p:blipFill>
-        <p:spPr bwMode="auto">
-          <a:xfrm>
-            <a:off x="3708406" y="1485900"/>
-            <a:ext cx="5486401" cy="2743200"/>
-          </a:xfrm>
-          <a:prstGeom prst="rect">
-            <a:avLst/>
-          </a:prstGeom>
-          <a:noFill/>
-          <a:extLst>
-            <a:ext uri="{909E8E84-426E-40DD-AFC4-6F175D3DCCD1}">
-              <a14:hiddenFill xmlns:a14="http://schemas.microsoft.com/office/drawing/2010/main">
-                <a:solidFill>
-                  <a:srgbClr val="FFFFFF"/>
-                </a:solidFill>
-              </a14:hiddenFill>
-            </a:ext>
-          </a:extLst>
-        </p:spPr>
-      </p:pic>
-      <p:sp>
-        <p:nvSpPr>
-          <p:cNvPr id="3" name="TextBox 2"/>
-          <p:cNvSpPr txBox="1"/>
-          <p:nvPr/>
-        </p:nvSpPr>
-        <p:spPr>
-          <a:xfrm>
-            <a:off x="1179781" y="2503558"/>
-            <a:ext cx="1995221" cy="707886"/>
-          </a:xfrm>
-          <a:prstGeom prst="rect">
-            <a:avLst/>
-          </a:prstGeom>
-          <a:noFill/>
-        </p:spPr>
-        <p:txBody>
-          <a:bodyPr wrap="square" rtlCol="0">
-            <a:spAutoFit/>
-          </a:bodyPr>
-          <a:lstStyle/>
-          <a:p>
-            <a:r>
-              <a:rPr lang="en-US" sz="4000" dirty="0"/>
-              <a:t>VAR(5)</a:t>
-            </a:r>
-          </a:p>
-        </p:txBody>
-      </p:sp>
-    </p:spTree>
-    <p:extLst>
-      <p:ext uri="{BB962C8B-B14F-4D97-AF65-F5344CB8AC3E}">
-        <p14:creationId xmlns:p14="http://schemas.microsoft.com/office/powerpoint/2010/main" val="3861653137"/>
-      </p:ext>
-    </p:extLst>
-  </p:cSld>
-  <p:clrMapOvr>
-    <a:masterClrMapping/>
-  </p:clrMapOvr>
-  <p:timing>
-    <p:tnLst>
-      <p:par>
-        <p:cTn id="1" dur="indefinite" restart="never" nodeType="tmRoot"/>
-      </p:par>
-    </p:tnLst>
-  </p:timing>
-</p:sld>
-</file>
-
-<file path=ppt/slides/slide15.xml><?xml version="1.0" encoding="utf-8"?>
-<p:sld xmlns:a="http://schemas.openxmlformats.org/drawingml/2006/main" xmlns:r="http://schemas.openxmlformats.org/officeDocument/2006/relationships" xmlns:p="http://schemas.openxmlformats.org/presentationml/2006/main">
-  <p:cSld>
-    <p:spTree>
-      <p:nvGrpSpPr>
-        <p:cNvPr id="1" name=""/>
-        <p:cNvGrpSpPr/>
-        <p:nvPr/>
-      </p:nvGrpSpPr>
-      <p:grpSpPr>
-        <a:xfrm>
-          <a:off x="0" y="0"/>
-          <a:ext cx="0" cy="0"/>
-          <a:chOff x="0" y="0"/>
-          <a:chExt cx="0" cy="0"/>
-        </a:xfrm>
-      </p:grpSpPr>
-      <p:sp>
-        <p:nvSpPr>
-          <p:cNvPr id="2" name="Title 1"/>
-          <p:cNvSpPr>
-            <a:spLocks noGrp="1"/>
-          </p:cNvSpPr>
-          <p:nvPr>
-            <p:ph type="title"/>
-          </p:nvPr>
-        </p:nvSpPr>
-        <p:spPr/>
-        <p:txBody>
-          <a:bodyPr>
-            <a:normAutofit/>
-          </a:bodyPr>
-          <a:lstStyle/>
-          <a:p>
-            <a:r>
-              <a:rPr lang="en-US" dirty="0"/>
-              <a:t>VAR</a:t>
-            </a:r>
-            <a:r>
-              <a:rPr lang="ru-RU" dirty="0"/>
-              <a:t> Индии</a:t>
-            </a:r>
-            <a:r>
-              <a:rPr lang="en-US" dirty="0"/>
-              <a:t>: </a:t>
-            </a:r>
-            <a:r>
-              <a:rPr lang="ru-RU" dirty="0" smtClean="0"/>
-              <a:t>прогноз</a:t>
-            </a:r>
-            <a:endParaRPr lang="en-US" dirty="0"/>
-          </a:p>
-        </p:txBody>
-      </p:sp>
-      <p:pic>
-        <p:nvPicPr>
-          <p:cNvPr id="7172" name="Picture 4" descr="C:\Users\bklyu\Documents\Python Scripts\_GitHub_repos\conferences\lomonosov readings 2026\explore_data\_gdp_forecast_diff_india.png"/>
-          <p:cNvPicPr>
-            <a:picLocks noChangeAspect="1" noChangeArrowheads="1"/>
-          </p:cNvPicPr>
-          <p:nvPr/>
-        </p:nvPicPr>
-        <p:blipFill rotWithShape="1">
-          <a:blip r:embed="rId2">
-            <a:extLst>
-              <a:ext uri="{28A0092B-C50C-407E-A947-70E740481C1C}">
-                <a14:useLocalDpi xmlns:a14="http://schemas.microsoft.com/office/drawing/2010/main" val="0"/>
-              </a:ext>
-            </a:extLst>
-          </a:blip>
-          <a:srcRect l="6033" t="6425" r="2951" b="6336"/>
-          <a:stretch/>
-        </p:blipFill>
-        <p:spPr bwMode="auto">
-          <a:xfrm>
-            <a:off x="736600" y="1104900"/>
-            <a:ext cx="3657600" cy="1752928"/>
-          </a:xfrm>
-          <a:prstGeom prst="rect">
-            <a:avLst/>
-          </a:prstGeom>
-          <a:noFill/>
-          <a:extLst>
-            <a:ext uri="{909E8E84-426E-40DD-AFC4-6F175D3DCCD1}">
-              <a14:hiddenFill xmlns:a14="http://schemas.microsoft.com/office/drawing/2010/main">
-                <a:solidFill>
-                  <a:srgbClr val="FFFFFF"/>
-                </a:solidFill>
-              </a14:hiddenFill>
-            </a:ext>
-          </a:extLst>
-        </p:spPr>
-      </p:pic>
-      <p:pic>
-        <p:nvPicPr>
-          <p:cNvPr id="7173" name="Picture 5" descr="C:\Users\bklyu\Documents\Python Scripts\_GitHub_repos\conferences\lomonosov readings 2026\explore_data\_gdp_forecast_value_india.png"/>
-          <p:cNvPicPr>
-            <a:picLocks noChangeAspect="1" noChangeArrowheads="1"/>
-          </p:cNvPicPr>
-          <p:nvPr/>
-        </p:nvPicPr>
-        <p:blipFill rotWithShape="1">
-          <a:blip r:embed="rId3">
-            <a:extLst>
-              <a:ext uri="{28A0092B-C50C-407E-A947-70E740481C1C}">
-                <a14:useLocalDpi xmlns:a14="http://schemas.microsoft.com/office/drawing/2010/main" val="0"/>
-              </a:ext>
-            </a:extLst>
-          </a:blip>
-          <a:srcRect l="3300" t="6511" r="2691" b="5469"/>
-          <a:stretch/>
-        </p:blipFill>
-        <p:spPr bwMode="auto">
-          <a:xfrm>
-            <a:off x="3222629" y="2697961"/>
-            <a:ext cx="6248401" cy="2925151"/>
-          </a:xfrm>
-          <a:prstGeom prst="rect">
-            <a:avLst/>
-          </a:prstGeom>
-          <a:noFill/>
-          <a:extLst>
-            <a:ext uri="{909E8E84-426E-40DD-AFC4-6F175D3DCCD1}">
-              <a14:hiddenFill xmlns:a14="http://schemas.microsoft.com/office/drawing/2010/main">
-                <a:solidFill>
-                  <a:srgbClr val="FFFFFF"/>
-                </a:solidFill>
-              </a14:hiddenFill>
-            </a:ext>
-          </a:extLst>
-        </p:spPr>
-      </p:pic>
-    </p:spTree>
-    <p:extLst>
-      <p:ext uri="{BB962C8B-B14F-4D97-AF65-F5344CB8AC3E}">
-        <p14:creationId xmlns:p14="http://schemas.microsoft.com/office/powerpoint/2010/main" val="1775786759"/>
-      </p:ext>
-    </p:extLst>
-  </p:cSld>
-  <p:clrMapOvr>
-    <a:masterClrMapping/>
-  </p:clrMapOvr>
-  <p:timing>
-    <p:tnLst>
-      <p:par>
-        <p:cTn id="1" dur="indefinite" restart="never" nodeType="tmRoot"/>
-      </p:par>
-    </p:tnLst>
-  </p:timing>
-</p:sld>
-</file>
-
-<file path=ppt/slides/slide16.xml><?xml version="1.0" encoding="utf-8"?>
-<p:sld xmlns:a="http://schemas.openxmlformats.org/drawingml/2006/main" xmlns:r="http://schemas.openxmlformats.org/officeDocument/2006/relationships" xmlns:p="http://schemas.openxmlformats.org/presentationml/2006/main">
-  <p:cSld>
-    <p:spTree>
-      <p:nvGrpSpPr>
-        <p:cNvPr id="1" name=""/>
-        <p:cNvGrpSpPr/>
-        <p:nvPr/>
-      </p:nvGrpSpPr>
-      <p:grpSpPr>
-        <a:xfrm>
-          <a:off x="0" y="0"/>
-          <a:ext cx="0" cy="0"/>
-          <a:chOff x="0" y="0"/>
-          <a:chExt cx="0" cy="0"/>
-        </a:xfrm>
-      </p:grpSpPr>
-      <p:sp>
-        <p:nvSpPr>
-          <p:cNvPr id="2" name="Title 1"/>
-          <p:cNvSpPr>
-            <a:spLocks noGrp="1"/>
-          </p:cNvSpPr>
-          <p:nvPr>
-            <p:ph type="title"/>
-          </p:nvPr>
-        </p:nvSpPr>
-        <p:spPr/>
-        <p:txBody>
-          <a:bodyPr>
-            <a:normAutofit/>
-          </a:bodyPr>
-          <a:lstStyle/>
-          <a:p>
-            <a:r>
-              <a:rPr lang="en-US" dirty="0" smtClean="0"/>
-              <a:t>VAR</a:t>
-            </a:r>
-            <a:r>
-              <a:rPr lang="ru-RU" dirty="0"/>
-              <a:t> </a:t>
-            </a:r>
-            <a:r>
-              <a:rPr lang="ru-RU" dirty="0" smtClean="0"/>
+              <a:t>Рекомендации для </a:t>
+            </a:r>
+            <a:r>
+              <a:rPr lang="ru-RU" sz="4400" dirty="0" smtClean="0"/>
               <a:t>Китая</a:t>
-            </a:r>
-            <a:r>
-              <a:rPr lang="en-US" dirty="0" smtClean="0"/>
-              <a:t>: </a:t>
-            </a:r>
-            <a:r>
-              <a:rPr lang="ru-RU" dirty="0" smtClean="0"/>
-              <a:t>спецификация</a:t>
-            </a:r>
-            <a:endParaRPr lang="en-US" dirty="0"/>
-          </a:p>
-        </p:txBody>
-      </p:sp>
-      <p:sp>
-        <p:nvSpPr>
-          <p:cNvPr id="3" name="TextBox 2"/>
-          <p:cNvSpPr txBox="1"/>
-          <p:nvPr/>
-        </p:nvSpPr>
-        <p:spPr>
-          <a:xfrm>
-            <a:off x="1179781" y="2503558"/>
-            <a:ext cx="1995221" cy="707886"/>
-          </a:xfrm>
-          <a:prstGeom prst="rect">
-            <a:avLst/>
-          </a:prstGeom>
-          <a:noFill/>
-        </p:spPr>
-        <p:txBody>
-          <a:bodyPr wrap="square" rtlCol="0">
-            <a:spAutoFit/>
-          </a:bodyPr>
-          <a:lstStyle/>
-          <a:p>
-            <a:r>
-              <a:rPr lang="en-US" sz="4000" dirty="0"/>
-              <a:t>VAR(</a:t>
-            </a:r>
-            <a:r>
-              <a:rPr lang="ru-RU" sz="4000" dirty="0"/>
-              <a:t>2</a:t>
-            </a:r>
-            <a:r>
-              <a:rPr lang="en-US" sz="4000" dirty="0"/>
-              <a:t>)</a:t>
-            </a:r>
-          </a:p>
-        </p:txBody>
-      </p:sp>
-      <p:pic>
-        <p:nvPicPr>
-          <p:cNvPr id="13314" name="Picture 2" descr="C:\Users\bklyu\Documents\Python Scripts\_GitHub_repos\conferences\lomonosov readings 2026\explore_data\_gdp_obs_model_china.png"/>
-          <p:cNvPicPr>
-            <a:picLocks noChangeAspect="1" noChangeArrowheads="1"/>
-          </p:cNvPicPr>
-          <p:nvPr/>
-        </p:nvPicPr>
-        <p:blipFill>
-          <a:blip r:embed="rId2">
-            <a:extLst>
-              <a:ext uri="{28A0092B-C50C-407E-A947-70E740481C1C}">
-                <a14:useLocalDpi xmlns:a14="http://schemas.microsoft.com/office/drawing/2010/main" val="0"/>
-              </a:ext>
-            </a:extLst>
-          </a:blip>
-          <a:srcRect/>
-          <a:stretch>
-            <a:fillRect/>
-          </a:stretch>
-        </p:blipFill>
-        <p:spPr bwMode="auto">
-          <a:xfrm>
-            <a:off x="3708400" y="1485900"/>
-            <a:ext cx="5486400" cy="2743200"/>
-          </a:xfrm>
-          <a:prstGeom prst="rect">
-            <a:avLst/>
-          </a:prstGeom>
-          <a:noFill/>
-          <a:extLst>
-            <a:ext uri="{909E8E84-426E-40DD-AFC4-6F175D3DCCD1}">
-              <a14:hiddenFill xmlns:a14="http://schemas.microsoft.com/office/drawing/2010/main">
-                <a:solidFill>
-                  <a:srgbClr val="FFFFFF"/>
-                </a:solidFill>
-              </a14:hiddenFill>
-            </a:ext>
-          </a:extLst>
-        </p:spPr>
-      </p:pic>
-    </p:spTree>
-    <p:extLst>
-      <p:ext uri="{BB962C8B-B14F-4D97-AF65-F5344CB8AC3E}">
-        <p14:creationId xmlns:p14="http://schemas.microsoft.com/office/powerpoint/2010/main" val="916465186"/>
-      </p:ext>
-    </p:extLst>
-  </p:cSld>
-  <p:clrMapOvr>
-    <a:masterClrMapping/>
-  </p:clrMapOvr>
-  <p:timing>
-    <p:tnLst>
-      <p:par>
-        <p:cTn id="1" dur="indefinite" restart="never" nodeType="tmRoot"/>
-      </p:par>
-    </p:tnLst>
-  </p:timing>
-</p:sld>
-</file>
-
-<file path=ppt/slides/slide17.xml><?xml version="1.0" encoding="utf-8"?>
-<p:sld xmlns:a="http://schemas.openxmlformats.org/drawingml/2006/main" xmlns:r="http://schemas.openxmlformats.org/officeDocument/2006/relationships" xmlns:p="http://schemas.openxmlformats.org/presentationml/2006/main">
-  <p:cSld>
-    <p:spTree>
-      <p:nvGrpSpPr>
-        <p:cNvPr id="1" name=""/>
-        <p:cNvGrpSpPr/>
-        <p:nvPr/>
-      </p:nvGrpSpPr>
-      <p:grpSpPr>
-        <a:xfrm>
-          <a:off x="0" y="0"/>
-          <a:ext cx="0" cy="0"/>
-          <a:chOff x="0" y="0"/>
-          <a:chExt cx="0" cy="0"/>
-        </a:xfrm>
-      </p:grpSpPr>
-      <p:sp>
-        <p:nvSpPr>
-          <p:cNvPr id="2" name="Title 1"/>
-          <p:cNvSpPr>
-            <a:spLocks noGrp="1"/>
-          </p:cNvSpPr>
-          <p:nvPr>
-            <p:ph type="title"/>
-          </p:nvPr>
-        </p:nvSpPr>
-        <p:spPr/>
-        <p:txBody>
-          <a:bodyPr>
-            <a:normAutofit/>
-          </a:bodyPr>
-          <a:lstStyle/>
-          <a:p>
-            <a:r>
-              <a:rPr lang="en-US" dirty="0"/>
-              <a:t>VAR</a:t>
-            </a:r>
-            <a:r>
-              <a:rPr lang="ru-RU" dirty="0"/>
-              <a:t> </a:t>
-            </a:r>
-            <a:r>
-              <a:rPr lang="ru-RU" dirty="0" smtClean="0"/>
-              <a:t>Китая</a:t>
-            </a:r>
-            <a:r>
-              <a:rPr lang="en-US" dirty="0" smtClean="0"/>
-              <a:t>: </a:t>
-            </a:r>
-            <a:r>
-              <a:rPr lang="ru-RU" dirty="0" smtClean="0"/>
-              <a:t>прогноз</a:t>
-            </a:r>
-            <a:endParaRPr lang="en-US" dirty="0"/>
-          </a:p>
-        </p:txBody>
-      </p:sp>
-      <p:pic>
-        <p:nvPicPr>
-          <p:cNvPr id="14338" name="Picture 2" descr="C:\Users\bklyu\Documents\Python Scripts\_GitHub_repos\conferences\lomonosov readings 2026\explore_data\_gdp_forecast_diff_china.png"/>
-          <p:cNvPicPr>
-            <a:picLocks noChangeAspect="1" noChangeArrowheads="1"/>
-          </p:cNvPicPr>
-          <p:nvPr/>
-        </p:nvPicPr>
-        <p:blipFill rotWithShape="1">
-          <a:blip r:embed="rId2">
-            <a:extLst>
-              <a:ext uri="{28A0092B-C50C-407E-A947-70E740481C1C}">
-                <a14:useLocalDpi xmlns:a14="http://schemas.microsoft.com/office/drawing/2010/main" val="0"/>
-              </a:ext>
-            </a:extLst>
-          </a:blip>
-          <a:srcRect t="6858" r="2865" b="6944"/>
-          <a:stretch/>
-        </p:blipFill>
-        <p:spPr bwMode="auto">
-          <a:xfrm>
-            <a:off x="762795" y="1104904"/>
-            <a:ext cx="3657600" cy="1622877"/>
-          </a:xfrm>
-          <a:prstGeom prst="rect">
-            <a:avLst/>
-          </a:prstGeom>
-          <a:noFill/>
-          <a:extLst>
-            <a:ext uri="{909E8E84-426E-40DD-AFC4-6F175D3DCCD1}">
-              <a14:hiddenFill xmlns:a14="http://schemas.microsoft.com/office/drawing/2010/main">
-                <a:solidFill>
-                  <a:srgbClr val="FFFFFF"/>
-                </a:solidFill>
-              </a14:hiddenFill>
-            </a:ext>
-          </a:extLst>
-        </p:spPr>
-      </p:pic>
-      <p:pic>
-        <p:nvPicPr>
-          <p:cNvPr id="14339" name="Picture 3" descr="C:\Users\bklyu\Documents\Python Scripts\_GitHub_repos\conferences\lomonosov readings 2026\explore_data\_gdp_forecast_value_china.png"/>
-          <p:cNvPicPr>
-            <a:picLocks noChangeAspect="1" noChangeArrowheads="1"/>
-          </p:cNvPicPr>
-          <p:nvPr/>
-        </p:nvPicPr>
-        <p:blipFill rotWithShape="1">
-          <a:blip r:embed="rId3">
-            <a:extLst>
-              <a:ext uri="{28A0092B-C50C-407E-A947-70E740481C1C}">
-                <a14:useLocalDpi xmlns:a14="http://schemas.microsoft.com/office/drawing/2010/main" val="0"/>
-              </a:ext>
-            </a:extLst>
-          </a:blip>
-          <a:srcRect t="6742" r="3211" b="6799"/>
-          <a:stretch/>
-        </p:blipFill>
-        <p:spPr bwMode="auto">
-          <a:xfrm>
-            <a:off x="3222623" y="2781305"/>
-            <a:ext cx="6309360" cy="2817995"/>
-          </a:xfrm>
-          <a:prstGeom prst="rect">
-            <a:avLst/>
-          </a:prstGeom>
-          <a:noFill/>
-          <a:extLst>
-            <a:ext uri="{909E8E84-426E-40DD-AFC4-6F175D3DCCD1}">
-              <a14:hiddenFill xmlns:a14="http://schemas.microsoft.com/office/drawing/2010/main">
-                <a:solidFill>
-                  <a:srgbClr val="FFFFFF"/>
-                </a:solidFill>
-              </a14:hiddenFill>
-            </a:ext>
-          </a:extLst>
-        </p:spPr>
-      </p:pic>
-    </p:spTree>
-    <p:extLst>
-      <p:ext uri="{BB962C8B-B14F-4D97-AF65-F5344CB8AC3E}">
-        <p14:creationId xmlns:p14="http://schemas.microsoft.com/office/powerpoint/2010/main" val="1569145000"/>
-      </p:ext>
-    </p:extLst>
-  </p:cSld>
-  <p:clrMapOvr>
-    <a:masterClrMapping/>
-  </p:clrMapOvr>
-  <p:timing>
-    <p:tnLst>
-      <p:par>
-        <p:cTn id="1" dur="indefinite" restart="never" nodeType="tmRoot"/>
-      </p:par>
-    </p:tnLst>
-  </p:timing>
-</p:sld>
-</file>
-
-<file path=ppt/slides/slide18.xml><?xml version="1.0" encoding="utf-8"?>
-<p:sld xmlns:a="http://schemas.openxmlformats.org/drawingml/2006/main" xmlns:r="http://schemas.openxmlformats.org/officeDocument/2006/relationships" xmlns:p="http://schemas.openxmlformats.org/presentationml/2006/main">
-  <p:cSld>
-    <p:spTree>
-      <p:nvGrpSpPr>
-        <p:cNvPr id="1" name=""/>
-        <p:cNvGrpSpPr/>
-        <p:nvPr/>
-      </p:nvGrpSpPr>
-      <p:grpSpPr>
-        <a:xfrm>
-          <a:off x="0" y="0"/>
-          <a:ext cx="0" cy="0"/>
-          <a:chOff x="0" y="0"/>
-          <a:chExt cx="0" cy="0"/>
-        </a:xfrm>
-      </p:grpSpPr>
-      <p:sp>
-        <p:nvSpPr>
-          <p:cNvPr id="2" name="Title 1"/>
-          <p:cNvSpPr>
-            <a:spLocks noGrp="1"/>
-          </p:cNvSpPr>
-          <p:nvPr>
-            <p:ph type="title"/>
-          </p:nvPr>
-        </p:nvSpPr>
-        <p:spPr/>
-        <p:txBody>
-          <a:bodyPr/>
-          <a:lstStyle/>
-          <a:p>
-            <a:r>
-              <a:rPr lang="ru-RU" sz="4400" dirty="0"/>
-              <a:t>Функции импульсных откликов</a:t>
-            </a:r>
-          </a:p>
-        </p:txBody>
-      </p:sp>
-      <p:sp>
-        <p:nvSpPr>
-          <p:cNvPr id="3" name="Text Placeholder 2"/>
-          <p:cNvSpPr>
-            <a:spLocks noGrp="1"/>
-          </p:cNvSpPr>
-          <p:nvPr>
-            <p:ph type="body" idx="1"/>
-          </p:nvPr>
-        </p:nvSpPr>
-        <p:spPr/>
-        <p:txBody>
-          <a:bodyPr>
-            <a:noAutofit/>
-          </a:bodyPr>
-          <a:lstStyle/>
-          <a:p>
-            <a:pPr algn="just"/>
-            <a:r>
-              <a:rPr lang="ru-RU" dirty="0" smtClean="0"/>
-              <a:t>Функции импульсных откликов (IRF – </a:t>
-            </a:r>
-            <a:r>
-              <a:rPr lang="en-US" dirty="0" smtClean="0"/>
-              <a:t>Impulse</a:t>
-            </a:r>
-            <a:r>
-              <a:rPr lang="ru-RU" dirty="0" smtClean="0"/>
-              <a:t> </a:t>
-            </a:r>
-            <a:r>
-              <a:rPr lang="en-US" dirty="0" smtClean="0"/>
-              <a:t>Response </a:t>
-            </a:r>
-            <a:r>
-              <a:rPr lang="en-US" dirty="0"/>
-              <a:t>Function</a:t>
-            </a:r>
-            <a:r>
-              <a:rPr lang="ru-RU" dirty="0" smtClean="0"/>
-              <a:t>) в векторной авторегрессии показывают, как шок (непредвиденное изменение) одной переменной влияет на текущие и будущие значения всех переменных системы. IRF позволяет оценить силу, направление и длительность реакции системы на внешний импульс, затухающий </a:t>
-            </a:r>
-            <a:r>
-              <a:rPr lang="en-US" dirty="0" smtClean="0"/>
-              <a:t/>
-            </a:r>
-            <a:br>
-              <a:rPr lang="en-US" dirty="0" smtClean="0"/>
-            </a:br>
-            <a:r>
-              <a:rPr lang="ru-RU" dirty="0" smtClean="0"/>
-              <a:t>со временем.</a:t>
-            </a:r>
-            <a:endParaRPr lang="en-US" dirty="0"/>
-          </a:p>
-        </p:txBody>
-      </p:sp>
-    </p:spTree>
-    <p:extLst>
-      <p:ext uri="{BB962C8B-B14F-4D97-AF65-F5344CB8AC3E}">
-        <p14:creationId xmlns:p14="http://schemas.microsoft.com/office/powerpoint/2010/main" val="4133823676"/>
-      </p:ext>
-    </p:extLst>
-  </p:cSld>
-  <p:clrMapOvr>
-    <a:masterClrMapping/>
-  </p:clrMapOvr>
-  <p:timing>
-    <p:tnLst>
-      <p:par>
-        <p:cTn id="1" dur="indefinite" restart="never" nodeType="tmRoot"/>
-      </p:par>
-    </p:tnLst>
-  </p:timing>
-</p:sld>
-</file>
-
-<file path=ppt/slides/slide19.xml><?xml version="1.0" encoding="utf-8"?>
-<p:sld xmlns:a="http://schemas.openxmlformats.org/drawingml/2006/main" xmlns:r="http://schemas.openxmlformats.org/officeDocument/2006/relationships" xmlns:p="http://schemas.openxmlformats.org/presentationml/2006/main">
-  <p:cSld>
-    <p:spTree>
-      <p:nvGrpSpPr>
-        <p:cNvPr id="1" name=""/>
-        <p:cNvGrpSpPr/>
-        <p:nvPr/>
-      </p:nvGrpSpPr>
-      <p:grpSpPr>
-        <a:xfrm>
-          <a:off x="0" y="0"/>
-          <a:ext cx="0" cy="0"/>
-          <a:chOff x="0" y="0"/>
-          <a:chExt cx="0" cy="0"/>
-        </a:xfrm>
-      </p:grpSpPr>
-      <p:sp>
-        <p:nvSpPr>
-          <p:cNvPr id="2" name="Title 1"/>
-          <p:cNvSpPr>
-            <a:spLocks noGrp="1"/>
-          </p:cNvSpPr>
-          <p:nvPr>
-            <p:ph type="title"/>
-          </p:nvPr>
-        </p:nvSpPr>
-        <p:spPr/>
-        <p:txBody>
-          <a:bodyPr/>
-          <a:lstStyle/>
-          <a:p>
-            <a:r>
-              <a:rPr lang="ru-RU" dirty="0"/>
-              <a:t>Отклик ВВП Китая </a:t>
-            </a:r>
-            <a:r>
-              <a:rPr lang="ru-RU" dirty="0" smtClean="0"/>
-              <a:t>на </a:t>
-            </a:r>
-            <a:r>
-              <a:rPr lang="ru-RU" dirty="0"/>
-              <a:t>шоки</a:t>
-            </a:r>
-            <a:endParaRPr lang="en-US" dirty="0"/>
-          </a:p>
-        </p:txBody>
-      </p:sp>
-      <p:pic>
-        <p:nvPicPr>
-          <p:cNvPr id="8195" name="Picture 3" descr="C:\Users\bklyu\Documents\Python Scripts\_GitHub_repos\conferences\lomonosov readings 2026\explore_data\irf_china.png"/>
-          <p:cNvPicPr>
-            <a:picLocks noChangeAspect="1" noChangeArrowheads="1"/>
-          </p:cNvPicPr>
-          <p:nvPr/>
-        </p:nvPicPr>
-        <p:blipFill>
-          <a:blip r:embed="rId2">
-            <a:extLst>
-              <a:ext uri="{28A0092B-C50C-407E-A947-70E740481C1C}">
-                <a14:useLocalDpi xmlns:a14="http://schemas.microsoft.com/office/drawing/2010/main" val="0"/>
-              </a:ext>
-            </a:extLst>
-          </a:blip>
-          <a:srcRect/>
-          <a:stretch>
-            <a:fillRect/>
-          </a:stretch>
-        </p:blipFill>
-        <p:spPr bwMode="auto">
-          <a:xfrm>
-            <a:off x="690880" y="1487746"/>
-            <a:ext cx="8778240" cy="2739519"/>
-          </a:xfrm>
-          <a:prstGeom prst="rect">
-            <a:avLst/>
-          </a:prstGeom>
-          <a:noFill/>
-          <a:extLst>
-            <a:ext uri="{909E8E84-426E-40DD-AFC4-6F175D3DCCD1}">
-              <a14:hiddenFill xmlns:a14="http://schemas.microsoft.com/office/drawing/2010/main">
-                <a:solidFill>
-                  <a:srgbClr val="FFFFFF"/>
-                </a:solidFill>
-              </a14:hiddenFill>
-            </a:ext>
-          </a:extLst>
-        </p:spPr>
-      </p:pic>
-    </p:spTree>
-    <p:extLst>
-      <p:ext uri="{BB962C8B-B14F-4D97-AF65-F5344CB8AC3E}">
-        <p14:creationId xmlns:p14="http://schemas.microsoft.com/office/powerpoint/2010/main" val="2895882210"/>
-      </p:ext>
-    </p:extLst>
-  </p:cSld>
-  <p:clrMapOvr>
-    <a:masterClrMapping/>
-  </p:clrMapOvr>
-  <p:timing>
-    <p:tnLst>
-      <p:par>
-        <p:cTn id="1" dur="indefinite" restart="never" nodeType="tmRoot"/>
-      </p:par>
-    </p:tnLst>
-  </p:timing>
-</p:sld>
-</file>
-
-<file path=ppt/slides/slide2.xml><?xml version="1.0" encoding="utf-8"?>
-<p:sld xmlns:a="http://schemas.openxmlformats.org/drawingml/2006/main" xmlns:r="http://schemas.openxmlformats.org/officeDocument/2006/relationships" xmlns:p="http://schemas.openxmlformats.org/presentationml/2006/main">
-  <p:cSld>
-    <p:spTree>
-      <p:nvGrpSpPr>
-        <p:cNvPr id="1" name=""/>
-        <p:cNvGrpSpPr/>
-        <p:nvPr/>
-      </p:nvGrpSpPr>
-      <p:grpSpPr>
-        <a:xfrm>
-          <a:off x="0" y="0"/>
-          <a:ext cx="0" cy="0"/>
-          <a:chOff x="0" y="0"/>
-          <a:chExt cx="0" cy="0"/>
-        </a:xfrm>
-      </p:grpSpPr>
-      <p:sp>
-        <p:nvSpPr>
-          <p:cNvPr id="2" name="Title 1"/>
-          <p:cNvSpPr>
-            <a:spLocks noGrp="1"/>
-          </p:cNvSpPr>
-          <p:nvPr>
-            <p:ph type="title"/>
-          </p:nvPr>
-        </p:nvSpPr>
-        <p:spPr/>
-        <p:txBody>
-          <a:bodyPr/>
-          <a:lstStyle/>
-          <a:p>
-            <a:r>
-              <a:rPr lang="ru-RU" dirty="0" smtClean="0"/>
-              <a:t>Обоснование </a:t>
-            </a:r>
-            <a:r>
-              <a:rPr lang="ru-RU" dirty="0"/>
-              <a:t>исследования</a:t>
-            </a:r>
-            <a:endParaRPr lang="en-US" dirty="0"/>
-          </a:p>
-        </p:txBody>
-      </p:sp>
-      <p:sp>
-        <p:nvSpPr>
-          <p:cNvPr id="3" name="Text Placeholder 2"/>
-          <p:cNvSpPr>
-            <a:spLocks noGrp="1"/>
-          </p:cNvSpPr>
-          <p:nvPr>
-            <p:ph type="body" idx="1"/>
-          </p:nvPr>
-        </p:nvSpPr>
-        <p:spPr>
-          <a:xfrm>
-            <a:off x="2108200" y="2089828"/>
-            <a:ext cx="6324600" cy="1258093"/>
-          </a:xfrm>
-        </p:spPr>
-        <p:txBody>
-          <a:bodyPr>
-            <a:noAutofit/>
-          </a:bodyPr>
-          <a:lstStyle/>
-          <a:p>
-            <a:pPr algn="just"/>
-            <a:r>
-              <a:rPr lang="ru-RU" dirty="0"/>
-              <a:t>Взаимосвязь между развитием финансового сектора и экономическим ростом остается предметом активных теоретических и эмпирических дискуссий. Несмотря на общее признание важности устойчивой финансовой системы, конкретное влияние фондовых рынков на экономику трактуется неоднозначно</a:t>
-            </a:r>
-            <a:r>
-              <a:rPr lang="ru-RU" dirty="0" smtClean="0"/>
-              <a:t>.</a:t>
-            </a:r>
-            <a:endParaRPr lang="en-US" dirty="0"/>
-          </a:p>
-        </p:txBody>
-      </p:sp>
-    </p:spTree>
-    <p:extLst>
-      <p:ext uri="{BB962C8B-B14F-4D97-AF65-F5344CB8AC3E}">
-        <p14:creationId xmlns:p14="http://schemas.microsoft.com/office/powerpoint/2010/main" val="3279012890"/>
-      </p:ext>
-    </p:extLst>
-  </p:cSld>
-  <p:clrMapOvr>
-    <a:masterClrMapping/>
-  </p:clrMapOvr>
-  <p:timing>
-    <p:tnLst>
-      <p:par>
-        <p:cTn id="1" dur="indefinite" restart="never" nodeType="tmRoot"/>
-      </p:par>
-    </p:tnLst>
-  </p:timing>
-</p:sld>
-</file>
-
-<file path=ppt/slides/slide20.xml><?xml version="1.0" encoding="utf-8"?>
-<p:sld xmlns:a="http://schemas.openxmlformats.org/drawingml/2006/main" xmlns:r="http://schemas.openxmlformats.org/officeDocument/2006/relationships" xmlns:p="http://schemas.openxmlformats.org/presentationml/2006/main">
-  <p:cSld>
-    <p:spTree>
-      <p:nvGrpSpPr>
-        <p:cNvPr id="1" name=""/>
-        <p:cNvGrpSpPr/>
-        <p:nvPr/>
-      </p:nvGrpSpPr>
-      <p:grpSpPr>
-        <a:xfrm>
-          <a:off x="0" y="0"/>
-          <a:ext cx="0" cy="0"/>
-          <a:chOff x="0" y="0"/>
-          <a:chExt cx="0" cy="0"/>
-        </a:xfrm>
-      </p:grpSpPr>
-      <p:sp>
-        <p:nvSpPr>
-          <p:cNvPr id="2" name="Title 1"/>
-          <p:cNvSpPr>
-            <a:spLocks noGrp="1"/>
-          </p:cNvSpPr>
-          <p:nvPr>
-            <p:ph type="title"/>
-          </p:nvPr>
-        </p:nvSpPr>
-        <p:spPr/>
-        <p:txBody>
-          <a:bodyPr>
-            <a:normAutofit/>
-          </a:bodyPr>
-          <a:lstStyle/>
-          <a:p>
-            <a:r>
-              <a:rPr lang="ru-RU" dirty="0" smtClean="0"/>
-              <a:t>Отклик ВВП </a:t>
-            </a:r>
-            <a:r>
-              <a:rPr lang="ru-RU" dirty="0"/>
-              <a:t>Индии </a:t>
-            </a:r>
-            <a:r>
-              <a:rPr lang="ru-RU" dirty="0" smtClean="0"/>
-              <a:t>на шоки</a:t>
-            </a:r>
-            <a:endParaRPr lang="en-US" dirty="0"/>
-          </a:p>
-        </p:txBody>
-      </p:sp>
-      <p:pic>
-        <p:nvPicPr>
-          <p:cNvPr id="7171" name="Picture 3" descr="C:\Users\bklyu\Documents\Python Scripts\_GitHub_repos\conferences\lomonosov readings 2026\explore_data\irf_india.png"/>
-          <p:cNvPicPr>
-            <a:picLocks noChangeAspect="1" noChangeArrowheads="1"/>
-          </p:cNvPicPr>
-          <p:nvPr/>
-        </p:nvPicPr>
-        <p:blipFill>
-          <a:blip r:embed="rId2">
-            <a:extLst>
-              <a:ext uri="{28A0092B-C50C-407E-A947-70E740481C1C}">
-                <a14:useLocalDpi xmlns:a14="http://schemas.microsoft.com/office/drawing/2010/main" val="0"/>
-              </a:ext>
-            </a:extLst>
-          </a:blip>
-          <a:srcRect/>
-          <a:stretch>
-            <a:fillRect/>
-          </a:stretch>
-        </p:blipFill>
-        <p:spPr bwMode="auto">
-          <a:xfrm>
-            <a:off x="690880" y="1487148"/>
-            <a:ext cx="8778240" cy="2740717"/>
-          </a:xfrm>
-          <a:prstGeom prst="rect">
-            <a:avLst/>
-          </a:prstGeom>
-          <a:noFill/>
-          <a:extLst>
-            <a:ext uri="{909E8E84-426E-40DD-AFC4-6F175D3DCCD1}">
-              <a14:hiddenFill xmlns:a14="http://schemas.microsoft.com/office/drawing/2010/main">
-                <a:solidFill>
-                  <a:srgbClr val="FFFFFF"/>
-                </a:solidFill>
-              </a14:hiddenFill>
-            </a:ext>
-          </a:extLst>
-        </p:spPr>
-      </p:pic>
-    </p:spTree>
-    <p:extLst>
-      <p:ext uri="{BB962C8B-B14F-4D97-AF65-F5344CB8AC3E}">
-        <p14:creationId xmlns:p14="http://schemas.microsoft.com/office/powerpoint/2010/main" val="3820882855"/>
-      </p:ext>
-    </p:extLst>
-  </p:cSld>
-  <p:clrMapOvr>
-    <a:masterClrMapping/>
-  </p:clrMapOvr>
-  <p:timing>
-    <p:tnLst>
-      <p:par>
-        <p:cTn id="1" dur="indefinite" restart="never" nodeType="tmRoot"/>
-      </p:par>
-    </p:tnLst>
-  </p:timing>
-</p:sld>
-</file>
-
-<file path=ppt/slides/slide21.xml><?xml version="1.0" encoding="utf-8"?>
-<p:sld xmlns:a="http://schemas.openxmlformats.org/drawingml/2006/main" xmlns:r="http://schemas.openxmlformats.org/officeDocument/2006/relationships" xmlns:p="http://schemas.openxmlformats.org/presentationml/2006/main">
-  <p:cSld>
-    <p:spTree>
-      <p:nvGrpSpPr>
-        <p:cNvPr id="1" name=""/>
-        <p:cNvGrpSpPr/>
-        <p:nvPr/>
-      </p:nvGrpSpPr>
-      <p:grpSpPr>
-        <a:xfrm>
-          <a:off x="0" y="0"/>
-          <a:ext cx="0" cy="0"/>
-          <a:chOff x="0" y="0"/>
-          <a:chExt cx="0" cy="0"/>
-        </a:xfrm>
-      </p:grpSpPr>
-      <p:sp>
-        <p:nvSpPr>
-          <p:cNvPr id="2" name="Title 1"/>
-          <p:cNvSpPr>
-            <a:spLocks noGrp="1"/>
-          </p:cNvSpPr>
-          <p:nvPr>
-            <p:ph type="title"/>
-          </p:nvPr>
-        </p:nvSpPr>
-        <p:spPr>
-          <a:xfrm>
-            <a:off x="2108200" y="508000"/>
-            <a:ext cx="7543800" cy="1524000"/>
-          </a:xfrm>
-        </p:spPr>
-        <p:txBody>
-          <a:bodyPr/>
-          <a:lstStyle/>
-          <a:p>
-            <a:r>
-              <a:rPr lang="ru-RU" sz="4400" dirty="0"/>
-              <a:t>Кумулятивная функция импульсных откликов</a:t>
-            </a:r>
-            <a:endParaRPr lang="en-US" sz="4400" dirty="0"/>
-          </a:p>
-        </p:txBody>
-      </p:sp>
-      <p:sp>
-        <p:nvSpPr>
-          <p:cNvPr id="3" name="Text Placeholder 2"/>
-          <p:cNvSpPr>
-            <a:spLocks noGrp="1"/>
-          </p:cNvSpPr>
-          <p:nvPr>
-            <p:ph type="body" idx="1"/>
-          </p:nvPr>
-        </p:nvSpPr>
-        <p:spPr/>
-        <p:txBody>
-          <a:bodyPr>
-            <a:noAutofit/>
-          </a:bodyPr>
-          <a:lstStyle/>
-          <a:p>
-            <a:pPr algn="just"/>
-            <a:r>
-              <a:rPr lang="ru-RU" dirty="0"/>
-              <a:t>Кумулятивная функция импульсных откликов (</a:t>
-            </a:r>
-            <a:r>
-              <a:rPr lang="ru-RU" dirty="0" smtClean="0"/>
-              <a:t>CIRF – </a:t>
-            </a:r>
-            <a:r>
-              <a:rPr lang="en-US" dirty="0" smtClean="0"/>
-              <a:t>Cumulative Impulse</a:t>
-            </a:r>
-            <a:r>
-              <a:rPr lang="ru-RU" dirty="0" smtClean="0"/>
-              <a:t> </a:t>
-            </a:r>
-            <a:r>
-              <a:rPr lang="en-US" dirty="0"/>
-              <a:t>Response Function</a:t>
-            </a:r>
-            <a:r>
-              <a:rPr lang="ru-RU" dirty="0" smtClean="0"/>
-              <a:t>) </a:t>
-            </a:r>
-            <a:r>
-              <a:rPr lang="ru-RU" dirty="0"/>
-              <a:t>в моделях векторной </a:t>
-            </a:r>
-            <a:r>
-              <a:rPr lang="ru-RU" dirty="0" smtClean="0"/>
-              <a:t>авторегрессии </a:t>
-            </a:r>
-            <a:r>
-              <a:rPr lang="ru-RU" dirty="0"/>
-              <a:t>показывает совокупный долгосрочный эффект единовременного шока одной переменной на будущие значения других </a:t>
-            </a:r>
-            <a:r>
-              <a:rPr lang="ru-RU" dirty="0" smtClean="0"/>
-              <a:t>переменных. </a:t>
-            </a:r>
-            <a:r>
-              <a:rPr lang="en-US" dirty="0" smtClean="0"/>
-              <a:t/>
-            </a:r>
-            <a:br>
-              <a:rPr lang="en-US" dirty="0" smtClean="0"/>
-            </a:br>
-            <a:r>
-              <a:rPr lang="ru-RU" dirty="0" smtClean="0"/>
-              <a:t>В </a:t>
-            </a:r>
-            <a:r>
-              <a:rPr lang="ru-RU" dirty="0"/>
-              <a:t>отличие от обычного импульсного отклика, который показывает реакцию в конкретный момент времени, CIRF накапливает </a:t>
-            </a:r>
-            <a:r>
-              <a:rPr lang="ru-RU" dirty="0" smtClean="0"/>
-              <a:t>эти реакции, </a:t>
-            </a:r>
-            <a:r>
-              <a:rPr lang="ru-RU" dirty="0"/>
-              <a:t>позволяя оценить, приведет ли шок к постоянному изменению уровня переменной.</a:t>
-            </a:r>
-            <a:endParaRPr lang="en-US" dirty="0"/>
-          </a:p>
-        </p:txBody>
-      </p:sp>
-    </p:spTree>
-    <p:extLst>
-      <p:ext uri="{BB962C8B-B14F-4D97-AF65-F5344CB8AC3E}">
-        <p14:creationId xmlns:p14="http://schemas.microsoft.com/office/powerpoint/2010/main" val="2751044265"/>
-      </p:ext>
-    </p:extLst>
-  </p:cSld>
-  <p:clrMapOvr>
-    <a:masterClrMapping/>
-  </p:clrMapOvr>
-  <p:timing>
-    <p:tnLst>
-      <p:par>
-        <p:cTn id="1" dur="indefinite" restart="never" nodeType="tmRoot"/>
-      </p:par>
-    </p:tnLst>
-  </p:timing>
-</p:sld>
-</file>
-
-<file path=ppt/slides/slide22.xml><?xml version="1.0" encoding="utf-8"?>
-<p:sld xmlns:a="http://schemas.openxmlformats.org/drawingml/2006/main" xmlns:r="http://schemas.openxmlformats.org/officeDocument/2006/relationships" xmlns:p="http://schemas.openxmlformats.org/presentationml/2006/main">
-  <p:cSld>
-    <p:spTree>
-      <p:nvGrpSpPr>
-        <p:cNvPr id="1" name=""/>
-        <p:cNvGrpSpPr/>
-        <p:nvPr/>
-      </p:nvGrpSpPr>
-      <p:grpSpPr>
-        <a:xfrm>
-          <a:off x="0" y="0"/>
-          <a:ext cx="0" cy="0"/>
-          <a:chOff x="0" y="0"/>
-          <a:chExt cx="0" cy="0"/>
-        </a:xfrm>
-      </p:grpSpPr>
-      <p:sp>
-        <p:nvSpPr>
-          <p:cNvPr id="2" name="Title 1"/>
-          <p:cNvSpPr>
-            <a:spLocks noGrp="1"/>
-          </p:cNvSpPr>
-          <p:nvPr>
-            <p:ph type="title"/>
-          </p:nvPr>
-        </p:nvSpPr>
-        <p:spPr/>
-        <p:txBody>
-          <a:bodyPr>
-            <a:normAutofit/>
-          </a:bodyPr>
-          <a:lstStyle/>
-          <a:p>
-            <a:r>
-              <a:rPr lang="ru-RU" dirty="0" smtClean="0"/>
-              <a:t>Накопленная </a:t>
-            </a:r>
-            <a:r>
-              <a:rPr lang="ru-RU" dirty="0"/>
-              <a:t>реакция </a:t>
-            </a:r>
-            <a:r>
-              <a:rPr lang="ru-RU" dirty="0" smtClean="0"/>
-              <a:t>Китая</a:t>
-            </a:r>
-            <a:endParaRPr lang="en-US" dirty="0"/>
-          </a:p>
-        </p:txBody>
-      </p:sp>
-      <p:pic>
-        <p:nvPicPr>
-          <p:cNvPr id="10242" name="Picture 2" descr="C:\Users\bklyu\Documents\Python Scripts\_GitHub_repos\conferences\lomonosov readings 2026\explore_data\cirf_china.png"/>
-          <p:cNvPicPr>
-            <a:picLocks noChangeAspect="1" noChangeArrowheads="1"/>
-          </p:cNvPicPr>
-          <p:nvPr/>
-        </p:nvPicPr>
-        <p:blipFill>
-          <a:blip r:embed="rId2">
-            <a:extLst>
-              <a:ext uri="{28A0092B-C50C-407E-A947-70E740481C1C}">
-                <a14:useLocalDpi xmlns:a14="http://schemas.microsoft.com/office/drawing/2010/main" val="0"/>
-              </a:ext>
-            </a:extLst>
-          </a:blip>
-          <a:srcRect/>
-          <a:stretch>
-            <a:fillRect/>
-          </a:stretch>
-        </p:blipFill>
-        <p:spPr bwMode="auto">
-          <a:xfrm>
-            <a:off x="690880" y="1467286"/>
-            <a:ext cx="8778240" cy="2780439"/>
-          </a:xfrm>
-          <a:prstGeom prst="rect">
-            <a:avLst/>
-          </a:prstGeom>
-          <a:noFill/>
-          <a:extLst>
-            <a:ext uri="{909E8E84-426E-40DD-AFC4-6F175D3DCCD1}">
-              <a14:hiddenFill xmlns:a14="http://schemas.microsoft.com/office/drawing/2010/main">
-                <a:solidFill>
-                  <a:srgbClr val="FFFFFF"/>
-                </a:solidFill>
-              </a14:hiddenFill>
-            </a:ext>
-          </a:extLst>
-        </p:spPr>
-      </p:pic>
-    </p:spTree>
-    <p:extLst>
-      <p:ext uri="{BB962C8B-B14F-4D97-AF65-F5344CB8AC3E}">
-        <p14:creationId xmlns:p14="http://schemas.microsoft.com/office/powerpoint/2010/main" val="2063722478"/>
-      </p:ext>
-    </p:extLst>
-  </p:cSld>
-  <p:clrMapOvr>
-    <a:masterClrMapping/>
-  </p:clrMapOvr>
-  <p:timing>
-    <p:tnLst>
-      <p:par>
-        <p:cTn id="1" dur="indefinite" restart="never" nodeType="tmRoot"/>
-      </p:par>
-    </p:tnLst>
-  </p:timing>
-</p:sld>
-</file>
-
-<file path=ppt/slides/slide23.xml><?xml version="1.0" encoding="utf-8"?>
-<p:sld xmlns:a="http://schemas.openxmlformats.org/drawingml/2006/main" xmlns:r="http://schemas.openxmlformats.org/officeDocument/2006/relationships" xmlns:p="http://schemas.openxmlformats.org/presentationml/2006/main">
-  <p:cSld>
-    <p:spTree>
-      <p:nvGrpSpPr>
-        <p:cNvPr id="1" name=""/>
-        <p:cNvGrpSpPr/>
-        <p:nvPr/>
-      </p:nvGrpSpPr>
-      <p:grpSpPr>
-        <a:xfrm>
-          <a:off x="0" y="0"/>
-          <a:ext cx="0" cy="0"/>
-          <a:chOff x="0" y="0"/>
-          <a:chExt cx="0" cy="0"/>
-        </a:xfrm>
-      </p:grpSpPr>
-      <p:sp>
-        <p:nvSpPr>
-          <p:cNvPr id="2" name="Title 1"/>
-          <p:cNvSpPr>
-            <a:spLocks noGrp="1"/>
-          </p:cNvSpPr>
-          <p:nvPr>
-            <p:ph type="title"/>
-          </p:nvPr>
-        </p:nvSpPr>
-        <p:spPr/>
-        <p:txBody>
-          <a:bodyPr>
-            <a:normAutofit/>
-          </a:bodyPr>
-          <a:lstStyle/>
-          <a:p>
-            <a:r>
-              <a:rPr lang="ru-RU" dirty="0" smtClean="0"/>
-              <a:t>Накопленная реакция ВВП </a:t>
-            </a:r>
-            <a:r>
-              <a:rPr lang="ru-RU" dirty="0"/>
-              <a:t>Индии</a:t>
-            </a:r>
-            <a:endParaRPr lang="en-US" dirty="0"/>
-          </a:p>
-        </p:txBody>
-      </p:sp>
-      <p:pic>
-        <p:nvPicPr>
-          <p:cNvPr id="9219" name="Picture 3" descr="C:\Users\bklyu\Documents\Python Scripts\_GitHub_repos\conferences\lomonosov readings 2026\explore_data\cirf_india.png"/>
-          <p:cNvPicPr>
-            <a:picLocks noChangeAspect="1" noChangeArrowheads="1"/>
-          </p:cNvPicPr>
-          <p:nvPr/>
-        </p:nvPicPr>
-        <p:blipFill>
-          <a:blip r:embed="rId2">
-            <a:extLst>
-              <a:ext uri="{28A0092B-C50C-407E-A947-70E740481C1C}">
-                <a14:useLocalDpi xmlns:a14="http://schemas.microsoft.com/office/drawing/2010/main" val="0"/>
-              </a:ext>
-            </a:extLst>
-          </a:blip>
-          <a:srcRect/>
-          <a:stretch>
-            <a:fillRect/>
-          </a:stretch>
-        </p:blipFill>
-        <p:spPr bwMode="auto">
-          <a:xfrm>
-            <a:off x="690880" y="1475186"/>
-            <a:ext cx="8778240" cy="2764641"/>
-          </a:xfrm>
-          <a:prstGeom prst="rect">
-            <a:avLst/>
-          </a:prstGeom>
-          <a:noFill/>
-          <a:extLst>
-            <a:ext uri="{909E8E84-426E-40DD-AFC4-6F175D3DCCD1}">
-              <a14:hiddenFill xmlns:a14="http://schemas.microsoft.com/office/drawing/2010/main">
-                <a:solidFill>
-                  <a:srgbClr val="FFFFFF"/>
-                </a:solidFill>
-              </a14:hiddenFill>
-            </a:ext>
-          </a:extLst>
-        </p:spPr>
-      </p:pic>
-    </p:spTree>
-    <p:extLst>
-      <p:ext uri="{BB962C8B-B14F-4D97-AF65-F5344CB8AC3E}">
-        <p14:creationId xmlns:p14="http://schemas.microsoft.com/office/powerpoint/2010/main" val="1542038033"/>
-      </p:ext>
-    </p:extLst>
-  </p:cSld>
-  <p:clrMapOvr>
-    <a:masterClrMapping/>
-  </p:clrMapOvr>
-  <p:timing>
-    <p:tnLst>
-      <p:par>
-        <p:cTn id="1" dur="indefinite" restart="never" nodeType="tmRoot"/>
-      </p:par>
-    </p:tnLst>
-  </p:timing>
-</p:sld>
-</file>
-
-<file path=ppt/slides/slide24.xml><?xml version="1.0" encoding="utf-8"?>
-<p:sld xmlns:a="http://schemas.openxmlformats.org/drawingml/2006/main" xmlns:r="http://schemas.openxmlformats.org/officeDocument/2006/relationships" xmlns:p="http://schemas.openxmlformats.org/presentationml/2006/main">
-  <p:cSld>
-    <p:spTree>
-      <p:nvGrpSpPr>
-        <p:cNvPr id="1" name=""/>
-        <p:cNvGrpSpPr/>
-        <p:nvPr/>
-      </p:nvGrpSpPr>
-      <p:grpSpPr>
-        <a:xfrm>
-          <a:off x="0" y="0"/>
-          <a:ext cx="0" cy="0"/>
-          <a:chOff x="0" y="0"/>
-          <a:chExt cx="0" cy="0"/>
-        </a:xfrm>
-      </p:grpSpPr>
-      <p:sp>
-        <p:nvSpPr>
-          <p:cNvPr id="2" name="Title 1"/>
-          <p:cNvSpPr>
-            <a:spLocks noGrp="1"/>
-          </p:cNvSpPr>
-          <p:nvPr>
-            <p:ph type="title"/>
-          </p:nvPr>
-        </p:nvSpPr>
-        <p:spPr/>
-        <p:txBody>
-          <a:bodyPr/>
-          <a:lstStyle/>
-          <a:p>
-            <a:r>
-              <a:rPr lang="ru-RU" sz="4400" dirty="0"/>
-              <a:t>Разложение дисперсии ошибки прогноза</a:t>
-            </a:r>
-            <a:endParaRPr lang="en-US" sz="4400" dirty="0"/>
-          </a:p>
-        </p:txBody>
-      </p:sp>
-      <p:sp>
-        <p:nvSpPr>
-          <p:cNvPr id="3" name="Text Placeholder 2"/>
-          <p:cNvSpPr>
-            <a:spLocks noGrp="1"/>
-          </p:cNvSpPr>
-          <p:nvPr>
-            <p:ph type="body" idx="1"/>
-          </p:nvPr>
-        </p:nvSpPr>
-        <p:spPr/>
-        <p:txBody>
-          <a:bodyPr>
-            <a:noAutofit/>
-          </a:bodyPr>
-          <a:lstStyle/>
-          <a:p>
-            <a:pPr algn="just"/>
-            <a:r>
-              <a:rPr lang="ru-RU" dirty="0" smtClean="0"/>
-              <a:t>Разложение </a:t>
-            </a:r>
-            <a:r>
-              <a:rPr lang="ru-RU" dirty="0"/>
-              <a:t>дисперсии ошибки прогноза </a:t>
-            </a:r>
-            <a:r>
-              <a:rPr lang="ru-RU" dirty="0" smtClean="0"/>
-              <a:t>(FEVD – Forecast Error </a:t>
-            </a:r>
-            <a:r>
-              <a:rPr lang="ru-RU" dirty="0"/>
-              <a:t>Variance </a:t>
-            </a:r>
-            <a:r>
-              <a:rPr lang="ru-RU" dirty="0" smtClean="0"/>
-              <a:t>Decomposition), — </a:t>
-            </a:r>
-            <a:r>
-              <a:rPr lang="ru-RU" dirty="0"/>
-              <a:t>это метод в эконометрике (</a:t>
-            </a:r>
-            <a:r>
-              <a:rPr lang="ru-RU"/>
-              <a:t>обычно </a:t>
-            </a:r>
-            <a:r>
-              <a:rPr lang="ru-RU" smtClean="0"/>
-              <a:t/>
-            </a:r>
-            <a:br>
-              <a:rPr lang="ru-RU" smtClean="0"/>
-            </a:br>
-            <a:r>
-              <a:rPr lang="ru-RU" smtClean="0"/>
-              <a:t>в </a:t>
-            </a:r>
-            <a:r>
-              <a:rPr lang="ru-RU" dirty="0"/>
-              <a:t>моделях VAR), определяющий, какой процент волатильности (дисперсии) одной переменной объясняется неожиданными шоками другой переменной. FEVD показывает </a:t>
-            </a:r>
-            <a:r>
-              <a:rPr lang="ru-RU" b="1" dirty="0"/>
-              <a:t>относительную важность каждого структурного шока </a:t>
-            </a:r>
-            <a:r>
-              <a:rPr lang="ru-RU" b="1" dirty="0" smtClean="0"/>
-              <a:t>для </a:t>
-            </a:r>
-            <a:r>
-              <a:rPr lang="ru-RU" b="1" dirty="0"/>
-              <a:t>переменных системы</a:t>
-            </a:r>
-            <a:r>
-              <a:rPr lang="ru-RU" dirty="0"/>
-              <a:t> </a:t>
-            </a:r>
-            <a:r>
-              <a:rPr lang="ru-RU" dirty="0" smtClean="0"/>
-              <a:t/>
-            </a:r>
-            <a:br>
-              <a:rPr lang="ru-RU" dirty="0" smtClean="0"/>
-            </a:br>
-            <a:r>
-              <a:rPr lang="ru-RU" dirty="0" smtClean="0"/>
-              <a:t>в </a:t>
-            </a:r>
-            <a:r>
-              <a:rPr lang="ru-RU" dirty="0"/>
-              <a:t>краткосрочной и долгосрочной перспективе.</a:t>
-            </a:r>
-            <a:endParaRPr lang="en-US" dirty="0"/>
-          </a:p>
-        </p:txBody>
-      </p:sp>
-    </p:spTree>
-    <p:extLst>
-      <p:ext uri="{BB962C8B-B14F-4D97-AF65-F5344CB8AC3E}">
-        <p14:creationId xmlns:p14="http://schemas.microsoft.com/office/powerpoint/2010/main" val="2751044265"/>
-      </p:ext>
-    </p:extLst>
-  </p:cSld>
-  <p:clrMapOvr>
-    <a:masterClrMapping/>
-  </p:clrMapOvr>
-  <p:timing>
-    <p:tnLst>
-      <p:par>
-        <p:cTn id="1" dur="indefinite" restart="never" nodeType="tmRoot"/>
-      </p:par>
-    </p:tnLst>
-  </p:timing>
-</p:sld>
-</file>
-
-<file path=ppt/slides/slide25.xml><?xml version="1.0" encoding="utf-8"?>
-<p:sld xmlns:a="http://schemas.openxmlformats.org/drawingml/2006/main" xmlns:r="http://schemas.openxmlformats.org/officeDocument/2006/relationships" xmlns:p="http://schemas.openxmlformats.org/presentationml/2006/main">
-  <p:cSld>
-    <p:spTree>
-      <p:nvGrpSpPr>
-        <p:cNvPr id="1" name=""/>
-        <p:cNvGrpSpPr/>
-        <p:nvPr/>
-      </p:nvGrpSpPr>
-      <p:grpSpPr>
-        <a:xfrm>
-          <a:off x="0" y="0"/>
-          <a:ext cx="0" cy="0"/>
-          <a:chOff x="0" y="0"/>
-          <a:chExt cx="0" cy="0"/>
-        </a:xfrm>
-      </p:grpSpPr>
-      <p:sp>
-        <p:nvSpPr>
-          <p:cNvPr id="2" name="Title 1"/>
-          <p:cNvSpPr>
-            <a:spLocks noGrp="1"/>
-          </p:cNvSpPr>
-          <p:nvPr>
-            <p:ph type="title"/>
-          </p:nvPr>
-        </p:nvSpPr>
-        <p:spPr/>
-        <p:txBody>
-          <a:bodyPr>
-            <a:normAutofit/>
-          </a:bodyPr>
-          <a:lstStyle/>
-          <a:p>
-            <a:r>
-              <a:rPr lang="ru-RU" dirty="0" smtClean="0"/>
-              <a:t>Вклад переменных в ВВП Индии</a:t>
-            </a:r>
-            <a:endParaRPr lang="en-US" dirty="0"/>
-          </a:p>
-        </p:txBody>
-      </p:sp>
-      <p:pic>
-        <p:nvPicPr>
-          <p:cNvPr id="11266" name="Picture 2" descr="C:\Users\bklyu\Documents\Python Scripts\_GitHub_repos\conferences\lomonosov readings 2026\explore_data\fevd_india.png"/>
-          <p:cNvPicPr>
-            <a:picLocks noChangeAspect="1" noChangeArrowheads="1"/>
-          </p:cNvPicPr>
-          <p:nvPr/>
-        </p:nvPicPr>
-        <p:blipFill>
-          <a:blip r:embed="rId2">
-            <a:extLst>
-              <a:ext uri="{28A0092B-C50C-407E-A947-70E740481C1C}">
-                <a14:useLocalDpi xmlns:a14="http://schemas.microsoft.com/office/drawing/2010/main" val="0"/>
-              </a:ext>
-            </a:extLst>
-          </a:blip>
-          <a:srcRect/>
-          <a:stretch>
-            <a:fillRect/>
-          </a:stretch>
-        </p:blipFill>
-        <p:spPr bwMode="auto">
-          <a:xfrm>
-            <a:off x="690880" y="1716334"/>
-            <a:ext cx="8778240" cy="2282343"/>
-          </a:xfrm>
-          <a:prstGeom prst="rect">
-            <a:avLst/>
-          </a:prstGeom>
-          <a:noFill/>
-          <a:extLst>
-            <a:ext uri="{909E8E84-426E-40DD-AFC4-6F175D3DCCD1}">
-              <a14:hiddenFill xmlns:a14="http://schemas.microsoft.com/office/drawing/2010/main">
-                <a:solidFill>
-                  <a:srgbClr val="FFFFFF"/>
-                </a:solidFill>
-              </a14:hiddenFill>
-            </a:ext>
-          </a:extLst>
-        </p:spPr>
-      </p:pic>
-    </p:spTree>
-    <p:extLst>
-      <p:ext uri="{BB962C8B-B14F-4D97-AF65-F5344CB8AC3E}">
-        <p14:creationId xmlns:p14="http://schemas.microsoft.com/office/powerpoint/2010/main" val="3329742558"/>
-      </p:ext>
-    </p:extLst>
-  </p:cSld>
-  <p:clrMapOvr>
-    <a:masterClrMapping/>
-  </p:clrMapOvr>
-  <p:timing>
-    <p:tnLst>
-      <p:par>
-        <p:cTn id="1" dur="indefinite" restart="never" nodeType="tmRoot"/>
-      </p:par>
-    </p:tnLst>
-  </p:timing>
-</p:sld>
-</file>
-
-<file path=ppt/slides/slide26.xml><?xml version="1.0" encoding="utf-8"?>
-<p:sld xmlns:a="http://schemas.openxmlformats.org/drawingml/2006/main" xmlns:r="http://schemas.openxmlformats.org/officeDocument/2006/relationships" xmlns:p="http://schemas.openxmlformats.org/presentationml/2006/main">
-  <p:cSld>
-    <p:spTree>
-      <p:nvGrpSpPr>
-        <p:cNvPr id="1" name=""/>
-        <p:cNvGrpSpPr/>
-        <p:nvPr/>
-      </p:nvGrpSpPr>
-      <p:grpSpPr>
-        <a:xfrm>
-          <a:off x="0" y="0"/>
-          <a:ext cx="0" cy="0"/>
-          <a:chOff x="0" y="0"/>
-          <a:chExt cx="0" cy="0"/>
-        </a:xfrm>
-      </p:grpSpPr>
-      <p:sp>
-        <p:nvSpPr>
-          <p:cNvPr id="2" name="Title 1"/>
-          <p:cNvSpPr>
-            <a:spLocks noGrp="1"/>
-          </p:cNvSpPr>
-          <p:nvPr>
-            <p:ph type="title"/>
-          </p:nvPr>
-        </p:nvSpPr>
-        <p:spPr/>
-        <p:txBody>
-          <a:bodyPr>
-            <a:normAutofit/>
-          </a:bodyPr>
-          <a:lstStyle/>
-          <a:p>
-            <a:r>
-              <a:rPr lang="ru-RU" dirty="0"/>
-              <a:t>Вклад переменных в ВВП </a:t>
-            </a:r>
-            <a:r>
-              <a:rPr lang="ru-RU" dirty="0" smtClean="0"/>
-              <a:t>Китая</a:t>
-            </a:r>
-            <a:endParaRPr lang="en-US" dirty="0"/>
-          </a:p>
-        </p:txBody>
-      </p:sp>
-      <p:pic>
-        <p:nvPicPr>
-          <p:cNvPr id="12290" name="Picture 2" descr="C:\Users\bklyu\Documents\Python Scripts\_GitHub_repos\conferences\lomonosov readings 2026\explore_data\fevd_china.png"/>
-          <p:cNvPicPr>
-            <a:picLocks noChangeAspect="1" noChangeArrowheads="1"/>
-          </p:cNvPicPr>
-          <p:nvPr/>
-        </p:nvPicPr>
-        <p:blipFill>
-          <a:blip r:embed="rId2">
-            <a:extLst>
-              <a:ext uri="{28A0092B-C50C-407E-A947-70E740481C1C}">
-                <a14:useLocalDpi xmlns:a14="http://schemas.microsoft.com/office/drawing/2010/main" val="0"/>
-              </a:ext>
-            </a:extLst>
-          </a:blip>
-          <a:srcRect/>
-          <a:stretch>
-            <a:fillRect/>
-          </a:stretch>
-        </p:blipFill>
-        <p:spPr bwMode="auto">
-          <a:xfrm>
-            <a:off x="690880" y="1706579"/>
-            <a:ext cx="8778240" cy="2301851"/>
-          </a:xfrm>
-          <a:prstGeom prst="rect">
-            <a:avLst/>
-          </a:prstGeom>
-          <a:noFill/>
-          <a:extLst>
-            <a:ext uri="{909E8E84-426E-40DD-AFC4-6F175D3DCCD1}">
-              <a14:hiddenFill xmlns:a14="http://schemas.microsoft.com/office/drawing/2010/main">
-                <a:solidFill>
-                  <a:srgbClr val="FFFFFF"/>
-                </a:solidFill>
-              </a14:hiddenFill>
-            </a:ext>
-          </a:extLst>
-        </p:spPr>
-      </p:pic>
-    </p:spTree>
-    <p:extLst>
-      <p:ext uri="{BB962C8B-B14F-4D97-AF65-F5344CB8AC3E}">
-        <p14:creationId xmlns:p14="http://schemas.microsoft.com/office/powerpoint/2010/main" val="4106966577"/>
-      </p:ext>
-    </p:extLst>
-  </p:cSld>
-  <p:clrMapOvr>
-    <a:masterClrMapping/>
-  </p:clrMapOvr>
-  <p:timing>
-    <p:tnLst>
-      <p:par>
-        <p:cTn id="1" dur="indefinite" restart="never" nodeType="tmRoot"/>
-      </p:par>
-    </p:tnLst>
-  </p:timing>
-</p:sld>
-</file>
-
-<file path=ppt/slides/slide27.xml><?xml version="1.0" encoding="utf-8"?>
-<p:sld xmlns:a="http://schemas.openxmlformats.org/drawingml/2006/main" xmlns:r="http://schemas.openxmlformats.org/officeDocument/2006/relationships" xmlns:p="http://schemas.openxmlformats.org/presentationml/2006/main">
-  <p:cSld>
-    <p:spTree>
-      <p:nvGrpSpPr>
-        <p:cNvPr id="1" name=""/>
-        <p:cNvGrpSpPr/>
-        <p:nvPr/>
-      </p:nvGrpSpPr>
-      <p:grpSpPr>
-        <a:xfrm>
-          <a:off x="0" y="0"/>
-          <a:ext cx="0" cy="0"/>
-          <a:chOff x="0" y="0"/>
-          <a:chExt cx="0" cy="0"/>
-        </a:xfrm>
-      </p:grpSpPr>
-      <p:sp>
-        <p:nvSpPr>
-          <p:cNvPr id="2" name="Title 1"/>
-          <p:cNvSpPr>
-            <a:spLocks noGrp="1"/>
-          </p:cNvSpPr>
-          <p:nvPr>
-            <p:ph type="title"/>
-          </p:nvPr>
-        </p:nvSpPr>
-        <p:spPr/>
-        <p:txBody>
-          <a:bodyPr/>
-          <a:lstStyle/>
-          <a:p>
-            <a:r>
-              <a:rPr lang="ru-RU" sz="4400" dirty="0"/>
-              <a:t>Выводы (1)</a:t>
-            </a:r>
-            <a:endParaRPr lang="en-US" sz="4400" dirty="0"/>
-          </a:p>
-        </p:txBody>
-      </p:sp>
-      <p:sp>
-        <p:nvSpPr>
-          <p:cNvPr id="3" name="Text Placeholder 2"/>
-          <p:cNvSpPr>
-            <a:spLocks noGrp="1"/>
-          </p:cNvSpPr>
-          <p:nvPr>
-            <p:ph type="body" idx="1"/>
-          </p:nvPr>
-        </p:nvSpPr>
-        <p:spPr>
-          <a:xfrm>
-            <a:off x="1778000" y="2089829"/>
-            <a:ext cx="7721600" cy="1258093"/>
-          </a:xfrm>
-        </p:spPr>
-        <p:txBody>
-          <a:bodyPr>
-            <a:noAutofit/>
-          </a:bodyPr>
-          <a:lstStyle/>
-          <a:p>
-            <a:pPr marL="416042" indent="-342891" algn="just">
-              <a:buFont typeface="Arial" panose="020B0604020202020204" pitchFamily="34" charset="0"/>
-              <a:buChar char="•"/>
-            </a:pPr>
-            <a:r>
-              <a:rPr lang="ru-RU" dirty="0" smtClean="0"/>
-              <a:t>Долгосрочный тренд </a:t>
-            </a:r>
-            <a:r>
-              <a:rPr lang="ru-RU" dirty="0"/>
-              <a:t>совместного </a:t>
-            </a:r>
-            <a:r>
-              <a:rPr lang="ru-RU" dirty="0" smtClean="0"/>
-              <a:t>роста (</a:t>
-            </a:r>
-            <a:r>
-              <a:rPr lang="ru-RU" dirty="0" err="1" smtClean="0"/>
-              <a:t>коинтеграция</a:t>
-            </a:r>
-            <a:r>
-              <a:rPr lang="ru-RU" dirty="0" smtClean="0"/>
-              <a:t>):</a:t>
-            </a:r>
-          </a:p>
-          <a:p>
-            <a:pPr marL="870945" lvl="1" indent="-285744" algn="just">
-              <a:buFont typeface="Arial" panose="020B0604020202020204" pitchFamily="34" charset="0"/>
-              <a:buChar char="•"/>
-            </a:pPr>
-            <a:r>
-              <a:rPr lang="ru-RU" dirty="0" smtClean="0"/>
-              <a:t>В </a:t>
-            </a:r>
-            <a:r>
-              <a:rPr lang="ru-RU" b="1" dirty="0" smtClean="0"/>
-              <a:t>Индии</a:t>
-            </a:r>
-            <a:r>
-              <a:rPr lang="ru-RU" dirty="0" smtClean="0"/>
-              <a:t>: экономика растет совместно с рыночной капитализацией.</a:t>
-            </a:r>
-          </a:p>
-          <a:p>
-            <a:pPr marL="870945" lvl="1" indent="-285744" algn="just">
-              <a:buFont typeface="Arial" panose="020B0604020202020204" pitchFamily="34" charset="0"/>
-              <a:buChar char="•"/>
-            </a:pPr>
-            <a:r>
-              <a:rPr lang="ru-RU" dirty="0" smtClean="0"/>
-              <a:t>В</a:t>
-            </a:r>
-            <a:r>
-              <a:rPr lang="ru-RU" dirty="0"/>
-              <a:t> </a:t>
-            </a:r>
-            <a:r>
-              <a:rPr lang="ru-RU" b="1" dirty="0"/>
-              <a:t>Китае</a:t>
-            </a:r>
-            <a:r>
-              <a:rPr lang="ru-RU" dirty="0"/>
-              <a:t>: экономика растет совместно с задолженностью.</a:t>
-            </a:r>
-          </a:p>
-          <a:p>
-            <a:pPr marL="416042" indent="-342891" algn="just">
-              <a:buFont typeface="Arial" panose="020B0604020202020204" pitchFamily="34" charset="0"/>
-              <a:buChar char="•"/>
-            </a:pPr>
-            <a:r>
-              <a:rPr lang="ru-RU" dirty="0"/>
-              <a:t>Отсутствие долгосрочных связей не исключает значимых краткосрочных взаимодействий между переменными</a:t>
-            </a:r>
-            <a:r>
-              <a:rPr lang="ru-RU" dirty="0" smtClean="0"/>
-              <a:t>.</a:t>
-            </a:r>
-            <a:endParaRPr lang="en-US" dirty="0"/>
-          </a:p>
-        </p:txBody>
-      </p:sp>
-    </p:spTree>
-    <p:extLst>
-      <p:ext uri="{BB962C8B-B14F-4D97-AF65-F5344CB8AC3E}">
-        <p14:creationId xmlns:p14="http://schemas.microsoft.com/office/powerpoint/2010/main" val="3682347184"/>
-      </p:ext>
-    </p:extLst>
-  </p:cSld>
-  <p:clrMapOvr>
-    <a:masterClrMapping/>
-  </p:clrMapOvr>
-  <p:timing>
-    <p:tnLst>
-      <p:par>
-        <p:cTn id="1" dur="indefinite" restart="never" nodeType="tmRoot"/>
-      </p:par>
-    </p:tnLst>
-  </p:timing>
-</p:sld>
-</file>
-
-<file path=ppt/slides/slide28.xml><?xml version="1.0" encoding="utf-8"?>
-<p:sld xmlns:a="http://schemas.openxmlformats.org/drawingml/2006/main" xmlns:r="http://schemas.openxmlformats.org/officeDocument/2006/relationships" xmlns:p="http://schemas.openxmlformats.org/presentationml/2006/main">
-  <p:cSld>
-    <p:spTree>
-      <p:nvGrpSpPr>
-        <p:cNvPr id="1" name=""/>
-        <p:cNvGrpSpPr/>
-        <p:nvPr/>
-      </p:nvGrpSpPr>
-      <p:grpSpPr>
-        <a:xfrm>
-          <a:off x="0" y="0"/>
-          <a:ext cx="0" cy="0"/>
-          <a:chOff x="0" y="0"/>
-          <a:chExt cx="0" cy="0"/>
-        </a:xfrm>
-      </p:grpSpPr>
-      <p:sp>
-        <p:nvSpPr>
-          <p:cNvPr id="2" name="Title 1"/>
-          <p:cNvSpPr>
-            <a:spLocks noGrp="1"/>
-          </p:cNvSpPr>
-          <p:nvPr>
-            <p:ph type="title"/>
-          </p:nvPr>
-        </p:nvSpPr>
-        <p:spPr/>
-        <p:txBody>
-          <a:bodyPr/>
-          <a:lstStyle/>
-          <a:p>
-            <a:r>
-              <a:rPr lang="ru-RU" sz="4400" dirty="0"/>
-              <a:t>Выводы (2)</a:t>
-            </a:r>
-            <a:endParaRPr lang="en-US" sz="4400" dirty="0"/>
-          </a:p>
-        </p:txBody>
-      </p:sp>
-      <p:sp>
-        <p:nvSpPr>
-          <p:cNvPr id="3" name="Text Placeholder 2"/>
-          <p:cNvSpPr>
-            <a:spLocks noGrp="1"/>
-          </p:cNvSpPr>
-          <p:nvPr>
-            <p:ph type="body" idx="1"/>
-          </p:nvPr>
-        </p:nvSpPr>
-        <p:spPr>
-          <a:xfrm>
-            <a:off x="1778000" y="2089829"/>
-            <a:ext cx="7264400" cy="1258093"/>
-          </a:xfrm>
-        </p:spPr>
-        <p:txBody>
-          <a:bodyPr>
-            <a:noAutofit/>
-          </a:bodyPr>
-          <a:lstStyle/>
-          <a:p>
-            <a:pPr marL="416042" indent="-342891" algn="just">
-              <a:buFont typeface="Arial" panose="020B0604020202020204" pitchFamily="34" charset="0"/>
-              <a:buChar char="•"/>
-            </a:pPr>
-            <a:r>
-              <a:rPr lang="ru-RU" dirty="0"/>
-              <a:t>Направление влияния на ВВП </a:t>
-            </a:r>
-            <a:r>
-              <a:rPr lang="ru-RU" dirty="0" smtClean="0"/>
-              <a:t>(кумулятивный отклик):</a:t>
-            </a:r>
-          </a:p>
-          <a:p>
-            <a:pPr marL="1211550" lvl="1" indent="-342891" algn="just">
-              <a:buFont typeface="Arial" panose="020B0604020202020204" pitchFamily="34" charset="0"/>
-              <a:buChar char="•"/>
-            </a:pPr>
-            <a:r>
-              <a:rPr lang="ru-RU" b="1" dirty="0" smtClean="0"/>
-              <a:t>В </a:t>
-            </a:r>
-            <a:r>
-              <a:rPr lang="ru-RU" b="1" dirty="0"/>
-              <a:t>Индии</a:t>
-            </a:r>
-            <a:r>
-              <a:rPr lang="ru-RU" dirty="0"/>
-              <a:t> положительное влияние на ВВП оказывают: рыночная капитализация, задолженность и экспорт </a:t>
-            </a:r>
-            <a:r>
-              <a:rPr lang="ru-RU" dirty="0" smtClean="0"/>
-              <a:t>товаров </a:t>
-            </a:r>
-            <a:r>
-              <a:rPr lang="ru-RU" dirty="0"/>
-              <a:t>и </a:t>
-            </a:r>
-            <a:r>
-              <a:rPr lang="ru-RU" dirty="0" smtClean="0"/>
-              <a:t>услуг.</a:t>
-            </a:r>
-          </a:p>
-          <a:p>
-            <a:pPr marL="1211550" lvl="1" indent="-342891" algn="just">
-              <a:buFont typeface="Arial" panose="020B0604020202020204" pitchFamily="34" charset="0"/>
-              <a:buChar char="•"/>
-            </a:pPr>
-            <a:r>
-              <a:rPr lang="ru-RU" b="1" dirty="0" smtClean="0"/>
-              <a:t>В </a:t>
-            </a:r>
-            <a:r>
-              <a:rPr lang="ru-RU" b="1" dirty="0"/>
-              <a:t>Китае</a:t>
-            </a:r>
-            <a:r>
-              <a:rPr lang="ru-RU" dirty="0"/>
-              <a:t> структура влияния аналогична, за исключением ключевого отличия: рыночная капитализация оказывает </a:t>
-            </a:r>
-            <a:r>
-              <a:rPr lang="ru-RU" b="1" dirty="0"/>
-              <a:t>отрицательное</a:t>
-            </a:r>
-            <a:r>
-              <a:rPr lang="ru-RU" dirty="0"/>
-              <a:t> влияние на ВВП</a:t>
-            </a:r>
-            <a:r>
-              <a:rPr lang="ru-RU" dirty="0" smtClean="0"/>
-              <a:t>.</a:t>
-            </a:r>
-            <a:endParaRPr lang="en-US" dirty="0"/>
-          </a:p>
-        </p:txBody>
-      </p:sp>
-    </p:spTree>
-    <p:extLst>
-      <p:ext uri="{BB962C8B-B14F-4D97-AF65-F5344CB8AC3E}">
-        <p14:creationId xmlns:p14="http://schemas.microsoft.com/office/powerpoint/2010/main" val="1651311990"/>
-      </p:ext>
-    </p:extLst>
-  </p:cSld>
-  <p:clrMapOvr>
-    <a:masterClrMapping/>
-  </p:clrMapOvr>
-  <p:timing>
-    <p:tnLst>
-      <p:par>
-        <p:cTn id="1" dur="indefinite" restart="never" nodeType="tmRoot"/>
-      </p:par>
-    </p:tnLst>
-  </p:timing>
-</p:sld>
-</file>
-
-<file path=ppt/slides/slide29.xml><?xml version="1.0" encoding="utf-8"?>
-<p:sld xmlns:a="http://schemas.openxmlformats.org/drawingml/2006/main" xmlns:r="http://schemas.openxmlformats.org/officeDocument/2006/relationships" xmlns:p="http://schemas.openxmlformats.org/presentationml/2006/main">
-  <p:cSld>
-    <p:spTree>
-      <p:nvGrpSpPr>
-        <p:cNvPr id="1" name=""/>
-        <p:cNvGrpSpPr/>
-        <p:nvPr/>
-      </p:nvGrpSpPr>
-      <p:grpSpPr>
-        <a:xfrm>
-          <a:off x="0" y="0"/>
-          <a:ext cx="0" cy="0"/>
-          <a:chOff x="0" y="0"/>
-          <a:chExt cx="0" cy="0"/>
-        </a:xfrm>
-      </p:grpSpPr>
-      <p:sp>
-        <p:nvSpPr>
-          <p:cNvPr id="2" name="Title 1"/>
-          <p:cNvSpPr>
-            <a:spLocks noGrp="1"/>
-          </p:cNvSpPr>
-          <p:nvPr>
-            <p:ph type="title"/>
-          </p:nvPr>
-        </p:nvSpPr>
-        <p:spPr/>
-        <p:txBody>
-          <a:bodyPr/>
-          <a:lstStyle/>
-          <a:p>
-            <a:r>
-              <a:rPr lang="ru-RU" sz="4400" dirty="0"/>
-              <a:t>Выводы (3)</a:t>
-            </a:r>
-            <a:endParaRPr lang="en-US" sz="4400" dirty="0"/>
-          </a:p>
-        </p:txBody>
-      </p:sp>
-      <p:sp>
-        <p:nvSpPr>
-          <p:cNvPr id="3" name="Text Placeholder 2"/>
-          <p:cNvSpPr>
-            <a:spLocks noGrp="1"/>
-          </p:cNvSpPr>
-          <p:nvPr>
-            <p:ph type="body" idx="1"/>
-          </p:nvPr>
-        </p:nvSpPr>
-        <p:spPr/>
-        <p:txBody>
-          <a:bodyPr>
-            <a:noAutofit/>
-          </a:bodyPr>
-          <a:lstStyle/>
-          <a:p>
-            <a:pPr marL="416042" indent="-342891" algn="just">
-              <a:buFont typeface="Arial" panose="020B0604020202020204" pitchFamily="34" charset="0"/>
-              <a:buChar char="•"/>
-            </a:pPr>
-            <a:r>
-              <a:rPr lang="ru-RU" dirty="0" smtClean="0"/>
-              <a:t>Переменные </a:t>
-            </a:r>
-            <a:r>
-              <a:rPr lang="ru-RU" dirty="0" smtClean="0"/>
-              <a:t>(без учета вклада </a:t>
-            </a:r>
-            <a:r>
-              <a:rPr lang="ru-RU" dirty="0" smtClean="0"/>
-              <a:t>ВВП) объясняют </a:t>
-            </a:r>
-            <a:r>
-              <a:rPr lang="ru-RU" dirty="0" smtClean="0"/>
-              <a:t>больший </a:t>
-            </a:r>
-            <a:r>
-              <a:rPr lang="ru-RU" dirty="0"/>
-              <a:t>объем вариации ВВП в </a:t>
-            </a:r>
-            <a:r>
-              <a:rPr lang="ru-RU" b="1" dirty="0"/>
-              <a:t>Индии </a:t>
-            </a:r>
-            <a:r>
-              <a:rPr lang="ru-RU" b="1" dirty="0" smtClean="0"/>
-              <a:t>(</a:t>
-            </a:r>
-            <a:r>
-              <a:rPr lang="en-US" b="1" dirty="0" smtClean="0"/>
-              <a:t>~</a:t>
-            </a:r>
-            <a:r>
-              <a:rPr lang="ru-RU" b="1" dirty="0" smtClean="0"/>
-              <a:t>30</a:t>
-            </a:r>
-            <a:r>
-              <a:rPr lang="ru-RU" b="1" dirty="0"/>
-              <a:t>%)</a:t>
-            </a:r>
-            <a:r>
-              <a:rPr lang="ru-RU" dirty="0"/>
-              <a:t> , чем в </a:t>
-            </a:r>
-            <a:r>
-              <a:rPr lang="ru-RU" b="1" dirty="0"/>
-              <a:t>Китае </a:t>
-            </a:r>
-            <a:r>
-              <a:rPr lang="ru-RU" b="1" dirty="0" smtClean="0"/>
-              <a:t>(</a:t>
-            </a:r>
-            <a:r>
-              <a:rPr lang="en-US" b="1" dirty="0" smtClean="0"/>
-              <a:t>~</a:t>
-            </a:r>
-            <a:r>
-              <a:rPr lang="ru-RU" b="1" dirty="0" smtClean="0"/>
-              <a:t>10</a:t>
-            </a:r>
-            <a:r>
-              <a:rPr lang="ru-RU" b="1" dirty="0" smtClean="0"/>
-              <a:t>%)</a:t>
-            </a:r>
-            <a:r>
-              <a:rPr lang="ru-RU" dirty="0" smtClean="0"/>
-              <a:t>:</a:t>
-            </a:r>
-          </a:p>
-          <a:p>
-            <a:pPr marL="1211550" lvl="1" indent="-342891" algn="just">
-              <a:buFont typeface="Arial" panose="020B0604020202020204" pitchFamily="34" charset="0"/>
-              <a:buChar char="•"/>
-            </a:pPr>
-            <a:r>
-              <a:rPr lang="ru-RU" b="1" dirty="0" smtClean="0"/>
-              <a:t>Индия</a:t>
-            </a:r>
-            <a:r>
-              <a:rPr lang="ru-RU" b="1" dirty="0"/>
-              <a:t>:</a:t>
-            </a:r>
-            <a:r>
-              <a:rPr lang="ru-RU" dirty="0"/>
-              <a:t> основную объяснительную силу несет </a:t>
-            </a:r>
-            <a:r>
-              <a:rPr lang="ru-RU" b="1" dirty="0"/>
-              <a:t>капитализация </a:t>
-            </a:r>
-            <a:r>
-              <a:rPr lang="ru-RU" b="1" dirty="0" smtClean="0"/>
-              <a:t>(</a:t>
-            </a:r>
-            <a:r>
-              <a:rPr lang="en-US" b="1" dirty="0" smtClean="0"/>
-              <a:t>~</a:t>
-            </a:r>
-            <a:r>
-              <a:rPr lang="ru-RU" b="1" dirty="0" smtClean="0"/>
-              <a:t>15</a:t>
-            </a:r>
-            <a:r>
-              <a:rPr lang="ru-RU" b="1" dirty="0"/>
-              <a:t>%)</a:t>
-            </a:r>
-            <a:r>
-              <a:rPr lang="ru-RU" dirty="0"/>
-              <a:t> , далее следуют задолженность и экспорт (по </a:t>
-            </a:r>
-            <a:r>
-              <a:rPr lang="en-US" dirty="0" smtClean="0"/>
-              <a:t>~</a:t>
-            </a:r>
-            <a:r>
-              <a:rPr lang="ru-RU" dirty="0" smtClean="0"/>
-              <a:t>7.5</a:t>
-            </a:r>
-            <a:r>
-              <a:rPr lang="ru-RU" dirty="0"/>
-              <a:t>% каждый</a:t>
-            </a:r>
-            <a:r>
-              <a:rPr lang="ru-RU" dirty="0" smtClean="0"/>
-              <a:t>).</a:t>
-            </a:r>
-          </a:p>
-          <a:p>
-            <a:pPr marL="1211550" lvl="1" indent="-342891" algn="just">
-              <a:buFont typeface="Arial" panose="020B0604020202020204" pitchFamily="34" charset="0"/>
-              <a:buChar char="•"/>
-            </a:pPr>
-            <a:r>
-              <a:rPr lang="ru-RU" b="1" dirty="0" smtClean="0"/>
-              <a:t>Китай</a:t>
-            </a:r>
-            <a:r>
-              <a:rPr lang="ru-RU" b="1" dirty="0"/>
-              <a:t>:</a:t>
-            </a:r>
-            <a:r>
-              <a:rPr lang="ru-RU" dirty="0"/>
-              <a:t> ключевым фактором является </a:t>
-            </a:r>
-            <a:r>
-              <a:rPr lang="ru-RU" b="1" dirty="0"/>
-              <a:t>задолженность </a:t>
-            </a:r>
-            <a:r>
-              <a:rPr lang="ru-RU" b="1" dirty="0" smtClean="0"/>
-              <a:t>(</a:t>
-            </a:r>
-            <a:r>
-              <a:rPr lang="en-US" b="1" dirty="0" smtClean="0"/>
-              <a:t>~</a:t>
-            </a:r>
-            <a:r>
-              <a:rPr lang="ru-RU" b="1" dirty="0" smtClean="0"/>
-              <a:t>5</a:t>
-            </a:r>
-            <a:r>
-              <a:rPr lang="ru-RU" b="1" dirty="0"/>
-              <a:t>%)</a:t>
-            </a:r>
-            <a:r>
-              <a:rPr lang="ru-RU" dirty="0"/>
-              <a:t> , </a:t>
-            </a:r>
-            <a:r>
-              <a:rPr lang="ru-RU" dirty="0" smtClean="0"/>
-              <a:t/>
-            </a:r>
-            <a:br>
-              <a:rPr lang="ru-RU" dirty="0" smtClean="0"/>
-            </a:br>
-            <a:r>
-              <a:rPr lang="ru-RU" dirty="0" smtClean="0"/>
-              <a:t>за </a:t>
-            </a:r>
-            <a:r>
-              <a:rPr lang="ru-RU" dirty="0"/>
-              <a:t>ней следуют экспорт </a:t>
-            </a:r>
-            <a:r>
-              <a:rPr lang="ru-RU" dirty="0" smtClean="0"/>
-              <a:t>(</a:t>
-            </a:r>
-            <a:r>
-              <a:rPr lang="en-US" dirty="0" smtClean="0"/>
-              <a:t>~</a:t>
-            </a:r>
-            <a:r>
-              <a:rPr lang="ru-RU" dirty="0" smtClean="0"/>
-              <a:t>3</a:t>
-            </a:r>
-            <a:r>
-              <a:rPr lang="ru-RU" dirty="0"/>
-              <a:t>%) и капитализация </a:t>
-            </a:r>
-            <a:r>
-              <a:rPr lang="ru-RU" dirty="0" smtClean="0"/>
-              <a:t>(</a:t>
-            </a:r>
-            <a:r>
-              <a:rPr lang="en-US" dirty="0" smtClean="0"/>
-              <a:t>~</a:t>
-            </a:r>
-            <a:r>
-              <a:rPr lang="ru-RU" dirty="0" smtClean="0"/>
-              <a:t>2</a:t>
-            </a:r>
-            <a:r>
-              <a:rPr lang="ru-RU" dirty="0" smtClean="0"/>
-              <a:t>%).</a:t>
-            </a:r>
-            <a:r>
-              <a:rPr lang="ru-RU" dirty="0"/>
-              <a:t/>
-            </a:r>
-            <a:br>
-              <a:rPr lang="ru-RU" dirty="0"/>
-            </a:br>
-            <a:endParaRPr lang="en-US" dirty="0"/>
-          </a:p>
-        </p:txBody>
-      </p:sp>
-    </p:spTree>
-    <p:extLst>
-      <p:ext uri="{BB962C8B-B14F-4D97-AF65-F5344CB8AC3E}">
-        <p14:creationId xmlns:p14="http://schemas.microsoft.com/office/powerpoint/2010/main" val="935023520"/>
-      </p:ext>
-    </p:extLst>
-  </p:cSld>
-  <p:clrMapOvr>
-    <a:masterClrMapping/>
-  </p:clrMapOvr>
-  <p:timing>
-    <p:tnLst>
-      <p:par>
-        <p:cTn id="1" dur="indefinite" restart="never" nodeType="tmRoot"/>
-      </p:par>
-    </p:tnLst>
-  </p:timing>
-</p:sld>
-</file>
-
-<file path=ppt/slides/slide3.xml><?xml version="1.0" encoding="utf-8"?>
-<p:sld xmlns:a="http://schemas.openxmlformats.org/drawingml/2006/main" xmlns:r="http://schemas.openxmlformats.org/officeDocument/2006/relationships" xmlns:p="http://schemas.openxmlformats.org/presentationml/2006/main">
-  <p:cSld>
-    <p:spTree>
-      <p:nvGrpSpPr>
-        <p:cNvPr id="1" name=""/>
-        <p:cNvGrpSpPr/>
-        <p:nvPr/>
-      </p:nvGrpSpPr>
-      <p:grpSpPr>
-        <a:xfrm>
-          <a:off x="0" y="0"/>
-          <a:ext cx="0" cy="0"/>
-          <a:chOff x="0" y="0"/>
-          <a:chExt cx="0" cy="0"/>
-        </a:xfrm>
-      </p:grpSpPr>
-      <p:sp>
-        <p:nvSpPr>
-          <p:cNvPr id="2" name="Title 1"/>
-          <p:cNvSpPr>
-            <a:spLocks noGrp="1"/>
-          </p:cNvSpPr>
-          <p:nvPr>
-            <p:ph type="title"/>
-          </p:nvPr>
-        </p:nvSpPr>
-        <p:spPr/>
-        <p:txBody>
-          <a:bodyPr/>
-          <a:lstStyle/>
-          <a:p>
-            <a:r>
-              <a:rPr lang="ru-RU" dirty="0"/>
-              <a:t>Проблемы с литературой</a:t>
-            </a:r>
-            <a:endParaRPr lang="en-US" dirty="0"/>
-          </a:p>
-        </p:txBody>
-      </p:sp>
-      <p:sp>
-        <p:nvSpPr>
-          <p:cNvPr id="3" name="Text Placeholder 2"/>
-          <p:cNvSpPr>
-            <a:spLocks noGrp="1"/>
-          </p:cNvSpPr>
-          <p:nvPr>
-            <p:ph type="body" idx="1"/>
-          </p:nvPr>
-        </p:nvSpPr>
-        <p:spPr>
-          <a:xfrm>
-            <a:off x="2108200" y="2089828"/>
-            <a:ext cx="6324600" cy="1258093"/>
-          </a:xfrm>
-        </p:spPr>
-        <p:txBody>
-          <a:bodyPr>
-            <a:noAutofit/>
-          </a:bodyPr>
-          <a:lstStyle/>
-          <a:p>
-            <a:pPr algn="just"/>
-            <a:r>
-              <a:rPr lang="ru-RU" dirty="0"/>
-              <a:t>Многие существующие исследования прибегающие к методологии векторной авторегрессии сфокусированы исключительно на переменных фондового рынка игнорируя другие факторы также играющие важную роль в экономике каждой страны. Это является ошибкой спецификации модели, что нарушает условие </a:t>
-            </a:r>
-            <a:r>
-              <a:rPr lang="ru-RU" dirty="0" err="1"/>
-              <a:t>экзогенности</a:t>
-            </a:r>
-            <a:r>
-              <a:rPr lang="ru-RU" dirty="0"/>
-              <a:t>, приводя к смещенным и несостоятельным оценкам коэффициентов.</a:t>
-            </a:r>
-            <a:endParaRPr lang="en-US" b="1" dirty="0"/>
-          </a:p>
-        </p:txBody>
-      </p:sp>
-    </p:spTree>
-    <p:extLst>
-      <p:ext uri="{BB962C8B-B14F-4D97-AF65-F5344CB8AC3E}">
-        <p14:creationId xmlns:p14="http://schemas.microsoft.com/office/powerpoint/2010/main" val="3161655172"/>
-      </p:ext>
-    </p:extLst>
-  </p:cSld>
-  <p:clrMapOvr>
-    <a:masterClrMapping/>
-  </p:clrMapOvr>
-  <p:timing>
-    <p:tnLst>
-      <p:par>
-        <p:cTn id="1" dur="indefinite" restart="never" nodeType="tmRoot"/>
-      </p:par>
-    </p:tnLst>
-  </p:timing>
-</p:sld>
-</file>
-
-<file path=ppt/slides/slide30.xml><?xml version="1.0" encoding="utf-8"?>
-<p:sld xmlns:a="http://schemas.openxmlformats.org/drawingml/2006/main" xmlns:r="http://schemas.openxmlformats.org/officeDocument/2006/relationships" xmlns:p="http://schemas.openxmlformats.org/presentationml/2006/main">
-  <p:cSld>
-    <p:spTree>
-      <p:nvGrpSpPr>
-        <p:cNvPr id="1" name=""/>
-        <p:cNvGrpSpPr/>
-        <p:nvPr/>
-      </p:nvGrpSpPr>
-      <p:grpSpPr>
-        <a:xfrm>
-          <a:off x="0" y="0"/>
-          <a:ext cx="0" cy="0"/>
-          <a:chOff x="0" y="0"/>
-          <a:chExt cx="0" cy="0"/>
-        </a:xfrm>
-      </p:grpSpPr>
-      <p:sp>
-        <p:nvSpPr>
-          <p:cNvPr id="2" name="Title 1"/>
-          <p:cNvSpPr>
-            <a:spLocks noGrp="1"/>
-          </p:cNvSpPr>
-          <p:nvPr>
-            <p:ph type="title"/>
-          </p:nvPr>
-        </p:nvSpPr>
-        <p:spPr/>
-        <p:txBody>
-          <a:bodyPr/>
-          <a:lstStyle/>
-          <a:p>
-            <a:r>
-              <a:rPr lang="ru-RU" sz="4400" dirty="0" smtClean="0"/>
-              <a:t>Заключение по Индии</a:t>
-            </a:r>
-            <a:endParaRPr lang="en-US" sz="4400" dirty="0"/>
-          </a:p>
-        </p:txBody>
-      </p:sp>
-      <p:sp>
-        <p:nvSpPr>
-          <p:cNvPr id="3" name="Text Placeholder 2"/>
-          <p:cNvSpPr>
-            <a:spLocks noGrp="1"/>
-          </p:cNvSpPr>
-          <p:nvPr>
-            <p:ph type="body" idx="1"/>
-          </p:nvPr>
-        </p:nvSpPr>
-        <p:spPr/>
-        <p:txBody>
-          <a:bodyPr>
-            <a:noAutofit/>
-          </a:bodyPr>
-          <a:lstStyle/>
-          <a:p>
-            <a:pPr algn="just"/>
-            <a:r>
-              <a:rPr lang="ru-RU" dirty="0"/>
-              <a:t>Для экономики Республики Индия </a:t>
-            </a:r>
-            <a:r>
-              <a:rPr lang="ru-RU" dirty="0" smtClean="0"/>
-              <a:t>особую </a:t>
-            </a:r>
-            <a:r>
-              <a:rPr lang="ru-RU" dirty="0"/>
-              <a:t>роль играют фондовые рынки. Это объясняется относительно более легким доступом к биржевому финансированию по сравнению с банковским кредитованием. В пользу этого тезиса свидетельствует значительное количество публичных компаний, чьи акции находятся в </a:t>
-            </a:r>
-            <a:r>
-              <a:rPr lang="ru-RU" dirty="0" smtClean="0"/>
-              <a:t>котировальных списках, но чьи акции не торгуются. </a:t>
-            </a:r>
-            <a:r>
-              <a:rPr lang="ru-RU" dirty="0"/>
-              <a:t>Роль банковского сектора, напротив, оказывается менее выраженной ввиду сохраняющихся сложностей с выдачей кредитов малому и среднему бизнесу (МСП), включая жесткие требования к </a:t>
-            </a:r>
-            <a:r>
-              <a:rPr lang="ru-RU" dirty="0" smtClean="0"/>
-              <a:t>обеспечению.</a:t>
-            </a:r>
-            <a:endParaRPr lang="ru-RU" dirty="0"/>
-          </a:p>
-          <a:p>
-            <a:pPr algn="just"/>
-            <a:r>
-              <a:rPr lang="ru-RU" dirty="0"/>
-              <a:t/>
-            </a:r>
-            <a:br>
-              <a:rPr lang="ru-RU" dirty="0"/>
-            </a:br>
-            <a:endParaRPr lang="en-US" dirty="0"/>
-          </a:p>
-        </p:txBody>
-      </p:sp>
-    </p:spTree>
-    <p:extLst>
-      <p:ext uri="{BB962C8B-B14F-4D97-AF65-F5344CB8AC3E}">
-        <p14:creationId xmlns:p14="http://schemas.microsoft.com/office/powerpoint/2010/main" val="3806076759"/>
-      </p:ext>
-    </p:extLst>
-  </p:cSld>
-  <p:clrMapOvr>
-    <a:masterClrMapping/>
-  </p:clrMapOvr>
-  <p:timing>
-    <p:tnLst>
-      <p:par>
-        <p:cTn id="1" dur="indefinite" restart="never" nodeType="tmRoot"/>
-      </p:par>
-    </p:tnLst>
-  </p:timing>
-</p:sld>
-</file>
-
-<file path=ppt/slides/slide31.xml><?xml version="1.0" encoding="utf-8"?>
-<p:sld xmlns:a="http://schemas.openxmlformats.org/drawingml/2006/main" xmlns:r="http://schemas.openxmlformats.org/officeDocument/2006/relationships" xmlns:p="http://schemas.openxmlformats.org/presentationml/2006/main">
-  <p:cSld>
-    <p:spTree>
-      <p:nvGrpSpPr>
-        <p:cNvPr id="1" name=""/>
-        <p:cNvGrpSpPr/>
-        <p:nvPr/>
-      </p:nvGrpSpPr>
-      <p:grpSpPr>
-        <a:xfrm>
-          <a:off x="0" y="0"/>
-          <a:ext cx="0" cy="0"/>
-          <a:chOff x="0" y="0"/>
-          <a:chExt cx="0" cy="0"/>
-        </a:xfrm>
-      </p:grpSpPr>
-      <p:sp>
-        <p:nvSpPr>
-          <p:cNvPr id="2" name="Title 1"/>
-          <p:cNvSpPr>
-            <a:spLocks noGrp="1"/>
-          </p:cNvSpPr>
-          <p:nvPr>
-            <p:ph type="title"/>
-          </p:nvPr>
-        </p:nvSpPr>
-        <p:spPr/>
-        <p:txBody>
-          <a:bodyPr/>
-          <a:lstStyle/>
-          <a:p>
-            <a:r>
-              <a:rPr lang="ru-RU" sz="4400" dirty="0"/>
-              <a:t>Рекомендации </a:t>
-            </a:r>
-            <a:r>
-              <a:rPr lang="ru-RU" sz="4400" dirty="0" smtClean="0"/>
-              <a:t>для Индии</a:t>
             </a:r>
             <a:endParaRPr lang="en-US" sz="4400" dirty="0"/>
           </a:p>
@@ -6432,274 +3509,6 @@
               <a:buChar char="•"/>
             </a:pPr>
             <a:r>
-              <a:rPr lang="ru-RU" dirty="0" smtClean="0"/>
-              <a:t>Развивать </a:t>
-            </a:r>
-            <a:r>
-              <a:rPr lang="ru-RU" dirty="0"/>
-              <a:t>специализированные механизмы финансирования МСП, включая </a:t>
-            </a:r>
-            <a:r>
-              <a:rPr lang="ru-RU" dirty="0" err="1"/>
-              <a:t>секьюритизацию</a:t>
-            </a:r>
-            <a:r>
-              <a:rPr lang="ru-RU" dirty="0"/>
-              <a:t> портфелей кредитов и развитие альтернативных биржевых площадок (платформ для МСП). </a:t>
-            </a:r>
-            <a:endParaRPr lang="ru-RU" dirty="0" smtClean="0"/>
-          </a:p>
-          <a:p>
-            <a:pPr marL="416050" indent="-342900" algn="just">
-              <a:buFont typeface="Arial" panose="020B0604020202020204" pitchFamily="34" charset="0"/>
-              <a:buChar char="•"/>
-            </a:pPr>
-            <a:r>
-              <a:rPr lang="ru-RU" dirty="0" smtClean="0"/>
-              <a:t>Усилить </a:t>
-            </a:r>
-            <a:r>
-              <a:rPr lang="ru-RU" dirty="0"/>
-              <a:t>пост-листинговый контроль за компаниями, вышедшими на биржу, с целью повышения прозрачности корпоративного управления и защиты прав миноритарных акционеров.</a:t>
-            </a:r>
-            <a:endParaRPr lang="en-US" dirty="0"/>
-          </a:p>
-        </p:txBody>
-      </p:sp>
-    </p:spTree>
-    <p:extLst>
-      <p:ext uri="{BB962C8B-B14F-4D97-AF65-F5344CB8AC3E}">
-        <p14:creationId xmlns:p14="http://schemas.microsoft.com/office/powerpoint/2010/main" val="2164138985"/>
-      </p:ext>
-    </p:extLst>
-  </p:cSld>
-  <p:clrMapOvr>
-    <a:masterClrMapping/>
-  </p:clrMapOvr>
-  <p:timing>
-    <p:tnLst>
-      <p:par>
-        <p:cTn id="1" dur="indefinite" restart="never" nodeType="tmRoot"/>
-      </p:par>
-    </p:tnLst>
-  </p:timing>
-</p:sld>
-</file>
-
-<file path=ppt/slides/slide32.xml><?xml version="1.0" encoding="utf-8"?>
-<p:sld xmlns:a="http://schemas.openxmlformats.org/drawingml/2006/main" xmlns:r="http://schemas.openxmlformats.org/officeDocument/2006/relationships" xmlns:p="http://schemas.openxmlformats.org/presentationml/2006/main">
-  <p:cSld>
-    <p:spTree>
-      <p:nvGrpSpPr>
-        <p:cNvPr id="1" name=""/>
-        <p:cNvGrpSpPr/>
-        <p:nvPr/>
-      </p:nvGrpSpPr>
-      <p:grpSpPr>
-        <a:xfrm>
-          <a:off x="0" y="0"/>
-          <a:ext cx="0" cy="0"/>
-          <a:chOff x="0" y="0"/>
-          <a:chExt cx="0" cy="0"/>
-        </a:xfrm>
-      </p:grpSpPr>
-      <p:sp>
-        <p:nvSpPr>
-          <p:cNvPr id="2" name="Title 1"/>
-          <p:cNvSpPr>
-            <a:spLocks noGrp="1"/>
-          </p:cNvSpPr>
-          <p:nvPr>
-            <p:ph type="title"/>
-          </p:nvPr>
-        </p:nvSpPr>
-        <p:spPr/>
-        <p:txBody>
-          <a:bodyPr/>
-          <a:lstStyle/>
-          <a:p>
-            <a:r>
-              <a:rPr lang="ru-RU" sz="4400" dirty="0" smtClean="0"/>
-              <a:t>Заключение по Китаю</a:t>
-            </a:r>
-            <a:endParaRPr lang="en-US" sz="4400" dirty="0"/>
-          </a:p>
-        </p:txBody>
-      </p:sp>
-      <p:sp>
-        <p:nvSpPr>
-          <p:cNvPr id="3" name="Text Placeholder 2"/>
-          <p:cNvSpPr>
-            <a:spLocks noGrp="1"/>
-          </p:cNvSpPr>
-          <p:nvPr>
-            <p:ph type="body" idx="1"/>
-          </p:nvPr>
-        </p:nvSpPr>
-        <p:spPr/>
-        <p:txBody>
-          <a:bodyPr>
-            <a:noAutofit/>
-          </a:bodyPr>
-          <a:lstStyle/>
-          <a:p>
-            <a:pPr algn="just"/>
-            <a:r>
-              <a:rPr lang="ru-RU" dirty="0"/>
-              <a:t>В Китайской Народной Республике структура финансовой системы характеризуется доминированием банковского сектора </a:t>
-            </a:r>
-            <a:r>
-              <a:rPr lang="ru-RU" dirty="0" smtClean="0"/>
-              <a:t/>
-            </a:r>
-            <a:br>
-              <a:rPr lang="ru-RU" dirty="0" smtClean="0"/>
-            </a:br>
-            <a:r>
-              <a:rPr lang="ru-RU" dirty="0" smtClean="0"/>
-              <a:t>над </a:t>
-            </a:r>
-            <a:r>
-              <a:rPr lang="ru-RU" dirty="0"/>
-              <a:t>рыночными механизмами финансирования. Это объясняется приоритетным доступом к кредитным ресурсам государственных </a:t>
-            </a:r>
-            <a:r>
-              <a:rPr lang="ru-RU" dirty="0" smtClean="0"/>
-              <a:t/>
-            </a:r>
-            <a:br>
-              <a:rPr lang="ru-RU" dirty="0" smtClean="0"/>
-            </a:br>
-            <a:r>
-              <a:rPr lang="ru-RU" dirty="0" smtClean="0"/>
-              <a:t>и </a:t>
-            </a:r>
-            <a:r>
-              <a:rPr lang="ru-RU" dirty="0" smtClean="0"/>
-              <a:t>около</a:t>
-            </a:r>
-            <a:r>
-              <a:rPr lang="en-US" dirty="0" smtClean="0"/>
-              <a:t> </a:t>
-            </a:r>
-            <a:r>
-              <a:rPr lang="ru-RU" dirty="0" smtClean="0"/>
-              <a:t>государственных </a:t>
-            </a:r>
-            <a:r>
-              <a:rPr lang="ru-RU" dirty="0"/>
-              <a:t>компаний, которые, однако, создают относительно небольшую долю ВВП по сравнению с частным сектором. Фондовый рынок остается недоиспользованным источником экономического роста ввиду активного административного регулирования и </a:t>
-            </a:r>
-            <a:r>
-              <a:rPr lang="ru-RU" dirty="0" smtClean="0"/>
-              <a:t>интервенций</a:t>
-            </a:r>
-            <a:r>
-              <a:rPr lang="en-US" dirty="0" smtClean="0"/>
-              <a:t> </a:t>
-            </a:r>
-            <a:r>
-              <a:rPr lang="ru-RU" dirty="0" smtClean="0"/>
-              <a:t>со </a:t>
-            </a:r>
-            <a:r>
-              <a:rPr lang="ru-RU" dirty="0"/>
-              <a:t>стороны государства, направленных на поддержание стабильности</a:t>
-            </a:r>
-            <a:r>
-              <a:rPr lang="ru-RU" dirty="0" smtClean="0"/>
-              <a:t>.</a:t>
-            </a:r>
-            <a:endParaRPr lang="en-US" dirty="0"/>
-          </a:p>
-        </p:txBody>
-      </p:sp>
-    </p:spTree>
-    <p:extLst>
-      <p:ext uri="{BB962C8B-B14F-4D97-AF65-F5344CB8AC3E}">
-        <p14:creationId xmlns:p14="http://schemas.microsoft.com/office/powerpoint/2010/main" val="1359136810"/>
-      </p:ext>
-    </p:extLst>
-  </p:cSld>
-  <p:clrMapOvr>
-    <a:masterClrMapping/>
-  </p:clrMapOvr>
-  <p:timing>
-    <p:tnLst>
-      <p:par>
-        <p:cTn id="1" dur="indefinite" restart="never" nodeType="tmRoot"/>
-      </p:par>
-    </p:tnLst>
-  </p:timing>
-</p:sld>
-</file>
-
-<file path=ppt/slides/slide33.xml><?xml version="1.0" encoding="utf-8"?>
-<p:sld xmlns:a="http://schemas.openxmlformats.org/drawingml/2006/main" xmlns:r="http://schemas.openxmlformats.org/officeDocument/2006/relationships" xmlns:p="http://schemas.openxmlformats.org/presentationml/2006/main">
-  <p:cSld>
-    <p:spTree>
-      <p:nvGrpSpPr>
-        <p:cNvPr id="1" name=""/>
-        <p:cNvGrpSpPr/>
-        <p:nvPr/>
-      </p:nvGrpSpPr>
-      <p:grpSpPr>
-        <a:xfrm>
-          <a:off x="0" y="0"/>
-          <a:ext cx="0" cy="0"/>
-          <a:chOff x="0" y="0"/>
-          <a:chExt cx="0" cy="0"/>
-        </a:xfrm>
-      </p:grpSpPr>
-      <p:sp>
-        <p:nvSpPr>
-          <p:cNvPr id="2" name="Title 1"/>
-          <p:cNvSpPr>
-            <a:spLocks noGrp="1"/>
-          </p:cNvSpPr>
-          <p:nvPr>
-            <p:ph type="title"/>
-          </p:nvPr>
-        </p:nvSpPr>
-        <p:spPr/>
-        <p:txBody>
-          <a:bodyPr/>
-          <a:lstStyle/>
-          <a:p>
-            <a:r>
-              <a:rPr lang="ru-RU" sz="4400" dirty="0"/>
-              <a:t>Рекомендации для </a:t>
-            </a:r>
-            <a:r>
-              <a:rPr lang="ru-RU" sz="4400" dirty="0" smtClean="0"/>
-              <a:t>Китая</a:t>
-            </a:r>
-            <a:endParaRPr lang="en-US" sz="4400" dirty="0"/>
-          </a:p>
-        </p:txBody>
-      </p:sp>
-      <p:sp>
-        <p:nvSpPr>
-          <p:cNvPr id="3" name="Text Placeholder 2"/>
-          <p:cNvSpPr>
-            <a:spLocks noGrp="1"/>
-          </p:cNvSpPr>
-          <p:nvPr>
-            <p:ph type="body" idx="1"/>
-          </p:nvPr>
-        </p:nvSpPr>
-        <p:spPr/>
-        <p:txBody>
-          <a:bodyPr>
-            <a:noAutofit/>
-          </a:bodyPr>
-          <a:lstStyle/>
-          <a:p>
-            <a:pPr marL="416050" indent="-342900" algn="just">
-              <a:buFont typeface="Arial" panose="020B0604020202020204" pitchFamily="34" charset="0"/>
-              <a:buChar char="•"/>
-            </a:pPr>
-            <a:r>
               <a:rPr lang="ru-RU" dirty="0"/>
               <a:t>Расширить практику кредитования негосударственного сектора, включая малые и средние предприятия, с целью повышения эффективности распределения капитала. </a:t>
             </a:r>
@@ -6780,7 +3589,7 @@
 </p:sld>
 </file>
 
-<file path=ppt/slides/slide34.xml><?xml version="1.0" encoding="utf-8"?>
+<file path=ppt/slides/slide12.xml><?xml version="1.0" encoding="utf-8"?>
 <p:sld xmlns:a="http://schemas.openxmlformats.org/drawingml/2006/main" xmlns:r="http://schemas.openxmlformats.org/officeDocument/2006/relationships" xmlns:p="http://schemas.openxmlformats.org/presentationml/2006/main">
   <p:cSld>
     <p:spTree>
@@ -7043,6 +3852,2896 @@
 </p:sld>
 </file>
 
+<file path=ppt/slides/slide13.xml><?xml version="1.0" encoding="utf-8"?>
+<p:sld xmlns:a="http://schemas.openxmlformats.org/drawingml/2006/main" xmlns:r="http://schemas.openxmlformats.org/officeDocument/2006/relationships" xmlns:p="http://schemas.openxmlformats.org/presentationml/2006/main">
+  <p:cSld>
+    <p:spTree>
+      <p:nvGrpSpPr>
+        <p:cNvPr id="1" name=""/>
+        <p:cNvGrpSpPr/>
+        <p:nvPr/>
+      </p:nvGrpSpPr>
+      <p:grpSpPr>
+        <a:xfrm>
+          <a:off x="0" y="0"/>
+          <a:ext cx="0" cy="0"/>
+          <a:chOff x="0" y="0"/>
+          <a:chExt cx="0" cy="0"/>
+        </a:xfrm>
+      </p:grpSpPr>
+      <p:sp>
+        <p:nvSpPr>
+          <p:cNvPr id="2" name="Title 1"/>
+          <p:cNvSpPr>
+            <a:spLocks noGrp="1"/>
+          </p:cNvSpPr>
+          <p:nvPr>
+            <p:ph type="title"/>
+          </p:nvPr>
+        </p:nvSpPr>
+        <p:spPr/>
+        <p:txBody>
+          <a:bodyPr/>
+          <a:lstStyle/>
+          <a:p>
+            <a:r>
+              <a:rPr lang="ru-RU" dirty="0" smtClean="0"/>
+              <a:t>Исходные данные</a:t>
+            </a:r>
+            <a:endParaRPr lang="en-US" dirty="0"/>
+          </a:p>
+        </p:txBody>
+      </p:sp>
+      <p:sp>
+        <p:nvSpPr>
+          <p:cNvPr id="3" name="Text Placeholder 2"/>
+          <p:cNvSpPr>
+            <a:spLocks noGrp="1"/>
+          </p:cNvSpPr>
+          <p:nvPr>
+            <p:ph type="body" idx="1"/>
+          </p:nvPr>
+        </p:nvSpPr>
+        <p:spPr>
+          <a:xfrm>
+            <a:off x="2108200" y="2089828"/>
+            <a:ext cx="6324600" cy="1258093"/>
+          </a:xfrm>
+        </p:spPr>
+        <p:txBody>
+          <a:bodyPr>
+            <a:normAutofit lnSpcReduction="10000"/>
+          </a:bodyPr>
+          <a:lstStyle/>
+          <a:p>
+            <a:pPr algn="just"/>
+            <a:r>
+              <a:rPr lang="ru-RU" dirty="0"/>
+              <a:t>Исходные данные позволяют </a:t>
+            </a:r>
+            <a:r>
+              <a:rPr lang="ru-RU" dirty="0" smtClean="0"/>
+              <a:t>сравнить </a:t>
+            </a:r>
+            <a:r>
+              <a:rPr lang="ru-RU" dirty="0"/>
+              <a:t>размеры ВВП, экспорта, долга и фондового рынка каждой страны </a:t>
+            </a:r>
+            <a:r>
+              <a:rPr lang="ru-RU" dirty="0" smtClean="0"/>
+              <a:t/>
+            </a:r>
+            <a:br>
+              <a:rPr lang="ru-RU" dirty="0" smtClean="0"/>
+            </a:br>
+            <a:r>
+              <a:rPr lang="ru-RU" dirty="0" smtClean="0"/>
+              <a:t>и </a:t>
+            </a:r>
+            <a:r>
+              <a:rPr lang="ru-RU" dirty="0"/>
+              <a:t>выдвинуть ряд гипотез относительно </a:t>
+            </a:r>
+            <a:r>
+              <a:rPr lang="ru-RU" dirty="0" smtClean="0"/>
+              <a:t>вклада </a:t>
+            </a:r>
+            <a:br>
+              <a:rPr lang="ru-RU" dirty="0" smtClean="0"/>
+            </a:br>
+            <a:r>
+              <a:rPr lang="ru-RU" dirty="0" smtClean="0"/>
+              <a:t>в </a:t>
+            </a:r>
+            <a:r>
+              <a:rPr lang="ru-RU" dirty="0"/>
+              <a:t>экономический рост </a:t>
+            </a:r>
+            <a:r>
+              <a:rPr lang="ru-RU" dirty="0" smtClean="0"/>
+              <a:t>каждой из них.</a:t>
+            </a:r>
+            <a:endParaRPr lang="en-US" dirty="0"/>
+          </a:p>
+        </p:txBody>
+      </p:sp>
+    </p:spTree>
+    <p:extLst>
+      <p:ext uri="{BB962C8B-B14F-4D97-AF65-F5344CB8AC3E}">
+        <p14:creationId xmlns:p14="http://schemas.microsoft.com/office/powerpoint/2010/main" val="3380102462"/>
+      </p:ext>
+    </p:extLst>
+  </p:cSld>
+  <p:clrMapOvr>
+    <a:masterClrMapping/>
+  </p:clrMapOvr>
+  <p:timing>
+    <p:tnLst>
+      <p:par>
+        <p:cTn id="1" dur="indefinite" restart="never" nodeType="tmRoot"/>
+      </p:par>
+    </p:tnLst>
+  </p:timing>
+</p:sld>
+</file>
+
+<file path=ppt/slides/slide14.xml><?xml version="1.0" encoding="utf-8"?>
+<p:sld xmlns:a="http://schemas.openxmlformats.org/drawingml/2006/main" xmlns:r="http://schemas.openxmlformats.org/officeDocument/2006/relationships" xmlns:p="http://schemas.openxmlformats.org/presentationml/2006/main">
+  <p:cSld>
+    <p:spTree>
+      <p:nvGrpSpPr>
+        <p:cNvPr id="1" name=""/>
+        <p:cNvGrpSpPr/>
+        <p:nvPr/>
+      </p:nvGrpSpPr>
+      <p:grpSpPr>
+        <a:xfrm>
+          <a:off x="0" y="0"/>
+          <a:ext cx="0" cy="0"/>
+          <a:chOff x="0" y="0"/>
+          <a:chExt cx="0" cy="0"/>
+        </a:xfrm>
+      </p:grpSpPr>
+      <p:sp>
+        <p:nvSpPr>
+          <p:cNvPr id="2" name="Title 1"/>
+          <p:cNvSpPr>
+            <a:spLocks noGrp="1"/>
+          </p:cNvSpPr>
+          <p:nvPr>
+            <p:ph type="title"/>
+          </p:nvPr>
+        </p:nvSpPr>
+        <p:spPr/>
+        <p:txBody>
+          <a:bodyPr/>
+          <a:lstStyle/>
+          <a:p>
+            <a:r>
+              <a:rPr lang="ru-RU" dirty="0" smtClean="0"/>
+              <a:t>Динамика показателей</a:t>
+            </a:r>
+            <a:endParaRPr lang="en-US" dirty="0"/>
+          </a:p>
+        </p:txBody>
+      </p:sp>
+      <p:pic>
+        <p:nvPicPr>
+          <p:cNvPr id="1026" name="Picture 2" descr="C:\Users\bklyu\Documents\Python Scripts\_GitHub_repos\conferences\lomonosov readings 2026\explore_data\relationship_level_both.png"/>
+          <p:cNvPicPr>
+            <a:picLocks noChangeAspect="1" noChangeArrowheads="1"/>
+          </p:cNvPicPr>
+          <p:nvPr/>
+        </p:nvPicPr>
+        <p:blipFill>
+          <a:blip r:embed="rId2">
+            <a:extLst>
+              <a:ext uri="{28A0092B-C50C-407E-A947-70E740481C1C}">
+                <a14:useLocalDpi xmlns:a14="http://schemas.microsoft.com/office/drawing/2010/main" val="0"/>
+              </a:ext>
+            </a:extLst>
+          </a:blip>
+          <a:srcRect/>
+          <a:stretch>
+            <a:fillRect/>
+          </a:stretch>
+        </p:blipFill>
+        <p:spPr bwMode="auto">
+          <a:xfrm>
+            <a:off x="690880" y="1551215"/>
+            <a:ext cx="8778240" cy="2612572"/>
+          </a:xfrm>
+          <a:prstGeom prst="rect">
+            <a:avLst/>
+          </a:prstGeom>
+          <a:noFill/>
+          <a:extLst>
+            <a:ext uri="{909E8E84-426E-40DD-AFC4-6F175D3DCCD1}">
+              <a14:hiddenFill xmlns:a14="http://schemas.microsoft.com/office/drawing/2010/main">
+                <a:solidFill>
+                  <a:srgbClr val="FFFFFF"/>
+                </a:solidFill>
+              </a14:hiddenFill>
+            </a:ext>
+          </a:extLst>
+        </p:spPr>
+      </p:pic>
+    </p:spTree>
+    <p:extLst>
+      <p:ext uri="{BB962C8B-B14F-4D97-AF65-F5344CB8AC3E}">
+        <p14:creationId xmlns:p14="http://schemas.microsoft.com/office/powerpoint/2010/main" val="3869212110"/>
+      </p:ext>
+    </p:extLst>
+  </p:cSld>
+  <p:clrMapOvr>
+    <a:masterClrMapping/>
+  </p:clrMapOvr>
+  <p:timing>
+    <p:tnLst>
+      <p:par>
+        <p:cTn id="1" dur="indefinite" restart="never" nodeType="tmRoot"/>
+      </p:par>
+    </p:tnLst>
+  </p:timing>
+</p:sld>
+</file>
+
+<file path=ppt/slides/slide15.xml><?xml version="1.0" encoding="utf-8"?>
+<p:sld xmlns:a="http://schemas.openxmlformats.org/drawingml/2006/main" xmlns:r="http://schemas.openxmlformats.org/officeDocument/2006/relationships" xmlns:p="http://schemas.openxmlformats.org/presentationml/2006/main">
+  <p:cSld>
+    <p:spTree>
+      <p:nvGrpSpPr>
+        <p:cNvPr id="1" name=""/>
+        <p:cNvGrpSpPr/>
+        <p:nvPr/>
+      </p:nvGrpSpPr>
+      <p:grpSpPr>
+        <a:xfrm>
+          <a:off x="0" y="0"/>
+          <a:ext cx="0" cy="0"/>
+          <a:chOff x="0" y="0"/>
+          <a:chExt cx="0" cy="0"/>
+        </a:xfrm>
+      </p:grpSpPr>
+      <p:sp>
+        <p:nvSpPr>
+          <p:cNvPr id="2" name="Title 1"/>
+          <p:cNvSpPr>
+            <a:spLocks noGrp="1"/>
+          </p:cNvSpPr>
+          <p:nvPr>
+            <p:ph type="title"/>
+          </p:nvPr>
+        </p:nvSpPr>
+        <p:spPr/>
+        <p:txBody>
+          <a:bodyPr/>
+          <a:lstStyle/>
+          <a:p>
+            <a:r>
+              <a:rPr lang="ru-RU" dirty="0"/>
+              <a:t>Динамика </a:t>
+            </a:r>
+            <a:r>
+              <a:rPr lang="ru-RU" dirty="0" smtClean="0"/>
+              <a:t>показателей (Китай)</a:t>
+            </a:r>
+            <a:endParaRPr lang="en-US" dirty="0"/>
+          </a:p>
+        </p:txBody>
+      </p:sp>
+      <p:pic>
+        <p:nvPicPr>
+          <p:cNvPr id="2050" name="Picture 2" descr="C:\Users\bklyu\Documents\Python Scripts\_GitHub_repos\conferences\lomonosov readings 2026\explore_data\relationship_level_china.png"/>
+          <p:cNvPicPr>
+            <a:picLocks noChangeAspect="1" noChangeArrowheads="1"/>
+          </p:cNvPicPr>
+          <p:nvPr/>
+        </p:nvPicPr>
+        <p:blipFill>
+          <a:blip r:embed="rId2">
+            <a:extLst>
+              <a:ext uri="{28A0092B-C50C-407E-A947-70E740481C1C}">
+                <a14:useLocalDpi xmlns:a14="http://schemas.microsoft.com/office/drawing/2010/main" val="0"/>
+              </a:ext>
+            </a:extLst>
+          </a:blip>
+          <a:srcRect/>
+          <a:stretch>
+            <a:fillRect/>
+          </a:stretch>
+        </p:blipFill>
+        <p:spPr bwMode="auto">
+          <a:xfrm>
+            <a:off x="690880" y="1389295"/>
+            <a:ext cx="8778240" cy="2936412"/>
+          </a:xfrm>
+          <a:prstGeom prst="rect">
+            <a:avLst/>
+          </a:prstGeom>
+          <a:noFill/>
+          <a:extLst>
+            <a:ext uri="{909E8E84-426E-40DD-AFC4-6F175D3DCCD1}">
+              <a14:hiddenFill xmlns:a14="http://schemas.microsoft.com/office/drawing/2010/main">
+                <a:solidFill>
+                  <a:srgbClr val="FFFFFF"/>
+                </a:solidFill>
+              </a14:hiddenFill>
+            </a:ext>
+          </a:extLst>
+        </p:spPr>
+      </p:pic>
+    </p:spTree>
+    <p:extLst>
+      <p:ext uri="{BB962C8B-B14F-4D97-AF65-F5344CB8AC3E}">
+        <p14:creationId xmlns:p14="http://schemas.microsoft.com/office/powerpoint/2010/main" val="3965574923"/>
+      </p:ext>
+    </p:extLst>
+  </p:cSld>
+  <p:clrMapOvr>
+    <a:masterClrMapping/>
+  </p:clrMapOvr>
+  <p:timing>
+    <p:tnLst>
+      <p:par>
+        <p:cTn id="1" dur="indefinite" restart="never" nodeType="tmRoot"/>
+      </p:par>
+    </p:tnLst>
+  </p:timing>
+</p:sld>
+</file>
+
+<file path=ppt/slides/slide16.xml><?xml version="1.0" encoding="utf-8"?>
+<p:sld xmlns:a="http://schemas.openxmlformats.org/drawingml/2006/main" xmlns:r="http://schemas.openxmlformats.org/officeDocument/2006/relationships" xmlns:p="http://schemas.openxmlformats.org/presentationml/2006/main">
+  <p:cSld>
+    <p:spTree>
+      <p:nvGrpSpPr>
+        <p:cNvPr id="1" name=""/>
+        <p:cNvGrpSpPr/>
+        <p:nvPr/>
+      </p:nvGrpSpPr>
+      <p:grpSpPr>
+        <a:xfrm>
+          <a:off x="0" y="0"/>
+          <a:ext cx="0" cy="0"/>
+          <a:chOff x="0" y="0"/>
+          <a:chExt cx="0" cy="0"/>
+        </a:xfrm>
+      </p:grpSpPr>
+      <p:sp>
+        <p:nvSpPr>
+          <p:cNvPr id="2" name="Title 1"/>
+          <p:cNvSpPr>
+            <a:spLocks noGrp="1"/>
+          </p:cNvSpPr>
+          <p:nvPr>
+            <p:ph type="title"/>
+          </p:nvPr>
+        </p:nvSpPr>
+        <p:spPr/>
+        <p:txBody>
+          <a:bodyPr/>
+          <a:lstStyle/>
+          <a:p>
+            <a:r>
+              <a:rPr lang="ru-RU" dirty="0"/>
+              <a:t>Динамика </a:t>
+            </a:r>
+            <a:r>
+              <a:rPr lang="ru-RU" dirty="0" smtClean="0"/>
+              <a:t>показателей (Индия)</a:t>
+            </a:r>
+            <a:endParaRPr lang="en-US" dirty="0"/>
+          </a:p>
+        </p:txBody>
+      </p:sp>
+      <p:pic>
+        <p:nvPicPr>
+          <p:cNvPr id="3074" name="Picture 2" descr="C:\Users\bklyu\Documents\Python Scripts\_GitHub_repos\conferences\lomonosov readings 2026\explore_data\relationship_level_india.png"/>
+          <p:cNvPicPr>
+            <a:picLocks noChangeAspect="1" noChangeArrowheads="1"/>
+          </p:cNvPicPr>
+          <p:nvPr/>
+        </p:nvPicPr>
+        <p:blipFill>
+          <a:blip r:embed="rId2">
+            <a:extLst>
+              <a:ext uri="{28A0092B-C50C-407E-A947-70E740481C1C}">
+                <a14:useLocalDpi xmlns:a14="http://schemas.microsoft.com/office/drawing/2010/main" val="0"/>
+              </a:ext>
+            </a:extLst>
+          </a:blip>
+          <a:srcRect/>
+          <a:stretch>
+            <a:fillRect/>
+          </a:stretch>
+        </p:blipFill>
+        <p:spPr bwMode="auto">
+          <a:xfrm>
+            <a:off x="690880" y="1387659"/>
+            <a:ext cx="8778240" cy="2939691"/>
+          </a:xfrm>
+          <a:prstGeom prst="rect">
+            <a:avLst/>
+          </a:prstGeom>
+          <a:noFill/>
+          <a:extLst>
+            <a:ext uri="{909E8E84-426E-40DD-AFC4-6F175D3DCCD1}">
+              <a14:hiddenFill xmlns:a14="http://schemas.microsoft.com/office/drawing/2010/main">
+                <a:solidFill>
+                  <a:srgbClr val="FFFFFF"/>
+                </a:solidFill>
+              </a14:hiddenFill>
+            </a:ext>
+          </a:extLst>
+        </p:spPr>
+      </p:pic>
+    </p:spTree>
+    <p:extLst>
+      <p:ext uri="{BB962C8B-B14F-4D97-AF65-F5344CB8AC3E}">
+        <p14:creationId xmlns:p14="http://schemas.microsoft.com/office/powerpoint/2010/main" val="1996634609"/>
+      </p:ext>
+    </p:extLst>
+  </p:cSld>
+  <p:clrMapOvr>
+    <a:masterClrMapping/>
+  </p:clrMapOvr>
+  <p:timing>
+    <p:tnLst>
+      <p:par>
+        <p:cTn id="1" dur="indefinite" restart="never" nodeType="tmRoot"/>
+      </p:par>
+    </p:tnLst>
+  </p:timing>
+</p:sld>
+</file>
+
+<file path=ppt/slides/slide17.xml><?xml version="1.0" encoding="utf-8"?>
+<p:sld xmlns:a="http://schemas.openxmlformats.org/drawingml/2006/main" xmlns:r="http://schemas.openxmlformats.org/officeDocument/2006/relationships" xmlns:p="http://schemas.openxmlformats.org/presentationml/2006/main">
+  <p:cSld>
+    <p:spTree>
+      <p:nvGrpSpPr>
+        <p:cNvPr id="1" name=""/>
+        <p:cNvGrpSpPr/>
+        <p:nvPr/>
+      </p:nvGrpSpPr>
+      <p:grpSpPr>
+        <a:xfrm>
+          <a:off x="0" y="0"/>
+          <a:ext cx="0" cy="0"/>
+          <a:chOff x="0" y="0"/>
+          <a:chExt cx="0" cy="0"/>
+        </a:xfrm>
+      </p:grpSpPr>
+      <p:sp>
+        <p:nvSpPr>
+          <p:cNvPr id="2" name="Title 1"/>
+          <p:cNvSpPr>
+            <a:spLocks noGrp="1"/>
+          </p:cNvSpPr>
+          <p:nvPr>
+            <p:ph type="title"/>
+          </p:nvPr>
+        </p:nvSpPr>
+        <p:spPr/>
+        <p:txBody>
+          <a:bodyPr/>
+          <a:lstStyle/>
+          <a:p>
+            <a:r>
+              <a:rPr lang="ru-RU" dirty="0" smtClean="0"/>
+              <a:t>Абсолютные приросты</a:t>
+            </a:r>
+            <a:endParaRPr lang="en-US" dirty="0"/>
+          </a:p>
+        </p:txBody>
+      </p:sp>
+      <p:sp>
+        <p:nvSpPr>
+          <p:cNvPr id="3" name="Text Placeholder 2"/>
+          <p:cNvSpPr>
+            <a:spLocks noGrp="1"/>
+          </p:cNvSpPr>
+          <p:nvPr>
+            <p:ph type="body" idx="1"/>
+          </p:nvPr>
+        </p:nvSpPr>
+        <p:spPr/>
+        <p:txBody>
+          <a:bodyPr>
+            <a:noAutofit/>
+          </a:bodyPr>
+          <a:lstStyle/>
+          <a:p>
+            <a:pPr algn="just"/>
+            <a:r>
+              <a:rPr lang="ru-RU" dirty="0"/>
+              <a:t>Абсолютные темпы роста, также известные как первые разности, позволяют </a:t>
+            </a:r>
+            <a:r>
+              <a:rPr lang="ru-RU" dirty="0" smtClean="0"/>
+              <a:t>сделать </a:t>
+            </a:r>
+            <a:r>
+              <a:rPr lang="ru-RU" dirty="0"/>
+              <a:t>данные </a:t>
+            </a:r>
+            <a:r>
+              <a:rPr lang="ru-RU" dirty="0" smtClean="0"/>
+              <a:t>стационарными, что </a:t>
+            </a:r>
+            <a:r>
+              <a:rPr lang="ru-RU" dirty="0"/>
+              <a:t>является одним </a:t>
+            </a:r>
+            <a:r>
+              <a:rPr lang="ru-RU" dirty="0" smtClean="0"/>
+              <a:t/>
+            </a:r>
+            <a:br>
+              <a:rPr lang="ru-RU" dirty="0" smtClean="0"/>
+            </a:br>
+            <a:r>
+              <a:rPr lang="ru-RU" dirty="0" smtClean="0"/>
+              <a:t>из </a:t>
+            </a:r>
+            <a:r>
+              <a:rPr lang="ru-RU" dirty="0"/>
+              <a:t>ключевых предположений большинства эконометрических методов, включая векторную авторегрессию. Первые разности также позволяют </a:t>
+            </a:r>
+            <a:r>
+              <a:rPr lang="ru-RU" dirty="0" smtClean="0"/>
+              <a:t>исследовать </a:t>
+            </a:r>
+            <a:r>
+              <a:rPr lang="ru-RU" dirty="0"/>
+              <a:t>причинно-следственную связь роста, исключая общие тренды.</a:t>
+            </a:r>
+            <a:endParaRPr lang="en-US" dirty="0"/>
+          </a:p>
+        </p:txBody>
+      </p:sp>
+    </p:spTree>
+    <p:extLst>
+      <p:ext uri="{BB962C8B-B14F-4D97-AF65-F5344CB8AC3E}">
+        <p14:creationId xmlns:p14="http://schemas.microsoft.com/office/powerpoint/2010/main" val="3624016492"/>
+      </p:ext>
+    </p:extLst>
+  </p:cSld>
+  <p:clrMapOvr>
+    <a:masterClrMapping/>
+  </p:clrMapOvr>
+  <p:timing>
+    <p:tnLst>
+      <p:par>
+        <p:cTn id="1" dur="indefinite" restart="never" nodeType="tmRoot"/>
+      </p:par>
+    </p:tnLst>
+  </p:timing>
+</p:sld>
+</file>
+
+<file path=ppt/slides/slide18.xml><?xml version="1.0" encoding="utf-8"?>
+<p:sld xmlns:a="http://schemas.openxmlformats.org/drawingml/2006/main" xmlns:r="http://schemas.openxmlformats.org/officeDocument/2006/relationships" xmlns:p="http://schemas.openxmlformats.org/presentationml/2006/main">
+  <p:cSld>
+    <p:spTree>
+      <p:nvGrpSpPr>
+        <p:cNvPr id="1" name=""/>
+        <p:cNvGrpSpPr/>
+        <p:nvPr/>
+      </p:nvGrpSpPr>
+      <p:grpSpPr>
+        <a:xfrm>
+          <a:off x="0" y="0"/>
+          <a:ext cx="0" cy="0"/>
+          <a:chOff x="0" y="0"/>
+          <a:chExt cx="0" cy="0"/>
+        </a:xfrm>
+      </p:grpSpPr>
+      <p:sp>
+        <p:nvSpPr>
+          <p:cNvPr id="2" name="Title 1"/>
+          <p:cNvSpPr>
+            <a:spLocks noGrp="1"/>
+          </p:cNvSpPr>
+          <p:nvPr>
+            <p:ph type="title"/>
+          </p:nvPr>
+        </p:nvSpPr>
+        <p:spPr/>
+        <p:txBody>
+          <a:bodyPr/>
+          <a:lstStyle/>
+          <a:p>
+            <a:r>
+              <a:rPr lang="ru-RU" dirty="0"/>
+              <a:t>Динамика показателей</a:t>
+            </a:r>
+            <a:endParaRPr lang="en-US" dirty="0"/>
+          </a:p>
+        </p:txBody>
+      </p:sp>
+      <p:pic>
+        <p:nvPicPr>
+          <p:cNvPr id="4098" name="Picture 2" descr="C:\Users\bklyu\Documents\Python Scripts\_GitHub_repos\conferences\lomonosov readings 2026\explore_data\relationship_diff_both.png"/>
+          <p:cNvPicPr>
+            <a:picLocks noChangeAspect="1" noChangeArrowheads="1"/>
+          </p:cNvPicPr>
+          <p:nvPr/>
+        </p:nvPicPr>
+        <p:blipFill>
+          <a:blip r:embed="rId2">
+            <a:extLst>
+              <a:ext uri="{28A0092B-C50C-407E-A947-70E740481C1C}">
+                <a14:useLocalDpi xmlns:a14="http://schemas.microsoft.com/office/drawing/2010/main" val="0"/>
+              </a:ext>
+            </a:extLst>
+          </a:blip>
+          <a:srcRect/>
+          <a:stretch>
+            <a:fillRect/>
+          </a:stretch>
+        </p:blipFill>
+        <p:spPr bwMode="auto">
+          <a:xfrm>
+            <a:off x="690880" y="1517998"/>
+            <a:ext cx="8778240" cy="2679015"/>
+          </a:xfrm>
+          <a:prstGeom prst="rect">
+            <a:avLst/>
+          </a:prstGeom>
+          <a:noFill/>
+          <a:extLst>
+            <a:ext uri="{909E8E84-426E-40DD-AFC4-6F175D3DCCD1}">
+              <a14:hiddenFill xmlns:a14="http://schemas.microsoft.com/office/drawing/2010/main">
+                <a:solidFill>
+                  <a:srgbClr val="FFFFFF"/>
+                </a:solidFill>
+              </a14:hiddenFill>
+            </a:ext>
+          </a:extLst>
+        </p:spPr>
+      </p:pic>
+    </p:spTree>
+    <p:extLst>
+      <p:ext uri="{BB962C8B-B14F-4D97-AF65-F5344CB8AC3E}">
+        <p14:creationId xmlns:p14="http://schemas.microsoft.com/office/powerpoint/2010/main" val="1280440382"/>
+      </p:ext>
+    </p:extLst>
+  </p:cSld>
+  <p:clrMapOvr>
+    <a:masterClrMapping/>
+  </p:clrMapOvr>
+  <p:timing>
+    <p:tnLst>
+      <p:par>
+        <p:cTn id="1" dur="indefinite" restart="never" nodeType="tmRoot"/>
+      </p:par>
+    </p:tnLst>
+  </p:timing>
+</p:sld>
+</file>
+
+<file path=ppt/slides/slide19.xml><?xml version="1.0" encoding="utf-8"?>
+<p:sld xmlns:a="http://schemas.openxmlformats.org/drawingml/2006/main" xmlns:r="http://schemas.openxmlformats.org/officeDocument/2006/relationships" xmlns:p="http://schemas.openxmlformats.org/presentationml/2006/main">
+  <p:cSld>
+    <p:spTree>
+      <p:nvGrpSpPr>
+        <p:cNvPr id="1" name=""/>
+        <p:cNvGrpSpPr/>
+        <p:nvPr/>
+      </p:nvGrpSpPr>
+      <p:grpSpPr>
+        <a:xfrm>
+          <a:off x="0" y="0"/>
+          <a:ext cx="0" cy="0"/>
+          <a:chOff x="0" y="0"/>
+          <a:chExt cx="0" cy="0"/>
+        </a:xfrm>
+      </p:grpSpPr>
+      <p:sp>
+        <p:nvSpPr>
+          <p:cNvPr id="2" name="Title 1"/>
+          <p:cNvSpPr>
+            <a:spLocks noGrp="1"/>
+          </p:cNvSpPr>
+          <p:nvPr>
+            <p:ph type="title"/>
+          </p:nvPr>
+        </p:nvSpPr>
+        <p:spPr/>
+        <p:txBody>
+          <a:bodyPr/>
+          <a:lstStyle/>
+          <a:p>
+            <a:r>
+              <a:rPr lang="ru-RU" dirty="0"/>
+              <a:t>Динамика показателей (Китай)</a:t>
+            </a:r>
+            <a:endParaRPr lang="en-US" dirty="0"/>
+          </a:p>
+        </p:txBody>
+      </p:sp>
+      <p:pic>
+        <p:nvPicPr>
+          <p:cNvPr id="5122" name="Picture 2" descr="C:\Users\bklyu\Documents\Python Scripts\_GitHub_repos\conferences\lomonosov readings 2026\explore_data\relationship_diff_china.png"/>
+          <p:cNvPicPr>
+            <a:picLocks noChangeAspect="1" noChangeArrowheads="1"/>
+          </p:cNvPicPr>
+          <p:nvPr/>
+        </p:nvPicPr>
+        <p:blipFill>
+          <a:blip r:embed="rId2">
+            <a:extLst>
+              <a:ext uri="{28A0092B-C50C-407E-A947-70E740481C1C}">
+                <a14:useLocalDpi xmlns:a14="http://schemas.microsoft.com/office/drawing/2010/main" val="0"/>
+              </a:ext>
+            </a:extLst>
+          </a:blip>
+          <a:srcRect/>
+          <a:stretch>
+            <a:fillRect/>
+          </a:stretch>
+        </p:blipFill>
+        <p:spPr bwMode="auto">
+          <a:xfrm>
+            <a:off x="690880" y="1377751"/>
+            <a:ext cx="8778240" cy="2959511"/>
+          </a:xfrm>
+          <a:prstGeom prst="rect">
+            <a:avLst/>
+          </a:prstGeom>
+          <a:noFill/>
+          <a:extLst>
+            <a:ext uri="{909E8E84-426E-40DD-AFC4-6F175D3DCCD1}">
+              <a14:hiddenFill xmlns:a14="http://schemas.microsoft.com/office/drawing/2010/main">
+                <a:solidFill>
+                  <a:srgbClr val="FFFFFF"/>
+                </a:solidFill>
+              </a14:hiddenFill>
+            </a:ext>
+          </a:extLst>
+        </p:spPr>
+      </p:pic>
+    </p:spTree>
+    <p:extLst>
+      <p:ext uri="{BB962C8B-B14F-4D97-AF65-F5344CB8AC3E}">
+        <p14:creationId xmlns:p14="http://schemas.microsoft.com/office/powerpoint/2010/main" val="3706015842"/>
+      </p:ext>
+    </p:extLst>
+  </p:cSld>
+  <p:clrMapOvr>
+    <a:masterClrMapping/>
+  </p:clrMapOvr>
+  <p:timing>
+    <p:tnLst>
+      <p:par>
+        <p:cTn id="1" dur="indefinite" restart="never" nodeType="tmRoot"/>
+      </p:par>
+    </p:tnLst>
+  </p:timing>
+</p:sld>
+</file>
+
+<file path=ppt/slides/slide2.xml><?xml version="1.0" encoding="utf-8"?>
+<p:sld xmlns:a="http://schemas.openxmlformats.org/drawingml/2006/main" xmlns:r="http://schemas.openxmlformats.org/officeDocument/2006/relationships" xmlns:p="http://schemas.openxmlformats.org/presentationml/2006/main">
+  <p:cSld>
+    <p:spTree>
+      <p:nvGrpSpPr>
+        <p:cNvPr id="1" name=""/>
+        <p:cNvGrpSpPr/>
+        <p:nvPr/>
+      </p:nvGrpSpPr>
+      <p:grpSpPr>
+        <a:xfrm>
+          <a:off x="0" y="0"/>
+          <a:ext cx="0" cy="0"/>
+          <a:chOff x="0" y="0"/>
+          <a:chExt cx="0" cy="0"/>
+        </a:xfrm>
+      </p:grpSpPr>
+      <p:sp>
+        <p:nvSpPr>
+          <p:cNvPr id="2" name="Title 1"/>
+          <p:cNvSpPr>
+            <a:spLocks noGrp="1"/>
+          </p:cNvSpPr>
+          <p:nvPr>
+            <p:ph type="title"/>
+          </p:nvPr>
+        </p:nvSpPr>
+        <p:spPr/>
+        <p:txBody>
+          <a:bodyPr/>
+          <a:lstStyle/>
+          <a:p>
+            <a:r>
+              <a:rPr lang="ru-RU" dirty="0" smtClean="0"/>
+              <a:t>Обоснование </a:t>
+            </a:r>
+            <a:r>
+              <a:rPr lang="ru-RU" dirty="0"/>
+              <a:t>исследования</a:t>
+            </a:r>
+            <a:endParaRPr lang="en-US" dirty="0"/>
+          </a:p>
+        </p:txBody>
+      </p:sp>
+      <p:sp>
+        <p:nvSpPr>
+          <p:cNvPr id="3" name="Text Placeholder 2"/>
+          <p:cNvSpPr>
+            <a:spLocks noGrp="1"/>
+          </p:cNvSpPr>
+          <p:nvPr>
+            <p:ph type="body" idx="1"/>
+          </p:nvPr>
+        </p:nvSpPr>
+        <p:spPr>
+          <a:xfrm>
+            <a:off x="2108200" y="2089828"/>
+            <a:ext cx="6324600" cy="1258093"/>
+          </a:xfrm>
+        </p:spPr>
+        <p:txBody>
+          <a:bodyPr>
+            <a:noAutofit/>
+          </a:bodyPr>
+          <a:lstStyle/>
+          <a:p>
+            <a:pPr algn="just"/>
+            <a:r>
+              <a:rPr lang="ru-RU" dirty="0"/>
+              <a:t>Взаимосвязь между развитием финансового сектора и экономическим ростом остается предметом активных теоретических и эмпирических дискуссий. Несмотря на общее признание важности устойчивой финансовой системы, конкретное влияние фондовых рынков на экономику трактуется неоднозначно</a:t>
+            </a:r>
+            <a:r>
+              <a:rPr lang="ru-RU" dirty="0" smtClean="0"/>
+              <a:t>.</a:t>
+            </a:r>
+            <a:endParaRPr lang="en-US" dirty="0"/>
+          </a:p>
+        </p:txBody>
+      </p:sp>
+    </p:spTree>
+    <p:extLst>
+      <p:ext uri="{BB962C8B-B14F-4D97-AF65-F5344CB8AC3E}">
+        <p14:creationId xmlns:p14="http://schemas.microsoft.com/office/powerpoint/2010/main" val="3279012890"/>
+      </p:ext>
+    </p:extLst>
+  </p:cSld>
+  <p:clrMapOvr>
+    <a:masterClrMapping/>
+  </p:clrMapOvr>
+  <p:timing>
+    <p:tnLst>
+      <p:par>
+        <p:cTn id="1" dur="indefinite" restart="never" nodeType="tmRoot"/>
+      </p:par>
+    </p:tnLst>
+  </p:timing>
+</p:sld>
+</file>
+
+<file path=ppt/slides/slide20.xml><?xml version="1.0" encoding="utf-8"?>
+<p:sld xmlns:a="http://schemas.openxmlformats.org/drawingml/2006/main" xmlns:r="http://schemas.openxmlformats.org/officeDocument/2006/relationships" xmlns:p="http://schemas.openxmlformats.org/presentationml/2006/main">
+  <p:cSld>
+    <p:spTree>
+      <p:nvGrpSpPr>
+        <p:cNvPr id="1" name=""/>
+        <p:cNvGrpSpPr/>
+        <p:nvPr/>
+      </p:nvGrpSpPr>
+      <p:grpSpPr>
+        <a:xfrm>
+          <a:off x="0" y="0"/>
+          <a:ext cx="0" cy="0"/>
+          <a:chOff x="0" y="0"/>
+          <a:chExt cx="0" cy="0"/>
+        </a:xfrm>
+      </p:grpSpPr>
+      <p:sp>
+        <p:nvSpPr>
+          <p:cNvPr id="2" name="Title 1"/>
+          <p:cNvSpPr>
+            <a:spLocks noGrp="1"/>
+          </p:cNvSpPr>
+          <p:nvPr>
+            <p:ph type="title"/>
+          </p:nvPr>
+        </p:nvSpPr>
+        <p:spPr/>
+        <p:txBody>
+          <a:bodyPr/>
+          <a:lstStyle/>
+          <a:p>
+            <a:r>
+              <a:rPr lang="ru-RU" dirty="0"/>
+              <a:t>Динамика показателей (Индия)</a:t>
+            </a:r>
+            <a:endParaRPr lang="en-US" dirty="0"/>
+          </a:p>
+        </p:txBody>
+      </p:sp>
+      <p:pic>
+        <p:nvPicPr>
+          <p:cNvPr id="6146" name="Picture 2" descr="C:\Users\bklyu\Documents\Python Scripts\_GitHub_repos\conferences\lomonosov readings 2026\explore_data\relationship_diff_india.png"/>
+          <p:cNvPicPr>
+            <a:picLocks noChangeAspect="1" noChangeArrowheads="1"/>
+          </p:cNvPicPr>
+          <p:nvPr/>
+        </p:nvPicPr>
+        <p:blipFill>
+          <a:blip r:embed="rId2">
+            <a:extLst>
+              <a:ext uri="{28A0092B-C50C-407E-A947-70E740481C1C}">
+                <a14:useLocalDpi xmlns:a14="http://schemas.microsoft.com/office/drawing/2010/main" val="0"/>
+              </a:ext>
+            </a:extLst>
+          </a:blip>
+          <a:srcRect/>
+          <a:stretch>
+            <a:fillRect/>
+          </a:stretch>
+        </p:blipFill>
+        <p:spPr bwMode="auto">
+          <a:xfrm>
+            <a:off x="690880" y="1382716"/>
+            <a:ext cx="8778240" cy="2949568"/>
+          </a:xfrm>
+          <a:prstGeom prst="rect">
+            <a:avLst/>
+          </a:prstGeom>
+          <a:noFill/>
+          <a:extLst>
+            <a:ext uri="{909E8E84-426E-40DD-AFC4-6F175D3DCCD1}">
+              <a14:hiddenFill xmlns:a14="http://schemas.microsoft.com/office/drawing/2010/main">
+                <a:solidFill>
+                  <a:srgbClr val="FFFFFF"/>
+                </a:solidFill>
+              </a14:hiddenFill>
+            </a:ext>
+          </a:extLst>
+        </p:spPr>
+      </p:pic>
+    </p:spTree>
+    <p:extLst>
+      <p:ext uri="{BB962C8B-B14F-4D97-AF65-F5344CB8AC3E}">
+        <p14:creationId xmlns:p14="http://schemas.microsoft.com/office/powerpoint/2010/main" val="1403363354"/>
+      </p:ext>
+    </p:extLst>
+  </p:cSld>
+  <p:clrMapOvr>
+    <a:masterClrMapping/>
+  </p:clrMapOvr>
+  <p:timing>
+    <p:tnLst>
+      <p:par>
+        <p:cTn id="1" dur="indefinite" restart="never" nodeType="tmRoot"/>
+      </p:par>
+    </p:tnLst>
+  </p:timing>
+</p:sld>
+</file>
+
+<file path=ppt/slides/slide21.xml><?xml version="1.0" encoding="utf-8"?>
+<p:sld xmlns:a="http://schemas.openxmlformats.org/drawingml/2006/main" xmlns:r="http://schemas.openxmlformats.org/officeDocument/2006/relationships" xmlns:p="http://schemas.openxmlformats.org/presentationml/2006/main">
+  <p:cSld>
+    <p:spTree>
+      <p:nvGrpSpPr>
+        <p:cNvPr id="1" name=""/>
+        <p:cNvGrpSpPr/>
+        <p:nvPr/>
+      </p:nvGrpSpPr>
+      <p:grpSpPr>
+        <a:xfrm>
+          <a:off x="0" y="0"/>
+          <a:ext cx="0" cy="0"/>
+          <a:chOff x="0" y="0"/>
+          <a:chExt cx="0" cy="0"/>
+        </a:xfrm>
+      </p:grpSpPr>
+      <p:sp>
+        <p:nvSpPr>
+          <p:cNvPr id="2" name="Title 1"/>
+          <p:cNvSpPr>
+            <a:spLocks noGrp="1"/>
+          </p:cNvSpPr>
+          <p:nvPr>
+            <p:ph type="title"/>
+          </p:nvPr>
+        </p:nvSpPr>
+        <p:spPr/>
+        <p:txBody>
+          <a:bodyPr/>
+          <a:lstStyle/>
+          <a:p>
+            <a:r>
+              <a:rPr lang="ru-RU" sz="4400" dirty="0"/>
+              <a:t>Векторная авторегрессия</a:t>
+            </a:r>
+          </a:p>
+        </p:txBody>
+      </p:sp>
+      <p:sp>
+        <p:nvSpPr>
+          <p:cNvPr id="3" name="Text Placeholder 2"/>
+          <p:cNvSpPr>
+            <a:spLocks noGrp="1"/>
+          </p:cNvSpPr>
+          <p:nvPr>
+            <p:ph type="body" idx="1"/>
+          </p:nvPr>
+        </p:nvSpPr>
+        <p:spPr/>
+        <p:txBody>
+          <a:bodyPr>
+            <a:noAutofit/>
+          </a:bodyPr>
+          <a:lstStyle/>
+          <a:p>
+            <a:pPr algn="just"/>
+            <a:r>
+              <a:rPr lang="ru-RU" dirty="0"/>
+              <a:t>Векторная авторегрессия (VAR — Vector AutoRegression) — это эконометрическая модель, используемая для анализа </a:t>
+            </a:r>
+            <a:r>
+              <a:rPr lang="en-US" dirty="0" smtClean="0"/>
+              <a:t/>
+            </a:r>
+            <a:br>
+              <a:rPr lang="en-US" dirty="0" smtClean="0"/>
+            </a:br>
+            <a:r>
+              <a:rPr lang="ru-RU" dirty="0" smtClean="0"/>
+              <a:t>и </a:t>
+            </a:r>
+            <a:r>
+              <a:rPr lang="ru-RU" dirty="0"/>
+              <a:t>прогнозирования нескольких взаимосвязанных временных рядов. </a:t>
+            </a:r>
+            <a:r>
+              <a:rPr lang="ru-RU" dirty="0" smtClean="0"/>
+              <a:t/>
+            </a:r>
+            <a:br>
+              <a:rPr lang="ru-RU" dirty="0" smtClean="0"/>
+            </a:br>
+            <a:r>
+              <a:rPr lang="ru-RU" dirty="0" smtClean="0"/>
+              <a:t>В </a:t>
+            </a:r>
+            <a:r>
+              <a:rPr lang="ru-RU" dirty="0"/>
+              <a:t>ней текущее значение каждой переменной </a:t>
+            </a:r>
+            <a:r>
+              <a:rPr lang="ru-RU" dirty="0" smtClean="0"/>
+              <a:t>зависит от </a:t>
+            </a:r>
+            <a:r>
+              <a:rPr lang="ru-RU" dirty="0"/>
+              <a:t>её собственных прошлых значений и от прошлых значений всех остальных переменных в системе. Она </a:t>
+            </a:r>
+            <a:r>
+              <a:rPr lang="ru-RU" dirty="0" smtClean="0"/>
+              <a:t>применяется </a:t>
+            </a:r>
+            <a:br>
+              <a:rPr lang="ru-RU" dirty="0" smtClean="0"/>
+            </a:br>
+            <a:r>
+              <a:rPr lang="ru-RU" dirty="0" smtClean="0"/>
+              <a:t>для </a:t>
+            </a:r>
+            <a:r>
+              <a:rPr lang="ru-RU" dirty="0"/>
+              <a:t>моделирования динамики и взаимовлияния стационарных экономических показателей.</a:t>
+            </a:r>
+            <a:endParaRPr lang="en-US" dirty="0"/>
+          </a:p>
+        </p:txBody>
+      </p:sp>
+    </p:spTree>
+    <p:extLst>
+      <p:ext uri="{BB962C8B-B14F-4D97-AF65-F5344CB8AC3E}">
+        <p14:creationId xmlns:p14="http://schemas.microsoft.com/office/powerpoint/2010/main" val="2147299148"/>
+      </p:ext>
+    </p:extLst>
+  </p:cSld>
+  <p:clrMapOvr>
+    <a:masterClrMapping/>
+  </p:clrMapOvr>
+  <p:timing>
+    <p:tnLst>
+      <p:par>
+        <p:cTn id="1" dur="indefinite" restart="never" nodeType="tmRoot"/>
+      </p:par>
+    </p:tnLst>
+  </p:timing>
+</p:sld>
+</file>
+
+<file path=ppt/slides/slide22.xml><?xml version="1.0" encoding="utf-8"?>
+<p:sld xmlns:a="http://schemas.openxmlformats.org/drawingml/2006/main" xmlns:r="http://schemas.openxmlformats.org/officeDocument/2006/relationships" xmlns:p="http://schemas.openxmlformats.org/presentationml/2006/main">
+  <p:cSld>
+    <p:spTree>
+      <p:nvGrpSpPr>
+        <p:cNvPr id="1" name=""/>
+        <p:cNvGrpSpPr/>
+        <p:nvPr/>
+      </p:nvGrpSpPr>
+      <p:grpSpPr>
+        <a:xfrm>
+          <a:off x="0" y="0"/>
+          <a:ext cx="0" cy="0"/>
+          <a:chOff x="0" y="0"/>
+          <a:chExt cx="0" cy="0"/>
+        </a:xfrm>
+      </p:grpSpPr>
+      <p:sp>
+        <p:nvSpPr>
+          <p:cNvPr id="2" name="Title 1"/>
+          <p:cNvSpPr>
+            <a:spLocks noGrp="1"/>
+          </p:cNvSpPr>
+          <p:nvPr>
+            <p:ph type="title"/>
+          </p:nvPr>
+        </p:nvSpPr>
+        <p:spPr/>
+        <p:txBody>
+          <a:bodyPr>
+            <a:normAutofit/>
+          </a:bodyPr>
+          <a:lstStyle/>
+          <a:p>
+            <a:r>
+              <a:rPr lang="en-US" dirty="0" smtClean="0"/>
+              <a:t>VAR</a:t>
+            </a:r>
+            <a:r>
+              <a:rPr lang="ru-RU" dirty="0"/>
+              <a:t> </a:t>
+            </a:r>
+            <a:r>
+              <a:rPr lang="ru-RU" dirty="0" smtClean="0"/>
+              <a:t>Индии</a:t>
+            </a:r>
+            <a:r>
+              <a:rPr lang="en-US" dirty="0" smtClean="0"/>
+              <a:t>: </a:t>
+            </a:r>
+            <a:r>
+              <a:rPr lang="ru-RU" dirty="0" smtClean="0"/>
+              <a:t>спецификация</a:t>
+            </a:r>
+            <a:endParaRPr lang="en-US" dirty="0"/>
+          </a:p>
+        </p:txBody>
+      </p:sp>
+      <p:pic>
+        <p:nvPicPr>
+          <p:cNvPr id="8200" name="Picture 8" descr="C:\Users\bklyu\Documents\Python Scripts\_GitHub_repos\conferences\lomonosov readings 2026\explore_data\_gdp_obs_model_india.png"/>
+          <p:cNvPicPr>
+            <a:picLocks noChangeAspect="1" noChangeArrowheads="1"/>
+          </p:cNvPicPr>
+          <p:nvPr/>
+        </p:nvPicPr>
+        <p:blipFill>
+          <a:blip r:embed="rId2">
+            <a:extLst>
+              <a:ext uri="{28A0092B-C50C-407E-A947-70E740481C1C}">
+                <a14:useLocalDpi xmlns:a14="http://schemas.microsoft.com/office/drawing/2010/main" val="0"/>
+              </a:ext>
+            </a:extLst>
+          </a:blip>
+          <a:srcRect/>
+          <a:stretch>
+            <a:fillRect/>
+          </a:stretch>
+        </p:blipFill>
+        <p:spPr bwMode="auto">
+          <a:xfrm>
+            <a:off x="3708406" y="1485900"/>
+            <a:ext cx="5486401" cy="2743200"/>
+          </a:xfrm>
+          <a:prstGeom prst="rect">
+            <a:avLst/>
+          </a:prstGeom>
+          <a:noFill/>
+          <a:extLst>
+            <a:ext uri="{909E8E84-426E-40DD-AFC4-6F175D3DCCD1}">
+              <a14:hiddenFill xmlns:a14="http://schemas.microsoft.com/office/drawing/2010/main">
+                <a:solidFill>
+                  <a:srgbClr val="FFFFFF"/>
+                </a:solidFill>
+              </a14:hiddenFill>
+            </a:ext>
+          </a:extLst>
+        </p:spPr>
+      </p:pic>
+      <p:sp>
+        <p:nvSpPr>
+          <p:cNvPr id="3" name="TextBox 2"/>
+          <p:cNvSpPr txBox="1"/>
+          <p:nvPr/>
+        </p:nvSpPr>
+        <p:spPr>
+          <a:xfrm>
+            <a:off x="1179781" y="2503558"/>
+            <a:ext cx="1995221" cy="707886"/>
+          </a:xfrm>
+          <a:prstGeom prst="rect">
+            <a:avLst/>
+          </a:prstGeom>
+          <a:noFill/>
+        </p:spPr>
+        <p:txBody>
+          <a:bodyPr wrap="square" rtlCol="0">
+            <a:spAutoFit/>
+          </a:bodyPr>
+          <a:lstStyle/>
+          <a:p>
+            <a:r>
+              <a:rPr lang="en-US" sz="4000" dirty="0"/>
+              <a:t>VAR(5)</a:t>
+            </a:r>
+          </a:p>
+        </p:txBody>
+      </p:sp>
+    </p:spTree>
+    <p:extLst>
+      <p:ext uri="{BB962C8B-B14F-4D97-AF65-F5344CB8AC3E}">
+        <p14:creationId xmlns:p14="http://schemas.microsoft.com/office/powerpoint/2010/main" val="3861653137"/>
+      </p:ext>
+    </p:extLst>
+  </p:cSld>
+  <p:clrMapOvr>
+    <a:masterClrMapping/>
+  </p:clrMapOvr>
+  <p:timing>
+    <p:tnLst>
+      <p:par>
+        <p:cTn id="1" dur="indefinite" restart="never" nodeType="tmRoot"/>
+      </p:par>
+    </p:tnLst>
+  </p:timing>
+</p:sld>
+</file>
+
+<file path=ppt/slides/slide23.xml><?xml version="1.0" encoding="utf-8"?>
+<p:sld xmlns:a="http://schemas.openxmlformats.org/drawingml/2006/main" xmlns:r="http://schemas.openxmlformats.org/officeDocument/2006/relationships" xmlns:p="http://schemas.openxmlformats.org/presentationml/2006/main">
+  <p:cSld>
+    <p:spTree>
+      <p:nvGrpSpPr>
+        <p:cNvPr id="1" name=""/>
+        <p:cNvGrpSpPr/>
+        <p:nvPr/>
+      </p:nvGrpSpPr>
+      <p:grpSpPr>
+        <a:xfrm>
+          <a:off x="0" y="0"/>
+          <a:ext cx="0" cy="0"/>
+          <a:chOff x="0" y="0"/>
+          <a:chExt cx="0" cy="0"/>
+        </a:xfrm>
+      </p:grpSpPr>
+      <p:sp>
+        <p:nvSpPr>
+          <p:cNvPr id="2" name="Title 1"/>
+          <p:cNvSpPr>
+            <a:spLocks noGrp="1"/>
+          </p:cNvSpPr>
+          <p:nvPr>
+            <p:ph type="title"/>
+          </p:nvPr>
+        </p:nvSpPr>
+        <p:spPr/>
+        <p:txBody>
+          <a:bodyPr>
+            <a:normAutofit/>
+          </a:bodyPr>
+          <a:lstStyle/>
+          <a:p>
+            <a:r>
+              <a:rPr lang="en-US" dirty="0"/>
+              <a:t>VAR</a:t>
+            </a:r>
+            <a:r>
+              <a:rPr lang="ru-RU" dirty="0"/>
+              <a:t> Индии</a:t>
+            </a:r>
+            <a:r>
+              <a:rPr lang="en-US" dirty="0"/>
+              <a:t>: </a:t>
+            </a:r>
+            <a:r>
+              <a:rPr lang="ru-RU" dirty="0" smtClean="0"/>
+              <a:t>прогноз</a:t>
+            </a:r>
+            <a:endParaRPr lang="en-US" dirty="0"/>
+          </a:p>
+        </p:txBody>
+      </p:sp>
+      <p:pic>
+        <p:nvPicPr>
+          <p:cNvPr id="7172" name="Picture 4" descr="C:\Users\bklyu\Documents\Python Scripts\_GitHub_repos\conferences\lomonosov readings 2026\explore_data\_gdp_forecast_diff_india.png"/>
+          <p:cNvPicPr>
+            <a:picLocks noChangeAspect="1" noChangeArrowheads="1"/>
+          </p:cNvPicPr>
+          <p:nvPr/>
+        </p:nvPicPr>
+        <p:blipFill rotWithShape="1">
+          <a:blip r:embed="rId2">
+            <a:extLst>
+              <a:ext uri="{28A0092B-C50C-407E-A947-70E740481C1C}">
+                <a14:useLocalDpi xmlns:a14="http://schemas.microsoft.com/office/drawing/2010/main" val="0"/>
+              </a:ext>
+            </a:extLst>
+          </a:blip>
+          <a:srcRect l="6033" t="6425" r="2951" b="6336"/>
+          <a:stretch/>
+        </p:blipFill>
+        <p:spPr bwMode="auto">
+          <a:xfrm>
+            <a:off x="736600" y="1104900"/>
+            <a:ext cx="3657600" cy="1752928"/>
+          </a:xfrm>
+          <a:prstGeom prst="rect">
+            <a:avLst/>
+          </a:prstGeom>
+          <a:noFill/>
+          <a:extLst>
+            <a:ext uri="{909E8E84-426E-40DD-AFC4-6F175D3DCCD1}">
+              <a14:hiddenFill xmlns:a14="http://schemas.microsoft.com/office/drawing/2010/main">
+                <a:solidFill>
+                  <a:srgbClr val="FFFFFF"/>
+                </a:solidFill>
+              </a14:hiddenFill>
+            </a:ext>
+          </a:extLst>
+        </p:spPr>
+      </p:pic>
+      <p:pic>
+        <p:nvPicPr>
+          <p:cNvPr id="7173" name="Picture 5" descr="C:\Users\bklyu\Documents\Python Scripts\_GitHub_repos\conferences\lomonosov readings 2026\explore_data\_gdp_forecast_value_india.png"/>
+          <p:cNvPicPr>
+            <a:picLocks noChangeAspect="1" noChangeArrowheads="1"/>
+          </p:cNvPicPr>
+          <p:nvPr/>
+        </p:nvPicPr>
+        <p:blipFill rotWithShape="1">
+          <a:blip r:embed="rId3">
+            <a:extLst>
+              <a:ext uri="{28A0092B-C50C-407E-A947-70E740481C1C}">
+                <a14:useLocalDpi xmlns:a14="http://schemas.microsoft.com/office/drawing/2010/main" val="0"/>
+              </a:ext>
+            </a:extLst>
+          </a:blip>
+          <a:srcRect l="3300" t="6511" r="2691" b="5469"/>
+          <a:stretch/>
+        </p:blipFill>
+        <p:spPr bwMode="auto">
+          <a:xfrm>
+            <a:off x="3222629" y="2697961"/>
+            <a:ext cx="6248401" cy="2925151"/>
+          </a:xfrm>
+          <a:prstGeom prst="rect">
+            <a:avLst/>
+          </a:prstGeom>
+          <a:noFill/>
+          <a:extLst>
+            <a:ext uri="{909E8E84-426E-40DD-AFC4-6F175D3DCCD1}">
+              <a14:hiddenFill xmlns:a14="http://schemas.microsoft.com/office/drawing/2010/main">
+                <a:solidFill>
+                  <a:srgbClr val="FFFFFF"/>
+                </a:solidFill>
+              </a14:hiddenFill>
+            </a:ext>
+          </a:extLst>
+        </p:spPr>
+      </p:pic>
+    </p:spTree>
+    <p:extLst>
+      <p:ext uri="{BB962C8B-B14F-4D97-AF65-F5344CB8AC3E}">
+        <p14:creationId xmlns:p14="http://schemas.microsoft.com/office/powerpoint/2010/main" val="1775786759"/>
+      </p:ext>
+    </p:extLst>
+  </p:cSld>
+  <p:clrMapOvr>
+    <a:masterClrMapping/>
+  </p:clrMapOvr>
+  <p:timing>
+    <p:tnLst>
+      <p:par>
+        <p:cTn id="1" dur="indefinite" restart="never" nodeType="tmRoot"/>
+      </p:par>
+    </p:tnLst>
+  </p:timing>
+</p:sld>
+</file>
+
+<file path=ppt/slides/slide24.xml><?xml version="1.0" encoding="utf-8"?>
+<p:sld xmlns:a="http://schemas.openxmlformats.org/drawingml/2006/main" xmlns:r="http://schemas.openxmlformats.org/officeDocument/2006/relationships" xmlns:p="http://schemas.openxmlformats.org/presentationml/2006/main">
+  <p:cSld>
+    <p:spTree>
+      <p:nvGrpSpPr>
+        <p:cNvPr id="1" name=""/>
+        <p:cNvGrpSpPr/>
+        <p:nvPr/>
+      </p:nvGrpSpPr>
+      <p:grpSpPr>
+        <a:xfrm>
+          <a:off x="0" y="0"/>
+          <a:ext cx="0" cy="0"/>
+          <a:chOff x="0" y="0"/>
+          <a:chExt cx="0" cy="0"/>
+        </a:xfrm>
+      </p:grpSpPr>
+      <p:sp>
+        <p:nvSpPr>
+          <p:cNvPr id="2" name="Title 1"/>
+          <p:cNvSpPr>
+            <a:spLocks noGrp="1"/>
+          </p:cNvSpPr>
+          <p:nvPr>
+            <p:ph type="title"/>
+          </p:nvPr>
+        </p:nvSpPr>
+        <p:spPr/>
+        <p:txBody>
+          <a:bodyPr>
+            <a:normAutofit/>
+          </a:bodyPr>
+          <a:lstStyle/>
+          <a:p>
+            <a:r>
+              <a:rPr lang="en-US" dirty="0" smtClean="0"/>
+              <a:t>VAR</a:t>
+            </a:r>
+            <a:r>
+              <a:rPr lang="ru-RU" dirty="0"/>
+              <a:t> </a:t>
+            </a:r>
+            <a:r>
+              <a:rPr lang="ru-RU" dirty="0" smtClean="0"/>
+              <a:t>Китая</a:t>
+            </a:r>
+            <a:r>
+              <a:rPr lang="en-US" dirty="0" smtClean="0"/>
+              <a:t>: </a:t>
+            </a:r>
+            <a:r>
+              <a:rPr lang="ru-RU" dirty="0" smtClean="0"/>
+              <a:t>спецификация</a:t>
+            </a:r>
+            <a:endParaRPr lang="en-US" dirty="0"/>
+          </a:p>
+        </p:txBody>
+      </p:sp>
+      <p:sp>
+        <p:nvSpPr>
+          <p:cNvPr id="3" name="TextBox 2"/>
+          <p:cNvSpPr txBox="1"/>
+          <p:nvPr/>
+        </p:nvSpPr>
+        <p:spPr>
+          <a:xfrm>
+            <a:off x="1179781" y="2503558"/>
+            <a:ext cx="1995221" cy="707886"/>
+          </a:xfrm>
+          <a:prstGeom prst="rect">
+            <a:avLst/>
+          </a:prstGeom>
+          <a:noFill/>
+        </p:spPr>
+        <p:txBody>
+          <a:bodyPr wrap="square" rtlCol="0">
+            <a:spAutoFit/>
+          </a:bodyPr>
+          <a:lstStyle/>
+          <a:p>
+            <a:r>
+              <a:rPr lang="en-US" sz="4000" dirty="0"/>
+              <a:t>VAR(</a:t>
+            </a:r>
+            <a:r>
+              <a:rPr lang="ru-RU" sz="4000" dirty="0"/>
+              <a:t>2</a:t>
+            </a:r>
+            <a:r>
+              <a:rPr lang="en-US" sz="4000" dirty="0"/>
+              <a:t>)</a:t>
+            </a:r>
+          </a:p>
+        </p:txBody>
+      </p:sp>
+      <p:pic>
+        <p:nvPicPr>
+          <p:cNvPr id="13314" name="Picture 2" descr="C:\Users\bklyu\Documents\Python Scripts\_GitHub_repos\conferences\lomonosov readings 2026\explore_data\_gdp_obs_model_china.png"/>
+          <p:cNvPicPr>
+            <a:picLocks noChangeAspect="1" noChangeArrowheads="1"/>
+          </p:cNvPicPr>
+          <p:nvPr/>
+        </p:nvPicPr>
+        <p:blipFill>
+          <a:blip r:embed="rId2">
+            <a:extLst>
+              <a:ext uri="{28A0092B-C50C-407E-A947-70E740481C1C}">
+                <a14:useLocalDpi xmlns:a14="http://schemas.microsoft.com/office/drawing/2010/main" val="0"/>
+              </a:ext>
+            </a:extLst>
+          </a:blip>
+          <a:srcRect/>
+          <a:stretch>
+            <a:fillRect/>
+          </a:stretch>
+        </p:blipFill>
+        <p:spPr bwMode="auto">
+          <a:xfrm>
+            <a:off x="3708400" y="1485900"/>
+            <a:ext cx="5486400" cy="2743200"/>
+          </a:xfrm>
+          <a:prstGeom prst="rect">
+            <a:avLst/>
+          </a:prstGeom>
+          <a:noFill/>
+          <a:extLst>
+            <a:ext uri="{909E8E84-426E-40DD-AFC4-6F175D3DCCD1}">
+              <a14:hiddenFill xmlns:a14="http://schemas.microsoft.com/office/drawing/2010/main">
+                <a:solidFill>
+                  <a:srgbClr val="FFFFFF"/>
+                </a:solidFill>
+              </a14:hiddenFill>
+            </a:ext>
+          </a:extLst>
+        </p:spPr>
+      </p:pic>
+    </p:spTree>
+    <p:extLst>
+      <p:ext uri="{BB962C8B-B14F-4D97-AF65-F5344CB8AC3E}">
+        <p14:creationId xmlns:p14="http://schemas.microsoft.com/office/powerpoint/2010/main" val="916465186"/>
+      </p:ext>
+    </p:extLst>
+  </p:cSld>
+  <p:clrMapOvr>
+    <a:masterClrMapping/>
+  </p:clrMapOvr>
+  <p:timing>
+    <p:tnLst>
+      <p:par>
+        <p:cTn id="1" dur="indefinite" restart="never" nodeType="tmRoot"/>
+      </p:par>
+    </p:tnLst>
+  </p:timing>
+</p:sld>
+</file>
+
+<file path=ppt/slides/slide25.xml><?xml version="1.0" encoding="utf-8"?>
+<p:sld xmlns:a="http://schemas.openxmlformats.org/drawingml/2006/main" xmlns:r="http://schemas.openxmlformats.org/officeDocument/2006/relationships" xmlns:p="http://schemas.openxmlformats.org/presentationml/2006/main">
+  <p:cSld>
+    <p:spTree>
+      <p:nvGrpSpPr>
+        <p:cNvPr id="1" name=""/>
+        <p:cNvGrpSpPr/>
+        <p:nvPr/>
+      </p:nvGrpSpPr>
+      <p:grpSpPr>
+        <a:xfrm>
+          <a:off x="0" y="0"/>
+          <a:ext cx="0" cy="0"/>
+          <a:chOff x="0" y="0"/>
+          <a:chExt cx="0" cy="0"/>
+        </a:xfrm>
+      </p:grpSpPr>
+      <p:sp>
+        <p:nvSpPr>
+          <p:cNvPr id="2" name="Title 1"/>
+          <p:cNvSpPr>
+            <a:spLocks noGrp="1"/>
+          </p:cNvSpPr>
+          <p:nvPr>
+            <p:ph type="title"/>
+          </p:nvPr>
+        </p:nvSpPr>
+        <p:spPr/>
+        <p:txBody>
+          <a:bodyPr>
+            <a:normAutofit/>
+          </a:bodyPr>
+          <a:lstStyle/>
+          <a:p>
+            <a:r>
+              <a:rPr lang="en-US" dirty="0"/>
+              <a:t>VAR</a:t>
+            </a:r>
+            <a:r>
+              <a:rPr lang="ru-RU" dirty="0"/>
+              <a:t> </a:t>
+            </a:r>
+            <a:r>
+              <a:rPr lang="ru-RU" dirty="0" smtClean="0"/>
+              <a:t>Китая</a:t>
+            </a:r>
+            <a:r>
+              <a:rPr lang="en-US" dirty="0" smtClean="0"/>
+              <a:t>: </a:t>
+            </a:r>
+            <a:r>
+              <a:rPr lang="ru-RU" dirty="0" smtClean="0"/>
+              <a:t>прогноз</a:t>
+            </a:r>
+            <a:endParaRPr lang="en-US" dirty="0"/>
+          </a:p>
+        </p:txBody>
+      </p:sp>
+      <p:pic>
+        <p:nvPicPr>
+          <p:cNvPr id="14338" name="Picture 2" descr="C:\Users\bklyu\Documents\Python Scripts\_GitHub_repos\conferences\lomonosov readings 2026\explore_data\_gdp_forecast_diff_china.png"/>
+          <p:cNvPicPr>
+            <a:picLocks noChangeAspect="1" noChangeArrowheads="1"/>
+          </p:cNvPicPr>
+          <p:nvPr/>
+        </p:nvPicPr>
+        <p:blipFill rotWithShape="1">
+          <a:blip r:embed="rId2">
+            <a:extLst>
+              <a:ext uri="{28A0092B-C50C-407E-A947-70E740481C1C}">
+                <a14:useLocalDpi xmlns:a14="http://schemas.microsoft.com/office/drawing/2010/main" val="0"/>
+              </a:ext>
+            </a:extLst>
+          </a:blip>
+          <a:srcRect t="6858" r="2865" b="6944"/>
+          <a:stretch/>
+        </p:blipFill>
+        <p:spPr bwMode="auto">
+          <a:xfrm>
+            <a:off x="762795" y="1104904"/>
+            <a:ext cx="3657600" cy="1622877"/>
+          </a:xfrm>
+          <a:prstGeom prst="rect">
+            <a:avLst/>
+          </a:prstGeom>
+          <a:noFill/>
+          <a:extLst>
+            <a:ext uri="{909E8E84-426E-40DD-AFC4-6F175D3DCCD1}">
+              <a14:hiddenFill xmlns:a14="http://schemas.microsoft.com/office/drawing/2010/main">
+                <a:solidFill>
+                  <a:srgbClr val="FFFFFF"/>
+                </a:solidFill>
+              </a14:hiddenFill>
+            </a:ext>
+          </a:extLst>
+        </p:spPr>
+      </p:pic>
+      <p:pic>
+        <p:nvPicPr>
+          <p:cNvPr id="14339" name="Picture 3" descr="C:\Users\bklyu\Documents\Python Scripts\_GitHub_repos\conferences\lomonosov readings 2026\explore_data\_gdp_forecast_value_china.png"/>
+          <p:cNvPicPr>
+            <a:picLocks noChangeAspect="1" noChangeArrowheads="1"/>
+          </p:cNvPicPr>
+          <p:nvPr/>
+        </p:nvPicPr>
+        <p:blipFill rotWithShape="1">
+          <a:blip r:embed="rId3">
+            <a:extLst>
+              <a:ext uri="{28A0092B-C50C-407E-A947-70E740481C1C}">
+                <a14:useLocalDpi xmlns:a14="http://schemas.microsoft.com/office/drawing/2010/main" val="0"/>
+              </a:ext>
+            </a:extLst>
+          </a:blip>
+          <a:srcRect t="6742" r="3211" b="6799"/>
+          <a:stretch/>
+        </p:blipFill>
+        <p:spPr bwMode="auto">
+          <a:xfrm>
+            <a:off x="3222623" y="2781305"/>
+            <a:ext cx="6309360" cy="2817995"/>
+          </a:xfrm>
+          <a:prstGeom prst="rect">
+            <a:avLst/>
+          </a:prstGeom>
+          <a:noFill/>
+          <a:extLst>
+            <a:ext uri="{909E8E84-426E-40DD-AFC4-6F175D3DCCD1}">
+              <a14:hiddenFill xmlns:a14="http://schemas.microsoft.com/office/drawing/2010/main">
+                <a:solidFill>
+                  <a:srgbClr val="FFFFFF"/>
+                </a:solidFill>
+              </a14:hiddenFill>
+            </a:ext>
+          </a:extLst>
+        </p:spPr>
+      </p:pic>
+    </p:spTree>
+    <p:extLst>
+      <p:ext uri="{BB962C8B-B14F-4D97-AF65-F5344CB8AC3E}">
+        <p14:creationId xmlns:p14="http://schemas.microsoft.com/office/powerpoint/2010/main" val="1569145000"/>
+      </p:ext>
+    </p:extLst>
+  </p:cSld>
+  <p:clrMapOvr>
+    <a:masterClrMapping/>
+  </p:clrMapOvr>
+  <p:timing>
+    <p:tnLst>
+      <p:par>
+        <p:cTn id="1" dur="indefinite" restart="never" nodeType="tmRoot"/>
+      </p:par>
+    </p:tnLst>
+  </p:timing>
+</p:sld>
+</file>
+
+<file path=ppt/slides/slide26.xml><?xml version="1.0" encoding="utf-8"?>
+<p:sld xmlns:a="http://schemas.openxmlformats.org/drawingml/2006/main" xmlns:r="http://schemas.openxmlformats.org/officeDocument/2006/relationships" xmlns:p="http://schemas.openxmlformats.org/presentationml/2006/main">
+  <p:cSld>
+    <p:spTree>
+      <p:nvGrpSpPr>
+        <p:cNvPr id="1" name=""/>
+        <p:cNvGrpSpPr/>
+        <p:nvPr/>
+      </p:nvGrpSpPr>
+      <p:grpSpPr>
+        <a:xfrm>
+          <a:off x="0" y="0"/>
+          <a:ext cx="0" cy="0"/>
+          <a:chOff x="0" y="0"/>
+          <a:chExt cx="0" cy="0"/>
+        </a:xfrm>
+      </p:grpSpPr>
+      <p:sp>
+        <p:nvSpPr>
+          <p:cNvPr id="2" name="Title 1"/>
+          <p:cNvSpPr>
+            <a:spLocks noGrp="1"/>
+          </p:cNvSpPr>
+          <p:nvPr>
+            <p:ph type="title"/>
+          </p:nvPr>
+        </p:nvSpPr>
+        <p:spPr/>
+        <p:txBody>
+          <a:bodyPr/>
+          <a:lstStyle/>
+          <a:p>
+            <a:r>
+              <a:rPr lang="ru-RU" sz="4400" dirty="0"/>
+              <a:t>Функции импульсных откликов</a:t>
+            </a:r>
+          </a:p>
+        </p:txBody>
+      </p:sp>
+      <p:sp>
+        <p:nvSpPr>
+          <p:cNvPr id="3" name="Text Placeholder 2"/>
+          <p:cNvSpPr>
+            <a:spLocks noGrp="1"/>
+          </p:cNvSpPr>
+          <p:nvPr>
+            <p:ph type="body" idx="1"/>
+          </p:nvPr>
+        </p:nvSpPr>
+        <p:spPr/>
+        <p:txBody>
+          <a:bodyPr>
+            <a:noAutofit/>
+          </a:bodyPr>
+          <a:lstStyle/>
+          <a:p>
+            <a:pPr algn="just"/>
+            <a:r>
+              <a:rPr lang="ru-RU" dirty="0" smtClean="0"/>
+              <a:t>Функции импульсных откликов (IRF – </a:t>
+            </a:r>
+            <a:r>
+              <a:rPr lang="en-US" dirty="0" smtClean="0"/>
+              <a:t>Impulse</a:t>
+            </a:r>
+            <a:r>
+              <a:rPr lang="ru-RU" dirty="0" smtClean="0"/>
+              <a:t> </a:t>
+            </a:r>
+            <a:r>
+              <a:rPr lang="en-US" dirty="0" smtClean="0"/>
+              <a:t>Response </a:t>
+            </a:r>
+            <a:r>
+              <a:rPr lang="en-US" dirty="0"/>
+              <a:t>Function</a:t>
+            </a:r>
+            <a:r>
+              <a:rPr lang="ru-RU" dirty="0" smtClean="0"/>
+              <a:t>) в векторной авторегрессии показывают, как шок (непредвиденное изменение) одной переменной влияет на текущие и будущие значения всех переменных системы. IRF позволяет оценить силу, направление и длительность реакции системы на внешний импульс, затухающий </a:t>
+            </a:r>
+            <a:r>
+              <a:rPr lang="en-US" dirty="0" smtClean="0"/>
+              <a:t/>
+            </a:r>
+            <a:br>
+              <a:rPr lang="en-US" dirty="0" smtClean="0"/>
+            </a:br>
+            <a:r>
+              <a:rPr lang="ru-RU" dirty="0" smtClean="0"/>
+              <a:t>со временем.</a:t>
+            </a:r>
+            <a:endParaRPr lang="en-US" dirty="0"/>
+          </a:p>
+        </p:txBody>
+      </p:sp>
+    </p:spTree>
+    <p:extLst>
+      <p:ext uri="{BB962C8B-B14F-4D97-AF65-F5344CB8AC3E}">
+        <p14:creationId xmlns:p14="http://schemas.microsoft.com/office/powerpoint/2010/main" val="4133823676"/>
+      </p:ext>
+    </p:extLst>
+  </p:cSld>
+  <p:clrMapOvr>
+    <a:masterClrMapping/>
+  </p:clrMapOvr>
+  <p:timing>
+    <p:tnLst>
+      <p:par>
+        <p:cTn id="1" dur="indefinite" restart="never" nodeType="tmRoot"/>
+      </p:par>
+    </p:tnLst>
+  </p:timing>
+</p:sld>
+</file>
+
+<file path=ppt/slides/slide27.xml><?xml version="1.0" encoding="utf-8"?>
+<p:sld xmlns:a="http://schemas.openxmlformats.org/drawingml/2006/main" xmlns:r="http://schemas.openxmlformats.org/officeDocument/2006/relationships" xmlns:p="http://schemas.openxmlformats.org/presentationml/2006/main">
+  <p:cSld>
+    <p:spTree>
+      <p:nvGrpSpPr>
+        <p:cNvPr id="1" name=""/>
+        <p:cNvGrpSpPr/>
+        <p:nvPr/>
+      </p:nvGrpSpPr>
+      <p:grpSpPr>
+        <a:xfrm>
+          <a:off x="0" y="0"/>
+          <a:ext cx="0" cy="0"/>
+          <a:chOff x="0" y="0"/>
+          <a:chExt cx="0" cy="0"/>
+        </a:xfrm>
+      </p:grpSpPr>
+      <p:sp>
+        <p:nvSpPr>
+          <p:cNvPr id="2" name="Title 1"/>
+          <p:cNvSpPr>
+            <a:spLocks noGrp="1"/>
+          </p:cNvSpPr>
+          <p:nvPr>
+            <p:ph type="title"/>
+          </p:nvPr>
+        </p:nvSpPr>
+        <p:spPr/>
+        <p:txBody>
+          <a:bodyPr/>
+          <a:lstStyle/>
+          <a:p>
+            <a:r>
+              <a:rPr lang="ru-RU" dirty="0"/>
+              <a:t>Отклик ВВП Китая </a:t>
+            </a:r>
+            <a:r>
+              <a:rPr lang="ru-RU" dirty="0" smtClean="0"/>
+              <a:t>на </a:t>
+            </a:r>
+            <a:r>
+              <a:rPr lang="ru-RU" dirty="0"/>
+              <a:t>шоки</a:t>
+            </a:r>
+            <a:endParaRPr lang="en-US" dirty="0"/>
+          </a:p>
+        </p:txBody>
+      </p:sp>
+      <p:pic>
+        <p:nvPicPr>
+          <p:cNvPr id="8195" name="Picture 3" descr="C:\Users\bklyu\Documents\Python Scripts\_GitHub_repos\conferences\lomonosov readings 2026\explore_data\irf_china.png"/>
+          <p:cNvPicPr>
+            <a:picLocks noChangeAspect="1" noChangeArrowheads="1"/>
+          </p:cNvPicPr>
+          <p:nvPr/>
+        </p:nvPicPr>
+        <p:blipFill>
+          <a:blip r:embed="rId2">
+            <a:extLst>
+              <a:ext uri="{28A0092B-C50C-407E-A947-70E740481C1C}">
+                <a14:useLocalDpi xmlns:a14="http://schemas.microsoft.com/office/drawing/2010/main" val="0"/>
+              </a:ext>
+            </a:extLst>
+          </a:blip>
+          <a:srcRect/>
+          <a:stretch>
+            <a:fillRect/>
+          </a:stretch>
+        </p:blipFill>
+        <p:spPr bwMode="auto">
+          <a:xfrm>
+            <a:off x="690880" y="1487746"/>
+            <a:ext cx="8778240" cy="2739519"/>
+          </a:xfrm>
+          <a:prstGeom prst="rect">
+            <a:avLst/>
+          </a:prstGeom>
+          <a:noFill/>
+          <a:extLst>
+            <a:ext uri="{909E8E84-426E-40DD-AFC4-6F175D3DCCD1}">
+              <a14:hiddenFill xmlns:a14="http://schemas.microsoft.com/office/drawing/2010/main">
+                <a:solidFill>
+                  <a:srgbClr val="FFFFFF"/>
+                </a:solidFill>
+              </a14:hiddenFill>
+            </a:ext>
+          </a:extLst>
+        </p:spPr>
+      </p:pic>
+    </p:spTree>
+    <p:extLst>
+      <p:ext uri="{BB962C8B-B14F-4D97-AF65-F5344CB8AC3E}">
+        <p14:creationId xmlns:p14="http://schemas.microsoft.com/office/powerpoint/2010/main" val="2895882210"/>
+      </p:ext>
+    </p:extLst>
+  </p:cSld>
+  <p:clrMapOvr>
+    <a:masterClrMapping/>
+  </p:clrMapOvr>
+  <p:timing>
+    <p:tnLst>
+      <p:par>
+        <p:cTn id="1" dur="indefinite" restart="never" nodeType="tmRoot"/>
+      </p:par>
+    </p:tnLst>
+  </p:timing>
+</p:sld>
+</file>
+
+<file path=ppt/slides/slide28.xml><?xml version="1.0" encoding="utf-8"?>
+<p:sld xmlns:a="http://schemas.openxmlformats.org/drawingml/2006/main" xmlns:r="http://schemas.openxmlformats.org/officeDocument/2006/relationships" xmlns:p="http://schemas.openxmlformats.org/presentationml/2006/main">
+  <p:cSld>
+    <p:spTree>
+      <p:nvGrpSpPr>
+        <p:cNvPr id="1" name=""/>
+        <p:cNvGrpSpPr/>
+        <p:nvPr/>
+      </p:nvGrpSpPr>
+      <p:grpSpPr>
+        <a:xfrm>
+          <a:off x="0" y="0"/>
+          <a:ext cx="0" cy="0"/>
+          <a:chOff x="0" y="0"/>
+          <a:chExt cx="0" cy="0"/>
+        </a:xfrm>
+      </p:grpSpPr>
+      <p:sp>
+        <p:nvSpPr>
+          <p:cNvPr id="2" name="Title 1"/>
+          <p:cNvSpPr>
+            <a:spLocks noGrp="1"/>
+          </p:cNvSpPr>
+          <p:nvPr>
+            <p:ph type="title"/>
+          </p:nvPr>
+        </p:nvSpPr>
+        <p:spPr/>
+        <p:txBody>
+          <a:bodyPr>
+            <a:normAutofit/>
+          </a:bodyPr>
+          <a:lstStyle/>
+          <a:p>
+            <a:r>
+              <a:rPr lang="ru-RU" dirty="0" smtClean="0"/>
+              <a:t>Отклик ВВП </a:t>
+            </a:r>
+            <a:r>
+              <a:rPr lang="ru-RU" dirty="0"/>
+              <a:t>Индии </a:t>
+            </a:r>
+            <a:r>
+              <a:rPr lang="ru-RU" dirty="0" smtClean="0"/>
+              <a:t>на шоки</a:t>
+            </a:r>
+            <a:endParaRPr lang="en-US" dirty="0"/>
+          </a:p>
+        </p:txBody>
+      </p:sp>
+      <p:pic>
+        <p:nvPicPr>
+          <p:cNvPr id="7171" name="Picture 3" descr="C:\Users\bklyu\Documents\Python Scripts\_GitHub_repos\conferences\lomonosov readings 2026\explore_data\irf_india.png"/>
+          <p:cNvPicPr>
+            <a:picLocks noChangeAspect="1" noChangeArrowheads="1"/>
+          </p:cNvPicPr>
+          <p:nvPr/>
+        </p:nvPicPr>
+        <p:blipFill>
+          <a:blip r:embed="rId2">
+            <a:extLst>
+              <a:ext uri="{28A0092B-C50C-407E-A947-70E740481C1C}">
+                <a14:useLocalDpi xmlns:a14="http://schemas.microsoft.com/office/drawing/2010/main" val="0"/>
+              </a:ext>
+            </a:extLst>
+          </a:blip>
+          <a:srcRect/>
+          <a:stretch>
+            <a:fillRect/>
+          </a:stretch>
+        </p:blipFill>
+        <p:spPr bwMode="auto">
+          <a:xfrm>
+            <a:off x="690880" y="1487148"/>
+            <a:ext cx="8778240" cy="2740717"/>
+          </a:xfrm>
+          <a:prstGeom prst="rect">
+            <a:avLst/>
+          </a:prstGeom>
+          <a:noFill/>
+          <a:extLst>
+            <a:ext uri="{909E8E84-426E-40DD-AFC4-6F175D3DCCD1}">
+              <a14:hiddenFill xmlns:a14="http://schemas.microsoft.com/office/drawing/2010/main">
+                <a:solidFill>
+                  <a:srgbClr val="FFFFFF"/>
+                </a:solidFill>
+              </a14:hiddenFill>
+            </a:ext>
+          </a:extLst>
+        </p:spPr>
+      </p:pic>
+    </p:spTree>
+    <p:extLst>
+      <p:ext uri="{BB962C8B-B14F-4D97-AF65-F5344CB8AC3E}">
+        <p14:creationId xmlns:p14="http://schemas.microsoft.com/office/powerpoint/2010/main" val="3820882855"/>
+      </p:ext>
+    </p:extLst>
+  </p:cSld>
+  <p:clrMapOvr>
+    <a:masterClrMapping/>
+  </p:clrMapOvr>
+  <p:timing>
+    <p:tnLst>
+      <p:par>
+        <p:cTn id="1" dur="indefinite" restart="never" nodeType="tmRoot"/>
+      </p:par>
+    </p:tnLst>
+  </p:timing>
+</p:sld>
+</file>
+
+<file path=ppt/slides/slide29.xml><?xml version="1.0" encoding="utf-8"?>
+<p:sld xmlns:a="http://schemas.openxmlformats.org/drawingml/2006/main" xmlns:r="http://schemas.openxmlformats.org/officeDocument/2006/relationships" xmlns:p="http://schemas.openxmlformats.org/presentationml/2006/main">
+  <p:cSld>
+    <p:spTree>
+      <p:nvGrpSpPr>
+        <p:cNvPr id="1" name=""/>
+        <p:cNvGrpSpPr/>
+        <p:nvPr/>
+      </p:nvGrpSpPr>
+      <p:grpSpPr>
+        <a:xfrm>
+          <a:off x="0" y="0"/>
+          <a:ext cx="0" cy="0"/>
+          <a:chOff x="0" y="0"/>
+          <a:chExt cx="0" cy="0"/>
+        </a:xfrm>
+      </p:grpSpPr>
+      <p:sp>
+        <p:nvSpPr>
+          <p:cNvPr id="2" name="Title 1"/>
+          <p:cNvSpPr>
+            <a:spLocks noGrp="1"/>
+          </p:cNvSpPr>
+          <p:nvPr>
+            <p:ph type="title"/>
+          </p:nvPr>
+        </p:nvSpPr>
+        <p:spPr>
+          <a:xfrm>
+            <a:off x="2108200" y="508000"/>
+            <a:ext cx="7543800" cy="1524000"/>
+          </a:xfrm>
+        </p:spPr>
+        <p:txBody>
+          <a:bodyPr/>
+          <a:lstStyle/>
+          <a:p>
+            <a:r>
+              <a:rPr lang="ru-RU" sz="4400" dirty="0"/>
+              <a:t>Кумулятивная функция импульсных откликов</a:t>
+            </a:r>
+            <a:endParaRPr lang="en-US" sz="4400" dirty="0"/>
+          </a:p>
+        </p:txBody>
+      </p:sp>
+      <p:sp>
+        <p:nvSpPr>
+          <p:cNvPr id="3" name="Text Placeholder 2"/>
+          <p:cNvSpPr>
+            <a:spLocks noGrp="1"/>
+          </p:cNvSpPr>
+          <p:nvPr>
+            <p:ph type="body" idx="1"/>
+          </p:nvPr>
+        </p:nvSpPr>
+        <p:spPr/>
+        <p:txBody>
+          <a:bodyPr>
+            <a:noAutofit/>
+          </a:bodyPr>
+          <a:lstStyle/>
+          <a:p>
+            <a:pPr algn="just"/>
+            <a:r>
+              <a:rPr lang="ru-RU" dirty="0"/>
+              <a:t>Кумулятивная функция импульсных откликов (</a:t>
+            </a:r>
+            <a:r>
+              <a:rPr lang="ru-RU" dirty="0" smtClean="0"/>
+              <a:t>CIRF – </a:t>
+            </a:r>
+            <a:r>
+              <a:rPr lang="en-US" dirty="0" smtClean="0"/>
+              <a:t>Cumulative Impulse</a:t>
+            </a:r>
+            <a:r>
+              <a:rPr lang="ru-RU" dirty="0" smtClean="0"/>
+              <a:t> </a:t>
+            </a:r>
+            <a:r>
+              <a:rPr lang="en-US" dirty="0"/>
+              <a:t>Response Function</a:t>
+            </a:r>
+            <a:r>
+              <a:rPr lang="ru-RU" dirty="0" smtClean="0"/>
+              <a:t>) </a:t>
+            </a:r>
+            <a:r>
+              <a:rPr lang="ru-RU" dirty="0"/>
+              <a:t>в моделях векторной </a:t>
+            </a:r>
+            <a:r>
+              <a:rPr lang="ru-RU" dirty="0" smtClean="0"/>
+              <a:t>авторегрессии </a:t>
+            </a:r>
+            <a:r>
+              <a:rPr lang="ru-RU" dirty="0"/>
+              <a:t>показывает совокупный долгосрочный эффект единовременного шока одной переменной на будущие значения других </a:t>
+            </a:r>
+            <a:r>
+              <a:rPr lang="ru-RU" dirty="0" smtClean="0"/>
+              <a:t>переменных. </a:t>
+            </a:r>
+            <a:r>
+              <a:rPr lang="en-US" dirty="0" smtClean="0"/>
+              <a:t/>
+            </a:r>
+            <a:br>
+              <a:rPr lang="en-US" dirty="0" smtClean="0"/>
+            </a:br>
+            <a:r>
+              <a:rPr lang="ru-RU" dirty="0" smtClean="0"/>
+              <a:t>В </a:t>
+            </a:r>
+            <a:r>
+              <a:rPr lang="ru-RU" dirty="0"/>
+              <a:t>отличие от обычного импульсного отклика, который показывает реакцию в конкретный момент времени, CIRF накапливает </a:t>
+            </a:r>
+            <a:r>
+              <a:rPr lang="ru-RU" dirty="0" smtClean="0"/>
+              <a:t>эти реакции, </a:t>
+            </a:r>
+            <a:r>
+              <a:rPr lang="ru-RU" dirty="0"/>
+              <a:t>позволяя оценить, приведет ли шок к постоянному изменению уровня переменной.</a:t>
+            </a:r>
+            <a:endParaRPr lang="en-US" dirty="0"/>
+          </a:p>
+        </p:txBody>
+      </p:sp>
+    </p:spTree>
+    <p:extLst>
+      <p:ext uri="{BB962C8B-B14F-4D97-AF65-F5344CB8AC3E}">
+        <p14:creationId xmlns:p14="http://schemas.microsoft.com/office/powerpoint/2010/main" val="2751044265"/>
+      </p:ext>
+    </p:extLst>
+  </p:cSld>
+  <p:clrMapOvr>
+    <a:masterClrMapping/>
+  </p:clrMapOvr>
+  <p:timing>
+    <p:tnLst>
+      <p:par>
+        <p:cTn id="1" dur="indefinite" restart="never" nodeType="tmRoot"/>
+      </p:par>
+    </p:tnLst>
+  </p:timing>
+</p:sld>
+</file>
+
+<file path=ppt/slides/slide3.xml><?xml version="1.0" encoding="utf-8"?>
+<p:sld xmlns:a="http://schemas.openxmlformats.org/drawingml/2006/main" xmlns:r="http://schemas.openxmlformats.org/officeDocument/2006/relationships" xmlns:p="http://schemas.openxmlformats.org/presentationml/2006/main">
+  <p:cSld>
+    <p:spTree>
+      <p:nvGrpSpPr>
+        <p:cNvPr id="1" name=""/>
+        <p:cNvGrpSpPr/>
+        <p:nvPr/>
+      </p:nvGrpSpPr>
+      <p:grpSpPr>
+        <a:xfrm>
+          <a:off x="0" y="0"/>
+          <a:ext cx="0" cy="0"/>
+          <a:chOff x="0" y="0"/>
+          <a:chExt cx="0" cy="0"/>
+        </a:xfrm>
+      </p:grpSpPr>
+      <p:sp>
+        <p:nvSpPr>
+          <p:cNvPr id="2" name="Title 1"/>
+          <p:cNvSpPr>
+            <a:spLocks noGrp="1"/>
+          </p:cNvSpPr>
+          <p:nvPr>
+            <p:ph type="title"/>
+          </p:nvPr>
+        </p:nvSpPr>
+        <p:spPr/>
+        <p:txBody>
+          <a:bodyPr/>
+          <a:lstStyle/>
+          <a:p>
+            <a:r>
+              <a:rPr lang="ru-RU" dirty="0"/>
+              <a:t>Проблемы с литературой</a:t>
+            </a:r>
+            <a:endParaRPr lang="en-US" dirty="0"/>
+          </a:p>
+        </p:txBody>
+      </p:sp>
+      <p:sp>
+        <p:nvSpPr>
+          <p:cNvPr id="3" name="Text Placeholder 2"/>
+          <p:cNvSpPr>
+            <a:spLocks noGrp="1"/>
+          </p:cNvSpPr>
+          <p:nvPr>
+            <p:ph type="body" idx="1"/>
+          </p:nvPr>
+        </p:nvSpPr>
+        <p:spPr>
+          <a:xfrm>
+            <a:off x="2108200" y="2089828"/>
+            <a:ext cx="6324600" cy="1258093"/>
+          </a:xfrm>
+        </p:spPr>
+        <p:txBody>
+          <a:bodyPr>
+            <a:noAutofit/>
+          </a:bodyPr>
+          <a:lstStyle/>
+          <a:p>
+            <a:pPr algn="just"/>
+            <a:r>
+              <a:rPr lang="ru-RU" dirty="0"/>
+              <a:t>Многие существующие исследования прибегающие к методологии векторной авторегрессии сфокусированы исключительно на переменных фондового рынка игнорируя другие факторы также играющие важную роль в экономике каждой страны. Это является ошибкой спецификации модели, что нарушает условие </a:t>
+            </a:r>
+            <a:r>
+              <a:rPr lang="ru-RU" dirty="0" err="1"/>
+              <a:t>экзогенности</a:t>
+            </a:r>
+            <a:r>
+              <a:rPr lang="ru-RU" dirty="0"/>
+              <a:t>, приводя к смещенным и несостоятельным оценкам коэффициентов.</a:t>
+            </a:r>
+            <a:endParaRPr lang="en-US" b="1" dirty="0"/>
+          </a:p>
+        </p:txBody>
+      </p:sp>
+    </p:spTree>
+    <p:extLst>
+      <p:ext uri="{BB962C8B-B14F-4D97-AF65-F5344CB8AC3E}">
+        <p14:creationId xmlns:p14="http://schemas.microsoft.com/office/powerpoint/2010/main" val="3161655172"/>
+      </p:ext>
+    </p:extLst>
+  </p:cSld>
+  <p:clrMapOvr>
+    <a:masterClrMapping/>
+  </p:clrMapOvr>
+  <p:timing>
+    <p:tnLst>
+      <p:par>
+        <p:cTn id="1" dur="indefinite" restart="never" nodeType="tmRoot"/>
+      </p:par>
+    </p:tnLst>
+  </p:timing>
+</p:sld>
+</file>
+
+<file path=ppt/slides/slide30.xml><?xml version="1.0" encoding="utf-8"?>
+<p:sld xmlns:a="http://schemas.openxmlformats.org/drawingml/2006/main" xmlns:r="http://schemas.openxmlformats.org/officeDocument/2006/relationships" xmlns:p="http://schemas.openxmlformats.org/presentationml/2006/main">
+  <p:cSld>
+    <p:spTree>
+      <p:nvGrpSpPr>
+        <p:cNvPr id="1" name=""/>
+        <p:cNvGrpSpPr/>
+        <p:nvPr/>
+      </p:nvGrpSpPr>
+      <p:grpSpPr>
+        <a:xfrm>
+          <a:off x="0" y="0"/>
+          <a:ext cx="0" cy="0"/>
+          <a:chOff x="0" y="0"/>
+          <a:chExt cx="0" cy="0"/>
+        </a:xfrm>
+      </p:grpSpPr>
+      <p:sp>
+        <p:nvSpPr>
+          <p:cNvPr id="2" name="Title 1"/>
+          <p:cNvSpPr>
+            <a:spLocks noGrp="1"/>
+          </p:cNvSpPr>
+          <p:nvPr>
+            <p:ph type="title"/>
+          </p:nvPr>
+        </p:nvSpPr>
+        <p:spPr/>
+        <p:txBody>
+          <a:bodyPr>
+            <a:normAutofit/>
+          </a:bodyPr>
+          <a:lstStyle/>
+          <a:p>
+            <a:r>
+              <a:rPr lang="ru-RU" dirty="0" smtClean="0"/>
+              <a:t>Накопленная </a:t>
+            </a:r>
+            <a:r>
+              <a:rPr lang="ru-RU" dirty="0"/>
+              <a:t>реакция </a:t>
+            </a:r>
+            <a:r>
+              <a:rPr lang="ru-RU" dirty="0" smtClean="0"/>
+              <a:t>Китая</a:t>
+            </a:r>
+            <a:endParaRPr lang="en-US" dirty="0"/>
+          </a:p>
+        </p:txBody>
+      </p:sp>
+      <p:pic>
+        <p:nvPicPr>
+          <p:cNvPr id="10242" name="Picture 2" descr="C:\Users\bklyu\Documents\Python Scripts\_GitHub_repos\conferences\lomonosov readings 2026\explore_data\cirf_china.png"/>
+          <p:cNvPicPr>
+            <a:picLocks noChangeAspect="1" noChangeArrowheads="1"/>
+          </p:cNvPicPr>
+          <p:nvPr/>
+        </p:nvPicPr>
+        <p:blipFill>
+          <a:blip r:embed="rId2">
+            <a:extLst>
+              <a:ext uri="{28A0092B-C50C-407E-A947-70E740481C1C}">
+                <a14:useLocalDpi xmlns:a14="http://schemas.microsoft.com/office/drawing/2010/main" val="0"/>
+              </a:ext>
+            </a:extLst>
+          </a:blip>
+          <a:srcRect/>
+          <a:stretch>
+            <a:fillRect/>
+          </a:stretch>
+        </p:blipFill>
+        <p:spPr bwMode="auto">
+          <a:xfrm>
+            <a:off x="690880" y="1467286"/>
+            <a:ext cx="8778240" cy="2780439"/>
+          </a:xfrm>
+          <a:prstGeom prst="rect">
+            <a:avLst/>
+          </a:prstGeom>
+          <a:noFill/>
+          <a:extLst>
+            <a:ext uri="{909E8E84-426E-40DD-AFC4-6F175D3DCCD1}">
+              <a14:hiddenFill xmlns:a14="http://schemas.microsoft.com/office/drawing/2010/main">
+                <a:solidFill>
+                  <a:srgbClr val="FFFFFF"/>
+                </a:solidFill>
+              </a14:hiddenFill>
+            </a:ext>
+          </a:extLst>
+        </p:spPr>
+      </p:pic>
+    </p:spTree>
+    <p:extLst>
+      <p:ext uri="{BB962C8B-B14F-4D97-AF65-F5344CB8AC3E}">
+        <p14:creationId xmlns:p14="http://schemas.microsoft.com/office/powerpoint/2010/main" val="2063722478"/>
+      </p:ext>
+    </p:extLst>
+  </p:cSld>
+  <p:clrMapOvr>
+    <a:masterClrMapping/>
+  </p:clrMapOvr>
+  <p:timing>
+    <p:tnLst>
+      <p:par>
+        <p:cTn id="1" dur="indefinite" restart="never" nodeType="tmRoot"/>
+      </p:par>
+    </p:tnLst>
+  </p:timing>
+</p:sld>
+</file>
+
+<file path=ppt/slides/slide31.xml><?xml version="1.0" encoding="utf-8"?>
+<p:sld xmlns:a="http://schemas.openxmlformats.org/drawingml/2006/main" xmlns:r="http://schemas.openxmlformats.org/officeDocument/2006/relationships" xmlns:p="http://schemas.openxmlformats.org/presentationml/2006/main">
+  <p:cSld>
+    <p:spTree>
+      <p:nvGrpSpPr>
+        <p:cNvPr id="1" name=""/>
+        <p:cNvGrpSpPr/>
+        <p:nvPr/>
+      </p:nvGrpSpPr>
+      <p:grpSpPr>
+        <a:xfrm>
+          <a:off x="0" y="0"/>
+          <a:ext cx="0" cy="0"/>
+          <a:chOff x="0" y="0"/>
+          <a:chExt cx="0" cy="0"/>
+        </a:xfrm>
+      </p:grpSpPr>
+      <p:sp>
+        <p:nvSpPr>
+          <p:cNvPr id="2" name="Title 1"/>
+          <p:cNvSpPr>
+            <a:spLocks noGrp="1"/>
+          </p:cNvSpPr>
+          <p:nvPr>
+            <p:ph type="title"/>
+          </p:nvPr>
+        </p:nvSpPr>
+        <p:spPr/>
+        <p:txBody>
+          <a:bodyPr>
+            <a:normAutofit/>
+          </a:bodyPr>
+          <a:lstStyle/>
+          <a:p>
+            <a:r>
+              <a:rPr lang="ru-RU" dirty="0" smtClean="0"/>
+              <a:t>Накопленная реакция ВВП </a:t>
+            </a:r>
+            <a:r>
+              <a:rPr lang="ru-RU" dirty="0"/>
+              <a:t>Индии</a:t>
+            </a:r>
+            <a:endParaRPr lang="en-US" dirty="0"/>
+          </a:p>
+        </p:txBody>
+      </p:sp>
+      <p:pic>
+        <p:nvPicPr>
+          <p:cNvPr id="9219" name="Picture 3" descr="C:\Users\bklyu\Documents\Python Scripts\_GitHub_repos\conferences\lomonosov readings 2026\explore_data\cirf_india.png"/>
+          <p:cNvPicPr>
+            <a:picLocks noChangeAspect="1" noChangeArrowheads="1"/>
+          </p:cNvPicPr>
+          <p:nvPr/>
+        </p:nvPicPr>
+        <p:blipFill>
+          <a:blip r:embed="rId2">
+            <a:extLst>
+              <a:ext uri="{28A0092B-C50C-407E-A947-70E740481C1C}">
+                <a14:useLocalDpi xmlns:a14="http://schemas.microsoft.com/office/drawing/2010/main" val="0"/>
+              </a:ext>
+            </a:extLst>
+          </a:blip>
+          <a:srcRect/>
+          <a:stretch>
+            <a:fillRect/>
+          </a:stretch>
+        </p:blipFill>
+        <p:spPr bwMode="auto">
+          <a:xfrm>
+            <a:off x="690880" y="1475186"/>
+            <a:ext cx="8778240" cy="2764641"/>
+          </a:xfrm>
+          <a:prstGeom prst="rect">
+            <a:avLst/>
+          </a:prstGeom>
+          <a:noFill/>
+          <a:extLst>
+            <a:ext uri="{909E8E84-426E-40DD-AFC4-6F175D3DCCD1}">
+              <a14:hiddenFill xmlns:a14="http://schemas.microsoft.com/office/drawing/2010/main">
+                <a:solidFill>
+                  <a:srgbClr val="FFFFFF"/>
+                </a:solidFill>
+              </a14:hiddenFill>
+            </a:ext>
+          </a:extLst>
+        </p:spPr>
+      </p:pic>
+    </p:spTree>
+    <p:extLst>
+      <p:ext uri="{BB962C8B-B14F-4D97-AF65-F5344CB8AC3E}">
+        <p14:creationId xmlns:p14="http://schemas.microsoft.com/office/powerpoint/2010/main" val="1542038033"/>
+      </p:ext>
+    </p:extLst>
+  </p:cSld>
+  <p:clrMapOvr>
+    <a:masterClrMapping/>
+  </p:clrMapOvr>
+  <p:timing>
+    <p:tnLst>
+      <p:par>
+        <p:cTn id="1" dur="indefinite" restart="never" nodeType="tmRoot"/>
+      </p:par>
+    </p:tnLst>
+  </p:timing>
+</p:sld>
+</file>
+
+<file path=ppt/slides/slide32.xml><?xml version="1.0" encoding="utf-8"?>
+<p:sld xmlns:a="http://schemas.openxmlformats.org/drawingml/2006/main" xmlns:r="http://schemas.openxmlformats.org/officeDocument/2006/relationships" xmlns:p="http://schemas.openxmlformats.org/presentationml/2006/main">
+  <p:cSld>
+    <p:spTree>
+      <p:nvGrpSpPr>
+        <p:cNvPr id="1" name=""/>
+        <p:cNvGrpSpPr/>
+        <p:nvPr/>
+      </p:nvGrpSpPr>
+      <p:grpSpPr>
+        <a:xfrm>
+          <a:off x="0" y="0"/>
+          <a:ext cx="0" cy="0"/>
+          <a:chOff x="0" y="0"/>
+          <a:chExt cx="0" cy="0"/>
+        </a:xfrm>
+      </p:grpSpPr>
+      <p:sp>
+        <p:nvSpPr>
+          <p:cNvPr id="2" name="Title 1"/>
+          <p:cNvSpPr>
+            <a:spLocks noGrp="1"/>
+          </p:cNvSpPr>
+          <p:nvPr>
+            <p:ph type="title"/>
+          </p:nvPr>
+        </p:nvSpPr>
+        <p:spPr/>
+        <p:txBody>
+          <a:bodyPr/>
+          <a:lstStyle/>
+          <a:p>
+            <a:r>
+              <a:rPr lang="ru-RU" sz="4400" dirty="0"/>
+              <a:t>Разложение дисперсии ошибки прогноза</a:t>
+            </a:r>
+            <a:endParaRPr lang="en-US" sz="4400" dirty="0"/>
+          </a:p>
+        </p:txBody>
+      </p:sp>
+      <p:sp>
+        <p:nvSpPr>
+          <p:cNvPr id="3" name="Text Placeholder 2"/>
+          <p:cNvSpPr>
+            <a:spLocks noGrp="1"/>
+          </p:cNvSpPr>
+          <p:nvPr>
+            <p:ph type="body" idx="1"/>
+          </p:nvPr>
+        </p:nvSpPr>
+        <p:spPr/>
+        <p:txBody>
+          <a:bodyPr>
+            <a:noAutofit/>
+          </a:bodyPr>
+          <a:lstStyle/>
+          <a:p>
+            <a:pPr algn="just"/>
+            <a:r>
+              <a:rPr lang="ru-RU" dirty="0" smtClean="0"/>
+              <a:t>Разложение </a:t>
+            </a:r>
+            <a:r>
+              <a:rPr lang="ru-RU" dirty="0"/>
+              <a:t>дисперсии ошибки прогноза </a:t>
+            </a:r>
+            <a:r>
+              <a:rPr lang="ru-RU" dirty="0" smtClean="0"/>
+              <a:t>(FEVD – Forecast Error </a:t>
+            </a:r>
+            <a:r>
+              <a:rPr lang="ru-RU" dirty="0"/>
+              <a:t>Variance </a:t>
+            </a:r>
+            <a:r>
+              <a:rPr lang="ru-RU" dirty="0" smtClean="0"/>
+              <a:t>Decomposition), — </a:t>
+            </a:r>
+            <a:r>
+              <a:rPr lang="ru-RU" dirty="0"/>
+              <a:t>это метод в эконометрике (</a:t>
+            </a:r>
+            <a:r>
+              <a:rPr lang="ru-RU"/>
+              <a:t>обычно </a:t>
+            </a:r>
+            <a:r>
+              <a:rPr lang="ru-RU" smtClean="0"/>
+              <a:t/>
+            </a:r>
+            <a:br>
+              <a:rPr lang="ru-RU" smtClean="0"/>
+            </a:br>
+            <a:r>
+              <a:rPr lang="ru-RU" smtClean="0"/>
+              <a:t>в </a:t>
+            </a:r>
+            <a:r>
+              <a:rPr lang="ru-RU" dirty="0"/>
+              <a:t>моделях VAR), определяющий, какой процент волатильности (дисперсии) одной переменной объясняется неожиданными шоками другой переменной. FEVD показывает </a:t>
+            </a:r>
+            <a:r>
+              <a:rPr lang="ru-RU" b="1" dirty="0"/>
+              <a:t>относительную важность каждого структурного шока </a:t>
+            </a:r>
+            <a:r>
+              <a:rPr lang="ru-RU" b="1" dirty="0" smtClean="0"/>
+              <a:t>для </a:t>
+            </a:r>
+            <a:r>
+              <a:rPr lang="ru-RU" b="1" dirty="0"/>
+              <a:t>переменных системы</a:t>
+            </a:r>
+            <a:r>
+              <a:rPr lang="ru-RU" dirty="0"/>
+              <a:t> </a:t>
+            </a:r>
+            <a:r>
+              <a:rPr lang="ru-RU" dirty="0" smtClean="0"/>
+              <a:t/>
+            </a:r>
+            <a:br>
+              <a:rPr lang="ru-RU" dirty="0" smtClean="0"/>
+            </a:br>
+            <a:r>
+              <a:rPr lang="ru-RU" dirty="0" smtClean="0"/>
+              <a:t>в </a:t>
+            </a:r>
+            <a:r>
+              <a:rPr lang="ru-RU" dirty="0"/>
+              <a:t>краткосрочной и долгосрочной перспективе.</a:t>
+            </a:r>
+            <a:endParaRPr lang="en-US" dirty="0"/>
+          </a:p>
+        </p:txBody>
+      </p:sp>
+    </p:spTree>
+    <p:extLst>
+      <p:ext uri="{BB962C8B-B14F-4D97-AF65-F5344CB8AC3E}">
+        <p14:creationId xmlns:p14="http://schemas.microsoft.com/office/powerpoint/2010/main" val="2751044265"/>
+      </p:ext>
+    </p:extLst>
+  </p:cSld>
+  <p:clrMapOvr>
+    <a:masterClrMapping/>
+  </p:clrMapOvr>
+  <p:timing>
+    <p:tnLst>
+      <p:par>
+        <p:cTn id="1" dur="indefinite" restart="never" nodeType="tmRoot"/>
+      </p:par>
+    </p:tnLst>
+  </p:timing>
+</p:sld>
+</file>
+
+<file path=ppt/slides/slide33.xml><?xml version="1.0" encoding="utf-8"?>
+<p:sld xmlns:a="http://schemas.openxmlformats.org/drawingml/2006/main" xmlns:r="http://schemas.openxmlformats.org/officeDocument/2006/relationships" xmlns:p="http://schemas.openxmlformats.org/presentationml/2006/main">
+  <p:cSld>
+    <p:spTree>
+      <p:nvGrpSpPr>
+        <p:cNvPr id="1" name=""/>
+        <p:cNvGrpSpPr/>
+        <p:nvPr/>
+      </p:nvGrpSpPr>
+      <p:grpSpPr>
+        <a:xfrm>
+          <a:off x="0" y="0"/>
+          <a:ext cx="0" cy="0"/>
+          <a:chOff x="0" y="0"/>
+          <a:chExt cx="0" cy="0"/>
+        </a:xfrm>
+      </p:grpSpPr>
+      <p:sp>
+        <p:nvSpPr>
+          <p:cNvPr id="2" name="Title 1"/>
+          <p:cNvSpPr>
+            <a:spLocks noGrp="1"/>
+          </p:cNvSpPr>
+          <p:nvPr>
+            <p:ph type="title"/>
+          </p:nvPr>
+        </p:nvSpPr>
+        <p:spPr/>
+        <p:txBody>
+          <a:bodyPr>
+            <a:normAutofit/>
+          </a:bodyPr>
+          <a:lstStyle/>
+          <a:p>
+            <a:r>
+              <a:rPr lang="ru-RU" dirty="0" smtClean="0"/>
+              <a:t>Вклад переменных в ВВП Индии</a:t>
+            </a:r>
+            <a:endParaRPr lang="en-US" dirty="0"/>
+          </a:p>
+        </p:txBody>
+      </p:sp>
+      <p:pic>
+        <p:nvPicPr>
+          <p:cNvPr id="11266" name="Picture 2" descr="C:\Users\bklyu\Documents\Python Scripts\_GitHub_repos\conferences\lomonosov readings 2026\explore_data\fevd_india.png"/>
+          <p:cNvPicPr>
+            <a:picLocks noChangeAspect="1" noChangeArrowheads="1"/>
+          </p:cNvPicPr>
+          <p:nvPr/>
+        </p:nvPicPr>
+        <p:blipFill>
+          <a:blip r:embed="rId2">
+            <a:extLst>
+              <a:ext uri="{28A0092B-C50C-407E-A947-70E740481C1C}">
+                <a14:useLocalDpi xmlns:a14="http://schemas.microsoft.com/office/drawing/2010/main" val="0"/>
+              </a:ext>
+            </a:extLst>
+          </a:blip>
+          <a:srcRect/>
+          <a:stretch>
+            <a:fillRect/>
+          </a:stretch>
+        </p:blipFill>
+        <p:spPr bwMode="auto">
+          <a:xfrm>
+            <a:off x="690880" y="1716334"/>
+            <a:ext cx="8778240" cy="2282343"/>
+          </a:xfrm>
+          <a:prstGeom prst="rect">
+            <a:avLst/>
+          </a:prstGeom>
+          <a:noFill/>
+          <a:extLst>
+            <a:ext uri="{909E8E84-426E-40DD-AFC4-6F175D3DCCD1}">
+              <a14:hiddenFill xmlns:a14="http://schemas.microsoft.com/office/drawing/2010/main">
+                <a:solidFill>
+                  <a:srgbClr val="FFFFFF"/>
+                </a:solidFill>
+              </a14:hiddenFill>
+            </a:ext>
+          </a:extLst>
+        </p:spPr>
+      </p:pic>
+    </p:spTree>
+    <p:extLst>
+      <p:ext uri="{BB962C8B-B14F-4D97-AF65-F5344CB8AC3E}">
+        <p14:creationId xmlns:p14="http://schemas.microsoft.com/office/powerpoint/2010/main" val="3329742558"/>
+      </p:ext>
+    </p:extLst>
+  </p:cSld>
+  <p:clrMapOvr>
+    <a:masterClrMapping/>
+  </p:clrMapOvr>
+  <p:timing>
+    <p:tnLst>
+      <p:par>
+        <p:cTn id="1" dur="indefinite" restart="never" nodeType="tmRoot"/>
+      </p:par>
+    </p:tnLst>
+  </p:timing>
+</p:sld>
+</file>
+
+<file path=ppt/slides/slide34.xml><?xml version="1.0" encoding="utf-8"?>
+<p:sld xmlns:a="http://schemas.openxmlformats.org/drawingml/2006/main" xmlns:r="http://schemas.openxmlformats.org/officeDocument/2006/relationships" xmlns:p="http://schemas.openxmlformats.org/presentationml/2006/main">
+  <p:cSld>
+    <p:spTree>
+      <p:nvGrpSpPr>
+        <p:cNvPr id="1" name=""/>
+        <p:cNvGrpSpPr/>
+        <p:nvPr/>
+      </p:nvGrpSpPr>
+      <p:grpSpPr>
+        <a:xfrm>
+          <a:off x="0" y="0"/>
+          <a:ext cx="0" cy="0"/>
+          <a:chOff x="0" y="0"/>
+          <a:chExt cx="0" cy="0"/>
+        </a:xfrm>
+      </p:grpSpPr>
+      <p:sp>
+        <p:nvSpPr>
+          <p:cNvPr id="2" name="Title 1"/>
+          <p:cNvSpPr>
+            <a:spLocks noGrp="1"/>
+          </p:cNvSpPr>
+          <p:nvPr>
+            <p:ph type="title"/>
+          </p:nvPr>
+        </p:nvSpPr>
+        <p:spPr/>
+        <p:txBody>
+          <a:bodyPr>
+            <a:normAutofit/>
+          </a:bodyPr>
+          <a:lstStyle/>
+          <a:p>
+            <a:r>
+              <a:rPr lang="ru-RU" dirty="0"/>
+              <a:t>Вклад переменных в ВВП </a:t>
+            </a:r>
+            <a:r>
+              <a:rPr lang="ru-RU" dirty="0" smtClean="0"/>
+              <a:t>Китая</a:t>
+            </a:r>
+            <a:endParaRPr lang="en-US" dirty="0"/>
+          </a:p>
+        </p:txBody>
+      </p:sp>
+      <p:pic>
+        <p:nvPicPr>
+          <p:cNvPr id="12290" name="Picture 2" descr="C:\Users\bklyu\Documents\Python Scripts\_GitHub_repos\conferences\lomonosov readings 2026\explore_data\fevd_china.png"/>
+          <p:cNvPicPr>
+            <a:picLocks noChangeAspect="1" noChangeArrowheads="1"/>
+          </p:cNvPicPr>
+          <p:nvPr/>
+        </p:nvPicPr>
+        <p:blipFill>
+          <a:blip r:embed="rId2">
+            <a:extLst>
+              <a:ext uri="{28A0092B-C50C-407E-A947-70E740481C1C}">
+                <a14:useLocalDpi xmlns:a14="http://schemas.microsoft.com/office/drawing/2010/main" val="0"/>
+              </a:ext>
+            </a:extLst>
+          </a:blip>
+          <a:srcRect/>
+          <a:stretch>
+            <a:fillRect/>
+          </a:stretch>
+        </p:blipFill>
+        <p:spPr bwMode="auto">
+          <a:xfrm>
+            <a:off x="690880" y="1706579"/>
+            <a:ext cx="8778240" cy="2301851"/>
+          </a:xfrm>
+          <a:prstGeom prst="rect">
+            <a:avLst/>
+          </a:prstGeom>
+          <a:noFill/>
+          <a:extLst>
+            <a:ext uri="{909E8E84-426E-40DD-AFC4-6F175D3DCCD1}">
+              <a14:hiddenFill xmlns:a14="http://schemas.microsoft.com/office/drawing/2010/main">
+                <a:solidFill>
+                  <a:srgbClr val="FFFFFF"/>
+                </a:solidFill>
+              </a14:hiddenFill>
+            </a:ext>
+          </a:extLst>
+        </p:spPr>
+      </p:pic>
+    </p:spTree>
+    <p:extLst>
+      <p:ext uri="{BB962C8B-B14F-4D97-AF65-F5344CB8AC3E}">
+        <p14:creationId xmlns:p14="http://schemas.microsoft.com/office/powerpoint/2010/main" val="4106966577"/>
+      </p:ext>
+    </p:extLst>
+  </p:cSld>
+  <p:clrMapOvr>
+    <a:masterClrMapping/>
+  </p:clrMapOvr>
+  <p:timing>
+    <p:tnLst>
+      <p:par>
+        <p:cTn id="1" dur="indefinite" restart="never" nodeType="tmRoot"/>
+      </p:par>
+    </p:tnLst>
+  </p:timing>
+</p:sld>
+</file>
+
 <file path=ppt/slides/slide35.xml><?xml version="1.0" encoding="utf-8"?>
 <p:sld xmlns:a="http://schemas.openxmlformats.org/drawingml/2006/main" xmlns:r="http://schemas.openxmlformats.org/officeDocument/2006/relationships" xmlns:p="http://schemas.openxmlformats.org/presentationml/2006/main">
   <p:cSld>
@@ -19972,10 +19671,10 @@
           <a:lstStyle/>
           <a:p>
             <a:r>
-              <a:rPr lang="ru-RU" dirty="0" smtClean="0"/>
-              <a:t>Исходные данные</a:t>
-            </a:r>
-            <a:endParaRPr lang="en-US" dirty="0"/>
+              <a:rPr lang="ru-RU" sz="4400" dirty="0"/>
+              <a:t>Выводы (1)</a:t>
+            </a:r>
+            <a:endParaRPr lang="en-US" sz="4400" dirty="0"/>
           </a:p>
         </p:txBody>
       </p:sp>
@@ -19991,62 +19690,93 @@
         </p:nvSpPr>
         <p:spPr>
           <a:xfrm>
-            <a:off x="2108200" y="2089828"/>
-            <a:ext cx="6324600" cy="1258093"/>
+            <a:off x="1778000" y="2089829"/>
+            <a:ext cx="7721600" cy="1258093"/>
           </a:xfrm>
         </p:spPr>
         <p:txBody>
           <a:bodyPr>
-            <a:normAutofit lnSpcReduction="10000"/>
+            <a:noAutofit/>
           </a:bodyPr>
           <a:lstStyle/>
           <a:p>
-            <a:pPr algn="just"/>
+            <a:pPr marL="416042" indent="-342891" algn="just">
+              <a:buFont typeface="Arial" panose="020B0604020202020204" pitchFamily="34" charset="0"/>
+              <a:buChar char="•"/>
+            </a:pPr>
+            <a:r>
+              <a:rPr lang="ru-RU" dirty="0" smtClean="0"/>
+              <a:t>Долгосрочный тренд </a:t>
+            </a:r>
             <a:r>
               <a:rPr lang="ru-RU" dirty="0"/>
-              <a:t>Исходные данные позволяют </a:t>
+              <a:t>совместного </a:t>
             </a:r>
             <a:r>
               <a:rPr lang="ru-RU" dirty="0" smtClean="0"/>
-              <a:t>сравнить </a:t>
+              <a:t>роста (</a:t>
+            </a:r>
+            <a:r>
+              <a:rPr lang="ru-RU" dirty="0" err="1" smtClean="0"/>
+              <a:t>коинтеграция</a:t>
+            </a:r>
+            <a:r>
+              <a:rPr lang="ru-RU" dirty="0" smtClean="0"/>
+              <a:t>):</a:t>
+            </a:r>
+          </a:p>
+          <a:p>
+            <a:pPr marL="870945" lvl="1" indent="-285744" algn="just">
+              <a:buFont typeface="Arial" panose="020B0604020202020204" pitchFamily="34" charset="0"/>
+              <a:buChar char="•"/>
+            </a:pPr>
+            <a:r>
+              <a:rPr lang="ru-RU" dirty="0" smtClean="0"/>
+              <a:t>В </a:t>
+            </a:r>
+            <a:r>
+              <a:rPr lang="ru-RU" b="1" dirty="0" smtClean="0"/>
+              <a:t>Индии</a:t>
+            </a:r>
+            <a:r>
+              <a:rPr lang="ru-RU" dirty="0" smtClean="0"/>
+              <a:t>: экономика растет совместно с рыночной капитализацией.</a:t>
+            </a:r>
+          </a:p>
+          <a:p>
+            <a:pPr marL="870945" lvl="1" indent="-285744" algn="just">
+              <a:buFont typeface="Arial" panose="020B0604020202020204" pitchFamily="34" charset="0"/>
+              <a:buChar char="•"/>
+            </a:pPr>
+            <a:r>
+              <a:rPr lang="ru-RU" dirty="0" smtClean="0"/>
+              <a:t>В</a:t>
             </a:r>
             <a:r>
               <a:rPr lang="ru-RU" dirty="0"/>
-              <a:t>размеры ВВП, экспорта, долга и фондового рынка каждой страны </a:t>
+              <a:t> </a:t>
+            </a:r>
+            <a:r>
+              <a:rPr lang="ru-RU" b="1" dirty="0"/>
+              <a:t>Китае</a:t>
+            </a:r>
+            <a:r>
+              <a:rPr lang="ru-RU" dirty="0"/>
+              <a:t>: экономика растет совместно с задолженностью.</a:t>
+            </a:r>
+          </a:p>
+          <a:p>
+            <a:pPr marL="416042" indent="-342891" algn="just">
+              <a:buFont typeface="Arial" panose="020B0604020202020204" pitchFamily="34" charset="0"/>
+              <a:buChar char="•"/>
+            </a:pPr>
+            <a:r>
+              <a:rPr lang="ru-RU" dirty="0"/>
+              <a:t>Отсутствие долгосрочных связей не исключает значимых краткосрочных взаимодействий между переменными</a:t>
             </a:r>
             <a:r>
               <a:rPr lang="ru-RU" dirty="0" smtClean="0"/>
-              <a:t/>
-            </a:r>
-            <a:br>
-              <a:rPr lang="ru-RU" dirty="0" smtClean="0"/>
-            </a:br>
-            <a:r>
-              <a:rPr lang="ru-RU" dirty="0" smtClean="0"/>
-              <a:t>и </a:t>
-            </a:r>
-            <a:r>
-              <a:rPr lang="ru-RU" dirty="0"/>
-              <a:t>выдвинуть ряд гипотез относительно </a:t>
-            </a:r>
-            <a:r>
-              <a:rPr lang="ru-RU" dirty="0" smtClean="0"/>
-              <a:t>вклада </a:t>
-            </a:r>
-            <a:br>
-              <a:rPr lang="ru-RU" dirty="0" smtClean="0"/>
-            </a:br>
-            <a:r>
-              <a:rPr lang="ru-RU" dirty="0" smtClean="0"/>
-              <a:t>в </a:t>
-            </a:r>
-            <a:r>
-              <a:rPr lang="ru-RU" dirty="0"/>
-              <a:t>экономический рост </a:t>
-            </a:r>
-            <a:r>
-              <a:rPr lang="ru-RU" dirty="0" smtClean="0"/>
-              <a:t>каждой из них.</a:t>
+              <a:t>.</a:t>
             </a:r>
             <a:endParaRPr lang="en-US" dirty="0"/>
           </a:p>
@@ -20055,7 +19785,7 @@
     </p:spTree>
     <p:extLst>
       <p:ext uri="{BB962C8B-B14F-4D97-AF65-F5344CB8AC3E}">
-        <p14:creationId xmlns:p14="http://schemas.microsoft.com/office/powerpoint/2010/main" val="3380102462"/>
+        <p14:creationId xmlns:p14="http://schemas.microsoft.com/office/powerpoint/2010/main" val="3682347184"/>
       </p:ext>
     </p:extLst>
   </p:cSld>
@@ -20105,58 +19835,115 @@
           <a:lstStyle/>
           <a:p>
             <a:r>
+              <a:rPr lang="ru-RU" sz="4400" dirty="0"/>
+              <a:t>Выводы (2)</a:t>
+            </a:r>
+            <a:endParaRPr lang="en-US" sz="4400" dirty="0"/>
+          </a:p>
+        </p:txBody>
+      </p:sp>
+      <p:sp>
+        <p:nvSpPr>
+          <p:cNvPr id="3" name="Text Placeholder 2"/>
+          <p:cNvSpPr>
+            <a:spLocks noGrp="1"/>
+          </p:cNvSpPr>
+          <p:nvPr>
+            <p:ph type="body" idx="1"/>
+          </p:nvPr>
+        </p:nvSpPr>
+        <p:spPr>
+          <a:xfrm>
+            <a:off x="1778000" y="2089829"/>
+            <a:ext cx="7264400" cy="1258093"/>
+          </a:xfrm>
+        </p:spPr>
+        <p:txBody>
+          <a:bodyPr>
+            <a:noAutofit/>
+          </a:bodyPr>
+          <a:lstStyle/>
+          <a:p>
+            <a:pPr marL="416042" indent="-342891" algn="just">
+              <a:buFont typeface="Arial" panose="020B0604020202020204" pitchFamily="34" charset="0"/>
+              <a:buChar char="•"/>
+            </a:pPr>
+            <a:r>
+              <a:rPr lang="ru-RU" dirty="0"/>
+              <a:t>Направление влияния на ВВП </a:t>
+            </a:r>
+            <a:r>
               <a:rPr lang="ru-RU" dirty="0" smtClean="0"/>
-              <a:t>Динамика показателей</a:t>
+              <a:t>(кумулятивный отклик):</a:t>
+            </a:r>
+          </a:p>
+          <a:p>
+            <a:pPr marL="1211550" lvl="1" indent="-342891" algn="just">
+              <a:buFont typeface="Arial" panose="020B0604020202020204" pitchFamily="34" charset="0"/>
+              <a:buChar char="•"/>
+            </a:pPr>
+            <a:r>
+              <a:rPr lang="ru-RU" b="1" dirty="0" smtClean="0"/>
+              <a:t>В </a:t>
+            </a:r>
+            <a:r>
+              <a:rPr lang="ru-RU" b="1" dirty="0"/>
+              <a:t>Индии</a:t>
+            </a:r>
+            <a:r>
+              <a:rPr lang="ru-RU" dirty="0"/>
+              <a:t> положительное влияние на ВВП оказывают: рыночная капитализация, задолженность и экспорт </a:t>
+            </a:r>
+            <a:r>
+              <a:rPr lang="ru-RU" dirty="0" smtClean="0"/>
+              <a:t>товаров </a:t>
+            </a:r>
+            <a:r>
+              <a:rPr lang="ru-RU" dirty="0"/>
+              <a:t>и </a:t>
+            </a:r>
+            <a:r>
+              <a:rPr lang="ru-RU" dirty="0" smtClean="0"/>
+              <a:t>услуг.</a:t>
+            </a:r>
+          </a:p>
+          <a:p>
+            <a:pPr marL="1211550" lvl="1" indent="-342891" algn="just">
+              <a:buFont typeface="Arial" panose="020B0604020202020204" pitchFamily="34" charset="0"/>
+              <a:buChar char="•"/>
+            </a:pPr>
+            <a:r>
+              <a:rPr lang="ru-RU" b="1" dirty="0" smtClean="0"/>
+              <a:t>В </a:t>
+            </a:r>
+            <a:r>
+              <a:rPr lang="ru-RU" b="1" dirty="0"/>
+              <a:t>Китае</a:t>
+            </a:r>
+            <a:r>
+              <a:rPr lang="ru-RU" dirty="0"/>
+              <a:t> структура влияния аналогична, за исключением ключевого отличия: рыночная капитализация оказывает </a:t>
+            </a:r>
+            <a:r>
+              <a:rPr lang="ru-RU" b="1" dirty="0"/>
+              <a:t>отрицательное</a:t>
+            </a:r>
+            <a:r>
+              <a:rPr lang="ru-RU" dirty="0"/>
+              <a:t> влияние на ВВП</a:t>
+            </a:r>
+            <a:r>
+              <a:rPr lang="ru-RU" dirty="0" smtClean="0"/>
+              <a:t>.</a:t>
             </a:r>
             <a:endParaRPr lang="en-US" dirty="0"/>
           </a:p>
         </p:txBody>
       </p:sp>
-      <p:pic>
-        <p:nvPicPr>
-          <p:cNvPr id="1026" name="Picture 2" descr="C:\Users\bklyu\Documents\Python Scripts\_GitHub_repos\conferences\lomonosov readings 2026\explore_data\relationship_level_both.png"/>
-          <p:cNvPicPr>
-            <a:picLocks noChangeAspect="1" noChangeArrowheads="1"/>
-          </p:cNvPicPr>
-          <p:nvPr/>
-        </p:nvPicPr>
-        <p:blipFill>
-          <a:blip r:embed="rId2">
-            <a:extLst>
-              <a:ext uri="{28A0092B-C50C-407E-A947-70E740481C1C}">
-                <a14:useLocalDpi xmlns:a14="http://schemas.microsoft.com/office/drawing/2010/main" val="0"/>
-              </a:ext>
-            </a:extLst>
-          </a:blip>
-          <a:srcRect/>
-          <a:stretch>
-            <a:fillRect/>
-          </a:stretch>
-        </p:blipFill>
-        <p:spPr bwMode="auto">
-          <a:xfrm>
-            <a:off x="690880" y="1551215"/>
-            <a:ext cx="8778240" cy="2612572"/>
-          </a:xfrm>
-          <a:prstGeom prst="rect">
-            <a:avLst/>
-          </a:prstGeom>
-          <a:noFill/>
-          <a:extLst>
-            <a:ext uri="{909E8E84-426E-40DD-AFC4-6F175D3DCCD1}">
-              <a14:hiddenFill xmlns:a14="http://schemas.microsoft.com/office/drawing/2010/main">
-                <a:solidFill>
-                  <a:srgbClr val="FFFFFF"/>
-                </a:solidFill>
-              </a14:hiddenFill>
-            </a:ext>
-          </a:extLst>
-        </p:spPr>
-      </p:pic>
     </p:spTree>
     <p:extLst>
       <p:ext uri="{BB962C8B-B14F-4D97-AF65-F5344CB8AC3E}">
-        <p14:creationId xmlns:p14="http://schemas.microsoft.com/office/powerpoint/2010/main" val="3869212110"/>
+        <p14:creationId xmlns:p14="http://schemas.microsoft.com/office/powerpoint/2010/main" val="1651311990"/>
       </p:ext>
     </p:extLst>
   </p:cSld>
@@ -20206,62 +19993,244 @@
           <a:lstStyle/>
           <a:p>
             <a:r>
+              <a:rPr lang="ru-RU" sz="4400" dirty="0"/>
+              <a:t>Выводы (3)</a:t>
+            </a:r>
+            <a:endParaRPr lang="en-US" sz="4400" dirty="0"/>
+          </a:p>
+        </p:txBody>
+      </p:sp>
+      <p:sp>
+        <p:nvSpPr>
+          <p:cNvPr id="3" name="Text Placeholder 2"/>
+          <p:cNvSpPr>
+            <a:spLocks noGrp="1"/>
+          </p:cNvSpPr>
+          <p:nvPr>
+            <p:ph type="body" idx="1"/>
+          </p:nvPr>
+        </p:nvSpPr>
+        <p:spPr/>
+        <p:txBody>
+          <a:bodyPr>
+            <a:noAutofit/>
+          </a:bodyPr>
+          <a:lstStyle/>
+          <a:p>
+            <a:pPr marL="416042" indent="-342891" algn="just">
+              <a:buFont typeface="Arial" panose="020B0604020202020204" pitchFamily="34" charset="0"/>
+              <a:buChar char="•"/>
+            </a:pPr>
+            <a:r>
+              <a:rPr lang="ru-RU" dirty="0" smtClean="0"/>
+              <a:t>Переменные (без учета вклада ВВП) объясняют больший </a:t>
+            </a:r>
+            <a:r>
               <a:rPr lang="ru-RU" dirty="0"/>
-              <a:t>Динамика </a:t>
+              <a:t>объем вариации ВВП в </a:t>
+            </a:r>
+            <a:r>
+              <a:rPr lang="ru-RU" b="1" dirty="0"/>
+              <a:t>Индии </a:t>
+            </a:r>
+            <a:r>
+              <a:rPr lang="ru-RU" b="1" dirty="0" smtClean="0"/>
+              <a:t>(</a:t>
+            </a:r>
+            <a:r>
+              <a:rPr lang="en-US" b="1" dirty="0" smtClean="0"/>
+              <a:t>~</a:t>
+            </a:r>
+            <a:r>
+              <a:rPr lang="ru-RU" b="1" dirty="0" smtClean="0"/>
+              <a:t>30</a:t>
+            </a:r>
+            <a:r>
+              <a:rPr lang="ru-RU" b="1" dirty="0"/>
+              <a:t>%)</a:t>
+            </a:r>
+            <a:r>
+              <a:rPr lang="ru-RU" dirty="0"/>
+              <a:t> , чем в </a:t>
+            </a:r>
+            <a:r>
+              <a:rPr lang="ru-RU" b="1" dirty="0"/>
+              <a:t>Китае </a:t>
+            </a:r>
+            <a:r>
+              <a:rPr lang="ru-RU" b="1" dirty="0" smtClean="0"/>
+              <a:t>(</a:t>
+            </a:r>
+            <a:r>
+              <a:rPr lang="en-US" b="1" dirty="0" smtClean="0"/>
+              <a:t>~</a:t>
+            </a:r>
+            <a:r>
+              <a:rPr lang="ru-RU" b="1" dirty="0" smtClean="0"/>
+              <a:t>10%)</a:t>
             </a:r>
             <a:r>
               <a:rPr lang="ru-RU" dirty="0" smtClean="0"/>
-              <a:t>показателей (Китай)</a:t>
-            </a:r>
+              <a:t>:</a:t>
+            </a:r>
+          </a:p>
+          <a:p>
+            <a:pPr marL="1211550" lvl="1" indent="-342891" algn="just">
+              <a:buFont typeface="Arial" panose="020B0604020202020204" pitchFamily="34" charset="0"/>
+              <a:buChar char="•"/>
+            </a:pPr>
+            <a:r>
+              <a:rPr lang="ru-RU" b="1" dirty="0" smtClean="0"/>
+              <a:t>Индия</a:t>
+            </a:r>
+            <a:r>
+              <a:rPr lang="ru-RU" b="1" dirty="0"/>
+              <a:t>:</a:t>
+            </a:r>
+            <a:r>
+              <a:rPr lang="ru-RU" dirty="0"/>
+              <a:t> основную объяснительную силу несет </a:t>
+            </a:r>
+            <a:r>
+              <a:rPr lang="ru-RU" b="1" dirty="0"/>
+              <a:t>капитализация </a:t>
+            </a:r>
+            <a:r>
+              <a:rPr lang="ru-RU" b="1" dirty="0" smtClean="0"/>
+              <a:t>(</a:t>
+            </a:r>
+            <a:r>
+              <a:rPr lang="en-US" b="1" dirty="0" smtClean="0"/>
+              <a:t>~</a:t>
+            </a:r>
+            <a:r>
+              <a:rPr lang="ru-RU" b="1" dirty="0" smtClean="0"/>
+              <a:t>15</a:t>
+            </a:r>
+            <a:r>
+              <a:rPr lang="ru-RU" b="1" dirty="0"/>
+              <a:t>%)</a:t>
+            </a:r>
+            <a:r>
+              <a:rPr lang="ru-RU" dirty="0"/>
+              <a:t> , далее следуют задолженность и экспорт (по </a:t>
+            </a:r>
+            <a:r>
+              <a:rPr lang="en-US" dirty="0" smtClean="0"/>
+              <a:t>~</a:t>
+            </a:r>
+            <a:r>
+              <a:rPr lang="ru-RU" dirty="0" smtClean="0"/>
+              <a:t>7.5</a:t>
+            </a:r>
+            <a:r>
+              <a:rPr lang="ru-RU" dirty="0"/>
+              <a:t>% каждый</a:t>
+            </a:r>
+            <a:r>
+              <a:rPr lang="ru-RU" dirty="0" smtClean="0"/>
+              <a:t>).</a:t>
+            </a:r>
+          </a:p>
+          <a:p>
+            <a:pPr marL="1211550" lvl="1" indent="-342891" algn="just">
+              <a:buFont typeface="Arial" panose="020B0604020202020204" pitchFamily="34" charset="0"/>
+              <a:buChar char="•"/>
+            </a:pPr>
+            <a:r>
+              <a:rPr lang="ru-RU" b="1" dirty="0" smtClean="0"/>
+              <a:t>Китай</a:t>
+            </a:r>
+            <a:r>
+              <a:rPr lang="ru-RU" b="1" dirty="0"/>
+              <a:t>:</a:t>
+            </a:r>
+            <a:r>
+              <a:rPr lang="ru-RU" dirty="0"/>
+              <a:t> ключевым фактором является </a:t>
+            </a:r>
+            <a:r>
+              <a:rPr lang="ru-RU" b="1" dirty="0"/>
+              <a:t>задолженность </a:t>
+            </a:r>
+            <a:r>
+              <a:rPr lang="ru-RU" b="1" dirty="0" smtClean="0"/>
+              <a:t>(</a:t>
+            </a:r>
+            <a:r>
+              <a:rPr lang="en-US" b="1" dirty="0" smtClean="0"/>
+              <a:t>~</a:t>
+            </a:r>
+            <a:r>
+              <a:rPr lang="ru-RU" b="1" dirty="0" smtClean="0"/>
+              <a:t>5</a:t>
+            </a:r>
+            <a:r>
+              <a:rPr lang="ru-RU" b="1" dirty="0"/>
+              <a:t>%)</a:t>
+            </a:r>
+            <a:r>
+              <a:rPr lang="ru-RU" dirty="0"/>
+              <a:t> , </a:t>
+            </a:r>
+            <a:r>
+              <a:rPr lang="ru-RU" dirty="0" smtClean="0"/>
+              <a:t/>
+            </a:r>
+            <a:br>
+              <a:rPr lang="ru-RU" dirty="0" smtClean="0"/>
+            </a:br>
+            <a:r>
+              <a:rPr lang="ru-RU" dirty="0" smtClean="0"/>
+              <a:t>за </a:t>
+            </a:r>
+            <a:r>
+              <a:rPr lang="ru-RU" dirty="0"/>
+              <a:t>ней следуют экспорт </a:t>
+            </a:r>
+            <a:r>
+              <a:rPr lang="ru-RU" dirty="0" smtClean="0"/>
+              <a:t>(</a:t>
+            </a:r>
+            <a:r>
+              <a:rPr lang="en-US" dirty="0" smtClean="0"/>
+              <a:t>~</a:t>
+            </a:r>
+            <a:r>
+              <a:rPr lang="ru-RU" dirty="0" smtClean="0"/>
+              <a:t>3</a:t>
+            </a:r>
+            <a:r>
+              <a:rPr lang="ru-RU" dirty="0"/>
+              <a:t>%) и капитализация </a:t>
+            </a:r>
+            <a:r>
+              <a:rPr lang="ru-RU" dirty="0" smtClean="0"/>
+              <a:t>(</a:t>
+            </a:r>
+            <a:r>
+              <a:rPr lang="en-US" dirty="0" smtClean="0"/>
+              <a:t>~</a:t>
+            </a:r>
+            <a:r>
+              <a:rPr lang="ru-RU" dirty="0" smtClean="0"/>
+              <a:t>2%).</a:t>
+            </a:r>
+            <a:r>
+              <a:rPr lang="ru-RU" dirty="0"/>
+              <a:t/>
+            </a:r>
+            <a:br>
+              <a:rPr lang="ru-RU" dirty="0"/>
+            </a:br>
             <a:endParaRPr lang="en-US" dirty="0"/>
           </a:p>
         </p:txBody>
       </p:sp>
-      <p:pic>
-        <p:nvPicPr>
-          <p:cNvPr id="2050" name="Picture 2" descr="C:\Users\bklyu\Documents\Python Scripts\_GitHub_repos\conferences\lomonosov readings 2026\explore_data\relationship_level_china.png"/>
-          <p:cNvPicPr>
-            <a:picLocks noChangeAspect="1" noChangeArrowheads="1"/>
-          </p:cNvPicPr>
-          <p:nvPr/>
-        </p:nvPicPr>
-        <p:blipFill>
-          <a:blip r:embed="rId2">
-            <a:extLst>
-              <a:ext uri="{28A0092B-C50C-407E-A947-70E740481C1C}">
-                <a14:useLocalDpi xmlns:a14="http://schemas.microsoft.com/office/drawing/2010/main" val="0"/>
-              </a:ext>
-            </a:extLst>
-          </a:blip>
-          <a:srcRect/>
-          <a:stretch>
-            <a:fillRect/>
-          </a:stretch>
-        </p:blipFill>
-        <p:spPr bwMode="auto">
-          <a:xfrm>
-            <a:off x="690880" y="1389295"/>
-            <a:ext cx="8778240" cy="2936412"/>
-          </a:xfrm>
-          <a:prstGeom prst="rect">
-            <a:avLst/>
-          </a:prstGeom>
-          <a:noFill/>
-          <a:extLst>
-            <a:ext uri="{909E8E84-426E-40DD-AFC4-6F175D3DCCD1}">
-              <a14:hiddenFill xmlns:a14="http://schemas.microsoft.com/office/drawing/2010/main">
-                <a:solidFill>
-                  <a:srgbClr val="FFFFFF"/>
-                </a:solidFill>
-              </a14:hiddenFill>
-            </a:ext>
-          </a:extLst>
-        </p:spPr>
-      </p:pic>
     </p:spTree>
     <p:extLst>
       <p:ext uri="{BB962C8B-B14F-4D97-AF65-F5344CB8AC3E}">
-        <p14:creationId xmlns:p14="http://schemas.microsoft.com/office/powerpoint/2010/main" val="3965574923"/>
+        <p14:creationId xmlns:p14="http://schemas.microsoft.com/office/powerpoint/2010/main" val="935023520"/>
       </p:ext>
     </p:extLst>
   </p:cSld>
@@ -20311,62 +20280,74 @@
           <a:lstStyle/>
           <a:p>
             <a:r>
+              <a:rPr lang="ru-RU" sz="4400" dirty="0" smtClean="0"/>
+              <a:t>Заключение по Индии</a:t>
+            </a:r>
+            <a:endParaRPr lang="en-US" sz="4400" dirty="0"/>
+          </a:p>
+        </p:txBody>
+      </p:sp>
+      <p:sp>
+        <p:nvSpPr>
+          <p:cNvPr id="3" name="Text Placeholder 2"/>
+          <p:cNvSpPr>
+            <a:spLocks noGrp="1"/>
+          </p:cNvSpPr>
+          <p:nvPr>
+            <p:ph type="body" idx="1"/>
+          </p:nvPr>
+        </p:nvSpPr>
+        <p:spPr/>
+        <p:txBody>
+          <a:bodyPr>
+            <a:noAutofit/>
+          </a:bodyPr>
+          <a:lstStyle/>
+          <a:p>
+            <a:pPr algn="just"/>
+            <a:r>
               <a:rPr lang="ru-RU" dirty="0"/>
-              <a:t>Динамика </a:t>
+              <a:t>Для экономики Республики Индия </a:t>
             </a:r>
             <a:r>
               <a:rPr lang="ru-RU" dirty="0" smtClean="0"/>
-              <a:t>показателей (Индия)</a:t>
-            </a:r>
+              <a:t>особую </a:t>
+            </a:r>
+            <a:r>
+              <a:rPr lang="ru-RU" dirty="0"/>
+              <a:t>роль играют фондовые рынки. Это объясняется относительно более легким доступом к биржевому финансированию по сравнению с банковским кредитованием. В пользу этого тезиса свидетельствует значительное количество публичных компаний, чьи акции находятся в </a:t>
+            </a:r>
+            <a:r>
+              <a:rPr lang="ru-RU" dirty="0" smtClean="0"/>
+              <a:t>котировальных списках, но чьи акции не торгуются. </a:t>
+            </a:r>
+            <a:r>
+              <a:rPr lang="ru-RU" dirty="0"/>
+              <a:t>Роль банковского сектора, напротив, оказывается менее выраженной ввиду сохраняющихся сложностей с выдачей кредитов малому и среднему бизнесу (МСП), включая жесткие требования к </a:t>
+            </a:r>
+            <a:r>
+              <a:rPr lang="ru-RU" dirty="0" smtClean="0"/>
+              <a:t>обеспечению.</a:t>
+            </a:r>
+            <a:endParaRPr lang="ru-RU" dirty="0"/>
+          </a:p>
+          <a:p>
+            <a:pPr algn="just"/>
+            <a:r>
+              <a:rPr lang="ru-RU" dirty="0"/>
+              <a:t/>
+            </a:r>
+            <a:br>
+              <a:rPr lang="ru-RU" dirty="0"/>
+            </a:br>
             <a:endParaRPr lang="en-US" dirty="0"/>
           </a:p>
         </p:txBody>
       </p:sp>
-      <p:pic>
-        <p:nvPicPr>
-          <p:cNvPr id="3074" name="Picture 2" descr="C:\Users\bklyu\Documents\Python Scripts\_GitHub_repos\conferences\lomonosov readings 2026\explore_data\relationship_level_india.png"/>
-          <p:cNvPicPr>
-            <a:picLocks noChangeAspect="1" noChangeArrowheads="1"/>
-          </p:cNvPicPr>
-          <p:nvPr/>
-        </p:nvPicPr>
-        <p:blipFill>
-          <a:blip r:embed="rId2">
-            <a:extLst>
-              <a:ext uri="{28A0092B-C50C-407E-A947-70E740481C1C}">
-                <a14:useLocalDpi xmlns:a14="http://schemas.microsoft.com/office/drawing/2010/main" val="0"/>
-              </a:ext>
-            </a:extLst>
-          </a:blip>
-          <a:srcRect/>
-          <a:stretch>
-            <a:fillRect/>
-          </a:stretch>
-        </p:blipFill>
-        <p:spPr bwMode="auto">
-          <a:xfrm>
-            <a:off x="690880" y="1387659"/>
-            <a:ext cx="8778240" cy="2939691"/>
-          </a:xfrm>
-          <a:prstGeom prst="rect">
-            <a:avLst/>
-          </a:prstGeom>
-          <a:noFill/>
-          <a:extLst>
-            <a:ext uri="{909E8E84-426E-40DD-AFC4-6F175D3DCCD1}">
-              <a14:hiddenFill xmlns:a14="http://schemas.microsoft.com/office/drawing/2010/main">
-                <a:solidFill>
-                  <a:srgbClr val="FFFFFF"/>
-                </a:solidFill>
-              </a14:hiddenFill>
-            </a:ext>
-          </a:extLst>
-        </p:spPr>
-      </p:pic>
     </p:spTree>
     <p:extLst>
       <p:ext uri="{BB962C8B-B14F-4D97-AF65-F5344CB8AC3E}">
-        <p14:creationId xmlns:p14="http://schemas.microsoft.com/office/powerpoint/2010/main" val="1996634609"/>
+        <p14:creationId xmlns:p14="http://schemas.microsoft.com/office/powerpoint/2010/main" val="3806076759"/>
       </p:ext>
     </p:extLst>
   </p:cSld>
@@ -20416,10 +20397,14 @@
           <a:lstStyle/>
           <a:p>
             <a:r>
-              <a:rPr lang="ru-RU" dirty="0" smtClean="0"/>
-              <a:t>Абсолютные приросты</a:t>
-            </a:r>
-            <a:endParaRPr lang="en-US" dirty="0"/>
+              <a:rPr lang="ru-RU" sz="4400" dirty="0"/>
+              <a:t>Рекомендации </a:t>
+            </a:r>
+            <a:r>
+              <a:rPr lang="ru-RU" sz="4400" dirty="0" smtClean="0"/>
+              <a:t>для Индии</a:t>
+            </a:r>
+            <a:endParaRPr lang="en-US" sz="4400" dirty="0"/>
           </a:p>
         </p:txBody>
       </p:sp>
@@ -20440,49 +20425,40 @@
           </a:bodyPr>
           <a:lstStyle/>
           <a:p>
-            <a:pPr algn="just"/>
+            <a:pPr marL="416050" indent="-342900" algn="just">
+              <a:buFont typeface="Arial" panose="020B0604020202020204" pitchFamily="34" charset="0"/>
+              <a:buChar char="•"/>
+            </a:pPr>
+            <a:r>
+              <a:rPr lang="ru-RU" dirty="0" smtClean="0"/>
+              <a:t>Развивать </a:t>
+            </a:r>
             <a:r>
               <a:rPr lang="ru-RU" dirty="0"/>
-              <a:t>Абсолютные темпы роста, также известные как первые разности, позволяют </a:t>
-            </a:r>
+              <a:t>специализированные механизмы финансирования МСП, включая </a:t>
+            </a:r>
+            <a:r>
+              <a:rPr lang="ru-RU" dirty="0" err="1"/>
+              <a:t>секьюритизацию</a:t>
+            </a:r>
+            <a:r>
+              <a:rPr lang="ru-RU" dirty="0"/>
+              <a:t> портфелей кредитов и развитие альтернативных биржевых площадок (платформ для МСП). </a:t>
+            </a:r>
+            <a:endParaRPr lang="ru-RU" dirty="0" smtClean="0"/>
+          </a:p>
+          <a:p>
+            <a:pPr marL="416050" indent="-342900" algn="just">
+              <a:buFont typeface="Arial" panose="020B0604020202020204" pitchFamily="34" charset="0"/>
+              <a:buChar char="•"/>
+            </a:pPr>
             <a:r>
               <a:rPr lang="ru-RU" dirty="0" smtClean="0"/>
-              <a:t>сделать </a:t>
+              <a:t>Усилить </a:t>
             </a:r>
             <a:r>
               <a:rPr lang="ru-RU" dirty="0"/>
-              <a:t>данные </a:t>
-            </a:r>
-            <a:r>
-              <a:rPr lang="ru-RU" dirty="0" smtClean="0"/>
-              <a:t>стационарными, что </a:t>
-            </a:r>
-            <a:r>
-              <a:rPr lang="ru-RU" dirty="0"/>
-              <a:t>является одним </a:t>
-            </a:r>
-            <a:r>
-              <a:rPr lang="ru-RU" dirty="0" smtClean="0"/>
-              <a:t/>
-            </a:r>
-            <a:br>
-              <a:rPr lang="ru-RU" dirty="0" smtClean="0"/>
-            </a:br>
-            <a:r>
-              <a:rPr lang="ru-RU" dirty="0" smtClean="0"/>
-              <a:t>из </a:t>
-            </a:r>
-            <a:r>
-              <a:rPr lang="ru-RU" dirty="0"/>
-              <a:t>ключевых предположений большинства эконометрических методов, включая векторную авторегрессию. Первые разности также позволяют </a:t>
-            </a:r>
-            <a:r>
-              <a:rPr lang="ru-RU" dirty="0" smtClean="0"/>
-              <a:t>исследовать </a:t>
-            </a:r>
-            <a:r>
-              <a:rPr lang="ru-RU" dirty="0"/>
-              <a:t>причинно-следственную связь роста, исключая общие тренды.</a:t>
+              <a:t>пост-листинговый контроль за компаниями, вышедшими на биржу, с целью повышения прозрачности корпоративного управления и защиты прав миноритарных акционеров.</a:t>
             </a:r>
             <a:endParaRPr lang="en-US" dirty="0"/>
           </a:p>
@@ -20491,7 +20467,7 @@
     </p:spTree>
     <p:extLst>
       <p:ext uri="{BB962C8B-B14F-4D97-AF65-F5344CB8AC3E}">
-        <p14:creationId xmlns:p14="http://schemas.microsoft.com/office/powerpoint/2010/main" val="3624016492"/>
+        <p14:creationId xmlns:p14="http://schemas.microsoft.com/office/powerpoint/2010/main" val="2164138985"/>
       </p:ext>
     </p:extLst>
   </p:cSld>
